--- a/deck/midproject_outline.pptx
+++ b/deck/midproject_outline.pptx
@@ -16,10 +16,9 @@
     <p:sldId id="264" r:id="rId10"/>
     <p:sldId id="265" r:id="rId11"/>
     <p:sldId id="266" r:id="rId12"/>
-    <p:sldId id="267" r:id="rId13"/>
   </p:sldIdLst>
   <p:notesMasterIdLst>
-    <p:notesMasterId r:id="rId14"/>
+    <p:notesMasterId r:id="rId13"/>
   </p:notesMasterIdLst>
   <p:sldSz cx="12192000" cy="6858000"/>
   <p:notesSz cx="6858000" cy="12192000"/>
@@ -713,94 +712,6 @@
             <a:fld id="{F7021451-1387-4CA6-816F-3879F97B5CBC}" type="slidenum">
               <a:rPr lang="en-US"/>
               <a:t>11</a:t>
-            </a:fld>
-            <a:endParaRPr lang="en-US"/>
-          </a:p>
-        </p:txBody>
-      </p:sp>
-    </p:spTree>
-    <p:extLst>
-      <p:ext uri="{BB962C8B-B14F-4D97-AF65-F5344CB8AC3E}">
-        <p14:creationId xmlns:p14="http://schemas.microsoft.com/office/powerpoint/2010/main" val="1024086991"/>
-      </p:ext>
-    </p:extLst>
-  </p:cSld>
-  <p:clrMapOvr>
-    <a:masterClrMapping/>
-  </p:clrMapOvr>
-</p:notes>
-</file>
-
-<file path=ppt/notesSlides/notesSlide12.xml><?xml version="1.0" encoding="utf-8"?>
-<p:notes xmlns:a="http://schemas.openxmlformats.org/drawingml/2006/main" xmlns:r="http://schemas.openxmlformats.org/officeDocument/2006/relationships" xmlns:p="http://schemas.openxmlformats.org/presentationml/2006/main">
-  <p:cSld>
-    <p:spTree>
-      <p:nvGrpSpPr>
-        <p:cNvPr id="1" name=""/>
-        <p:cNvGrpSpPr/>
-        <p:nvPr/>
-      </p:nvGrpSpPr>
-      <p:grpSpPr>
-        <a:xfrm>
-          <a:off x="0" y="0"/>
-          <a:ext cx="0" cy="0"/>
-          <a:chOff x="0" y="0"/>
-          <a:chExt cx="0" cy="0"/>
-        </a:xfrm>
-      </p:grpSpPr>
-      <p:sp>
-        <p:nvSpPr>
-          <p:cNvPr id="2" name="Slide Image Placeholder 1"/>
-          <p:cNvSpPr>
-            <a:spLocks noGrp="1" noRot="1" noChangeAspect="1"/>
-          </p:cNvSpPr>
-          <p:nvPr>
-            <p:ph type="sldImg"/>
-          </p:nvPr>
-        </p:nvSpPr>
-        <p:spPr/>
-      </p:sp>
-      <p:sp>
-        <p:nvSpPr>
-          <p:cNvPr id="3" name="Notes Placeholder 2"/>
-          <p:cNvSpPr>
-            <a:spLocks noGrp="1"/>
-          </p:cNvSpPr>
-          <p:nvPr>
-            <p:ph type="body" idx="1"/>
-          </p:nvPr>
-        </p:nvSpPr>
-        <p:spPr/>
-        <p:txBody>
-          <a:bodyPr/>
-          <a:lstStyle/>
-          <a:p>
-            <a:r>
-              <a:rPr lang="en-US" dirty="0"/>
-              <a:t/>
-            </a:r>
-            <a:endParaRPr lang="en-US" dirty="0"/>
-          </a:p>
-        </p:txBody>
-      </p:sp>
-      <p:sp>
-        <p:nvSpPr>
-          <p:cNvPr id="4" name="Slide Number Placeholder 3"/>
-          <p:cNvSpPr>
-            <a:spLocks noGrp="1"/>
-          </p:cNvSpPr>
-          <p:nvPr>
-            <p:ph type="sldNum" sz="quarter" idx="10"/>
-          </p:nvPr>
-        </p:nvSpPr>
-        <p:spPr/>
-        <p:txBody>
-          <a:bodyPr/>
-          <a:lstStyle/>
-          <a:p>
-            <a:fld id="{F7021451-1387-4CA6-816F-3879F97B5CBC}" type="slidenum">
-              <a:rPr lang="en-US"/>
-              <a:t>12</a:t>
             </a:fld>
             <a:endParaRPr lang="en-US"/>
           </a:p>
@@ -1876,7 +1787,7 @@
       </p:sp>
       <p:pic>
         <p:nvPicPr>
-          <p:cNvPr id="3" name="Image 0" descr="/Users/bellavg/ProjectsMSc/ai4mi_project/deck/assets/uva_logo_white.png">    </p:cNvPr>
+          <p:cNvPr id="3" name="Image 0" descr="/Users/bellavg/ProjectsMSc/ai4mi_project/.claude/worktrees/segthor-presentation-midpoint-825c66/deck/assets/uva_logo_white.png">    </p:cNvPr>
           <p:cNvPicPr>
             <a:picLocks noChangeAspect="1"/>
           </p:cNvPicPr>
@@ -2085,6 +1996,293 @@
 <file path=ppt/slides/slide10.xml><?xml version="1.0" encoding="utf-8"?>
 <p:sld xmlns:a="http://schemas.openxmlformats.org/drawingml/2006/main" xmlns:r="http://schemas.openxmlformats.org/officeDocument/2006/relationships" xmlns:p="http://schemas.openxmlformats.org/presentationml/2006/main">
   <p:cSld name="Slide 10">
+    <p:bg>
+      <p:bgPr>
+        <a:solidFill>
+          <a:srgbClr val="1F1D21"/>
+        </a:solidFill>
+      </p:bgPr>
+    </p:bg>
+    <p:spTree>
+      <p:nvGrpSpPr>
+        <p:cNvPr id="1" name=""/>
+        <p:cNvGrpSpPr/>
+        <p:nvPr/>
+      </p:nvGrpSpPr>
+      <p:grpSpPr>
+        <a:xfrm>
+          <a:off x="0" y="0"/>
+          <a:ext cx="0" cy="0"/>
+          <a:chOff x="0" y="0"/>
+          <a:chExt cx="0" cy="0"/>
+        </a:xfrm>
+      </p:grpSpPr>
+      <p:sp>
+        <p:nvSpPr>
+          <p:cNvPr id="2" name="Shape 0"/>
+          <p:cNvSpPr/>
+          <p:nvPr/>
+        </p:nvSpPr>
+        <p:spPr>
+          <a:xfrm>
+            <a:off x="0" y="0"/>
+            <a:ext cx="164592" cy="6858000"/>
+          </a:xfrm>
+          <a:prstGeom prst="rect">
+            <a:avLst/>
+          </a:prstGeom>
+          <a:solidFill>
+            <a:srgbClr val="BC0031"/>
+          </a:solidFill>
+          <a:ln/>
+        </p:spPr>
+      </p:sp>
+      <p:sp>
+        <p:nvSpPr>
+          <p:cNvPr id="3" name="Text 1"/>
+          <p:cNvSpPr txBox="1"/>
+          <p:nvPr/>
+        </p:nvSpPr>
+        <p:spPr>
+          <a:xfrm>
+            <a:off x="731520" y="548640"/>
+            <a:ext cx="10058400" cy="640080"/>
+          </a:xfrm>
+          <a:prstGeom prst="rect">
+            <a:avLst/>
+          </a:prstGeom>
+          <a:noFill/>
+          <a:ln/>
+        </p:spPr>
+        <p:txBody>
+          <a:bodyPr wrap="square" lIns="0" tIns="0" rIns="0" bIns="0" rtlCol="0" anchor="ctr"/>
+          <a:lstStyle/>
+          <a:p>
+            <a:pPr indent="0" marL="0">
+              <a:buNone/>
+            </a:pPr>
+            <a:r>
+              <a:rPr lang="en-US" sz="3000" b="1" dirty="0">
+                <a:solidFill>
+                  <a:srgbClr val="FFFFFF"/>
+                </a:solidFill>
+                <a:latin typeface="Times New Roman" pitchFamily="34" charset="0"/>
+                <a:ea typeface="Times New Roman" pitchFamily="34" charset="-122"/>
+                <a:cs typeface="Times New Roman" pitchFamily="34" charset="-120"/>
+              </a:rPr>
+              <a:t>Status &amp; Next Steps</a:t>
+            </a:r>
+            <a:endParaRPr lang="en-US" sz="3000" dirty="0"/>
+          </a:p>
+        </p:txBody>
+      </p:sp>
+      <p:sp>
+        <p:nvSpPr>
+          <p:cNvPr id="4" name="Text 2"/>
+          <p:cNvSpPr txBox="1"/>
+          <p:nvPr/>
+        </p:nvSpPr>
+        <p:spPr>
+          <a:xfrm>
+            <a:off x="731520" y="1554480"/>
+            <a:ext cx="9601200" cy="2743200"/>
+          </a:xfrm>
+          <a:prstGeom prst="rect">
+            <a:avLst/>
+          </a:prstGeom>
+          <a:noFill/>
+          <a:ln/>
+        </p:spPr>
+        <p:txBody>
+          <a:bodyPr wrap="square" lIns="0" tIns="0" rIns="0" bIns="0" rtlCol="0" anchor="t"/>
+          <a:lstStyle/>
+          <a:p>
+            <a:pPr marL="228600" indent="-228600">
+              <a:lnSpc>
+                <a:spcPct val="115000"/>
+              </a:lnSpc>
+              <a:spcAft>
+                <a:spcPts val="1000"/>
+              </a:spcAft>
+              <a:buSzPct val="100000"/>
+              <a:buChar char="▪"/>
+            </a:pPr>
+            <a:r>
+              <a:rPr lang="en-US" sz="1600" dirty="0">
+                <a:solidFill>
+                  <a:srgbClr val="FFFFFF"/>
+                </a:solidFill>
+                <a:latin typeface="Times New Roman" pitchFamily="34" charset="0"/>
+                <a:ea typeface="Times New Roman" pitchFamily="34" charset="-122"/>
+                <a:cs typeface="Times New Roman" pitchFamily="34" charset="-120"/>
+              </a:rPr>
+              <a:t>Done: dataset validation, exploration, baseline, preprocessing pipeline</a:t>
+            </a:r>
+            <a:endParaRPr lang="en-US" sz="1600" dirty="0"/>
+          </a:p>
+          <a:p>
+            <a:pPr marL="228600" indent="-228600">
+              <a:lnSpc>
+                <a:spcPct val="115000"/>
+              </a:lnSpc>
+              <a:spcAft>
+                <a:spcPts val="1000"/>
+              </a:spcAft>
+              <a:buSzPct val="100000"/>
+              <a:buChar char="▪"/>
+            </a:pPr>
+            <a:r>
+              <a:rPr lang="en-US" sz="1600" dirty="0">
+                <a:solidFill>
+                  <a:srgbClr val="FFFFFF"/>
+                </a:solidFill>
+                <a:latin typeface="Times New Roman" pitchFamily="34" charset="0"/>
+                <a:ea typeface="Times New Roman" pitchFamily="34" charset="-122"/>
+                <a:cs typeface="Times New Roman" pitchFamily="34" charset="-120"/>
+              </a:rPr>
+              <a:t>In progress: [TODO] first modified-loss / modified-preprocessing run</a:t>
+            </a:r>
+            <a:endParaRPr lang="en-US" sz="1600" dirty="0"/>
+          </a:p>
+          <a:p>
+            <a:pPr marL="228600" indent="-228600">
+              <a:lnSpc>
+                <a:spcPct val="115000"/>
+              </a:lnSpc>
+              <a:spcAft>
+                <a:spcPts val="1000"/>
+              </a:spcAft>
+              <a:buSzPct val="100000"/>
+              <a:buChar char="▪"/>
+            </a:pPr>
+            <a:r>
+              <a:rPr lang="en-US" sz="1600" dirty="0">
+                <a:solidFill>
+                  <a:srgbClr val="FFFFFF"/>
+                </a:solidFill>
+                <a:latin typeface="Times New Roman" pitchFamily="34" charset="0"/>
+                <a:ea typeface="Times New Roman" pitchFamily="34" charset="-122"/>
+                <a:cs typeface="Times New Roman" pitchFamily="34" charset="-120"/>
+              </a:rPr>
+              <a:t>Next: [TODO] one or two concrete next experiments before the final deadline</a:t>
+            </a:r>
+            <a:endParaRPr lang="en-US" sz="1600" dirty="0"/>
+          </a:p>
+        </p:txBody>
+      </p:sp>
+      <p:sp>
+        <p:nvSpPr>
+          <p:cNvPr id="5" name="Text 3"/>
+          <p:cNvSpPr txBox="1"/>
+          <p:nvPr/>
+        </p:nvSpPr>
+        <p:spPr>
+          <a:xfrm>
+            <a:off x="731520" y="5760720"/>
+            <a:ext cx="5486400" cy="548640"/>
+          </a:xfrm>
+          <a:prstGeom prst="rect">
+            <a:avLst/>
+          </a:prstGeom>
+          <a:noFill/>
+          <a:ln/>
+        </p:spPr>
+        <p:txBody>
+          <a:bodyPr wrap="square" lIns="0" tIns="0" rIns="0" bIns="0" rtlCol="0" anchor="ctr"/>
+          <a:lstStyle/>
+          <a:p>
+            <a:pPr indent="0" marL="0">
+              <a:buNone/>
+            </a:pPr>
+            <a:r>
+              <a:rPr lang="en-US" sz="2000" b="1" dirty="0">
+                <a:solidFill>
+                  <a:srgbClr val="B5B5B5"/>
+                </a:solidFill>
+                <a:latin typeface="Times New Roman" pitchFamily="34" charset="0"/>
+                <a:ea typeface="Times New Roman" pitchFamily="34" charset="-122"/>
+                <a:cs typeface="Times New Roman" pitchFamily="34" charset="-120"/>
+              </a:rPr>
+              <a:t>Questions</a:t>
+            </a:r>
+            <a:endParaRPr lang="en-US" sz="2000" dirty="0"/>
+          </a:p>
+        </p:txBody>
+      </p:sp>
+      <p:pic>
+        <p:nvPicPr>
+          <p:cNvPr id="6" name="Image 0" descr="/Users/bellavg/ProjectsMSc/ai4mi_project/.claude/worktrees/segthor-presentation-midpoint-825c66/deck/assets/uva_logo_white.png">    </p:cNvPr>
+          <p:cNvPicPr>
+            <a:picLocks noChangeAspect="1"/>
+          </p:cNvPicPr>
+          <p:nvPr/>
+        </p:nvPicPr>
+        <p:blipFill>
+          <a:blip r:embed="rId1"/>
+          <a:stretch>
+            <a:fillRect/>
+          </a:stretch>
+        </p:blipFill>
+        <p:spPr>
+          <a:xfrm>
+            <a:off x="457200" y="6446520"/>
+            <a:ext cx="1371600" cy="137160"/>
+          </a:xfrm>
+          <a:prstGeom prst="rect">
+            <a:avLst/>
+          </a:prstGeom>
+        </p:spPr>
+      </p:pic>
+      <p:sp>
+        <p:nvSpPr>
+          <p:cNvPr id="7" name="Text 4"/>
+          <p:cNvSpPr txBox="1"/>
+          <p:nvPr/>
+        </p:nvSpPr>
+        <p:spPr>
+          <a:xfrm>
+            <a:off x="9902952" y="6446520"/>
+            <a:ext cx="1828800" cy="274320"/>
+          </a:xfrm>
+          <a:prstGeom prst="rect">
+            <a:avLst/>
+          </a:prstGeom>
+          <a:noFill/>
+          <a:ln/>
+        </p:spPr>
+        <p:txBody>
+          <a:bodyPr wrap="square" lIns="0" tIns="0" rIns="0" bIns="0" rtlCol="0" anchor="ctr"/>
+          <a:lstStyle/>
+          <a:p>
+            <a:pPr algn="r" indent="0" marL="0">
+              <a:buNone/>
+            </a:pPr>
+            <a:r>
+              <a:rPr lang="en-US" sz="900" dirty="0">
+                <a:solidFill>
+                  <a:srgbClr val="6B6B6B"/>
+                </a:solidFill>
+                <a:latin typeface="Times New Roman" pitchFamily="34" charset="0"/>
+                <a:ea typeface="Times New Roman" pitchFamily="34" charset="-122"/>
+                <a:cs typeface="Times New Roman" pitchFamily="34" charset="-120"/>
+              </a:rPr>
+              <a:t>09</a:t>
+            </a:r>
+            <a:endParaRPr lang="en-US" sz="900" dirty="0"/>
+          </a:p>
+        </p:txBody>
+      </p:sp>
+    </p:spTree>
+  </p:cSld>
+  <p:clrMapOvr>
+    <a:masterClrMapping/>
+  </p:clrMapOvr>
+</p:sld>
+</file>
+
+<file path=ppt/slides/slide11.xml><?xml version="1.0" encoding="utf-8"?>
+<p:sld xmlns:a="http://schemas.openxmlformats.org/drawingml/2006/main" xmlns:r="http://schemas.openxmlformats.org/officeDocument/2006/relationships" xmlns:p="http://schemas.openxmlformats.org/presentationml/2006/main">
+  <p:cSld name="Slide 11">
     <p:bg>
       <p:bgPr>
         <a:solidFill>
@@ -2121,1165 +2319,6 @@
             <a:avLst/>
           </a:prstGeom>
           <a:solidFill>
-            <a:srgbClr val="751B68"/>
-          </a:solidFill>
-          <a:ln/>
-        </p:spPr>
-      </p:sp>
-      <p:sp>
-        <p:nvSpPr>
-          <p:cNvPr id="3" name="Text 1"/>
-          <p:cNvSpPr txBox="1"/>
-          <p:nvPr/>
-        </p:nvSpPr>
-        <p:spPr>
-          <a:xfrm>
-            <a:off x="640080" y="384048"/>
-            <a:ext cx="8686800" cy="274320"/>
-          </a:xfrm>
-          <a:prstGeom prst="rect">
-            <a:avLst/>
-          </a:prstGeom>
-          <a:noFill/>
-          <a:ln/>
-        </p:spPr>
-        <p:txBody>
-          <a:bodyPr wrap="square" lIns="0" tIns="0" rIns="0" bIns="0" rtlCol="0" anchor="ctr"/>
-          <a:lstStyle/>
-          <a:p>
-            <a:pPr indent="0" marL="0">
-              <a:buNone/>
-            </a:pPr>
-            <a:r>
-              <a:rPr lang="en-US" sz="1200" b="1" spc="150" kern="0" dirty="0">
-                <a:solidFill>
-                  <a:srgbClr val="751B68"/>
-                </a:solidFill>
-                <a:latin typeface="Times New Roman" pitchFamily="34" charset="0"/>
-                <a:ea typeface="Times New Roman" pitchFamily="34" charset="-122"/>
-                <a:cs typeface="Times New Roman" pitchFamily="34" charset="-120"/>
-              </a:rPr>
-              <a:t>MODIFICATION &amp; RESULT — LARGEST RUBRIC WEIGHT</a:t>
-            </a:r>
-            <a:endParaRPr lang="en-US" sz="1200" dirty="0"/>
-          </a:p>
-        </p:txBody>
-      </p:sp>
-      <p:sp>
-        <p:nvSpPr>
-          <p:cNvPr id="4" name="Text 2"/>
-          <p:cNvSpPr txBox="1"/>
-          <p:nvPr/>
-        </p:nvSpPr>
-        <p:spPr>
-          <a:xfrm>
-            <a:off x="10424160" y="384048"/>
-            <a:ext cx="1097280" cy="274320"/>
-          </a:xfrm>
-          <a:prstGeom prst="rect">
-            <a:avLst/>
-          </a:prstGeom>
-          <a:noFill/>
-          <a:ln/>
-        </p:spPr>
-        <p:txBody>
-          <a:bodyPr wrap="square" lIns="0" tIns="0" rIns="0" bIns="0" rtlCol="0" anchor="ctr"/>
-          <a:lstStyle/>
-          <a:p>
-            <a:pPr algn="r" indent="0" marL="0">
-              <a:buNone/>
-            </a:pPr>
-            <a:r>
-              <a:rPr lang="en-US" sz="1200" b="1" dirty="0">
-                <a:solidFill>
-                  <a:srgbClr val="6B6B6B"/>
-                </a:solidFill>
-                <a:latin typeface="Times New Roman" pitchFamily="34" charset="0"/>
-                <a:ea typeface="Times New Roman" pitchFamily="34" charset="-122"/>
-                <a:cs typeface="Times New Roman" pitchFamily="34" charset="-120"/>
-              </a:rPr>
-              <a:t>2:10</a:t>
-            </a:r>
-            <a:endParaRPr lang="en-US" sz="1200" dirty="0"/>
-          </a:p>
-        </p:txBody>
-      </p:sp>
-      <p:sp>
-        <p:nvSpPr>
-          <p:cNvPr id="5" name="Text 3"/>
-          <p:cNvSpPr txBox="1"/>
-          <p:nvPr/>
-        </p:nvSpPr>
-        <p:spPr>
-          <a:xfrm>
-            <a:off x="640080" y="658368"/>
-            <a:ext cx="10881360" cy="822960"/>
-          </a:xfrm>
-          <a:prstGeom prst="rect">
-            <a:avLst/>
-          </a:prstGeom>
-          <a:noFill/>
-          <a:ln/>
-        </p:spPr>
-        <p:txBody>
-          <a:bodyPr wrap="square" lIns="0" tIns="0" rIns="0" bIns="0" rtlCol="0" anchor="ctr"/>
-          <a:lstStyle/>
-          <a:p>
-            <a:pPr indent="0" marL="0">
-              <a:buNone/>
-            </a:pPr>
-            <a:r>
-              <a:rPr lang="en-US" sz="2600" b="1" dirty="0">
-                <a:solidFill>
-                  <a:srgbClr val="1F1D21"/>
-                </a:solidFill>
-                <a:latin typeface="Times New Roman" pitchFamily="34" charset="0"/>
-                <a:ea typeface="Times New Roman" pitchFamily="34" charset="-122"/>
-                <a:cs typeface="Times New Roman" pitchFamily="34" charset="-120"/>
-              </a:rPr>
-              <a:t>Proposed Modification: Motivation, Method &amp; Preliminary Result</a:t>
-            </a:r>
-            <a:endParaRPr lang="en-US" sz="2600" dirty="0"/>
-          </a:p>
-        </p:txBody>
-      </p:sp>
-      <p:sp>
-        <p:nvSpPr>
-          <p:cNvPr id="6" name="Shape 4"/>
-          <p:cNvSpPr/>
-          <p:nvPr/>
-        </p:nvSpPr>
-        <p:spPr>
-          <a:xfrm>
-            <a:off x="658368" y="1463040"/>
-            <a:ext cx="1005840" cy="32004"/>
-          </a:xfrm>
-          <a:prstGeom prst="rect">
-            <a:avLst/>
-          </a:prstGeom>
-          <a:solidFill>
-            <a:srgbClr val="751B68"/>
-          </a:solidFill>
-          <a:ln/>
-        </p:spPr>
-      </p:sp>
-      <p:sp>
-        <p:nvSpPr>
-          <p:cNvPr id="7" name="Shape 5"/>
-          <p:cNvSpPr/>
-          <p:nvPr/>
-        </p:nvSpPr>
-        <p:spPr>
-          <a:xfrm>
-            <a:off x="1604772" y="1965960"/>
-            <a:ext cx="585216" cy="585216"/>
-          </a:xfrm>
-          <a:prstGeom prst="ellipse">
-            <a:avLst/>
-          </a:prstGeom>
-          <a:solidFill>
-            <a:srgbClr val="751B68"/>
-          </a:solidFill>
-          <a:ln/>
-        </p:spPr>
-      </p:sp>
-      <p:sp>
-        <p:nvSpPr>
-          <p:cNvPr id="8" name="Text 6"/>
-          <p:cNvSpPr txBox="1"/>
-          <p:nvPr/>
-        </p:nvSpPr>
-        <p:spPr>
-          <a:xfrm>
-            <a:off x="1604772" y="1965960"/>
-            <a:ext cx="585216" cy="585216"/>
-          </a:xfrm>
-          <a:prstGeom prst="rect">
-            <a:avLst/>
-          </a:prstGeom>
-          <a:noFill/>
-          <a:ln/>
-        </p:spPr>
-        <p:txBody>
-          <a:bodyPr wrap="square" lIns="0" tIns="0" rIns="0" bIns="0" rtlCol="0" anchor="ctr"/>
-          <a:lstStyle/>
-          <a:p>
-            <a:pPr algn="ctr" indent="0" marL="0">
-              <a:buNone/>
-            </a:pPr>
-            <a:r>
-              <a:rPr lang="en-US" sz="2000" b="1" dirty="0">
-                <a:solidFill>
-                  <a:srgbClr val="FFFFFF"/>
-                </a:solidFill>
-                <a:latin typeface="Times New Roman" pitchFamily="34" charset="0"/>
-                <a:ea typeface="Times New Roman" pitchFamily="34" charset="-122"/>
-                <a:cs typeface="Times New Roman" pitchFamily="34" charset="-120"/>
-              </a:rPr>
-              <a:t>1</a:t>
-            </a:r>
-            <a:endParaRPr lang="en-US" sz="2000" dirty="0"/>
-          </a:p>
-        </p:txBody>
-      </p:sp>
-      <p:sp>
-        <p:nvSpPr>
-          <p:cNvPr id="9" name="Text 7"/>
-          <p:cNvSpPr txBox="1"/>
-          <p:nvPr/>
-        </p:nvSpPr>
-        <p:spPr>
-          <a:xfrm>
-            <a:off x="640080" y="2715768"/>
-            <a:ext cx="2514600" cy="411480"/>
-          </a:xfrm>
-          <a:prstGeom prst="rect">
-            <a:avLst/>
-          </a:prstGeom>
-          <a:noFill/>
-          <a:ln/>
-        </p:spPr>
-        <p:txBody>
-          <a:bodyPr wrap="square" lIns="0" tIns="0" rIns="0" bIns="0" rtlCol="0" anchor="t"/>
-          <a:lstStyle/>
-          <a:p>
-            <a:pPr algn="ctr" indent="0" marL="0">
-              <a:buNone/>
-            </a:pPr>
-            <a:r>
-              <a:rPr lang="en-US" sz="1350" b="1" dirty="0">
-                <a:solidFill>
-                  <a:srgbClr val="1F1D21"/>
-                </a:solidFill>
-                <a:latin typeface="Times New Roman" pitchFamily="34" charset="0"/>
-                <a:ea typeface="Times New Roman" pitchFamily="34" charset="-122"/>
-                <a:cs typeface="Times New Roman" pitchFamily="34" charset="-120"/>
-              </a:rPr>
-              <a:t>Motivation</a:t>
-            </a:r>
-            <a:endParaRPr lang="en-US" sz="1350" dirty="0"/>
-          </a:p>
-        </p:txBody>
-      </p:sp>
-      <p:sp>
-        <p:nvSpPr>
-          <p:cNvPr id="10" name="Text 8"/>
-          <p:cNvSpPr txBox="1"/>
-          <p:nvPr/>
-        </p:nvSpPr>
-        <p:spPr>
-          <a:xfrm>
-            <a:off x="640080" y="3154680"/>
-            <a:ext cx="2514600" cy="2743200"/>
-          </a:xfrm>
-          <a:prstGeom prst="rect">
-            <a:avLst/>
-          </a:prstGeom>
-          <a:noFill/>
-          <a:ln/>
-        </p:spPr>
-        <p:txBody>
-          <a:bodyPr wrap="square" lIns="0" tIns="0" rIns="0" bIns="0" rtlCol="0" anchor="t"/>
-          <a:lstStyle/>
-          <a:p>
-            <a:pPr algn="ctr" indent="0" marL="0">
-              <a:lnSpc>
-                <a:spcPct val="115000"/>
-              </a:lnSpc>
-              <a:buNone/>
-            </a:pPr>
-            <a:r>
-              <a:rPr lang="en-US" sz="1200" dirty="0">
-                <a:solidFill>
-                  <a:srgbClr val="6B6B6B"/>
-                </a:solidFill>
-                <a:latin typeface="Times New Roman" pitchFamily="34" charset="0"/>
-                <a:ea typeface="Times New Roman" pitchFamily="34" charset="-122"/>
-                <a:cs typeface="Times New Roman" pitchFamily="34" charset="-120"/>
-              </a:rPr>
-              <a:t>[TODO], tied back to an exploration finding (slides 3–6)</a:t>
-            </a:r>
-            <a:endParaRPr lang="en-US" sz="1200" dirty="0"/>
-          </a:p>
-        </p:txBody>
-      </p:sp>
-      <p:sp>
-        <p:nvSpPr>
-          <p:cNvPr id="11" name="Shape 9"/>
-          <p:cNvSpPr/>
-          <p:nvPr/>
-        </p:nvSpPr>
-        <p:spPr>
-          <a:xfrm>
-            <a:off x="3163824" y="2194560"/>
-            <a:ext cx="237744" cy="128016"/>
-          </a:xfrm>
-          <a:prstGeom prst="rightArrow">
-            <a:avLst/>
-          </a:prstGeom>
-          <a:solidFill>
-            <a:srgbClr val="D9D9D9"/>
-          </a:solidFill>
-          <a:ln/>
-        </p:spPr>
-      </p:sp>
-      <p:sp>
-        <p:nvSpPr>
-          <p:cNvPr id="12" name="Shape 10"/>
-          <p:cNvSpPr/>
-          <p:nvPr/>
-        </p:nvSpPr>
-        <p:spPr>
-          <a:xfrm>
-            <a:off x="4393692" y="1965960"/>
-            <a:ext cx="585216" cy="585216"/>
-          </a:xfrm>
-          <a:prstGeom prst="ellipse">
-            <a:avLst/>
-          </a:prstGeom>
-          <a:solidFill>
-            <a:srgbClr val="751B68"/>
-          </a:solidFill>
-          <a:ln/>
-        </p:spPr>
-      </p:sp>
-      <p:sp>
-        <p:nvSpPr>
-          <p:cNvPr id="13" name="Text 11"/>
-          <p:cNvSpPr txBox="1"/>
-          <p:nvPr/>
-        </p:nvSpPr>
-        <p:spPr>
-          <a:xfrm>
-            <a:off x="4393692" y="1965960"/>
-            <a:ext cx="585216" cy="585216"/>
-          </a:xfrm>
-          <a:prstGeom prst="rect">
-            <a:avLst/>
-          </a:prstGeom>
-          <a:noFill/>
-          <a:ln/>
-        </p:spPr>
-        <p:txBody>
-          <a:bodyPr wrap="square" lIns="0" tIns="0" rIns="0" bIns="0" rtlCol="0" anchor="ctr"/>
-          <a:lstStyle/>
-          <a:p>
-            <a:pPr algn="ctr" indent="0" marL="0">
-              <a:buNone/>
-            </a:pPr>
-            <a:r>
-              <a:rPr lang="en-US" sz="2000" b="1" dirty="0">
-                <a:solidFill>
-                  <a:srgbClr val="FFFFFF"/>
-                </a:solidFill>
-                <a:latin typeface="Times New Roman" pitchFamily="34" charset="0"/>
-                <a:ea typeface="Times New Roman" pitchFamily="34" charset="-122"/>
-                <a:cs typeface="Times New Roman" pitchFamily="34" charset="-120"/>
-              </a:rPr>
-              <a:t>2</a:t>
-            </a:r>
-            <a:endParaRPr lang="en-US" sz="2000" dirty="0"/>
-          </a:p>
-        </p:txBody>
-      </p:sp>
-      <p:sp>
-        <p:nvSpPr>
-          <p:cNvPr id="14" name="Text 12"/>
-          <p:cNvSpPr txBox="1"/>
-          <p:nvPr/>
-        </p:nvSpPr>
-        <p:spPr>
-          <a:xfrm>
-            <a:off x="3429000" y="2715768"/>
-            <a:ext cx="2514600" cy="411480"/>
-          </a:xfrm>
-          <a:prstGeom prst="rect">
-            <a:avLst/>
-          </a:prstGeom>
-          <a:noFill/>
-          <a:ln/>
-        </p:spPr>
-        <p:txBody>
-          <a:bodyPr wrap="square" lIns="0" tIns="0" rIns="0" bIns="0" rtlCol="0" anchor="t"/>
-          <a:lstStyle/>
-          <a:p>
-            <a:pPr algn="ctr" indent="0" marL="0">
-              <a:buNone/>
-            </a:pPr>
-            <a:r>
-              <a:rPr lang="en-US" sz="1350" b="1" dirty="0">
-                <a:solidFill>
-                  <a:srgbClr val="1F1D21"/>
-                </a:solidFill>
-                <a:latin typeface="Times New Roman" pitchFamily="34" charset="0"/>
-                <a:ea typeface="Times New Roman" pitchFamily="34" charset="-122"/>
-                <a:cs typeface="Times New Roman" pitchFamily="34" charset="-120"/>
-              </a:rPr>
-              <a:t>Method</a:t>
-            </a:r>
-            <a:endParaRPr lang="en-US" sz="1350" dirty="0"/>
-          </a:p>
-        </p:txBody>
-      </p:sp>
-      <p:sp>
-        <p:nvSpPr>
-          <p:cNvPr id="15" name="Text 13"/>
-          <p:cNvSpPr txBox="1"/>
-          <p:nvPr/>
-        </p:nvSpPr>
-        <p:spPr>
-          <a:xfrm>
-            <a:off x="3429000" y="3154680"/>
-            <a:ext cx="2514600" cy="2743200"/>
-          </a:xfrm>
-          <a:prstGeom prst="rect">
-            <a:avLst/>
-          </a:prstGeom>
-          <a:noFill/>
-          <a:ln/>
-        </p:spPr>
-        <p:txBody>
-          <a:bodyPr wrap="square" lIns="0" tIns="0" rIns="0" bIns="0" rtlCol="0" anchor="t"/>
-          <a:lstStyle/>
-          <a:p>
-            <a:pPr algn="ctr" indent="0" marL="0">
-              <a:lnSpc>
-                <a:spcPct val="115000"/>
-              </a:lnSpc>
-              <a:buNone/>
-            </a:pPr>
-            <a:r>
-              <a:rPr lang="en-US" sz="1200" dirty="0">
-                <a:solidFill>
-                  <a:srgbClr val="6B6B6B"/>
-                </a:solidFill>
-                <a:latin typeface="Times New Roman" pitchFamily="34" charset="0"/>
-                <a:ea typeface="Times New Roman" pitchFamily="34" charset="-122"/>
-                <a:cs typeface="Times New Roman" pitchFamily="34" charset="-120"/>
-              </a:rPr>
-              <a:t>[TODO] the modification tried</a:t>
-            </a:r>
-            <a:endParaRPr lang="en-US" sz="1200" dirty="0"/>
-          </a:p>
-        </p:txBody>
-      </p:sp>
-      <p:sp>
-        <p:nvSpPr>
-          <p:cNvPr id="16" name="Shape 14"/>
-          <p:cNvSpPr/>
-          <p:nvPr/>
-        </p:nvSpPr>
-        <p:spPr>
-          <a:xfrm>
-            <a:off x="5952744" y="2194560"/>
-            <a:ext cx="237744" cy="128016"/>
-          </a:xfrm>
-          <a:prstGeom prst="rightArrow">
-            <a:avLst/>
-          </a:prstGeom>
-          <a:solidFill>
-            <a:srgbClr val="D9D9D9"/>
-          </a:solidFill>
-          <a:ln/>
-        </p:spPr>
-      </p:sp>
-      <p:sp>
-        <p:nvSpPr>
-          <p:cNvPr id="17" name="Shape 15"/>
-          <p:cNvSpPr/>
-          <p:nvPr/>
-        </p:nvSpPr>
-        <p:spPr>
-          <a:xfrm>
-            <a:off x="7182612" y="1965960"/>
-            <a:ext cx="585216" cy="585216"/>
-          </a:xfrm>
-          <a:prstGeom prst="ellipse">
-            <a:avLst/>
-          </a:prstGeom>
-          <a:solidFill>
-            <a:srgbClr val="751B68"/>
-          </a:solidFill>
-          <a:ln/>
-        </p:spPr>
-      </p:sp>
-      <p:sp>
-        <p:nvSpPr>
-          <p:cNvPr id="18" name="Text 16"/>
-          <p:cNvSpPr txBox="1"/>
-          <p:nvPr/>
-        </p:nvSpPr>
-        <p:spPr>
-          <a:xfrm>
-            <a:off x="7182612" y="1965960"/>
-            <a:ext cx="585216" cy="585216"/>
-          </a:xfrm>
-          <a:prstGeom prst="rect">
-            <a:avLst/>
-          </a:prstGeom>
-          <a:noFill/>
-          <a:ln/>
-        </p:spPr>
-        <p:txBody>
-          <a:bodyPr wrap="square" lIns="0" tIns="0" rIns="0" bIns="0" rtlCol="0" anchor="ctr"/>
-          <a:lstStyle/>
-          <a:p>
-            <a:pPr algn="ctr" indent="0" marL="0">
-              <a:buNone/>
-            </a:pPr>
-            <a:r>
-              <a:rPr lang="en-US" sz="2000" b="1" dirty="0">
-                <a:solidFill>
-                  <a:srgbClr val="FFFFFF"/>
-                </a:solidFill>
-                <a:latin typeface="Times New Roman" pitchFamily="34" charset="0"/>
-                <a:ea typeface="Times New Roman" pitchFamily="34" charset="-122"/>
-                <a:cs typeface="Times New Roman" pitchFamily="34" charset="-120"/>
-              </a:rPr>
-              <a:t>3</a:t>
-            </a:r>
-            <a:endParaRPr lang="en-US" sz="2000" dirty="0"/>
-          </a:p>
-        </p:txBody>
-      </p:sp>
-      <p:sp>
-        <p:nvSpPr>
-          <p:cNvPr id="19" name="Text 17"/>
-          <p:cNvSpPr txBox="1"/>
-          <p:nvPr/>
-        </p:nvSpPr>
-        <p:spPr>
-          <a:xfrm>
-            <a:off x="6217920" y="2715768"/>
-            <a:ext cx="2514600" cy="411480"/>
-          </a:xfrm>
-          <a:prstGeom prst="rect">
-            <a:avLst/>
-          </a:prstGeom>
-          <a:noFill/>
-          <a:ln/>
-        </p:spPr>
-        <p:txBody>
-          <a:bodyPr wrap="square" lIns="0" tIns="0" rIns="0" bIns="0" rtlCol="0" anchor="t"/>
-          <a:lstStyle/>
-          <a:p>
-            <a:pPr algn="ctr" indent="0" marL="0">
-              <a:buNone/>
-            </a:pPr>
-            <a:r>
-              <a:rPr lang="en-US" sz="1350" b="1" dirty="0">
-                <a:solidFill>
-                  <a:srgbClr val="1F1D21"/>
-                </a:solidFill>
-                <a:latin typeface="Times New Roman" pitchFamily="34" charset="0"/>
-                <a:ea typeface="Times New Roman" pitchFamily="34" charset="-122"/>
-                <a:cs typeface="Times New Roman" pitchFamily="34" charset="-120"/>
-              </a:rPr>
-              <a:t>Result</a:t>
-            </a:r>
-            <a:endParaRPr lang="en-US" sz="1350" dirty="0"/>
-          </a:p>
-        </p:txBody>
-      </p:sp>
-      <p:sp>
-        <p:nvSpPr>
-          <p:cNvPr id="20" name="Text 18"/>
-          <p:cNvSpPr txBox="1"/>
-          <p:nvPr/>
-        </p:nvSpPr>
-        <p:spPr>
-          <a:xfrm>
-            <a:off x="6217920" y="3154680"/>
-            <a:ext cx="2514600" cy="2743200"/>
-          </a:xfrm>
-          <a:prstGeom prst="rect">
-            <a:avLst/>
-          </a:prstGeom>
-          <a:noFill/>
-          <a:ln/>
-        </p:spPr>
-        <p:txBody>
-          <a:bodyPr wrap="square" lIns="0" tIns="0" rIns="0" bIns="0" rtlCol="0" anchor="t"/>
-          <a:lstStyle/>
-          <a:p>
-            <a:pPr algn="ctr" indent="0" marL="0">
-              <a:lnSpc>
-                <a:spcPct val="115000"/>
-              </a:lnSpc>
-              <a:buNone/>
-            </a:pPr>
-            <a:r>
-              <a:rPr lang="en-US" sz="1200" dirty="0">
-                <a:solidFill>
-                  <a:srgbClr val="6B6B6B"/>
-                </a:solidFill>
-                <a:latin typeface="Times New Roman" pitchFamily="34" charset="0"/>
-                <a:ea typeface="Times New Roman" pitchFamily="34" charset="-122"/>
-                <a:cs typeface="Times New Roman" pitchFamily="34" charset="-120"/>
-              </a:rPr>
-              <a:t>[TODO] vs. baseline — from the run in progress</a:t>
-            </a:r>
-            <a:endParaRPr lang="en-US" sz="1200" dirty="0"/>
-          </a:p>
-        </p:txBody>
-      </p:sp>
-      <p:sp>
-        <p:nvSpPr>
-          <p:cNvPr id="21" name="Shape 19"/>
-          <p:cNvSpPr/>
-          <p:nvPr/>
-        </p:nvSpPr>
-        <p:spPr>
-          <a:xfrm>
-            <a:off x="8741664" y="2194560"/>
-            <a:ext cx="237744" cy="128016"/>
-          </a:xfrm>
-          <a:prstGeom prst="rightArrow">
-            <a:avLst/>
-          </a:prstGeom>
-          <a:solidFill>
-            <a:srgbClr val="D9D9D9"/>
-          </a:solidFill>
-          <a:ln/>
-        </p:spPr>
-      </p:sp>
-      <p:sp>
-        <p:nvSpPr>
-          <p:cNvPr id="22" name="Shape 20"/>
-          <p:cNvSpPr/>
-          <p:nvPr/>
-        </p:nvSpPr>
-        <p:spPr>
-          <a:xfrm>
-            <a:off x="9971532" y="1965960"/>
-            <a:ext cx="585216" cy="585216"/>
-          </a:xfrm>
-          <a:prstGeom prst="ellipse">
-            <a:avLst/>
-          </a:prstGeom>
-          <a:solidFill>
-            <a:srgbClr val="751B68"/>
-          </a:solidFill>
-          <a:ln/>
-        </p:spPr>
-      </p:sp>
-      <p:sp>
-        <p:nvSpPr>
-          <p:cNvPr id="23" name="Text 21"/>
-          <p:cNvSpPr txBox="1"/>
-          <p:nvPr/>
-        </p:nvSpPr>
-        <p:spPr>
-          <a:xfrm>
-            <a:off x="9971532" y="1965960"/>
-            <a:ext cx="585216" cy="585216"/>
-          </a:xfrm>
-          <a:prstGeom prst="rect">
-            <a:avLst/>
-          </a:prstGeom>
-          <a:noFill/>
-          <a:ln/>
-        </p:spPr>
-        <p:txBody>
-          <a:bodyPr wrap="square" lIns="0" tIns="0" rIns="0" bIns="0" rtlCol="0" anchor="ctr"/>
-          <a:lstStyle/>
-          <a:p>
-            <a:pPr algn="ctr" indent="0" marL="0">
-              <a:buNone/>
-            </a:pPr>
-            <a:r>
-              <a:rPr lang="en-US" sz="2000" b="1" dirty="0">
-                <a:solidFill>
-                  <a:srgbClr val="FFFFFF"/>
-                </a:solidFill>
-                <a:latin typeface="Times New Roman" pitchFamily="34" charset="0"/>
-                <a:ea typeface="Times New Roman" pitchFamily="34" charset="-122"/>
-                <a:cs typeface="Times New Roman" pitchFamily="34" charset="-120"/>
-              </a:rPr>
-              <a:t>4</a:t>
-            </a:r>
-            <a:endParaRPr lang="en-US" sz="2000" dirty="0"/>
-          </a:p>
-        </p:txBody>
-      </p:sp>
-      <p:sp>
-        <p:nvSpPr>
-          <p:cNvPr id="24" name="Text 22"/>
-          <p:cNvSpPr txBox="1"/>
-          <p:nvPr/>
-        </p:nvSpPr>
-        <p:spPr>
-          <a:xfrm>
-            <a:off x="9006840" y="2715768"/>
-            <a:ext cx="2514600" cy="411480"/>
-          </a:xfrm>
-          <a:prstGeom prst="rect">
-            <a:avLst/>
-          </a:prstGeom>
-          <a:noFill/>
-          <a:ln/>
-        </p:spPr>
-        <p:txBody>
-          <a:bodyPr wrap="square" lIns="0" tIns="0" rIns="0" bIns="0" rtlCol="0" anchor="t"/>
-          <a:lstStyle/>
-          <a:p>
-            <a:pPr algn="ctr" indent="0" marL="0">
-              <a:buNone/>
-            </a:pPr>
-            <a:r>
-              <a:rPr lang="en-US" sz="1350" b="1" dirty="0">
-                <a:solidFill>
-                  <a:srgbClr val="1F1D21"/>
-                </a:solidFill>
-                <a:latin typeface="Times New Roman" pitchFamily="34" charset="0"/>
-                <a:ea typeface="Times New Roman" pitchFamily="34" charset="-122"/>
-                <a:cs typeface="Times New Roman" pitchFamily="34" charset="-120"/>
-              </a:rPr>
-              <a:t>Next steps</a:t>
-            </a:r>
-            <a:endParaRPr lang="en-US" sz="1350" dirty="0"/>
-          </a:p>
-        </p:txBody>
-      </p:sp>
-      <p:sp>
-        <p:nvSpPr>
-          <p:cNvPr id="25" name="Text 23"/>
-          <p:cNvSpPr txBox="1"/>
-          <p:nvPr/>
-        </p:nvSpPr>
-        <p:spPr>
-          <a:xfrm>
-            <a:off x="9006840" y="3154680"/>
-            <a:ext cx="2514600" cy="2743200"/>
-          </a:xfrm>
-          <a:prstGeom prst="rect">
-            <a:avLst/>
-          </a:prstGeom>
-          <a:noFill/>
-          <a:ln/>
-        </p:spPr>
-        <p:txBody>
-          <a:bodyPr wrap="square" lIns="0" tIns="0" rIns="0" bIns="0" rtlCol="0" anchor="t"/>
-          <a:lstStyle/>
-          <a:p>
-            <a:pPr algn="ctr" indent="0" marL="0">
-              <a:lnSpc>
-                <a:spcPct val="115000"/>
-              </a:lnSpc>
-              <a:buNone/>
-            </a:pPr>
-            <a:r>
-              <a:rPr lang="en-US" sz="1200" dirty="0">
-                <a:solidFill>
-                  <a:srgbClr val="6B6B6B"/>
-                </a:solidFill>
-                <a:latin typeface="Times New Roman" pitchFamily="34" charset="0"/>
-                <a:ea typeface="Times New Roman" pitchFamily="34" charset="-122"/>
-                <a:cs typeface="Times New Roman" pitchFamily="34" charset="-120"/>
-              </a:rPr>
-              <a:t>[TODO] one or two concrete next experiments</a:t>
-            </a:r>
-            <a:endParaRPr lang="en-US" sz="1200" dirty="0"/>
-          </a:p>
-        </p:txBody>
-      </p:sp>
-      <p:pic>
-        <p:nvPicPr>
-          <p:cNvPr id="26" name="Image 0" descr="/Users/bellavg/ProjectsMSc/ai4mi_project/deck/assets/uva_logo.png">    </p:cNvPr>
-          <p:cNvPicPr>
-            <a:picLocks noChangeAspect="1"/>
-          </p:cNvPicPr>
-          <p:nvPr/>
-        </p:nvPicPr>
-        <p:blipFill>
-          <a:blip r:embed="rId1"/>
-          <a:stretch>
-            <a:fillRect/>
-          </a:stretch>
-        </p:blipFill>
-        <p:spPr>
-          <a:xfrm>
-            <a:off x="457200" y="6446520"/>
-            <a:ext cx="1371600" cy="137160"/>
-          </a:xfrm>
-          <a:prstGeom prst="rect">
-            <a:avLst/>
-          </a:prstGeom>
-        </p:spPr>
-      </p:pic>
-      <p:sp>
-        <p:nvSpPr>
-          <p:cNvPr id="27" name="Text 24"/>
-          <p:cNvSpPr txBox="1"/>
-          <p:nvPr/>
-        </p:nvSpPr>
-        <p:spPr>
-          <a:xfrm>
-            <a:off x="9902952" y="6446520"/>
-            <a:ext cx="1828800" cy="274320"/>
-          </a:xfrm>
-          <a:prstGeom prst="rect">
-            <a:avLst/>
-          </a:prstGeom>
-          <a:noFill/>
-          <a:ln/>
-        </p:spPr>
-        <p:txBody>
-          <a:bodyPr wrap="square" lIns="0" tIns="0" rIns="0" bIns="0" rtlCol="0" anchor="ctr"/>
-          <a:lstStyle/>
-          <a:p>
-            <a:pPr algn="r" indent="0" marL="0">
-              <a:buNone/>
-            </a:pPr>
-            <a:r>
-              <a:rPr lang="en-US" sz="900" dirty="0">
-                <a:solidFill>
-                  <a:srgbClr val="6B6B6B"/>
-                </a:solidFill>
-                <a:latin typeface="Times New Roman" pitchFamily="34" charset="0"/>
-                <a:ea typeface="Times New Roman" pitchFamily="34" charset="-122"/>
-                <a:cs typeface="Times New Roman" pitchFamily="34" charset="-120"/>
-              </a:rPr>
-              <a:t>09</a:t>
-            </a:r>
-            <a:endParaRPr lang="en-US" sz="900" dirty="0"/>
-          </a:p>
-        </p:txBody>
-      </p:sp>
-    </p:spTree>
-  </p:cSld>
-  <p:clrMapOvr>
-    <a:masterClrMapping/>
-  </p:clrMapOvr>
-</p:sld>
-</file>
-
-<file path=ppt/slides/slide11.xml><?xml version="1.0" encoding="utf-8"?>
-<p:sld xmlns:a="http://schemas.openxmlformats.org/drawingml/2006/main" xmlns:r="http://schemas.openxmlformats.org/officeDocument/2006/relationships" xmlns:p="http://schemas.openxmlformats.org/presentationml/2006/main">
-  <p:cSld name="Slide 11">
-    <p:bg>
-      <p:bgPr>
-        <a:solidFill>
-          <a:srgbClr val="1F1D21"/>
-        </a:solidFill>
-      </p:bgPr>
-    </p:bg>
-    <p:spTree>
-      <p:nvGrpSpPr>
-        <p:cNvPr id="1" name=""/>
-        <p:cNvGrpSpPr/>
-        <p:nvPr/>
-      </p:nvGrpSpPr>
-      <p:grpSpPr>
-        <a:xfrm>
-          <a:off x="0" y="0"/>
-          <a:ext cx="0" cy="0"/>
-          <a:chOff x="0" y="0"/>
-          <a:chExt cx="0" cy="0"/>
-        </a:xfrm>
-      </p:grpSpPr>
-      <p:sp>
-        <p:nvSpPr>
-          <p:cNvPr id="2" name="Shape 0"/>
-          <p:cNvSpPr/>
-          <p:nvPr/>
-        </p:nvSpPr>
-        <p:spPr>
-          <a:xfrm>
-            <a:off x="0" y="0"/>
-            <a:ext cx="164592" cy="6858000"/>
-          </a:xfrm>
-          <a:prstGeom prst="rect">
-            <a:avLst/>
-          </a:prstGeom>
-          <a:solidFill>
-            <a:srgbClr val="BC0031"/>
-          </a:solidFill>
-          <a:ln/>
-        </p:spPr>
-      </p:sp>
-      <p:sp>
-        <p:nvSpPr>
-          <p:cNvPr id="3" name="Text 1"/>
-          <p:cNvSpPr txBox="1"/>
-          <p:nvPr/>
-        </p:nvSpPr>
-        <p:spPr>
-          <a:xfrm>
-            <a:off x="731520" y="548640"/>
-            <a:ext cx="10058400" cy="640080"/>
-          </a:xfrm>
-          <a:prstGeom prst="rect">
-            <a:avLst/>
-          </a:prstGeom>
-          <a:noFill/>
-          <a:ln/>
-        </p:spPr>
-        <p:txBody>
-          <a:bodyPr wrap="square" lIns="0" tIns="0" rIns="0" bIns="0" rtlCol="0" anchor="ctr"/>
-          <a:lstStyle/>
-          <a:p>
-            <a:pPr indent="0" marL="0">
-              <a:buNone/>
-            </a:pPr>
-            <a:r>
-              <a:rPr lang="en-US" sz="3000" b="1" dirty="0">
-                <a:solidFill>
-                  <a:srgbClr val="FFFFFF"/>
-                </a:solidFill>
-                <a:latin typeface="Times New Roman" pitchFamily="34" charset="0"/>
-                <a:ea typeface="Times New Roman" pitchFamily="34" charset="-122"/>
-                <a:cs typeface="Times New Roman" pitchFamily="34" charset="-120"/>
-              </a:rPr>
-              <a:t>Status &amp; Next Steps</a:t>
-            </a:r>
-            <a:endParaRPr lang="en-US" sz="3000" dirty="0"/>
-          </a:p>
-        </p:txBody>
-      </p:sp>
-      <p:sp>
-        <p:nvSpPr>
-          <p:cNvPr id="4" name="Text 2"/>
-          <p:cNvSpPr txBox="1"/>
-          <p:nvPr/>
-        </p:nvSpPr>
-        <p:spPr>
-          <a:xfrm>
-            <a:off x="731520" y="1554480"/>
-            <a:ext cx="9601200" cy="2743200"/>
-          </a:xfrm>
-          <a:prstGeom prst="rect">
-            <a:avLst/>
-          </a:prstGeom>
-          <a:noFill/>
-          <a:ln/>
-        </p:spPr>
-        <p:txBody>
-          <a:bodyPr wrap="square" lIns="0" tIns="0" rIns="0" bIns="0" rtlCol="0" anchor="t"/>
-          <a:lstStyle/>
-          <a:p>
-            <a:pPr marL="228600" indent="-228600">
-              <a:lnSpc>
-                <a:spcPct val="115000"/>
-              </a:lnSpc>
-              <a:spcAft>
-                <a:spcPts val="1000"/>
-              </a:spcAft>
-              <a:buSzPct val="100000"/>
-              <a:buChar char="▪"/>
-            </a:pPr>
-            <a:r>
-              <a:rPr lang="en-US" sz="1600" dirty="0">
-                <a:solidFill>
-                  <a:srgbClr val="FFFFFF"/>
-                </a:solidFill>
-                <a:latin typeface="Times New Roman" pitchFamily="34" charset="0"/>
-                <a:ea typeface="Times New Roman" pitchFamily="34" charset="-122"/>
-                <a:cs typeface="Times New Roman" pitchFamily="34" charset="-120"/>
-              </a:rPr>
-              <a:t>Done: dataset validation, exploration, baseline, preprocessing pipeline</a:t>
-            </a:r>
-            <a:endParaRPr lang="en-US" sz="1600" dirty="0"/>
-          </a:p>
-          <a:p>
-            <a:pPr marL="228600" indent="-228600">
-              <a:lnSpc>
-                <a:spcPct val="115000"/>
-              </a:lnSpc>
-              <a:spcAft>
-                <a:spcPts val="1000"/>
-              </a:spcAft>
-              <a:buSzPct val="100000"/>
-              <a:buChar char="▪"/>
-            </a:pPr>
-            <a:r>
-              <a:rPr lang="en-US" sz="1600" dirty="0">
-                <a:solidFill>
-                  <a:srgbClr val="FFFFFF"/>
-                </a:solidFill>
-                <a:latin typeface="Times New Roman" pitchFamily="34" charset="0"/>
-                <a:ea typeface="Times New Roman" pitchFamily="34" charset="-122"/>
-                <a:cs typeface="Times New Roman" pitchFamily="34" charset="-120"/>
-              </a:rPr>
-              <a:t>In progress: [TODO] first modified-loss / modified-preprocessing run</a:t>
-            </a:r>
-            <a:endParaRPr lang="en-US" sz="1600" dirty="0"/>
-          </a:p>
-          <a:p>
-            <a:pPr marL="228600" indent="-228600">
-              <a:lnSpc>
-                <a:spcPct val="115000"/>
-              </a:lnSpc>
-              <a:spcAft>
-                <a:spcPts val="1000"/>
-              </a:spcAft>
-              <a:buSzPct val="100000"/>
-              <a:buChar char="▪"/>
-            </a:pPr>
-            <a:r>
-              <a:rPr lang="en-US" sz="1600" dirty="0">
-                <a:solidFill>
-                  <a:srgbClr val="FFFFFF"/>
-                </a:solidFill>
-                <a:latin typeface="Times New Roman" pitchFamily="34" charset="0"/>
-                <a:ea typeface="Times New Roman" pitchFamily="34" charset="-122"/>
-                <a:cs typeface="Times New Roman" pitchFamily="34" charset="-120"/>
-              </a:rPr>
-              <a:t>Next: [TODO] one or two concrete next experiments before the final deadline</a:t>
-            </a:r>
-            <a:endParaRPr lang="en-US" sz="1600" dirty="0"/>
-          </a:p>
-        </p:txBody>
-      </p:sp>
-      <p:sp>
-        <p:nvSpPr>
-          <p:cNvPr id="5" name="Text 3"/>
-          <p:cNvSpPr txBox="1"/>
-          <p:nvPr/>
-        </p:nvSpPr>
-        <p:spPr>
-          <a:xfrm>
-            <a:off x="731520" y="5760720"/>
-            <a:ext cx="5486400" cy="548640"/>
-          </a:xfrm>
-          <a:prstGeom prst="rect">
-            <a:avLst/>
-          </a:prstGeom>
-          <a:noFill/>
-          <a:ln/>
-        </p:spPr>
-        <p:txBody>
-          <a:bodyPr wrap="square" lIns="0" tIns="0" rIns="0" bIns="0" rtlCol="0" anchor="ctr"/>
-          <a:lstStyle/>
-          <a:p>
-            <a:pPr indent="0" marL="0">
-              <a:buNone/>
-            </a:pPr>
-            <a:r>
-              <a:rPr lang="en-US" sz="2000" b="1" dirty="0">
-                <a:solidFill>
-                  <a:srgbClr val="B5B5B5"/>
-                </a:solidFill>
-                <a:latin typeface="Times New Roman" pitchFamily="34" charset="0"/>
-                <a:ea typeface="Times New Roman" pitchFamily="34" charset="-122"/>
-                <a:cs typeface="Times New Roman" pitchFamily="34" charset="-120"/>
-              </a:rPr>
-              <a:t>Questions</a:t>
-            </a:r>
-            <a:endParaRPr lang="en-US" sz="2000" dirty="0"/>
-          </a:p>
-        </p:txBody>
-      </p:sp>
-      <p:pic>
-        <p:nvPicPr>
-          <p:cNvPr id="6" name="Image 0" descr="/Users/bellavg/ProjectsMSc/ai4mi_project/deck/assets/uva_logo_white.png">    </p:cNvPr>
-          <p:cNvPicPr>
-            <a:picLocks noChangeAspect="1"/>
-          </p:cNvPicPr>
-          <p:nvPr/>
-        </p:nvPicPr>
-        <p:blipFill>
-          <a:blip r:embed="rId1"/>
-          <a:stretch>
-            <a:fillRect/>
-          </a:stretch>
-        </p:blipFill>
-        <p:spPr>
-          <a:xfrm>
-            <a:off x="457200" y="6446520"/>
-            <a:ext cx="1371600" cy="137160"/>
-          </a:xfrm>
-          <a:prstGeom prst="rect">
-            <a:avLst/>
-          </a:prstGeom>
-        </p:spPr>
-      </p:pic>
-      <p:sp>
-        <p:nvSpPr>
-          <p:cNvPr id="7" name="Text 4"/>
-          <p:cNvSpPr txBox="1"/>
-          <p:nvPr/>
-        </p:nvSpPr>
-        <p:spPr>
-          <a:xfrm>
-            <a:off x="9902952" y="6446520"/>
-            <a:ext cx="1828800" cy="274320"/>
-          </a:xfrm>
-          <a:prstGeom prst="rect">
-            <a:avLst/>
-          </a:prstGeom>
-          <a:noFill/>
-          <a:ln/>
-        </p:spPr>
-        <p:txBody>
-          <a:bodyPr wrap="square" lIns="0" tIns="0" rIns="0" bIns="0" rtlCol="0" anchor="ctr"/>
-          <a:lstStyle/>
-          <a:p>
-            <a:pPr algn="r" indent="0" marL="0">
-              <a:buNone/>
-            </a:pPr>
-            <a:r>
-              <a:rPr lang="en-US" sz="900" dirty="0">
-                <a:solidFill>
-                  <a:srgbClr val="6B6B6B"/>
-                </a:solidFill>
-                <a:latin typeface="Times New Roman" pitchFamily="34" charset="0"/>
-                <a:ea typeface="Times New Roman" pitchFamily="34" charset="-122"/>
-                <a:cs typeface="Times New Roman" pitchFamily="34" charset="-120"/>
-              </a:rPr>
-              <a:t>10</a:t>
-            </a:r>
-            <a:endParaRPr lang="en-US" sz="900" dirty="0"/>
-          </a:p>
-        </p:txBody>
-      </p:sp>
-    </p:spTree>
-  </p:cSld>
-  <p:clrMapOvr>
-    <a:masterClrMapping/>
-  </p:clrMapOvr>
-</p:sld>
-</file>
-
-<file path=ppt/slides/slide12.xml><?xml version="1.0" encoding="utf-8"?>
-<p:sld xmlns:a="http://schemas.openxmlformats.org/drawingml/2006/main" xmlns:r="http://schemas.openxmlformats.org/officeDocument/2006/relationships" xmlns:p="http://schemas.openxmlformats.org/presentationml/2006/main">
-  <p:cSld name="Slide 12">
-    <p:bg>
-      <p:bgPr>
-        <a:solidFill>
-          <a:srgbClr val="FFFFFF"/>
-        </a:solidFill>
-      </p:bgPr>
-    </p:bg>
-    <p:spTree>
-      <p:nvGrpSpPr>
-        <p:cNvPr id="1" name=""/>
-        <p:cNvGrpSpPr/>
-        <p:nvPr/>
-      </p:nvGrpSpPr>
-      <p:grpSpPr>
-        <a:xfrm>
-          <a:off x="0" y="0"/>
-          <a:ext cx="0" cy="0"/>
-          <a:chOff x="0" y="0"/>
-          <a:chExt cx="0" cy="0"/>
-        </a:xfrm>
-      </p:grpSpPr>
-      <p:sp>
-        <p:nvSpPr>
-          <p:cNvPr id="2" name="Shape 0"/>
-          <p:cNvSpPr/>
-          <p:nvPr/>
-        </p:nvSpPr>
-        <p:spPr>
-          <a:xfrm>
-            <a:off x="0" y="0"/>
-            <a:ext cx="164592" cy="6858000"/>
-          </a:xfrm>
-          <a:prstGeom prst="rect">
-            <a:avLst/>
-          </a:prstGeom>
-          <a:solidFill>
             <a:srgbClr val="6B6B6B"/>
           </a:solidFill>
           <a:ln/>
@@ -3478,7 +2517,7 @@
       </p:sp>
       <p:pic>
         <p:nvPicPr>
-          <p:cNvPr id="7" name="Image 0" descr="/Users/bellavg/ProjectsMSc/ai4mi_project/deck/assets/uva_logo.png">    </p:cNvPr>
+          <p:cNvPr id="7" name="Image 0" descr="/Users/bellavg/ProjectsMSc/ai4mi_project/.claude/worktrees/segthor-presentation-midpoint-825c66/deck/assets/uva_logo.png">    </p:cNvPr>
           <p:cNvPicPr>
             <a:picLocks noChangeAspect="1"/>
           </p:cNvPicPr>
@@ -3823,7 +2862,7 @@
       </p:sp>
       <p:pic>
         <p:nvPicPr>
-          <p:cNvPr id="8" name="Image 0" descr="/Users/bellavg/ProjectsMSc/ai4mi_project/deck/assets/uva_logo.png">    </p:cNvPr>
+          <p:cNvPr id="8" name="Image 0" descr="/Users/bellavg/ProjectsMSc/ai4mi_project/.claude/worktrees/segthor-presentation-midpoint-825c66/deck/assets/uva_logo.png">    </p:cNvPr>
           <p:cNvPicPr>
             <a:picLocks noChangeAspect="1"/>
           </p:cNvPicPr>
@@ -4023,7 +3062,7 @@
         <p:spPr>
           <a:xfrm>
             <a:off x="640080" y="658368"/>
-            <a:ext cx="10881360" cy="822960"/>
+            <a:ext cx="10881360" cy="502920"/>
           </a:xfrm>
           <a:prstGeom prst="rect">
             <a:avLst/>
@@ -4053,16 +3092,325 @@
           </a:p>
         </p:txBody>
       </p:sp>
-      <p:sp>
-        <p:nvSpPr>
-          <p:cNvPr id="6" name="Shape 4"/>
+      <p:pic>
+        <p:nvPicPr>
+          <p:cNvPr id="6" name="Image 0" descr="/Users/bellavg/ProjectsMSc/ai4mi_project/.claude/worktrees/segthor-presentation-midpoint-825c66/figures/comparison/connected_components.png">    </p:cNvPr>
+          <p:cNvPicPr>
+            <a:picLocks noChangeAspect="1"/>
+          </p:cNvPicPr>
+          <p:nvPr/>
+        </p:nvPicPr>
+        <p:blipFill>
+          <a:blip r:embed="rId1"/>
+          <a:srcRect l="0" r="0" t="0" b="0"/>
+          <a:stretch/>
+        </p:blipFill>
+        <p:spPr>
+          <a:xfrm>
+            <a:off x="4114800" y="1234440"/>
+            <a:ext cx="7434072" cy="3382503"/>
+          </a:xfrm>
+          <a:prstGeom prst="rect">
+            <a:avLst/>
+          </a:prstGeom>
+        </p:spPr>
+      </p:pic>
+      <p:sp>
+        <p:nvSpPr>
+          <p:cNvPr id="7" name="Text 4"/>
+          <p:cNvSpPr txBox="1"/>
+          <p:nvPr/>
+        </p:nvSpPr>
+        <p:spPr>
+          <a:xfrm>
+            <a:off x="640080" y="1234440"/>
+            <a:ext cx="3108960" cy="256032"/>
+          </a:xfrm>
+          <a:prstGeom prst="rect">
+            <a:avLst/>
+          </a:prstGeom>
+          <a:noFill/>
+          <a:ln/>
+        </p:spPr>
+        <p:txBody>
+          <a:bodyPr wrap="square" lIns="0" tIns="0" rIns="0" bIns="0" rtlCol="0" anchor="ctr"/>
+          <a:lstStyle/>
+          <a:p>
+            <a:pPr indent="0" marL="0">
+              <a:buNone/>
+            </a:pPr>
+            <a:r>
+              <a:rPr lang="en-US" sz="1150" b="1" spc="100" kern="0" dirty="0">
+                <a:solidFill>
+                  <a:srgbClr val="BC0031"/>
+                </a:solidFill>
+                <a:latin typeface="Times New Roman" pitchFamily="34" charset="0"/>
+                <a:ea typeface="Times New Roman" pitchFamily="34" charset="-122"/>
+                <a:cs typeface="Times New Roman" pitchFamily="34" charset="-120"/>
+              </a:rPr>
+              <a:t>WHAT IT SHOWS</a:t>
+            </a:r>
+            <a:endParaRPr lang="en-US" sz="1150" dirty="0"/>
+          </a:p>
+        </p:txBody>
+      </p:sp>
+      <p:sp>
+        <p:nvSpPr>
+          <p:cNvPr id="8" name="Text 5"/>
+          <p:cNvSpPr txBox="1"/>
+          <p:nvPr/>
+        </p:nvSpPr>
+        <p:spPr>
+          <a:xfrm>
+            <a:off x="640080" y="1527048"/>
+            <a:ext cx="3108960" cy="1164717"/>
+          </a:xfrm>
+          <a:prstGeom prst="rect">
+            <a:avLst/>
+          </a:prstGeom>
+          <a:noFill/>
+          <a:ln/>
+        </p:spPr>
+        <p:txBody>
+          <a:bodyPr wrap="square" lIns="0" tIns="0" rIns="0" bIns="0" rtlCol="0" anchor="t"/>
+          <a:lstStyle/>
+          <a:p>
+            <a:pPr marL="177800" indent="-177800">
+              <a:lnSpc>
+                <a:spcPct val="115000"/>
+              </a:lnSpc>
+              <a:spcAft>
+                <a:spcPts val="500"/>
+              </a:spcAft>
+              <a:buSzPct val="100000"/>
+              <a:buChar char="▪"/>
+            </a:pPr>
+            <a:r>
+              <a:rPr lang="en-US" sz="1250" dirty="0">
+                <a:solidFill>
+                  <a:srgbClr val="1F1D21"/>
+                </a:solidFill>
+                <a:latin typeface="Times New Roman" pitchFamily="34" charset="0"/>
+                <a:ea typeface="Times New Roman" pitchFamily="34" charset="-122"/>
+                <a:cs typeface="Times New Roman" pitchFamily="34" charset="-120"/>
+              </a:rPr>
+              <a:t>Connected pieces per label, for all patients: % of axial slices (2D) or patients (3D) with 1, 2 or 3+ pieces</a:t>
+            </a:r>
+            <a:endParaRPr lang="en-US" sz="1250" dirty="0"/>
+          </a:p>
+          <a:p>
+            <a:pPr marL="177800" indent="-177800">
+              <a:lnSpc>
+                <a:spcPct val="115000"/>
+              </a:lnSpc>
+              <a:spcAft>
+                <a:spcPts val="500"/>
+              </a:spcAft>
+              <a:buSzPct val="100000"/>
+              <a:buChar char="▪"/>
+            </a:pPr>
+            <a:r>
+              <a:rPr lang="en-US" sz="1250" dirty="0">
+                <a:solidFill>
+                  <a:srgbClr val="1F1D21"/>
+                </a:solidFill>
+                <a:latin typeface="Times New Roman" pitchFamily="34" charset="0"/>
+                <a:ea typeface="Times New Roman" pitchFamily="34" charset="-122"/>
+                <a:cs typeface="Times New Roman" pitchFamily="34" charset="-120"/>
+              </a:rPr>
+              <a:t>Top: aorta merged (3 labels). Bottom: aorta separate (4 labels)</a:t>
+            </a:r>
+            <a:endParaRPr lang="en-US" sz="1250" dirty="0"/>
+          </a:p>
+        </p:txBody>
+      </p:sp>
+      <p:sp>
+        <p:nvSpPr>
+          <p:cNvPr id="9" name="Text 6"/>
+          <p:cNvSpPr txBox="1"/>
+          <p:nvPr/>
+        </p:nvSpPr>
+        <p:spPr>
+          <a:xfrm>
+            <a:off x="640080" y="2920365"/>
+            <a:ext cx="3108960" cy="256032"/>
+          </a:xfrm>
+          <a:prstGeom prst="rect">
+            <a:avLst/>
+          </a:prstGeom>
+          <a:noFill/>
+          <a:ln/>
+        </p:spPr>
+        <p:txBody>
+          <a:bodyPr wrap="square" lIns="0" tIns="0" rIns="0" bIns="0" rtlCol="0" anchor="ctr"/>
+          <a:lstStyle/>
+          <a:p>
+            <a:pPr indent="0" marL="0">
+              <a:buNone/>
+            </a:pPr>
+            <a:r>
+              <a:rPr lang="en-US" sz="1150" b="1" spc="100" kern="0" dirty="0">
+                <a:solidFill>
+                  <a:srgbClr val="BC0031"/>
+                </a:solidFill>
+                <a:latin typeface="Times New Roman" pitchFamily="34" charset="0"/>
+                <a:ea typeface="Times New Roman" pitchFamily="34" charset="-122"/>
+                <a:cs typeface="Times New Roman" pitchFamily="34" charset="-120"/>
+              </a:rPr>
+              <a:t>VALIDATION</a:t>
+            </a:r>
+            <a:endParaRPr lang="en-US" sz="1150" dirty="0"/>
+          </a:p>
+        </p:txBody>
+      </p:sp>
+      <p:sp>
+        <p:nvSpPr>
+          <p:cNvPr id="10" name="Text 7"/>
+          <p:cNvSpPr txBox="1"/>
+          <p:nvPr/>
+        </p:nvSpPr>
+        <p:spPr>
+          <a:xfrm>
+            <a:off x="640080" y="3212973"/>
+            <a:ext cx="3108960" cy="1729359"/>
+          </a:xfrm>
+          <a:prstGeom prst="rect">
+            <a:avLst/>
+          </a:prstGeom>
+          <a:noFill/>
+          <a:ln/>
+        </p:spPr>
+        <p:txBody>
+          <a:bodyPr wrap="square" lIns="0" tIns="0" rIns="0" bIns="0" rtlCol="0" anchor="t"/>
+          <a:lstStyle/>
+          <a:p>
+            <a:pPr marL="177800" indent="-177800">
+              <a:lnSpc>
+                <a:spcPct val="115000"/>
+              </a:lnSpc>
+              <a:spcAft>
+                <a:spcPts val="500"/>
+              </a:spcAft>
+              <a:buSzPct val="100000"/>
+              <a:buChar char="▪"/>
+            </a:pPr>
+            <a:r>
+              <a:rPr lang="en-US" sz="1250" dirty="0">
+                <a:solidFill>
+                  <a:srgbClr val="1F1D21"/>
+                </a:solidFill>
+                <a:latin typeface="Times New Roman" pitchFamily="34" charset="0"/>
+                <a:ea typeface="Times New Roman" pitchFamily="34" charset="-122"/>
+                <a:cs typeface="Times New Roman" pitchFamily="34" charset="-120"/>
+              </a:rPr>
+              <a:t>[TODO] how the mislabeling was found and fixed</a:t>
+            </a:r>
+            <a:endParaRPr lang="en-US" sz="1250" dirty="0"/>
+          </a:p>
+          <a:p>
+            <a:pPr marL="177800" indent="-177800">
+              <a:lnSpc>
+                <a:spcPct val="115000"/>
+              </a:lnSpc>
+              <a:spcAft>
+                <a:spcPts val="500"/>
+              </a:spcAft>
+              <a:buSzPct val="100000"/>
+              <a:buChar char="▪"/>
+            </a:pPr>
+            <a:r>
+              <a:rPr lang="en-US" sz="1250" dirty="0">
+                <a:solidFill>
+                  <a:srgbClr val="1F1D21"/>
+                </a:solidFill>
+                <a:latin typeface="Times New Roman" pitchFamily="34" charset="0"/>
+                <a:ea typeface="Times New Roman" pitchFamily="34" charset="-122"/>
+                <a:cs typeface="Times New Roman" pitchFamily="34" charset="-120"/>
+              </a:rPr>
+              <a:t>[TODO] real per-class voxel share, now corrected — as numbers, not a bar chart</a:t>
+            </a:r>
+            <a:endParaRPr lang="en-US" sz="1250" dirty="0"/>
+          </a:p>
+          <a:p>
+            <a:pPr marL="177800" indent="-177800">
+              <a:lnSpc>
+                <a:spcPct val="115000"/>
+              </a:lnSpc>
+              <a:spcAft>
+                <a:spcPts val="500"/>
+              </a:spcAft>
+              <a:buSzPct val="100000"/>
+              <a:buChar char="▪"/>
+            </a:pPr>
+            <a:r>
+              <a:rPr lang="en-US" sz="1250" dirty="0">
+                <a:solidFill>
+                  <a:srgbClr val="1F1D21"/>
+                </a:solidFill>
+                <a:latin typeface="Times New Roman" pitchFamily="34" charset="0"/>
+                <a:ea typeface="Times New Roman" pitchFamily="34" charset="-122"/>
+                <a:cs typeface="Times New Roman" pitchFamily="34" charset="-120"/>
+              </a:rPr>
+              <a:t>[TODO] any other integrity checks run (e.g. alignment)</a:t>
+            </a:r>
+            <a:endParaRPr lang="en-US" sz="1250" dirty="0"/>
+          </a:p>
+          <a:p>
+            <a:pPr marL="177800" indent="-177800">
+              <a:lnSpc>
+                <a:spcPct val="115000"/>
+              </a:lnSpc>
+              <a:spcAft>
+                <a:spcPts val="500"/>
+              </a:spcAft>
+              <a:buSzPct val="100000"/>
+              <a:buChar char="▪"/>
+            </a:pPr>
+            <a:r>
+              <a:rPr lang="en-US" sz="1250" dirty="0">
+                <a:solidFill>
+                  <a:srgbClr val="1F1D21"/>
+                </a:solidFill>
+                <a:latin typeface="Times New Roman" pitchFamily="34" charset="0"/>
+                <a:ea typeface="Times New Roman" pitchFamily="34" charset="-122"/>
+                <a:cs typeface="Times New Roman" pitchFamily="34" charset="-120"/>
+              </a:rPr>
+              <a:t>[TODO] fragmentation risk, if any</a:t>
+            </a:r>
+            <a:endParaRPr lang="en-US" sz="1250" dirty="0"/>
+          </a:p>
+        </p:txBody>
+      </p:sp>
+      <p:sp>
+        <p:nvSpPr>
+          <p:cNvPr id="11" name="Shape 8"/>
           <p:cNvSpPr/>
           <p:nvPr/>
         </p:nvSpPr>
         <p:spPr>
           <a:xfrm>
-            <a:off x="658368" y="1463040"/>
-            <a:ext cx="1005840" cy="32004"/>
+            <a:off x="4114800" y="4891263"/>
+            <a:ext cx="7434072" cy="1143000"/>
+          </a:xfrm>
+          <a:prstGeom prst="rect">
+            <a:avLst/>
+          </a:prstGeom>
+          <a:solidFill>
+            <a:srgbClr val="F7E8EC"/>
+          </a:solidFill>
+          <a:ln/>
+        </p:spPr>
+      </p:sp>
+      <p:sp>
+        <p:nvSpPr>
+          <p:cNvPr id="12" name="Shape 9"/>
+          <p:cNvSpPr/>
+          <p:nvPr/>
+        </p:nvSpPr>
+        <p:spPr>
+          <a:xfrm>
+            <a:off x="4114800" y="4891263"/>
+            <a:ext cx="54864" cy="1143000"/>
           </a:xfrm>
           <a:prstGeom prst="rect">
             <a:avLst/>
@@ -4075,148 +3423,14 @@
       </p:sp>
       <p:sp>
         <p:nvSpPr>
-          <p:cNvPr id="7" name="Text 5"/>
-          <p:cNvSpPr txBox="1"/>
-          <p:nvPr/>
-        </p:nvSpPr>
-        <p:spPr>
-          <a:xfrm>
-            <a:off x="640080" y="1783080"/>
-            <a:ext cx="6309360" cy="4206240"/>
-          </a:xfrm>
-          <a:prstGeom prst="rect">
-            <a:avLst/>
-          </a:prstGeom>
-          <a:noFill/>
-          <a:ln/>
-        </p:spPr>
-        <p:txBody>
-          <a:bodyPr wrap="square" lIns="0" tIns="0" rIns="0" bIns="0" rtlCol="0" anchor="t"/>
-          <a:lstStyle/>
-          <a:p>
-            <a:pPr marL="228600" indent="-228600">
-              <a:lnSpc>
-                <a:spcPct val="118000"/>
-              </a:lnSpc>
-              <a:spcAft>
-                <a:spcPts val="1400"/>
-              </a:spcAft>
-              <a:buSzPct val="100000"/>
-              <a:buChar char="▪"/>
-            </a:pPr>
-            <a:r>
-              <a:rPr lang="en-US" sz="1600" dirty="0">
-                <a:solidFill>
-                  <a:srgbClr val="1F1D21"/>
-                </a:solidFill>
-                <a:latin typeface="Times New Roman" pitchFamily="34" charset="0"/>
-                <a:ea typeface="Times New Roman" pitchFamily="34" charset="-122"/>
-                <a:cs typeface="Times New Roman" pitchFamily="34" charset="-120"/>
-              </a:rPr>
-              <a:t>[TODO] how the mislabeling was found and fixed</a:t>
-            </a:r>
-            <a:endParaRPr lang="en-US" sz="1600" dirty="0"/>
-          </a:p>
-          <a:p>
-            <a:pPr marL="228600" indent="-228600">
-              <a:lnSpc>
-                <a:spcPct val="118000"/>
-              </a:lnSpc>
-              <a:spcAft>
-                <a:spcPts val="1400"/>
-              </a:spcAft>
-              <a:buSzPct val="100000"/>
-              <a:buChar char="▪"/>
-            </a:pPr>
-            <a:r>
-              <a:rPr lang="en-US" sz="1600" dirty="0">
-                <a:solidFill>
-                  <a:srgbClr val="1F1D21"/>
-                </a:solidFill>
-                <a:latin typeface="Times New Roman" pitchFamily="34" charset="0"/>
-                <a:ea typeface="Times New Roman" pitchFamily="34" charset="-122"/>
-                <a:cs typeface="Times New Roman" pitchFamily="34" charset="-120"/>
-              </a:rPr>
-              <a:t>[TODO] real per-class voxel share, now corrected — as numbers, not a bar chart</a:t>
-            </a:r>
-            <a:endParaRPr lang="en-US" sz="1600" dirty="0"/>
-          </a:p>
-          <a:p>
-            <a:pPr marL="228600" indent="-228600">
-              <a:lnSpc>
-                <a:spcPct val="118000"/>
-              </a:lnSpc>
-              <a:spcAft>
-                <a:spcPts val="1400"/>
-              </a:spcAft>
-              <a:buSzPct val="100000"/>
-              <a:buChar char="▪"/>
-            </a:pPr>
-            <a:r>
-              <a:rPr lang="en-US" sz="1600" dirty="0">
-                <a:solidFill>
-                  <a:srgbClr val="1F1D21"/>
-                </a:solidFill>
-                <a:latin typeface="Times New Roman" pitchFamily="34" charset="0"/>
-                <a:ea typeface="Times New Roman" pitchFamily="34" charset="-122"/>
-                <a:cs typeface="Times New Roman" pitchFamily="34" charset="-120"/>
-              </a:rPr>
-              <a:t>[TODO] any other integrity checks run (e.g. alignment)</a:t>
-            </a:r>
-            <a:endParaRPr lang="en-US" sz="1600" dirty="0"/>
-          </a:p>
-        </p:txBody>
-      </p:sp>
-      <p:sp>
-        <p:nvSpPr>
-          <p:cNvPr id="8" name="Shape 6"/>
-          <p:cNvSpPr/>
-          <p:nvPr/>
-        </p:nvSpPr>
-        <p:spPr>
-          <a:xfrm>
-            <a:off x="7360920" y="1783080"/>
-            <a:ext cx="4160520" cy="3931920"/>
-          </a:xfrm>
-          <a:prstGeom prst="rect">
-            <a:avLst/>
-          </a:prstGeom>
-          <a:solidFill>
-            <a:srgbClr val="F7E8EC"/>
-          </a:solidFill>
-          <a:ln/>
-        </p:spPr>
-      </p:sp>
-      <p:sp>
-        <p:nvSpPr>
-          <p:cNvPr id="9" name="Shape 7"/>
-          <p:cNvSpPr/>
-          <p:nvPr/>
-        </p:nvSpPr>
-        <p:spPr>
-          <a:xfrm>
-            <a:off x="7360920" y="1783080"/>
-            <a:ext cx="54864" cy="3931920"/>
-          </a:xfrm>
-          <a:prstGeom prst="rect">
-            <a:avLst/>
-          </a:prstGeom>
-          <a:solidFill>
-            <a:srgbClr val="BC0031"/>
-          </a:solidFill>
-          <a:ln/>
-        </p:spPr>
-      </p:sp>
-      <p:sp>
-        <p:nvSpPr>
-          <p:cNvPr id="10" name="Text 8"/>
-          <p:cNvSpPr txBox="1"/>
-          <p:nvPr/>
-        </p:nvSpPr>
-        <p:spPr>
-          <a:xfrm>
-            <a:off x="7635240" y="1965960"/>
-            <a:ext cx="3611880" cy="274320"/>
+          <p:cNvPr id="13" name="Text 10"/>
+          <p:cNvSpPr txBox="1"/>
+          <p:nvPr/>
+        </p:nvSpPr>
+        <p:spPr>
+          <a:xfrm>
+            <a:off x="4389120" y="5074143"/>
+            <a:ext cx="6885432" cy="274320"/>
           </a:xfrm>
           <a:prstGeom prst="rect">
             <a:avLst/>
@@ -4248,14 +3462,14 @@
       </p:sp>
       <p:sp>
         <p:nvSpPr>
-          <p:cNvPr id="11" name="Text 9"/>
-          <p:cNvSpPr txBox="1"/>
-          <p:nvPr/>
-        </p:nvSpPr>
-        <p:spPr>
-          <a:xfrm>
-            <a:off x="7635240" y="2286000"/>
-            <a:ext cx="3611880" cy="3246120"/>
+          <p:cNvPr id="14" name="Text 11"/>
+          <p:cNvSpPr txBox="1"/>
+          <p:nvPr/>
+        </p:nvSpPr>
+        <p:spPr>
+          <a:xfrm>
+            <a:off x="4389120" y="5394183"/>
+            <a:ext cx="6885432" cy="457200"/>
           </a:xfrm>
           <a:prstGeom prst="rect">
             <a:avLst/>
@@ -4290,14 +3504,14 @@
       </p:sp>
       <p:pic>
         <p:nvPicPr>
-          <p:cNvPr id="12" name="Image 0" descr="/Users/bellavg/ProjectsMSc/ai4mi_project/deck/assets/uva_logo.png">    </p:cNvPr>
+          <p:cNvPr id="15" name="Image 1" descr="/Users/bellavg/ProjectsMSc/ai4mi_project/.claude/worktrees/segthor-presentation-midpoint-825c66/deck/assets/uva_logo.png">    </p:cNvPr>
           <p:cNvPicPr>
             <a:picLocks noChangeAspect="1"/>
           </p:cNvPicPr>
           <p:nvPr/>
         </p:nvPicPr>
         <p:blipFill>
-          <a:blip r:embed="rId1"/>
+          <a:blip r:embed="rId2"/>
           <a:stretch>
             <a:fillRect/>
           </a:stretch>
@@ -4314,7 +3528,7 @@
       </p:pic>
       <p:sp>
         <p:nvSpPr>
-          <p:cNvPr id="13" name="Text 10"/>
+          <p:cNvPr id="16" name="Text 12"/>
           <p:cNvSpPr txBox="1"/>
           <p:nvPr/>
         </p:nvSpPr>
@@ -4522,7 +3736,7 @@
       </p:sp>
       <p:pic>
         <p:nvPicPr>
-          <p:cNvPr id="6" name="Image 0" descr="/Users/bellavg/ProjectsMSc/ai4mi_project/figures/profile/scan_geometry/field_of_view.png">    </p:cNvPr>
+          <p:cNvPr id="6" name="Image 0" descr="/Users/bellavg/ProjectsMSc/ai4mi_project/.claude/worktrees/segthor-presentation-midpoint-825c66/figures/profile/scan_geometry/field_of_view.png">    </p:cNvPr>
           <p:cNvPicPr>
             <a:picLocks noChangeAspect="1"/>
           </p:cNvPicPr>
@@ -4536,7 +3750,7 @@
         <p:spPr>
           <a:xfrm>
             <a:off x="640080" y="1234440"/>
-            <a:ext cx="7134860" cy="4846320"/>
+            <a:ext cx="7251192" cy="4925338"/>
           </a:xfrm>
           <a:prstGeom prst="rect">
             <a:avLst/>
@@ -4551,8 +3765,8 @@
         </p:nvSpPr>
         <p:spPr>
           <a:xfrm>
-            <a:off x="8140700" y="1234440"/>
-            <a:ext cx="3609340" cy="256032"/>
+            <a:off x="8257032" y="1234440"/>
+            <a:ext cx="3291840" cy="256032"/>
           </a:xfrm>
           <a:prstGeom prst="rect">
             <a:avLst/>
@@ -4590,8 +3804,8 @@
         </p:nvSpPr>
         <p:spPr>
           <a:xfrm>
-            <a:off x="8140700" y="1527048"/>
-            <a:ext cx="3609340" cy="960120"/>
+            <a:off x="8257032" y="1527048"/>
+            <a:ext cx="3291840" cy="1046988"/>
           </a:xfrm>
           <a:prstGeom prst="rect">
             <a:avLst/>
@@ -4603,11 +3817,15 @@
           <a:bodyPr wrap="square" lIns="0" tIns="0" rIns="0" bIns="0" rtlCol="0" anchor="t"/>
           <a:lstStyle/>
           <a:p>
-            <a:pPr indent="0" marL="0">
+            <a:pPr marL="177800" indent="-177800">
               <a:lnSpc>
                 <a:spcPct val="115000"/>
               </a:lnSpc>
-              <a:buNone/>
+              <a:spcAft>
+                <a:spcPts val="500"/>
+              </a:spcAft>
+              <a:buSzPct val="100000"/>
+              <a:buChar char="▪"/>
             </a:pPr>
             <a:r>
               <a:rPr lang="en-US" sz="1250" dirty="0">
@@ -4622,73 +3840,16 @@
             </a:r>
             <a:endParaRPr lang="en-US" sz="1250" dirty="0"/>
           </a:p>
-        </p:txBody>
-      </p:sp>
-      <p:sp>
-        <p:nvSpPr>
-          <p:cNvPr id="9" name="Text 6"/>
-          <p:cNvSpPr txBox="1"/>
-          <p:nvPr/>
-        </p:nvSpPr>
-        <p:spPr>
-          <a:xfrm>
-            <a:off x="8140700" y="2651760"/>
-            <a:ext cx="3609340" cy="256032"/>
-          </a:xfrm>
-          <a:prstGeom prst="rect">
-            <a:avLst/>
-          </a:prstGeom>
-          <a:noFill/>
-          <a:ln/>
-        </p:spPr>
-        <p:txBody>
-          <a:bodyPr wrap="square" lIns="0" tIns="0" rIns="0" bIns="0" rtlCol="0" anchor="ctr"/>
-          <a:lstStyle/>
-          <a:p>
-            <a:pPr indent="0" marL="0">
-              <a:buNone/>
-            </a:pPr>
-            <a:r>
-              <a:rPr lang="en-US" sz="1150" b="1" spc="100" kern="0" dirty="0">
-                <a:solidFill>
-                  <a:srgbClr val="BC0031"/>
-                </a:solidFill>
-                <a:latin typeface="Times New Roman" pitchFamily="34" charset="0"/>
-                <a:ea typeface="Times New Roman" pitchFamily="34" charset="-122"/>
-                <a:cs typeface="Times New Roman" pitchFamily="34" charset="-120"/>
-              </a:rPr>
-              <a:t>HOW IT WAS MADE</a:t>
-            </a:r>
-            <a:endParaRPr lang="en-US" sz="1150" dirty="0"/>
-          </a:p>
-        </p:txBody>
-      </p:sp>
-      <p:sp>
-        <p:nvSpPr>
-          <p:cNvPr id="10" name="Text 7"/>
-          <p:cNvSpPr txBox="1"/>
-          <p:nvPr/>
-        </p:nvSpPr>
-        <p:spPr>
-          <a:xfrm>
-            <a:off x="8140700" y="2944368"/>
-            <a:ext cx="3609340" cy="960120"/>
-          </a:xfrm>
-          <a:prstGeom prst="rect">
-            <a:avLst/>
-          </a:prstGeom>
-          <a:noFill/>
-          <a:ln/>
-        </p:spPr>
-        <p:txBody>
-          <a:bodyPr wrap="square" lIns="0" tIns="0" rIns="0" bIns="0" rtlCol="0" anchor="t"/>
-          <a:lstStyle/>
-          <a:p>
-            <a:pPr indent="0" marL="0">
+          <a:p>
+            <a:pPr marL="177800" indent="-177800">
               <a:lnSpc>
                 <a:spcPct val="115000"/>
               </a:lnSpc>
-              <a:buNone/>
+              <a:spcAft>
+                <a:spcPts val="500"/>
+              </a:spcAft>
+              <a:buSzPct val="100000"/>
+              <a:buChar char="▪"/>
             </a:pPr>
             <a:r>
               <a:rPr lang="en-US" sz="1250" dirty="0">
@@ -4699,7 +3860,164 @@
                 <a:ea typeface="Times New Roman" pitchFamily="34" charset="-122"/>
                 <a:cs typeface="Times New Roman" pitchFamily="34" charset="-120"/>
               </a:rPr>
+              <a:t>[TODO]</a:t>
+            </a:r>
+            <a:endParaRPr lang="en-US" sz="1250" dirty="0"/>
+          </a:p>
+          <a:p>
+            <a:pPr marL="177800" indent="-177800">
+              <a:lnSpc>
+                <a:spcPct val="115000"/>
+              </a:lnSpc>
+              <a:spcAft>
+                <a:spcPts val="500"/>
+              </a:spcAft>
+              <a:buSzPct val="100000"/>
+              <a:buChar char="▪"/>
+            </a:pPr>
+            <a:r>
+              <a:rPr lang="en-US" sz="1250" dirty="0">
+                <a:solidFill>
+                  <a:srgbClr val="1F1D21"/>
+                </a:solidFill>
+                <a:latin typeface="Times New Roman" pitchFamily="34" charset="0"/>
+                <a:ea typeface="Times New Roman" pitchFamily="34" charset="-122"/>
+                <a:cs typeface="Times New Roman" pitchFamily="34" charset="-120"/>
+              </a:rPr>
+              <a:t>[TODO]</a:t>
+            </a:r>
+            <a:endParaRPr lang="en-US" sz="1250" dirty="0"/>
+          </a:p>
+        </p:txBody>
+      </p:sp>
+      <p:sp>
+        <p:nvSpPr>
+          <p:cNvPr id="9" name="Text 6"/>
+          <p:cNvSpPr txBox="1"/>
+          <p:nvPr/>
+        </p:nvSpPr>
+        <p:spPr>
+          <a:xfrm>
+            <a:off x="8257032" y="2802636"/>
+            <a:ext cx="3291840" cy="256032"/>
+          </a:xfrm>
+          <a:prstGeom prst="rect">
+            <a:avLst/>
+          </a:prstGeom>
+          <a:noFill/>
+          <a:ln/>
+        </p:spPr>
+        <p:txBody>
+          <a:bodyPr wrap="square" lIns="0" tIns="0" rIns="0" bIns="0" rtlCol="0" anchor="ctr"/>
+          <a:lstStyle/>
+          <a:p>
+            <a:pPr indent="0" marL="0">
+              <a:buNone/>
+            </a:pPr>
+            <a:r>
+              <a:rPr lang="en-US" sz="1150" b="1" spc="100" kern="0" dirty="0">
+                <a:solidFill>
+                  <a:srgbClr val="BC0031"/>
+                </a:solidFill>
+                <a:latin typeface="Times New Roman" pitchFamily="34" charset="0"/>
+                <a:ea typeface="Times New Roman" pitchFamily="34" charset="-122"/>
+                <a:cs typeface="Times New Roman" pitchFamily="34" charset="-120"/>
+              </a:rPr>
+              <a:t>HOW IT WAS MADE</a:t>
+            </a:r>
+            <a:endParaRPr lang="en-US" sz="1150" dirty="0"/>
+          </a:p>
+        </p:txBody>
+      </p:sp>
+      <p:sp>
+        <p:nvSpPr>
+          <p:cNvPr id="10" name="Text 7"/>
+          <p:cNvSpPr txBox="1"/>
+          <p:nvPr/>
+        </p:nvSpPr>
+        <p:spPr>
+          <a:xfrm>
+            <a:off x="8257032" y="3095244"/>
+            <a:ext cx="3291840" cy="846963"/>
+          </a:xfrm>
+          <a:prstGeom prst="rect">
+            <a:avLst/>
+          </a:prstGeom>
+          <a:noFill/>
+          <a:ln/>
+        </p:spPr>
+        <p:txBody>
+          <a:bodyPr wrap="square" lIns="0" tIns="0" rIns="0" bIns="0" rtlCol="0" anchor="t"/>
+          <a:lstStyle/>
+          <a:p>
+            <a:pPr marL="177800" indent="-177800">
+              <a:lnSpc>
+                <a:spcPct val="115000"/>
+              </a:lnSpc>
+              <a:spcAft>
+                <a:spcPts val="500"/>
+              </a:spcAft>
+              <a:buSzPct val="100000"/>
+              <a:buChar char="▪"/>
+            </a:pPr>
+            <a:r>
+              <a:rPr lang="en-US" sz="1250" dirty="0">
+                <a:solidFill>
+                  <a:srgbClr val="1F1D21"/>
+                </a:solidFill>
+                <a:latin typeface="Times New Roman" pitchFamily="34" charset="0"/>
+                <a:ea typeface="Times New Roman" pitchFamily="34" charset="-122"/>
+                <a:cs typeface="Times New Roman" pitchFamily="34" charset="-120"/>
+              </a:rPr>
               <a:t>[TODO] how it was measured</a:t>
+            </a:r>
+            <a:endParaRPr lang="en-US" sz="1250" dirty="0"/>
+          </a:p>
+          <a:p>
+            <a:pPr marL="177800" indent="-177800">
+              <a:lnSpc>
+                <a:spcPct val="115000"/>
+              </a:lnSpc>
+              <a:spcAft>
+                <a:spcPts val="500"/>
+              </a:spcAft>
+              <a:buSzPct val="100000"/>
+              <a:buChar char="▪"/>
+            </a:pPr>
+            <a:r>
+              <a:rPr lang="en-US" sz="1250" dirty="0">
+                <a:solidFill>
+                  <a:srgbClr val="1F1D21"/>
+                </a:solidFill>
+                <a:latin typeface="Times New Roman" pitchFamily="34" charset="0"/>
+                <a:ea typeface="Times New Roman" pitchFamily="34" charset="-122"/>
+                <a:cs typeface="Times New Roman" pitchFamily="34" charset="-120"/>
+              </a:rPr>
+              <a:t>[TODO]</a:t>
+            </a:r>
+            <a:endParaRPr lang="en-US" sz="1250" dirty="0"/>
+          </a:p>
+          <a:p>
+            <a:pPr marL="177800" indent="-177800">
+              <a:lnSpc>
+                <a:spcPct val="115000"/>
+              </a:lnSpc>
+              <a:spcAft>
+                <a:spcPts val="500"/>
+              </a:spcAft>
+              <a:buSzPct val="100000"/>
+              <a:buChar char="▪"/>
+            </a:pPr>
+            <a:r>
+              <a:rPr lang="en-US" sz="1250" dirty="0">
+                <a:solidFill>
+                  <a:srgbClr val="1F1D21"/>
+                </a:solidFill>
+                <a:latin typeface="Times New Roman" pitchFamily="34" charset="0"/>
+                <a:ea typeface="Times New Roman" pitchFamily="34" charset="-122"/>
+                <a:cs typeface="Times New Roman" pitchFamily="34" charset="-120"/>
+              </a:rPr>
+              <a:t>[TODO]</a:t>
             </a:r>
             <a:endParaRPr lang="en-US" sz="1250" dirty="0"/>
           </a:p>
@@ -4713,8 +4031,8 @@
         </p:nvSpPr>
         <p:spPr>
           <a:xfrm>
-            <a:off x="8140700" y="4526280"/>
-            <a:ext cx="3609340" cy="1554480"/>
+            <a:off x="8257032" y="4170807"/>
+            <a:ext cx="3291840" cy="1051560"/>
           </a:xfrm>
           <a:prstGeom prst="rect">
             <a:avLst/>
@@ -4733,8 +4051,8 @@
         </p:nvSpPr>
         <p:spPr>
           <a:xfrm>
-            <a:off x="8140700" y="4526280"/>
-            <a:ext cx="54864" cy="1554480"/>
+            <a:off x="8257032" y="4170807"/>
+            <a:ext cx="54864" cy="1051560"/>
           </a:xfrm>
           <a:prstGeom prst="rect">
             <a:avLst/>
@@ -4753,8 +4071,8 @@
         </p:nvSpPr>
         <p:spPr>
           <a:xfrm>
-            <a:off x="8415020" y="4709160"/>
-            <a:ext cx="3060700" cy="274320"/>
+            <a:off x="8531352" y="4353687"/>
+            <a:ext cx="2743200" cy="274320"/>
           </a:xfrm>
           <a:prstGeom prst="rect">
             <a:avLst/>
@@ -4792,8 +4110,8 @@
         </p:nvSpPr>
         <p:spPr>
           <a:xfrm>
-            <a:off x="8415020" y="5029200"/>
-            <a:ext cx="3060700" cy="868680"/>
+            <a:off x="8531352" y="4673727"/>
+            <a:ext cx="2743200" cy="365760"/>
           </a:xfrm>
           <a:prstGeom prst="rect">
             <a:avLst/>
@@ -4828,7 +4146,7 @@
       </p:sp>
       <p:pic>
         <p:nvPicPr>
-          <p:cNvPr id="15" name="Image 1" descr="/Users/bellavg/ProjectsMSc/ai4mi_project/deck/assets/uva_logo.png">    </p:cNvPr>
+          <p:cNvPr id="15" name="Image 1" descr="/Users/bellavg/ProjectsMSc/ai4mi_project/.claude/worktrees/segthor-presentation-midpoint-825c66/deck/assets/uva_logo.png">    </p:cNvPr>
           <p:cNvPicPr>
             <a:picLocks noChangeAspect="1"/>
           </p:cNvPicPr>
@@ -5028,7 +4346,7 @@
         <p:spPr>
           <a:xfrm>
             <a:off x="640080" y="658368"/>
-            <a:ext cx="10881360" cy="822960"/>
+            <a:ext cx="10881360" cy="502920"/>
           </a:xfrm>
           <a:prstGeom prst="rect">
             <a:avLst/>
@@ -5052,22 +4370,331 @@
                 <a:ea typeface="Times New Roman" pitchFamily="34" charset="-122"/>
                 <a:cs typeface="Times New Roman" pitchFamily="34" charset="-120"/>
               </a:rPr>
-              <a:t>Exploratory Analysis II: Whole-Scan &amp; Per-Organ Intensity</a:t>
+              <a:t>Exploratory Analysis II: Organ HU Intensity, All Patients</a:t>
             </a:r>
             <a:endParaRPr lang="en-US" sz="2600" dirty="0"/>
           </a:p>
         </p:txBody>
       </p:sp>
-      <p:sp>
-        <p:nvSpPr>
-          <p:cNvPr id="6" name="Shape 4"/>
+      <p:pic>
+        <p:nvPicPr>
+          <p:cNvPr id="6" name="Image 0" descr="/Users/bellavg/ProjectsMSc/ai4mi_project/.claude/worktrees/segthor-presentation-midpoint-825c66/figures/comparison/label_hu_distribution.png">    </p:cNvPr>
+          <p:cNvPicPr>
+            <a:picLocks noChangeAspect="1"/>
+          </p:cNvPicPr>
+          <p:nvPr/>
+        </p:nvPicPr>
+        <p:blipFill>
+          <a:blip r:embed="rId1"/>
+          <a:srcRect l="0" r="0" t="0" b="0"/>
+          <a:stretch/>
+        </p:blipFill>
+        <p:spPr>
+          <a:xfrm>
+            <a:off x="5209032" y="1234440"/>
+            <a:ext cx="6339840" cy="4937760"/>
+          </a:xfrm>
+          <a:prstGeom prst="rect">
+            <a:avLst/>
+          </a:prstGeom>
+        </p:spPr>
+      </p:pic>
+      <p:sp>
+        <p:nvSpPr>
+          <p:cNvPr id="7" name="Text 4"/>
+          <p:cNvSpPr txBox="1"/>
+          <p:nvPr/>
+        </p:nvSpPr>
+        <p:spPr>
+          <a:xfrm>
+            <a:off x="640080" y="1234440"/>
+            <a:ext cx="4114800" cy="256032"/>
+          </a:xfrm>
+          <a:prstGeom prst="rect">
+            <a:avLst/>
+          </a:prstGeom>
+          <a:noFill/>
+          <a:ln/>
+        </p:spPr>
+        <p:txBody>
+          <a:bodyPr wrap="square" lIns="0" tIns="0" rIns="0" bIns="0" rtlCol="0" anchor="ctr"/>
+          <a:lstStyle/>
+          <a:p>
+            <a:pPr indent="0" marL="0">
+              <a:buNone/>
+            </a:pPr>
+            <a:r>
+              <a:rPr lang="en-US" sz="1150" b="1" spc="100" kern="0" dirty="0">
+                <a:solidFill>
+                  <a:srgbClr val="E98300"/>
+                </a:solidFill>
+                <a:latin typeface="Times New Roman" pitchFamily="34" charset="0"/>
+                <a:ea typeface="Times New Roman" pitchFamily="34" charset="-122"/>
+                <a:cs typeface="Times New Roman" pitchFamily="34" charset="-120"/>
+              </a:rPr>
+              <a:t>WHAT IT SHOWS</a:t>
+            </a:r>
+            <a:endParaRPr lang="en-US" sz="1150" dirty="0"/>
+          </a:p>
+        </p:txBody>
+      </p:sp>
+      <p:sp>
+        <p:nvSpPr>
+          <p:cNvPr id="8" name="Text 5"/>
+          <p:cNvSpPr txBox="1"/>
+          <p:nvPr/>
+        </p:nvSpPr>
+        <p:spPr>
+          <a:xfrm>
+            <a:off x="640080" y="1527048"/>
+            <a:ext cx="4114800" cy="1046988"/>
+          </a:xfrm>
+          <a:prstGeom prst="rect">
+            <a:avLst/>
+          </a:prstGeom>
+          <a:noFill/>
+          <a:ln/>
+        </p:spPr>
+        <p:txBody>
+          <a:bodyPr wrap="square" lIns="0" tIns="0" rIns="0" bIns="0" rtlCol="0" anchor="t"/>
+          <a:lstStyle/>
+          <a:p>
+            <a:pPr marL="177800" indent="-177800">
+              <a:lnSpc>
+                <a:spcPct val="115000"/>
+              </a:lnSpc>
+              <a:spcAft>
+                <a:spcPts val="500"/>
+              </a:spcAft>
+              <a:buSzPct val="100000"/>
+              <a:buChar char="▪"/>
+            </a:pPr>
+            <a:r>
+              <a:rPr lang="en-US" sz="1250" dirty="0">
+                <a:solidFill>
+                  <a:srgbClr val="1F1D21"/>
+                </a:solidFill>
+                <a:latin typeface="Times New Roman" pitchFamily="34" charset="0"/>
+                <a:ea typeface="Times New Roman" pitchFamily="34" charset="-122"/>
+                <a:cs typeface="Times New Roman" pitchFamily="34" charset="-120"/>
+              </a:rPr>
+              <a:t>HU inside each annotated organ, for all patients</a:t>
+            </a:r>
+            <a:endParaRPr lang="en-US" sz="1250" dirty="0"/>
+          </a:p>
+          <a:p>
+            <a:pPr marL="177800" indent="-177800">
+              <a:lnSpc>
+                <a:spcPct val="115000"/>
+              </a:lnSpc>
+              <a:spcAft>
+                <a:spcPts val="500"/>
+              </a:spcAft>
+              <a:buSzPct val="100000"/>
+              <a:buChar char="▪"/>
+            </a:pPr>
+            <a:r>
+              <a:rPr lang="en-US" sz="1250" dirty="0">
+                <a:solidFill>
+                  <a:srgbClr val="1F1D21"/>
+                </a:solidFill>
+                <a:latin typeface="Times New Roman" pitchFamily="34" charset="0"/>
+                <a:ea typeface="Times New Roman" pitchFamily="34" charset="-122"/>
+                <a:cs typeface="Times New Roman" pitchFamily="34" charset="-120"/>
+              </a:rPr>
+              <a:t>Bars are labelled voxels per 10 HU bin</a:t>
+            </a:r>
+            <a:endParaRPr lang="en-US" sz="1250" dirty="0"/>
+          </a:p>
+          <a:p>
+            <a:pPr marL="177800" indent="-177800">
+              <a:lnSpc>
+                <a:spcPct val="115000"/>
+              </a:lnSpc>
+              <a:spcAft>
+                <a:spcPts val="500"/>
+              </a:spcAft>
+              <a:buSzPct val="100000"/>
+              <a:buChar char="▪"/>
+            </a:pPr>
+            <a:r>
+              <a:rPr lang="en-US" sz="1250" dirty="0">
+                <a:solidFill>
+                  <a:srgbClr val="1F1D21"/>
+                </a:solidFill>
+                <a:latin typeface="Times New Roman" pitchFamily="34" charset="0"/>
+                <a:ea typeface="Times New Roman" pitchFamily="34" charset="-122"/>
+                <a:cs typeface="Times New Roman" pitchFamily="34" charset="-120"/>
+              </a:rPr>
+              <a:t>Top: original labels (aorta merged). Bottom: corrected labels (aorta separate)</a:t>
+            </a:r>
+            <a:endParaRPr lang="en-US" sz="1250" dirty="0"/>
+          </a:p>
+        </p:txBody>
+      </p:sp>
+      <p:sp>
+        <p:nvSpPr>
+          <p:cNvPr id="9" name="Text 6"/>
+          <p:cNvSpPr txBox="1"/>
+          <p:nvPr/>
+        </p:nvSpPr>
+        <p:spPr>
+          <a:xfrm>
+            <a:off x="640080" y="2802636"/>
+            <a:ext cx="4114800" cy="256032"/>
+          </a:xfrm>
+          <a:prstGeom prst="rect">
+            <a:avLst/>
+          </a:prstGeom>
+          <a:noFill/>
+          <a:ln/>
+        </p:spPr>
+        <p:txBody>
+          <a:bodyPr wrap="square" lIns="0" tIns="0" rIns="0" bIns="0" rtlCol="0" anchor="ctr"/>
+          <a:lstStyle/>
+          <a:p>
+            <a:pPr indent="0" marL="0">
+              <a:buNone/>
+            </a:pPr>
+            <a:r>
+              <a:rPr lang="en-US" sz="1150" b="1" spc="100" kern="0" dirty="0">
+                <a:solidFill>
+                  <a:srgbClr val="BC0031"/>
+                </a:solidFill>
+                <a:latin typeface="Times New Roman" pitchFamily="34" charset="0"/>
+                <a:ea typeface="Times New Roman" pitchFamily="34" charset="-122"/>
+                <a:cs typeface="Times New Roman" pitchFamily="34" charset="-120"/>
+              </a:rPr>
+              <a:t>AORTA VS. HEART</a:t>
+            </a:r>
+            <a:endParaRPr lang="en-US" sz="1150" dirty="0"/>
+          </a:p>
+        </p:txBody>
+      </p:sp>
+      <p:sp>
+        <p:nvSpPr>
+          <p:cNvPr id="10" name="Text 7"/>
+          <p:cNvSpPr txBox="1"/>
+          <p:nvPr/>
+        </p:nvSpPr>
+        <p:spPr>
+          <a:xfrm>
+            <a:off x="640080" y="3095244"/>
+            <a:ext cx="4114800" cy="846963"/>
+          </a:xfrm>
+          <a:prstGeom prst="rect">
+            <a:avLst/>
+          </a:prstGeom>
+          <a:noFill/>
+          <a:ln/>
+        </p:spPr>
+        <p:txBody>
+          <a:bodyPr wrap="square" lIns="0" tIns="0" rIns="0" bIns="0" rtlCol="0" anchor="t"/>
+          <a:lstStyle/>
+          <a:p>
+            <a:pPr marL="177800" indent="-177800">
+              <a:lnSpc>
+                <a:spcPct val="115000"/>
+              </a:lnSpc>
+              <a:spcAft>
+                <a:spcPts val="500"/>
+              </a:spcAft>
+              <a:buSzPct val="100000"/>
+              <a:buChar char="▪"/>
+            </a:pPr>
+            <a:r>
+              <a:rPr lang="en-US" sz="1250" dirty="0">
+                <a:solidFill>
+                  <a:srgbClr val="1F1D21"/>
+                </a:solidFill>
+                <a:latin typeface="Times New Roman" pitchFamily="34" charset="0"/>
+                <a:ea typeface="Times New Roman" pitchFamily="34" charset="-122"/>
+                <a:cs typeface="Times New Roman" pitchFamily="34" charset="-120"/>
+              </a:rPr>
+              <a:t>[TODO] aorta vs. heart in HU</a:t>
+            </a:r>
+            <a:endParaRPr lang="en-US" sz="1250" dirty="0"/>
+          </a:p>
+          <a:p>
+            <a:pPr marL="177800" indent="-177800">
+              <a:lnSpc>
+                <a:spcPct val="115000"/>
+              </a:lnSpc>
+              <a:spcAft>
+                <a:spcPts val="500"/>
+              </a:spcAft>
+              <a:buSzPct val="100000"/>
+              <a:buChar char="▪"/>
+            </a:pPr>
+            <a:r>
+              <a:rPr lang="en-US" sz="1250" dirty="0">
+                <a:solidFill>
+                  <a:srgbClr val="1F1D21"/>
+                </a:solidFill>
+                <a:latin typeface="Times New Roman" pitchFamily="34" charset="0"/>
+                <a:ea typeface="Times New Roman" pitchFamily="34" charset="-122"/>
+                <a:cs typeface="Times New Roman" pitchFamily="34" charset="-120"/>
+              </a:rPr>
+              <a:t>[TODO]</a:t>
+            </a:r>
+            <a:endParaRPr lang="en-US" sz="1250" dirty="0"/>
+          </a:p>
+          <a:p>
+            <a:pPr marL="177800" indent="-177800">
+              <a:lnSpc>
+                <a:spcPct val="115000"/>
+              </a:lnSpc>
+              <a:spcAft>
+                <a:spcPts val="500"/>
+              </a:spcAft>
+              <a:buSzPct val="100000"/>
+              <a:buChar char="▪"/>
+            </a:pPr>
+            <a:r>
+              <a:rPr lang="en-US" sz="1250" dirty="0">
+                <a:solidFill>
+                  <a:srgbClr val="1F1D21"/>
+                </a:solidFill>
+                <a:latin typeface="Times New Roman" pitchFamily="34" charset="0"/>
+                <a:ea typeface="Times New Roman" pitchFamily="34" charset="-122"/>
+                <a:cs typeface="Times New Roman" pitchFamily="34" charset="-120"/>
+              </a:rPr>
+              <a:t>[TODO]</a:t>
+            </a:r>
+            <a:endParaRPr lang="en-US" sz="1250" dirty="0"/>
+          </a:p>
+        </p:txBody>
+      </p:sp>
+      <p:sp>
+        <p:nvSpPr>
+          <p:cNvPr id="11" name="Shape 8"/>
           <p:cNvSpPr/>
           <p:nvPr/>
         </p:nvSpPr>
         <p:spPr>
           <a:xfrm>
-            <a:off x="658368" y="1463040"/>
-            <a:ext cx="1005840" cy="32004"/>
+            <a:off x="640080" y="4170807"/>
+            <a:ext cx="4114800" cy="1051560"/>
+          </a:xfrm>
+          <a:prstGeom prst="rect">
+            <a:avLst/>
+          </a:prstGeom>
+          <a:solidFill>
+            <a:srgbClr val="FCEEDC"/>
+          </a:solidFill>
+          <a:ln/>
+        </p:spPr>
+      </p:sp>
+      <p:sp>
+        <p:nvSpPr>
+          <p:cNvPr id="12" name="Shape 9"/>
+          <p:cNvSpPr/>
+          <p:nvPr/>
+        </p:nvSpPr>
+        <p:spPr>
+          <a:xfrm>
+            <a:off x="640080" y="4170807"/>
+            <a:ext cx="54864" cy="1051560"/>
           </a:xfrm>
           <a:prstGeom prst="rect">
             <a:avLst/>
@@ -5080,14 +4707,53 @@
       </p:sp>
       <p:sp>
         <p:nvSpPr>
-          <p:cNvPr id="7" name="Text 5"/>
-          <p:cNvSpPr txBox="1"/>
-          <p:nvPr/>
-        </p:nvSpPr>
-        <p:spPr>
-          <a:xfrm>
-            <a:off x="640080" y="1783080"/>
-            <a:ext cx="10607040" cy="4206240"/>
+          <p:cNvPr id="13" name="Text 10"/>
+          <p:cNvSpPr txBox="1"/>
+          <p:nvPr/>
+        </p:nvSpPr>
+        <p:spPr>
+          <a:xfrm>
+            <a:off x="914400" y="4353687"/>
+            <a:ext cx="3566160" cy="274320"/>
+          </a:xfrm>
+          <a:prstGeom prst="rect">
+            <a:avLst/>
+          </a:prstGeom>
+          <a:noFill/>
+          <a:ln/>
+        </p:spPr>
+        <p:txBody>
+          <a:bodyPr wrap="square" lIns="0" tIns="0" rIns="0" bIns="0" rtlCol="0" anchor="ctr"/>
+          <a:lstStyle/>
+          <a:p>
+            <a:pPr indent="0" marL="0">
+              <a:buNone/>
+            </a:pPr>
+            <a:r>
+              <a:rPr lang="en-US" sz="1100" b="1" spc="100" kern="0" dirty="0">
+                <a:solidFill>
+                  <a:srgbClr val="1F1D21"/>
+                </a:solidFill>
+                <a:latin typeface="Times New Roman" pitchFamily="34" charset="0"/>
+                <a:ea typeface="Times New Roman" pitchFamily="34" charset="-122"/>
+                <a:cs typeface="Times New Roman" pitchFamily="34" charset="-120"/>
+              </a:rPr>
+              <a:t>WHAT WE LEARN</a:t>
+            </a:r>
+            <a:endParaRPr lang="en-US" sz="1100" dirty="0"/>
+          </a:p>
+        </p:txBody>
+      </p:sp>
+      <p:sp>
+        <p:nvSpPr>
+          <p:cNvPr id="14" name="Text 11"/>
+          <p:cNvSpPr txBox="1"/>
+          <p:nvPr/>
+        </p:nvSpPr>
+        <p:spPr>
+          <a:xfrm>
+            <a:off x="914400" y="4673727"/>
+            <a:ext cx="3566160" cy="365760"/>
           </a:xfrm>
           <a:prstGeom prst="rect">
             <a:avLst/>
@@ -5099,18 +4765,14 @@
           <a:bodyPr wrap="square" lIns="0" tIns="0" rIns="0" bIns="0" rtlCol="0" anchor="t"/>
           <a:lstStyle/>
           <a:p>
-            <a:pPr marL="228600" indent="-228600">
+            <a:pPr indent="0" marL="0">
               <a:lnSpc>
                 <a:spcPct val="118000"/>
               </a:lnSpc>
-              <a:spcAft>
-                <a:spcPts val="1400"/>
-              </a:spcAft>
-              <a:buSzPct val="100000"/>
-              <a:buChar char="▪"/>
-            </a:pPr>
-            <a:r>
-              <a:rPr lang="en-US" sz="1600" dirty="0">
+              <a:buNone/>
+            </a:pPr>
+            <a:r>
+              <a:rPr lang="en-US" sz="1350" dirty="0">
                 <a:solidFill>
                   <a:srgbClr val="1F1D21"/>
                 </a:solidFill>
@@ -5118,70 +4780,22 @@
                 <a:ea typeface="Times New Roman" pitchFamily="34" charset="-122"/>
                 <a:cs typeface="Times New Roman" pitchFamily="34" charset="-120"/>
               </a:rPr>
-              <a:t>[TODO] whole-scan HU distribution, with each organ's voxels coloured</a:t>
-            </a:r>
-            <a:endParaRPr lang="en-US" sz="1600" dirty="0"/>
-          </a:p>
-          <a:p>
-            <a:pPr marL="228600" indent="-228600">
-              <a:lnSpc>
-                <a:spcPct val="118000"/>
-              </a:lnSpc>
-              <a:spcAft>
-                <a:spcPts val="1400"/>
-              </a:spcAft>
-              <a:buSzPct val="100000"/>
-              <a:buChar char="▪"/>
-            </a:pPr>
-            <a:r>
-              <a:rPr lang="en-US" sz="1600" dirty="0">
-                <a:solidFill>
-                  <a:srgbClr val="1F1D21"/>
-                </a:solidFill>
-                <a:latin typeface="Times New Roman" pitchFamily="34" charset="0"/>
-                <a:ea typeface="Times New Roman" pitchFamily="34" charset="-122"/>
-                <a:cs typeface="Times New Roman" pitchFamily="34" charset="-120"/>
-              </a:rPr>
-              <a:t>[TODO] aorta vs. heart in HU</a:t>
-            </a:r>
-            <a:endParaRPr lang="en-US" sz="1600" dirty="0"/>
-          </a:p>
-          <a:p>
-            <a:pPr marL="228600" indent="-228600">
-              <a:lnSpc>
-                <a:spcPct val="118000"/>
-              </a:lnSpc>
-              <a:spcAft>
-                <a:spcPts val="1400"/>
-              </a:spcAft>
-              <a:buSzPct val="100000"/>
-              <a:buChar char="▪"/>
-            </a:pPr>
-            <a:r>
-              <a:rPr lang="en-US" sz="1600" dirty="0">
-                <a:solidFill>
-                  <a:srgbClr val="1F1D21"/>
-                </a:solidFill>
-                <a:latin typeface="Times New Roman" pitchFamily="34" charset="0"/>
-                <a:ea typeface="Times New Roman" pitchFamily="34" charset="-122"/>
-                <a:cs typeface="Times New Roman" pitchFamily="34" charset="-120"/>
-              </a:rPr>
               <a:t>[TODO] what this implies</a:t>
             </a:r>
-            <a:endParaRPr lang="en-US" sz="1600" dirty="0"/>
+            <a:endParaRPr lang="en-US" sz="1350" dirty="0"/>
           </a:p>
         </p:txBody>
       </p:sp>
       <p:pic>
         <p:nvPicPr>
-          <p:cNvPr id="8" name="Image 0" descr="/Users/bellavg/ProjectsMSc/ai4mi_project/deck/assets/uva_logo.png">    </p:cNvPr>
+          <p:cNvPr id="15" name="Image 1" descr="/Users/bellavg/ProjectsMSc/ai4mi_project/.claude/worktrees/segthor-presentation-midpoint-825c66/deck/assets/uva_logo.png">    </p:cNvPr>
           <p:cNvPicPr>
             <a:picLocks noChangeAspect="1"/>
           </p:cNvPicPr>
           <p:nvPr/>
         </p:nvPicPr>
         <p:blipFill>
-          <a:blip r:embed="rId1"/>
+          <a:blip r:embed="rId2"/>
           <a:stretch>
             <a:fillRect/>
           </a:stretch>
@@ -5198,7 +4812,7 @@
       </p:pic>
       <p:sp>
         <p:nvSpPr>
-          <p:cNvPr id="9" name="Text 6"/>
+          <p:cNvPr id="16" name="Text 12"/>
           <p:cNvSpPr txBox="1"/>
           <p:nvPr/>
         </p:nvSpPr>
@@ -5359,7 +4973,7 @@
                 <a:ea typeface="Times New Roman" pitchFamily="34" charset="-122"/>
                 <a:cs typeface="Times New Roman" pitchFamily="34" charset="-120"/>
               </a:rPr>
-              <a:t>0:35</a:t>
+              <a:t>0:50</a:t>
             </a:r>
             <a:endParaRPr lang="en-US" sz="1200" dirty="0"/>
           </a:p>
@@ -5398,7 +5012,7 @@
                 <a:ea typeface="Times New Roman" pitchFamily="34" charset="-122"/>
                 <a:cs typeface="Times New Roman" pitchFamily="34" charset="-120"/>
               </a:rPr>
-              <a:t>Exploratory Analysis III: Label Topology &amp; Adjacency</a:t>
+              <a:t>Exploratory Analysis III: Spatial Layout &amp; Label Adjacency</a:t>
             </a:r>
             <a:endParaRPr lang="en-US" sz="2600" dirty="0"/>
           </a:p>
@@ -5433,7 +5047,7 @@
         <p:spPr>
           <a:xfrm>
             <a:off x="640080" y="1783080"/>
-            <a:ext cx="5074920" cy="274320"/>
+            <a:ext cx="3322320" cy="274320"/>
           </a:xfrm>
           <a:prstGeom prst="rect">
             <a:avLst/>
@@ -5457,7 +5071,7 @@
                 <a:ea typeface="Times New Roman" pitchFamily="34" charset="-122"/>
                 <a:cs typeface="Times New Roman" pitchFamily="34" charset="-120"/>
               </a:rPr>
-              <a:t>TOPOLOGY</a:t>
+              <a:t>POSITION</a:t>
             </a:r>
             <a:endParaRPr lang="en-US" sz="1200" dirty="0"/>
           </a:p>
@@ -5472,7 +5086,7 @@
         <p:spPr>
           <a:xfrm>
             <a:off x="640080" y="2148840"/>
-            <a:ext cx="5074920" cy="3840480"/>
+            <a:ext cx="3322320" cy="1143000"/>
           </a:xfrm>
           <a:prstGeom prst="rect">
             <a:avLst/>
@@ -5484,12 +5098,12 @@
           <a:bodyPr wrap="square" lIns="0" tIns="0" rIns="0" bIns="0" rtlCol="0" anchor="t"/>
           <a:lstStyle/>
           <a:p>
-            <a:pPr marL="203200" indent="-203200">
+            <a:pPr marL="177800" indent="-177800">
               <a:lnSpc>
                 <a:spcPct val="115000"/>
               </a:lnSpc>
               <a:spcAft>
-                <a:spcPts val="900"/>
+                <a:spcPts val="500"/>
               </a:spcAft>
               <a:buSzPct val="100000"/>
               <a:buChar char="▪"/>
@@ -5503,17 +5117,17 @@
                 <a:ea typeface="Times New Roman" pitchFamily="34" charset="-122"/>
                 <a:cs typeface="Times New Roman" pitchFamily="34" charset="-120"/>
               </a:rPr>
-              <a:t>[TODO] connected components per label</a:t>
+              <a:t>[TODO] where each organ sits in 3D</a:t>
             </a:r>
             <a:endParaRPr lang="en-US" sz="1400" dirty="0"/>
           </a:p>
           <a:p>
-            <a:pPr marL="203200" indent="-203200">
+            <a:pPr marL="177800" indent="-177800">
               <a:lnSpc>
                 <a:spcPct val="115000"/>
               </a:lnSpc>
               <a:spcAft>
-                <a:spcPts val="900"/>
+                <a:spcPts val="500"/>
               </a:spcAft>
               <a:buSzPct val="100000"/>
               <a:buChar char="▪"/>
@@ -5527,78 +5141,17 @@
                 <a:ea typeface="Times New Roman" pitchFamily="34" charset="-122"/>
                 <a:cs typeface="Times New Roman" pitchFamily="34" charset="-120"/>
               </a:rPr>
-              <a:t>[TODO] fragmentation risk, if any</a:t>
+              <a:t>[TODO]</a:t>
             </a:r>
             <a:endParaRPr lang="en-US" sz="1400" dirty="0"/>
           </a:p>
-        </p:txBody>
-      </p:sp>
-      <p:sp>
-        <p:nvSpPr>
-          <p:cNvPr id="9" name="Text 7"/>
-          <p:cNvSpPr txBox="1"/>
-          <p:nvPr/>
-        </p:nvSpPr>
-        <p:spPr>
-          <a:xfrm>
-            <a:off x="6263640" y="1783080"/>
-            <a:ext cx="5257800" cy="274320"/>
-          </a:xfrm>
-          <a:prstGeom prst="rect">
-            <a:avLst/>
-          </a:prstGeom>
-          <a:noFill/>
-          <a:ln/>
-        </p:spPr>
-        <p:txBody>
-          <a:bodyPr wrap="square" lIns="0" tIns="0" rIns="0" bIns="0" rtlCol="0" anchor="ctr"/>
-          <a:lstStyle/>
-          <a:p>
-            <a:pPr indent="0" marL="0">
-              <a:buNone/>
-            </a:pPr>
-            <a:r>
-              <a:rPr lang="en-US" sz="1200" b="1" spc="100" kern="0" dirty="0">
-                <a:solidFill>
-                  <a:srgbClr val="E98300"/>
-                </a:solidFill>
-                <a:latin typeface="Times New Roman" pitchFamily="34" charset="0"/>
-                <a:ea typeface="Times New Roman" pitchFamily="34" charset="-122"/>
-                <a:cs typeface="Times New Roman" pitchFamily="34" charset="-120"/>
-              </a:rPr>
-              <a:t>ADJACENCY</a:t>
-            </a:r>
-            <a:endParaRPr lang="en-US" sz="1200" dirty="0"/>
-          </a:p>
-        </p:txBody>
-      </p:sp>
-      <p:sp>
-        <p:nvSpPr>
-          <p:cNvPr id="10" name="Text 8"/>
-          <p:cNvSpPr txBox="1"/>
-          <p:nvPr/>
-        </p:nvSpPr>
-        <p:spPr>
-          <a:xfrm>
-            <a:off x="6263640" y="2148840"/>
-            <a:ext cx="5257800" cy="3840480"/>
-          </a:xfrm>
-          <a:prstGeom prst="rect">
-            <a:avLst/>
-          </a:prstGeom>
-          <a:noFill/>
-          <a:ln/>
-        </p:spPr>
-        <p:txBody>
-          <a:bodyPr wrap="square" lIns="0" tIns="0" rIns="0" bIns="0" rtlCol="0" anchor="t"/>
-          <a:lstStyle/>
-          <a:p>
-            <a:pPr marL="203200" indent="-203200">
+          <a:p>
+            <a:pPr marL="177800" indent="-177800">
               <a:lnSpc>
                 <a:spcPct val="115000"/>
               </a:lnSpc>
               <a:spcAft>
-                <a:spcPts val="900"/>
+                <a:spcPts val="500"/>
               </a:spcAft>
               <a:buSzPct val="100000"/>
               <a:buChar char="▪"/>
@@ -5612,17 +5165,98 @@
                 <a:ea typeface="Times New Roman" pitchFamily="34" charset="-122"/>
                 <a:cs typeface="Times New Roman" pitchFamily="34" charset="-120"/>
               </a:rPr>
-              <a:t>[TODO] contact between label pairs</a:t>
+              <a:t>[TODO]</a:t>
             </a:r>
             <a:endParaRPr lang="en-US" sz="1400" dirty="0"/>
           </a:p>
-          <a:p>
-            <a:pPr marL="203200" indent="-203200">
+        </p:txBody>
+      </p:sp>
+      <p:sp>
+        <p:nvSpPr>
+          <p:cNvPr id="9" name="Shape 7"/>
+          <p:cNvSpPr/>
+          <p:nvPr/>
+        </p:nvSpPr>
+        <p:spPr>
+          <a:xfrm>
+            <a:off x="4191000" y="1783080"/>
+            <a:ext cx="13716" cy="1508760"/>
+          </a:xfrm>
+          <a:prstGeom prst="rect">
+            <a:avLst/>
+          </a:prstGeom>
+          <a:solidFill>
+            <a:srgbClr val="E3E3E3"/>
+          </a:solidFill>
+          <a:ln/>
+        </p:spPr>
+      </p:sp>
+      <p:sp>
+        <p:nvSpPr>
+          <p:cNvPr id="10" name="Text 8"/>
+          <p:cNvSpPr txBox="1"/>
+          <p:nvPr/>
+        </p:nvSpPr>
+        <p:spPr>
+          <a:xfrm>
+            <a:off x="4419600" y="1783080"/>
+            <a:ext cx="3322320" cy="274320"/>
+          </a:xfrm>
+          <a:prstGeom prst="rect">
+            <a:avLst/>
+          </a:prstGeom>
+          <a:noFill/>
+          <a:ln/>
+        </p:spPr>
+        <p:txBody>
+          <a:bodyPr wrap="square" lIns="0" tIns="0" rIns="0" bIns="0" rtlCol="0" anchor="ctr"/>
+          <a:lstStyle/>
+          <a:p>
+            <a:pPr indent="0" marL="0">
+              <a:buNone/>
+            </a:pPr>
+            <a:r>
+              <a:rPr lang="en-US" sz="1200" b="1" spc="100" kern="0" dirty="0">
+                <a:solidFill>
+                  <a:srgbClr val="E98300"/>
+                </a:solidFill>
+                <a:latin typeface="Times New Roman" pitchFamily="34" charset="0"/>
+                <a:ea typeface="Times New Roman" pitchFamily="34" charset="-122"/>
+                <a:cs typeface="Times New Roman" pitchFamily="34" charset="-120"/>
+              </a:rPr>
+              <a:t>EXTENT</a:t>
+            </a:r>
+            <a:endParaRPr lang="en-US" sz="1200" dirty="0"/>
+          </a:p>
+        </p:txBody>
+      </p:sp>
+      <p:sp>
+        <p:nvSpPr>
+          <p:cNvPr id="11" name="Text 9"/>
+          <p:cNvSpPr txBox="1"/>
+          <p:nvPr/>
+        </p:nvSpPr>
+        <p:spPr>
+          <a:xfrm>
+            <a:off x="4419600" y="2148840"/>
+            <a:ext cx="3322320" cy="1143000"/>
+          </a:xfrm>
+          <a:prstGeom prst="rect">
+            <a:avLst/>
+          </a:prstGeom>
+          <a:noFill/>
+          <a:ln/>
+        </p:spPr>
+        <p:txBody>
+          <a:bodyPr wrap="square" lIns="0" tIns="0" rIns="0" bIns="0" rtlCol="0" anchor="t"/>
+          <a:lstStyle/>
+          <a:p>
+            <a:pPr marL="177800" indent="-177800">
               <a:lnSpc>
                 <a:spcPct val="115000"/>
               </a:lnSpc>
               <a:spcAft>
-                <a:spcPts val="900"/>
+                <a:spcPts val="500"/>
               </a:spcAft>
               <a:buSzPct val="100000"/>
               <a:buChar char="▪"/>
@@ -5636,22 +5270,70 @@
                 <a:ea typeface="Times New Roman" pitchFamily="34" charset="-122"/>
                 <a:cs typeface="Times New Roman" pitchFamily="34" charset="-120"/>
               </a:rPr>
-              <a:t>[TODO] which pairs matter most, now that aorta is real</a:t>
+              <a:t>[TODO] coverage along the body axis</a:t>
             </a:r>
             <a:endParaRPr lang="en-US" sz="1400" dirty="0"/>
           </a:p>
-        </p:txBody>
-      </p:sp>
-      <p:sp>
-        <p:nvSpPr>
-          <p:cNvPr id="11" name="Shape 9"/>
+          <a:p>
+            <a:pPr marL="177800" indent="-177800">
+              <a:lnSpc>
+                <a:spcPct val="115000"/>
+              </a:lnSpc>
+              <a:spcAft>
+                <a:spcPts val="500"/>
+              </a:spcAft>
+              <a:buSzPct val="100000"/>
+              <a:buChar char="▪"/>
+            </a:pPr>
+            <a:r>
+              <a:rPr lang="en-US" sz="1400" dirty="0">
+                <a:solidFill>
+                  <a:srgbClr val="1F1D21"/>
+                </a:solidFill>
+                <a:latin typeface="Times New Roman" pitchFamily="34" charset="0"/>
+                <a:ea typeface="Times New Roman" pitchFamily="34" charset="-122"/>
+                <a:cs typeface="Times New Roman" pitchFamily="34" charset="-120"/>
+              </a:rPr>
+              <a:t>[TODO]</a:t>
+            </a:r>
+            <a:endParaRPr lang="en-US" sz="1400" dirty="0"/>
+          </a:p>
+          <a:p>
+            <a:pPr marL="177800" indent="-177800">
+              <a:lnSpc>
+                <a:spcPct val="115000"/>
+              </a:lnSpc>
+              <a:spcAft>
+                <a:spcPts val="500"/>
+              </a:spcAft>
+              <a:buSzPct val="100000"/>
+              <a:buChar char="▪"/>
+            </a:pPr>
+            <a:r>
+              <a:rPr lang="en-US" sz="1400" dirty="0">
+                <a:solidFill>
+                  <a:srgbClr val="1F1D21"/>
+                </a:solidFill>
+                <a:latin typeface="Times New Roman" pitchFamily="34" charset="0"/>
+                <a:ea typeface="Times New Roman" pitchFamily="34" charset="-122"/>
+                <a:cs typeface="Times New Roman" pitchFamily="34" charset="-120"/>
+              </a:rPr>
+              <a:t>[TODO]</a:t>
+            </a:r>
+            <a:endParaRPr lang="en-US" sz="1400" dirty="0"/>
+          </a:p>
+        </p:txBody>
+      </p:sp>
+      <p:sp>
+        <p:nvSpPr>
+          <p:cNvPr id="12" name="Shape 10"/>
           <p:cNvSpPr/>
           <p:nvPr/>
         </p:nvSpPr>
         <p:spPr>
           <a:xfrm>
-            <a:off x="5989320" y="1783080"/>
-            <a:ext cx="13716" cy="4206240"/>
+            <a:off x="7970520" y="1783080"/>
+            <a:ext cx="13716" cy="1508760"/>
           </a:xfrm>
           <a:prstGeom prst="rect">
             <a:avLst/>
@@ -5662,9 +5344,263 @@
           <a:ln/>
         </p:spPr>
       </p:sp>
+      <p:sp>
+        <p:nvSpPr>
+          <p:cNvPr id="13" name="Text 11"/>
+          <p:cNvSpPr txBox="1"/>
+          <p:nvPr/>
+        </p:nvSpPr>
+        <p:spPr>
+          <a:xfrm>
+            <a:off x="8199120" y="1783080"/>
+            <a:ext cx="3322320" cy="274320"/>
+          </a:xfrm>
+          <a:prstGeom prst="rect">
+            <a:avLst/>
+          </a:prstGeom>
+          <a:noFill/>
+          <a:ln/>
+        </p:spPr>
+        <p:txBody>
+          <a:bodyPr wrap="square" lIns="0" tIns="0" rIns="0" bIns="0" rtlCol="0" anchor="ctr"/>
+          <a:lstStyle/>
+          <a:p>
+            <a:pPr indent="0" marL="0">
+              <a:buNone/>
+            </a:pPr>
+            <a:r>
+              <a:rPr lang="en-US" sz="1200" b="1" spc="100" kern="0" dirty="0">
+                <a:solidFill>
+                  <a:srgbClr val="E98300"/>
+                </a:solidFill>
+                <a:latin typeface="Times New Roman" pitchFamily="34" charset="0"/>
+                <a:ea typeface="Times New Roman" pitchFamily="34" charset="-122"/>
+                <a:cs typeface="Times New Roman" pitchFamily="34" charset="-120"/>
+              </a:rPr>
+              <a:t>ADJACENCY</a:t>
+            </a:r>
+            <a:endParaRPr lang="en-US" sz="1200" dirty="0"/>
+          </a:p>
+        </p:txBody>
+      </p:sp>
+      <p:sp>
+        <p:nvSpPr>
+          <p:cNvPr id="14" name="Text 12"/>
+          <p:cNvSpPr txBox="1"/>
+          <p:nvPr/>
+        </p:nvSpPr>
+        <p:spPr>
+          <a:xfrm>
+            <a:off x="8199120" y="2148840"/>
+            <a:ext cx="3322320" cy="1143000"/>
+          </a:xfrm>
+          <a:prstGeom prst="rect">
+            <a:avLst/>
+          </a:prstGeom>
+          <a:noFill/>
+          <a:ln/>
+        </p:spPr>
+        <p:txBody>
+          <a:bodyPr wrap="square" lIns="0" tIns="0" rIns="0" bIns="0" rtlCol="0" anchor="t"/>
+          <a:lstStyle/>
+          <a:p>
+            <a:pPr marL="177800" indent="-177800">
+              <a:lnSpc>
+                <a:spcPct val="115000"/>
+              </a:lnSpc>
+              <a:spcAft>
+                <a:spcPts val="500"/>
+              </a:spcAft>
+              <a:buSzPct val="100000"/>
+              <a:buChar char="▪"/>
+            </a:pPr>
+            <a:r>
+              <a:rPr lang="en-US" sz="1400" dirty="0">
+                <a:solidFill>
+                  <a:srgbClr val="1F1D21"/>
+                </a:solidFill>
+                <a:latin typeface="Times New Roman" pitchFamily="34" charset="0"/>
+                <a:ea typeface="Times New Roman" pitchFamily="34" charset="-122"/>
+                <a:cs typeface="Times New Roman" pitchFamily="34" charset="-120"/>
+              </a:rPr>
+              <a:t>[TODO] contact between label pairs</a:t>
+            </a:r>
+            <a:endParaRPr lang="en-US" sz="1400" dirty="0"/>
+          </a:p>
+          <a:p>
+            <a:pPr marL="177800" indent="-177800">
+              <a:lnSpc>
+                <a:spcPct val="115000"/>
+              </a:lnSpc>
+              <a:spcAft>
+                <a:spcPts val="500"/>
+              </a:spcAft>
+              <a:buSzPct val="100000"/>
+              <a:buChar char="▪"/>
+            </a:pPr>
+            <a:r>
+              <a:rPr lang="en-US" sz="1400" dirty="0">
+                <a:solidFill>
+                  <a:srgbClr val="1F1D21"/>
+                </a:solidFill>
+                <a:latin typeface="Times New Roman" pitchFamily="34" charset="0"/>
+                <a:ea typeface="Times New Roman" pitchFamily="34" charset="-122"/>
+                <a:cs typeface="Times New Roman" pitchFamily="34" charset="-120"/>
+              </a:rPr>
+              <a:t>[TODO] which pairs matter most, now that aorta is real</a:t>
+            </a:r>
+            <a:endParaRPr lang="en-US" sz="1400" dirty="0"/>
+          </a:p>
+          <a:p>
+            <a:pPr marL="177800" indent="-177800">
+              <a:lnSpc>
+                <a:spcPct val="115000"/>
+              </a:lnSpc>
+              <a:spcAft>
+                <a:spcPts val="500"/>
+              </a:spcAft>
+              <a:buSzPct val="100000"/>
+              <a:buChar char="▪"/>
+            </a:pPr>
+            <a:r>
+              <a:rPr lang="en-US" sz="1400" dirty="0">
+                <a:solidFill>
+                  <a:srgbClr val="1F1D21"/>
+                </a:solidFill>
+                <a:latin typeface="Times New Roman" pitchFamily="34" charset="0"/>
+                <a:ea typeface="Times New Roman" pitchFamily="34" charset="-122"/>
+                <a:cs typeface="Times New Roman" pitchFamily="34" charset="-120"/>
+              </a:rPr>
+              <a:t>[TODO]</a:t>
+            </a:r>
+            <a:endParaRPr lang="en-US" sz="1400" dirty="0"/>
+          </a:p>
+        </p:txBody>
+      </p:sp>
+      <p:sp>
+        <p:nvSpPr>
+          <p:cNvPr id="15" name="Shape 13"/>
+          <p:cNvSpPr/>
+          <p:nvPr/>
+        </p:nvSpPr>
+        <p:spPr>
+          <a:xfrm>
+            <a:off x="640080" y="3611880"/>
+            <a:ext cx="10881360" cy="914400"/>
+          </a:xfrm>
+          <a:prstGeom prst="rect">
+            <a:avLst/>
+          </a:prstGeom>
+          <a:solidFill>
+            <a:srgbClr val="FCEEDC"/>
+          </a:solidFill>
+          <a:ln/>
+        </p:spPr>
+      </p:sp>
+      <p:sp>
+        <p:nvSpPr>
+          <p:cNvPr id="16" name="Shape 14"/>
+          <p:cNvSpPr/>
+          <p:nvPr/>
+        </p:nvSpPr>
+        <p:spPr>
+          <a:xfrm>
+            <a:off x="640080" y="3611880"/>
+            <a:ext cx="54864" cy="914400"/>
+          </a:xfrm>
+          <a:prstGeom prst="rect">
+            <a:avLst/>
+          </a:prstGeom>
+          <a:solidFill>
+            <a:srgbClr val="E98300"/>
+          </a:solidFill>
+          <a:ln/>
+        </p:spPr>
+      </p:sp>
+      <p:sp>
+        <p:nvSpPr>
+          <p:cNvPr id="17" name="Text 15"/>
+          <p:cNvSpPr txBox="1"/>
+          <p:nvPr/>
+        </p:nvSpPr>
+        <p:spPr>
+          <a:xfrm>
+            <a:off x="914400" y="3794760"/>
+            <a:ext cx="10332720" cy="274320"/>
+          </a:xfrm>
+          <a:prstGeom prst="rect">
+            <a:avLst/>
+          </a:prstGeom>
+          <a:noFill/>
+          <a:ln/>
+        </p:spPr>
+        <p:txBody>
+          <a:bodyPr wrap="square" lIns="0" tIns="0" rIns="0" bIns="0" rtlCol="0" anchor="ctr"/>
+          <a:lstStyle/>
+          <a:p>
+            <a:pPr indent="0" marL="0">
+              <a:buNone/>
+            </a:pPr>
+            <a:r>
+              <a:rPr lang="en-US" sz="1100" b="1" spc="100" kern="0" dirty="0">
+                <a:solidFill>
+                  <a:srgbClr val="E98300"/>
+                </a:solidFill>
+                <a:latin typeface="Times New Roman" pitchFamily="34" charset="0"/>
+                <a:ea typeface="Times New Roman" pitchFamily="34" charset="-122"/>
+                <a:cs typeface="Times New Roman" pitchFamily="34" charset="-120"/>
+              </a:rPr>
+              <a:t>WHY THIS MATTERS</a:t>
+            </a:r>
+            <a:endParaRPr lang="en-US" sz="1100" dirty="0"/>
+          </a:p>
+        </p:txBody>
+      </p:sp>
+      <p:sp>
+        <p:nvSpPr>
+          <p:cNvPr id="18" name="Text 16"/>
+          <p:cNvSpPr txBox="1"/>
+          <p:nvPr/>
+        </p:nvSpPr>
+        <p:spPr>
+          <a:xfrm>
+            <a:off x="914400" y="4114800"/>
+            <a:ext cx="10332720" cy="228600"/>
+          </a:xfrm>
+          <a:prstGeom prst="rect">
+            <a:avLst/>
+          </a:prstGeom>
+          <a:noFill/>
+          <a:ln/>
+        </p:spPr>
+        <p:txBody>
+          <a:bodyPr wrap="square" lIns="0" tIns="0" rIns="0" bIns="0" rtlCol="0" anchor="t"/>
+          <a:lstStyle/>
+          <a:p>
+            <a:pPr indent="0" marL="0">
+              <a:lnSpc>
+                <a:spcPct val="118000"/>
+              </a:lnSpc>
+              <a:buNone/>
+            </a:pPr>
+            <a:r>
+              <a:rPr lang="en-US" sz="1350" dirty="0">
+                <a:solidFill>
+                  <a:srgbClr val="1F1D21"/>
+                </a:solidFill>
+                <a:latin typeface="Times New Roman" pitchFamily="34" charset="0"/>
+                <a:ea typeface="Times New Roman" pitchFamily="34" charset="-122"/>
+                <a:cs typeface="Times New Roman" pitchFamily="34" charset="-120"/>
+              </a:rPr>
+              <a:t>[TODO] how position and extent inform the preprocessing decisions on the next slide.</a:t>
+            </a:r>
+            <a:endParaRPr lang="en-US" sz="1350" dirty="0"/>
+          </a:p>
+        </p:txBody>
+      </p:sp>
       <p:pic>
         <p:nvPicPr>
-          <p:cNvPr id="12" name="Image 0" descr="/Users/bellavg/ProjectsMSc/ai4mi_project/deck/assets/uva_logo.png">    </p:cNvPr>
+          <p:cNvPr id="19" name="Image 0" descr="/Users/bellavg/ProjectsMSc/ai4mi_project/.claude/worktrees/segthor-presentation-midpoint-825c66/deck/assets/uva_logo.png">    </p:cNvPr>
           <p:cNvPicPr>
             <a:picLocks noChangeAspect="1"/>
           </p:cNvPicPr>
@@ -5688,7 +5624,7 @@
       </p:pic>
       <p:sp>
         <p:nvSpPr>
-          <p:cNvPr id="13" name="Text 10"/>
+          <p:cNvPr id="20" name="Text 17"/>
           <p:cNvSpPr txBox="1"/>
           <p:nvPr/>
         </p:nvSpPr>
@@ -5772,7 +5708,7 @@
             <a:avLst/>
           </a:prstGeom>
           <a:solidFill>
-            <a:srgbClr val="E98300"/>
+            <a:srgbClr val="004E92"/>
           </a:solidFill>
           <a:ln/>
         </p:spPr>
@@ -5804,13 +5740,13 @@
             <a:r>
               <a:rPr lang="en-US" sz="1200" b="1" spc="150" kern="0" dirty="0">
                 <a:solidFill>
-                  <a:srgbClr val="E98300"/>
-                </a:solidFill>
-                <a:latin typeface="Times New Roman" pitchFamily="34" charset="0"/>
-                <a:ea typeface="Times New Roman" pitchFamily="34" charset="-122"/>
-                <a:cs typeface="Times New Roman" pitchFamily="34" charset="-120"/>
-              </a:rPr>
-              <a:t>DATA EXPLORATION</a:t>
+                  <a:srgbClr val="004E92"/>
+                </a:solidFill>
+                <a:latin typeface="Times New Roman" pitchFamily="34" charset="0"/>
+                <a:ea typeface="Times New Roman" pitchFamily="34" charset="-122"/>
+                <a:cs typeface="Times New Roman" pitchFamily="34" charset="-120"/>
+              </a:rPr>
+              <a:t>PREPROCESSING PIPELINE</a:t>
             </a:r>
             <a:endParaRPr lang="en-US" sz="1200" dirty="0"/>
           </a:p>
@@ -5849,7 +5785,7 @@
                 <a:ea typeface="Times New Roman" pitchFamily="34" charset="-122"/>
                 <a:cs typeface="Times New Roman" pitchFamily="34" charset="-120"/>
               </a:rPr>
-              <a:t>0:35</a:t>
+              <a:t>0:55</a:t>
             </a:r>
             <a:endParaRPr lang="en-US" sz="1200" dirty="0"/>
           </a:p>
@@ -5888,7 +5824,7 @@
                 <a:ea typeface="Times New Roman" pitchFamily="34" charset="-122"/>
                 <a:cs typeface="Times New Roman" pitchFamily="34" charset="-120"/>
               </a:rPr>
-              <a:t>Exploratory Analysis IV: Spatial Distribution &amp; Extent</a:t>
+              <a:t>Preprocessing: From Measurement to Method</a:t>
             </a:r>
             <a:endParaRPr lang="en-US" sz="2600" dirty="0"/>
           </a:p>
@@ -5909,21 +5845,41 @@
             <a:avLst/>
           </a:prstGeom>
           <a:solidFill>
-            <a:srgbClr val="E98300"/>
+            <a:srgbClr val="004E92"/>
           </a:solidFill>
           <a:ln/>
         </p:spPr>
       </p:sp>
       <p:sp>
         <p:nvSpPr>
-          <p:cNvPr id="7" name="Text 5"/>
-          <p:cNvSpPr txBox="1"/>
-          <p:nvPr/>
-        </p:nvSpPr>
-        <p:spPr>
-          <a:xfrm>
-            <a:off x="640080" y="1783080"/>
-            <a:ext cx="5074920" cy="274320"/>
+          <p:cNvPr id="7" name="Shape 5"/>
+          <p:cNvSpPr/>
+          <p:nvPr/>
+        </p:nvSpPr>
+        <p:spPr>
+          <a:xfrm>
+            <a:off x="2069592" y="1965960"/>
+            <a:ext cx="585216" cy="585216"/>
+          </a:xfrm>
+          <a:prstGeom prst="ellipse">
+            <a:avLst/>
+          </a:prstGeom>
+          <a:solidFill>
+            <a:srgbClr val="004E92"/>
+          </a:solidFill>
+          <a:ln/>
+        </p:spPr>
+      </p:sp>
+      <p:sp>
+        <p:nvSpPr>
+          <p:cNvPr id="8" name="Text 6"/>
+          <p:cNvSpPr txBox="1"/>
+          <p:nvPr/>
+        </p:nvSpPr>
+        <p:spPr>
+          <a:xfrm>
+            <a:off x="2069592" y="1965960"/>
+            <a:ext cx="585216" cy="585216"/>
           </a:xfrm>
           <a:prstGeom prst="rect">
             <a:avLst/>
@@ -5935,34 +5891,34 @@
           <a:bodyPr wrap="square" lIns="0" tIns="0" rIns="0" bIns="0" rtlCol="0" anchor="ctr"/>
           <a:lstStyle/>
           <a:p>
-            <a:pPr indent="0" marL="0">
-              <a:buNone/>
-            </a:pPr>
-            <a:r>
-              <a:rPr lang="en-US" sz="1200" b="1" spc="100" kern="0" dirty="0">
-                <a:solidFill>
-                  <a:srgbClr val="E98300"/>
-                </a:solidFill>
-                <a:latin typeface="Times New Roman" pitchFamily="34" charset="0"/>
-                <a:ea typeface="Times New Roman" pitchFamily="34" charset="-122"/>
-                <a:cs typeface="Times New Roman" pitchFamily="34" charset="-120"/>
-              </a:rPr>
-              <a:t>POSITION</a:t>
-            </a:r>
-            <a:endParaRPr lang="en-US" sz="1200" dirty="0"/>
-          </a:p>
-        </p:txBody>
-      </p:sp>
-      <p:sp>
-        <p:nvSpPr>
-          <p:cNvPr id="8" name="Text 6"/>
-          <p:cNvSpPr txBox="1"/>
-          <p:nvPr/>
-        </p:nvSpPr>
-        <p:spPr>
-          <a:xfrm>
-            <a:off x="640080" y="2148840"/>
-            <a:ext cx="5074920" cy="2514600"/>
+            <a:pPr algn="ctr" indent="0" marL="0">
+              <a:buNone/>
+            </a:pPr>
+            <a:r>
+              <a:rPr lang="en-US" sz="2000" b="1" dirty="0">
+                <a:solidFill>
+                  <a:srgbClr val="FFFFFF"/>
+                </a:solidFill>
+                <a:latin typeface="Times New Roman" pitchFamily="34" charset="0"/>
+                <a:ea typeface="Times New Roman" pitchFamily="34" charset="-122"/>
+                <a:cs typeface="Times New Roman" pitchFamily="34" charset="-120"/>
+              </a:rPr>
+              <a:t>1</a:t>
+            </a:r>
+            <a:endParaRPr lang="en-US" sz="2000" dirty="0"/>
+          </a:p>
+        </p:txBody>
+      </p:sp>
+      <p:sp>
+        <p:nvSpPr>
+          <p:cNvPr id="9" name="Text 7"/>
+          <p:cNvSpPr txBox="1"/>
+          <p:nvPr/>
+        </p:nvSpPr>
+        <p:spPr>
+          <a:xfrm>
+            <a:off x="640080" y="2715768"/>
+            <a:ext cx="3444240" cy="411480"/>
           </a:xfrm>
           <a:prstGeom prst="rect">
             <a:avLst/>
@@ -5974,18 +5930,171 @@
           <a:bodyPr wrap="square" lIns="0" tIns="0" rIns="0" bIns="0" rtlCol="0" anchor="t"/>
           <a:lstStyle/>
           <a:p>
-            <a:pPr marL="203200" indent="-203200">
+            <a:pPr algn="ctr" indent="0" marL="0">
+              <a:buNone/>
+            </a:pPr>
+            <a:r>
+              <a:rPr lang="en-US" sz="1350" b="1" dirty="0">
+                <a:solidFill>
+                  <a:srgbClr val="1F1D21"/>
+                </a:solidFill>
+                <a:latin typeface="Times New Roman" pitchFamily="34" charset="0"/>
+                <a:ea typeface="Times New Roman" pitchFamily="34" charset="-122"/>
+                <a:cs typeface="Times New Roman" pitchFamily="34" charset="-120"/>
+              </a:rPr>
+              <a:t>Step 1</a:t>
+            </a:r>
+            <a:endParaRPr lang="en-US" sz="1350" dirty="0"/>
+          </a:p>
+        </p:txBody>
+      </p:sp>
+      <p:sp>
+        <p:nvSpPr>
+          <p:cNvPr id="10" name="Text 8"/>
+          <p:cNvSpPr txBox="1"/>
+          <p:nvPr/>
+        </p:nvSpPr>
+        <p:spPr>
+          <a:xfrm>
+            <a:off x="640080" y="3154680"/>
+            <a:ext cx="3444240" cy="2743200"/>
+          </a:xfrm>
+          <a:prstGeom prst="rect">
+            <a:avLst/>
+          </a:prstGeom>
+          <a:noFill/>
+          <a:ln/>
+        </p:spPr>
+        <p:txBody>
+          <a:bodyPr wrap="square" lIns="0" tIns="0" rIns="0" bIns="0" rtlCol="0" anchor="t"/>
+          <a:lstStyle/>
+          <a:p>
+            <a:pPr algn="ctr" indent="0" marL="0">
               <a:lnSpc>
                 <a:spcPct val="115000"/>
               </a:lnSpc>
-              <a:spcAft>
-                <a:spcPts val="900"/>
-              </a:spcAft>
-              <a:buSzPct val="100000"/>
-              <a:buChar char="▪"/>
-            </a:pPr>
-            <a:r>
-              <a:rPr lang="en-US" sz="1400" dirty="0">
+              <a:buNone/>
+            </a:pPr>
+            <a:r>
+              <a:rPr lang="en-US" sz="1200" dirty="0">
+                <a:solidFill>
+                  <a:srgbClr val="6B6B6B"/>
+                </a:solidFill>
+                <a:latin typeface="Times New Roman" pitchFamily="34" charset="0"/>
+                <a:ea typeface="Times New Roman" pitchFamily="34" charset="-122"/>
+                <a:cs typeface="Times New Roman" pitchFamily="34" charset="-120"/>
+              </a:rPr>
+              <a:t>[TODO], motivated by the geometry measurement (slide 3)</a:t>
+            </a:r>
+            <a:endParaRPr lang="en-US" sz="1200" dirty="0"/>
+          </a:p>
+        </p:txBody>
+      </p:sp>
+      <p:sp>
+        <p:nvSpPr>
+          <p:cNvPr id="11" name="Shape 9"/>
+          <p:cNvSpPr/>
+          <p:nvPr/>
+        </p:nvSpPr>
+        <p:spPr>
+          <a:xfrm>
+            <a:off x="4093464" y="2194560"/>
+            <a:ext cx="237744" cy="128016"/>
+          </a:xfrm>
+          <a:prstGeom prst="rightArrow">
+            <a:avLst/>
+          </a:prstGeom>
+          <a:solidFill>
+            <a:srgbClr val="D9D9D9"/>
+          </a:solidFill>
+          <a:ln/>
+        </p:spPr>
+      </p:sp>
+      <p:sp>
+        <p:nvSpPr>
+          <p:cNvPr id="12" name="Shape 10"/>
+          <p:cNvSpPr/>
+          <p:nvPr/>
+        </p:nvSpPr>
+        <p:spPr>
+          <a:xfrm>
+            <a:off x="5788152" y="1965960"/>
+            <a:ext cx="585216" cy="585216"/>
+          </a:xfrm>
+          <a:prstGeom prst="ellipse">
+            <a:avLst/>
+          </a:prstGeom>
+          <a:solidFill>
+            <a:srgbClr val="004E92"/>
+          </a:solidFill>
+          <a:ln/>
+        </p:spPr>
+      </p:sp>
+      <p:sp>
+        <p:nvSpPr>
+          <p:cNvPr id="13" name="Text 11"/>
+          <p:cNvSpPr txBox="1"/>
+          <p:nvPr/>
+        </p:nvSpPr>
+        <p:spPr>
+          <a:xfrm>
+            <a:off x="5788152" y="1965960"/>
+            <a:ext cx="585216" cy="585216"/>
+          </a:xfrm>
+          <a:prstGeom prst="rect">
+            <a:avLst/>
+          </a:prstGeom>
+          <a:noFill/>
+          <a:ln/>
+        </p:spPr>
+        <p:txBody>
+          <a:bodyPr wrap="square" lIns="0" tIns="0" rIns="0" bIns="0" rtlCol="0" anchor="ctr"/>
+          <a:lstStyle/>
+          <a:p>
+            <a:pPr algn="ctr" indent="0" marL="0">
+              <a:buNone/>
+            </a:pPr>
+            <a:r>
+              <a:rPr lang="en-US" sz="2000" b="1" dirty="0">
+                <a:solidFill>
+                  <a:srgbClr val="FFFFFF"/>
+                </a:solidFill>
+                <a:latin typeface="Times New Roman" pitchFamily="34" charset="0"/>
+                <a:ea typeface="Times New Roman" pitchFamily="34" charset="-122"/>
+                <a:cs typeface="Times New Roman" pitchFamily="34" charset="-120"/>
+              </a:rPr>
+              <a:t>2</a:t>
+            </a:r>
+            <a:endParaRPr lang="en-US" sz="2000" dirty="0"/>
+          </a:p>
+        </p:txBody>
+      </p:sp>
+      <p:sp>
+        <p:nvSpPr>
+          <p:cNvPr id="14" name="Text 12"/>
+          <p:cNvSpPr txBox="1"/>
+          <p:nvPr/>
+        </p:nvSpPr>
+        <p:spPr>
+          <a:xfrm>
+            <a:off x="4358640" y="2715768"/>
+            <a:ext cx="3444240" cy="411480"/>
+          </a:xfrm>
+          <a:prstGeom prst="rect">
+            <a:avLst/>
+          </a:prstGeom>
+          <a:noFill/>
+          <a:ln/>
+        </p:spPr>
+        <p:txBody>
+          <a:bodyPr wrap="square" lIns="0" tIns="0" rIns="0" bIns="0" rtlCol="0" anchor="t"/>
+          <a:lstStyle/>
+          <a:p>
+            <a:pPr algn="ctr" indent="0" marL="0">
+              <a:buNone/>
+            </a:pPr>
+            <a:r>
+              <a:rPr lang="en-US" sz="1350" b="1" dirty="0">
                 <a:solidFill>
                   <a:srgbClr val="1F1D21"/>
                 </a:solidFill>
@@ -5993,61 +6102,22 @@
                 <a:ea typeface="Times New Roman" pitchFamily="34" charset="-122"/>
                 <a:cs typeface="Times New Roman" pitchFamily="34" charset="-120"/>
               </a:rPr>
-              <a:t>[TODO] where each organ sits in 3D</a:t>
-            </a:r>
-            <a:endParaRPr lang="en-US" sz="1400" dirty="0"/>
-          </a:p>
-        </p:txBody>
-      </p:sp>
-      <p:sp>
-        <p:nvSpPr>
-          <p:cNvPr id="9" name="Text 7"/>
-          <p:cNvSpPr txBox="1"/>
-          <p:nvPr/>
-        </p:nvSpPr>
-        <p:spPr>
-          <a:xfrm>
-            <a:off x="6263640" y="1783080"/>
-            <a:ext cx="5257800" cy="274320"/>
-          </a:xfrm>
-          <a:prstGeom prst="rect">
-            <a:avLst/>
-          </a:prstGeom>
-          <a:noFill/>
-          <a:ln/>
-        </p:spPr>
-        <p:txBody>
-          <a:bodyPr wrap="square" lIns="0" tIns="0" rIns="0" bIns="0" rtlCol="0" anchor="ctr"/>
-          <a:lstStyle/>
-          <a:p>
-            <a:pPr indent="0" marL="0">
-              <a:buNone/>
-            </a:pPr>
-            <a:r>
-              <a:rPr lang="en-US" sz="1200" b="1" spc="100" kern="0" dirty="0">
-                <a:solidFill>
-                  <a:srgbClr val="E98300"/>
-                </a:solidFill>
-                <a:latin typeface="Times New Roman" pitchFamily="34" charset="0"/>
-                <a:ea typeface="Times New Roman" pitchFamily="34" charset="-122"/>
-                <a:cs typeface="Times New Roman" pitchFamily="34" charset="-120"/>
-              </a:rPr>
-              <a:t>EXTENT</a:t>
-            </a:r>
-            <a:endParaRPr lang="en-US" sz="1200" dirty="0"/>
-          </a:p>
-        </p:txBody>
-      </p:sp>
-      <p:sp>
-        <p:nvSpPr>
-          <p:cNvPr id="10" name="Text 8"/>
-          <p:cNvSpPr txBox="1"/>
-          <p:nvPr/>
-        </p:nvSpPr>
-        <p:spPr>
-          <a:xfrm>
-            <a:off x="6263640" y="2148840"/>
-            <a:ext cx="5257800" cy="2514600"/>
+              <a:t>Step 2</a:t>
+            </a:r>
+            <a:endParaRPr lang="en-US" sz="1350" dirty="0"/>
+          </a:p>
+        </p:txBody>
+      </p:sp>
+      <p:sp>
+        <p:nvSpPr>
+          <p:cNvPr id="15" name="Text 13"/>
+          <p:cNvSpPr txBox="1"/>
+          <p:nvPr/>
+        </p:nvSpPr>
+        <p:spPr>
+          <a:xfrm>
+            <a:off x="4358640" y="3154680"/>
+            <a:ext cx="3444240" cy="2743200"/>
           </a:xfrm>
           <a:prstGeom prst="rect">
             <a:avLst/>
@@ -6059,18 +6129,132 @@
           <a:bodyPr wrap="square" lIns="0" tIns="0" rIns="0" bIns="0" rtlCol="0" anchor="t"/>
           <a:lstStyle/>
           <a:p>
-            <a:pPr marL="203200" indent="-203200">
+            <a:pPr algn="ctr" indent="0" marL="0">
               <a:lnSpc>
                 <a:spcPct val="115000"/>
               </a:lnSpc>
-              <a:spcAft>
-                <a:spcPts val="900"/>
-              </a:spcAft>
-              <a:buSzPct val="100000"/>
-              <a:buChar char="▪"/>
-            </a:pPr>
-            <a:r>
-              <a:rPr lang="en-US" sz="1400" dirty="0">
+              <a:buNone/>
+            </a:pPr>
+            <a:r>
+              <a:rPr lang="en-US" sz="1200" dirty="0">
+                <a:solidFill>
+                  <a:srgbClr val="6B6B6B"/>
+                </a:solidFill>
+                <a:latin typeface="Times New Roman" pitchFamily="34" charset="0"/>
+                <a:ea typeface="Times New Roman" pitchFamily="34" charset="-122"/>
+                <a:cs typeface="Times New Roman" pitchFamily="34" charset="-120"/>
+              </a:rPr>
+              <a:t>[TODO], motivated by the intensity measurement (slide 4)</a:t>
+            </a:r>
+            <a:endParaRPr lang="en-US" sz="1200" dirty="0"/>
+          </a:p>
+        </p:txBody>
+      </p:sp>
+      <p:sp>
+        <p:nvSpPr>
+          <p:cNvPr id="16" name="Shape 14"/>
+          <p:cNvSpPr/>
+          <p:nvPr/>
+        </p:nvSpPr>
+        <p:spPr>
+          <a:xfrm>
+            <a:off x="7812024" y="2194560"/>
+            <a:ext cx="237744" cy="128016"/>
+          </a:xfrm>
+          <a:prstGeom prst="rightArrow">
+            <a:avLst/>
+          </a:prstGeom>
+          <a:solidFill>
+            <a:srgbClr val="D9D9D9"/>
+          </a:solidFill>
+          <a:ln/>
+        </p:spPr>
+      </p:sp>
+      <p:sp>
+        <p:nvSpPr>
+          <p:cNvPr id="17" name="Shape 15"/>
+          <p:cNvSpPr/>
+          <p:nvPr/>
+        </p:nvSpPr>
+        <p:spPr>
+          <a:xfrm>
+            <a:off x="9506712" y="1965960"/>
+            <a:ext cx="585216" cy="585216"/>
+          </a:xfrm>
+          <a:prstGeom prst="ellipse">
+            <a:avLst/>
+          </a:prstGeom>
+          <a:solidFill>
+            <a:srgbClr val="004E92"/>
+          </a:solidFill>
+          <a:ln/>
+        </p:spPr>
+      </p:sp>
+      <p:sp>
+        <p:nvSpPr>
+          <p:cNvPr id="18" name="Text 16"/>
+          <p:cNvSpPr txBox="1"/>
+          <p:nvPr/>
+        </p:nvSpPr>
+        <p:spPr>
+          <a:xfrm>
+            <a:off x="9506712" y="1965960"/>
+            <a:ext cx="585216" cy="585216"/>
+          </a:xfrm>
+          <a:prstGeom prst="rect">
+            <a:avLst/>
+          </a:prstGeom>
+          <a:noFill/>
+          <a:ln/>
+        </p:spPr>
+        <p:txBody>
+          <a:bodyPr wrap="square" lIns="0" tIns="0" rIns="0" bIns="0" rtlCol="0" anchor="ctr"/>
+          <a:lstStyle/>
+          <a:p>
+            <a:pPr algn="ctr" indent="0" marL="0">
+              <a:buNone/>
+            </a:pPr>
+            <a:r>
+              <a:rPr lang="en-US" sz="2000" b="1" dirty="0">
+                <a:solidFill>
+                  <a:srgbClr val="FFFFFF"/>
+                </a:solidFill>
+                <a:latin typeface="Times New Roman" pitchFamily="34" charset="0"/>
+                <a:ea typeface="Times New Roman" pitchFamily="34" charset="-122"/>
+                <a:cs typeface="Times New Roman" pitchFamily="34" charset="-120"/>
+              </a:rPr>
+              <a:t>3</a:t>
+            </a:r>
+            <a:endParaRPr lang="en-US" sz="2000" dirty="0"/>
+          </a:p>
+        </p:txBody>
+      </p:sp>
+      <p:sp>
+        <p:nvSpPr>
+          <p:cNvPr id="19" name="Text 17"/>
+          <p:cNvSpPr txBox="1"/>
+          <p:nvPr/>
+        </p:nvSpPr>
+        <p:spPr>
+          <a:xfrm>
+            <a:off x="8077200" y="2715768"/>
+            <a:ext cx="3444240" cy="411480"/>
+          </a:xfrm>
+          <a:prstGeom prst="rect">
+            <a:avLst/>
+          </a:prstGeom>
+          <a:noFill/>
+          <a:ln/>
+        </p:spPr>
+        <p:txBody>
+          <a:bodyPr wrap="square" lIns="0" tIns="0" rIns="0" bIns="0" rtlCol="0" anchor="t"/>
+          <a:lstStyle/>
+          <a:p>
+            <a:pPr algn="ctr" indent="0" marL="0">
+              <a:buNone/>
+            </a:pPr>
+            <a:r>
+              <a:rPr lang="en-US" sz="1350" b="1" dirty="0">
                 <a:solidFill>
                   <a:srgbClr val="1F1D21"/>
                 </a:solidFill>
@@ -6078,121 +6262,22 @@
                 <a:ea typeface="Times New Roman" pitchFamily="34" charset="-122"/>
                 <a:cs typeface="Times New Roman" pitchFamily="34" charset="-120"/>
               </a:rPr>
-              <a:t>[TODO] coverage along the body axis</a:t>
-            </a:r>
-            <a:endParaRPr lang="en-US" sz="1400" dirty="0"/>
-          </a:p>
-        </p:txBody>
-      </p:sp>
-      <p:sp>
-        <p:nvSpPr>
-          <p:cNvPr id="11" name="Shape 9"/>
-          <p:cNvSpPr/>
-          <p:nvPr/>
-        </p:nvSpPr>
-        <p:spPr>
-          <a:xfrm>
-            <a:off x="5989320" y="1783080"/>
-            <a:ext cx="13716" cy="2880360"/>
-          </a:xfrm>
-          <a:prstGeom prst="rect">
-            <a:avLst/>
-          </a:prstGeom>
-          <a:solidFill>
-            <a:srgbClr val="E3E3E3"/>
-          </a:solidFill>
-          <a:ln/>
-        </p:spPr>
-      </p:sp>
-      <p:sp>
-        <p:nvSpPr>
-          <p:cNvPr id="12" name="Shape 10"/>
-          <p:cNvSpPr/>
-          <p:nvPr/>
-        </p:nvSpPr>
-        <p:spPr>
-          <a:xfrm>
-            <a:off x="640080" y="4892040"/>
-            <a:ext cx="10881360" cy="914400"/>
-          </a:xfrm>
-          <a:prstGeom prst="rect">
-            <a:avLst/>
-          </a:prstGeom>
-          <a:solidFill>
-            <a:srgbClr val="FCEEDC"/>
-          </a:solidFill>
-          <a:ln/>
-        </p:spPr>
-      </p:sp>
-      <p:sp>
-        <p:nvSpPr>
-          <p:cNvPr id="13" name="Shape 11"/>
-          <p:cNvSpPr/>
-          <p:nvPr/>
-        </p:nvSpPr>
-        <p:spPr>
-          <a:xfrm>
-            <a:off x="640080" y="4892040"/>
-            <a:ext cx="54864" cy="914400"/>
-          </a:xfrm>
-          <a:prstGeom prst="rect">
-            <a:avLst/>
-          </a:prstGeom>
-          <a:solidFill>
-            <a:srgbClr val="E98300"/>
-          </a:solidFill>
-          <a:ln/>
-        </p:spPr>
-      </p:sp>
-      <p:sp>
-        <p:nvSpPr>
-          <p:cNvPr id="14" name="Text 12"/>
-          <p:cNvSpPr txBox="1"/>
-          <p:nvPr/>
-        </p:nvSpPr>
-        <p:spPr>
-          <a:xfrm>
-            <a:off x="914400" y="5074920"/>
-            <a:ext cx="10332720" cy="274320"/>
-          </a:xfrm>
-          <a:prstGeom prst="rect">
-            <a:avLst/>
-          </a:prstGeom>
-          <a:noFill/>
-          <a:ln/>
-        </p:spPr>
-        <p:txBody>
-          <a:bodyPr wrap="square" lIns="0" tIns="0" rIns="0" bIns="0" rtlCol="0" anchor="ctr"/>
-          <a:lstStyle/>
-          <a:p>
-            <a:pPr indent="0" marL="0">
-              <a:buNone/>
-            </a:pPr>
-            <a:r>
-              <a:rPr lang="en-US" sz="1100" b="1" spc="100" kern="0" dirty="0">
-                <a:solidFill>
-                  <a:srgbClr val="E98300"/>
-                </a:solidFill>
-                <a:latin typeface="Times New Roman" pitchFamily="34" charset="0"/>
-                <a:ea typeface="Times New Roman" pitchFamily="34" charset="-122"/>
-                <a:cs typeface="Times New Roman" pitchFamily="34" charset="-120"/>
-              </a:rPr>
-              <a:t>WHY THIS MATTERS</a:t>
-            </a:r>
-            <a:endParaRPr lang="en-US" sz="1100" dirty="0"/>
-          </a:p>
-        </p:txBody>
-      </p:sp>
-      <p:sp>
-        <p:nvSpPr>
-          <p:cNvPr id="15" name="Text 13"/>
-          <p:cNvSpPr txBox="1"/>
-          <p:nvPr/>
-        </p:nvSpPr>
-        <p:spPr>
-          <a:xfrm>
-            <a:off x="914400" y="5394960"/>
-            <a:ext cx="10332720" cy="228600"/>
+              <a:t>Step 3</a:t>
+            </a:r>
+            <a:endParaRPr lang="en-US" sz="1350" dirty="0"/>
+          </a:p>
+        </p:txBody>
+      </p:sp>
+      <p:sp>
+        <p:nvSpPr>
+          <p:cNvPr id="20" name="Text 18"/>
+          <p:cNvSpPr txBox="1"/>
+          <p:nvPr/>
+        </p:nvSpPr>
+        <p:spPr>
+          <a:xfrm>
+            <a:off x="8077200" y="3154680"/>
+            <a:ext cx="3444240" cy="2743200"/>
           </a:xfrm>
           <a:prstGeom prst="rect">
             <a:avLst/>
@@ -6204,30 +6289,30 @@
           <a:bodyPr wrap="square" lIns="0" tIns="0" rIns="0" bIns="0" rtlCol="0" anchor="t"/>
           <a:lstStyle/>
           <a:p>
-            <a:pPr indent="0" marL="0">
+            <a:pPr algn="ctr" indent="0" marL="0">
               <a:lnSpc>
-                <a:spcPct val="118000"/>
+                <a:spcPct val="115000"/>
               </a:lnSpc>
               <a:buNone/>
             </a:pPr>
             <a:r>
-              <a:rPr lang="en-US" sz="1350" dirty="0">
-                <a:solidFill>
-                  <a:srgbClr val="1F1D21"/>
-                </a:solidFill>
-                <a:latin typeface="Times New Roman" pitchFamily="34" charset="0"/>
-                <a:ea typeface="Times New Roman" pitchFamily="34" charset="-122"/>
-                <a:cs typeface="Times New Roman" pitchFamily="34" charset="-120"/>
-              </a:rPr>
-              <a:t>[TODO] how position and extent inform the preprocessing decisions on the next slide.</a:t>
-            </a:r>
-            <a:endParaRPr lang="en-US" sz="1350" dirty="0"/>
+              <a:rPr lang="en-US" sz="1200" dirty="0">
+                <a:solidFill>
+                  <a:srgbClr val="6B6B6B"/>
+                </a:solidFill>
+                <a:latin typeface="Times New Roman" pitchFamily="34" charset="0"/>
+                <a:ea typeface="Times New Roman" pitchFamily="34" charset="-122"/>
+                <a:cs typeface="Times New Roman" pitchFamily="34" charset="-120"/>
+              </a:rPr>
+              <a:t>[TODO], motivated by the position/extent measurement (slide 5)</a:t>
+            </a:r>
+            <a:endParaRPr lang="en-US" sz="1200" dirty="0"/>
           </a:p>
         </p:txBody>
       </p:sp>
       <p:pic>
         <p:nvPicPr>
-          <p:cNvPr id="16" name="Image 0" descr="/Users/bellavg/ProjectsMSc/ai4mi_project/deck/assets/uva_logo.png">    </p:cNvPr>
+          <p:cNvPr id="21" name="Image 0" descr="/Users/bellavg/ProjectsMSc/ai4mi_project/.claude/worktrees/segthor-presentation-midpoint-825c66/deck/assets/uva_logo.png">    </p:cNvPr>
           <p:cNvPicPr>
             <a:picLocks noChangeAspect="1"/>
           </p:cNvPicPr>
@@ -6251,7 +6336,7 @@
       </p:pic>
       <p:sp>
         <p:nvSpPr>
-          <p:cNvPr id="17" name="Text 14"/>
+          <p:cNvPr id="22" name="Text 19"/>
           <p:cNvSpPr txBox="1"/>
           <p:nvPr/>
         </p:nvSpPr>
@@ -6335,7 +6420,7 @@
             <a:avLst/>
           </a:prstGeom>
           <a:solidFill>
-            <a:srgbClr val="004E92"/>
+            <a:srgbClr val="751B68"/>
           </a:solidFill>
           <a:ln/>
         </p:spPr>
@@ -6367,13 +6452,13 @@
             <a:r>
               <a:rPr lang="en-US" sz="1200" b="1" spc="150" kern="0" dirty="0">
                 <a:solidFill>
-                  <a:srgbClr val="004E92"/>
-                </a:solidFill>
-                <a:latin typeface="Times New Roman" pitchFamily="34" charset="0"/>
-                <a:ea typeface="Times New Roman" pitchFamily="34" charset="-122"/>
-                <a:cs typeface="Times New Roman" pitchFamily="34" charset="-120"/>
-              </a:rPr>
-              <a:t>PREPROCESSING PIPELINE</a:t>
+                  <a:srgbClr val="751B68"/>
+                </a:solidFill>
+                <a:latin typeface="Times New Roman" pitchFamily="34" charset="0"/>
+                <a:ea typeface="Times New Roman" pitchFamily="34" charset="-122"/>
+                <a:cs typeface="Times New Roman" pitchFamily="34" charset="-120"/>
+              </a:rPr>
+              <a:t>BASELINE</a:t>
             </a:r>
             <a:endParaRPr lang="en-US" sz="1200" dirty="0"/>
           </a:p>
@@ -6412,7 +6497,7 @@
                 <a:ea typeface="Times New Roman" pitchFamily="34" charset="-122"/>
                 <a:cs typeface="Times New Roman" pitchFamily="34" charset="-120"/>
               </a:rPr>
-              <a:t>0:55</a:t>
+              <a:t>0:35</a:t>
             </a:r>
             <a:endParaRPr lang="en-US" sz="1200" dirty="0"/>
           </a:p>
@@ -6451,7 +6536,7 @@
                 <a:ea typeface="Times New Roman" pitchFamily="34" charset="-122"/>
                 <a:cs typeface="Times New Roman" pitchFamily="34" charset="-120"/>
               </a:rPr>
-              <a:t>Preprocessing: From Measurement to Method</a:t>
+              <a:t>Baseline Performance: Unmodified Pipeline (CE Loss, 25 Epochs)</a:t>
             </a:r>
             <a:endParaRPr lang="en-US" sz="2600" dirty="0"/>
           </a:p>
@@ -6472,41 +6557,130 @@
             <a:avLst/>
           </a:prstGeom>
           <a:solidFill>
-            <a:srgbClr val="004E92"/>
+            <a:srgbClr val="751B68"/>
           </a:solidFill>
           <a:ln/>
         </p:spPr>
       </p:sp>
       <p:sp>
         <p:nvSpPr>
-          <p:cNvPr id="7" name="Shape 5"/>
+          <p:cNvPr id="7" name="Text 5"/>
+          <p:cNvSpPr txBox="1"/>
+          <p:nvPr/>
+        </p:nvSpPr>
+        <p:spPr>
+          <a:xfrm>
+            <a:off x="640080" y="1783080"/>
+            <a:ext cx="6309360" cy="4206240"/>
+          </a:xfrm>
+          <a:prstGeom prst="rect">
+            <a:avLst/>
+          </a:prstGeom>
+          <a:noFill/>
+          <a:ln/>
+        </p:spPr>
+        <p:txBody>
+          <a:bodyPr wrap="square" lIns="0" tIns="0" rIns="0" bIns="0" rtlCol="0" anchor="t"/>
+          <a:lstStyle/>
+          <a:p>
+            <a:pPr marL="228600" indent="-228600">
+              <a:lnSpc>
+                <a:spcPct val="118000"/>
+              </a:lnSpc>
+              <a:spcAft>
+                <a:spcPts val="1400"/>
+              </a:spcAft>
+              <a:buSzPct val="100000"/>
+              <a:buChar char="▪"/>
+            </a:pPr>
+            <a:r>
+              <a:rPr lang="en-US" sz="1600" b="1" dirty="0">
+                <a:solidFill>
+                  <a:srgbClr val="1F1D21"/>
+                </a:solidFill>
+                <a:latin typeface="Times New Roman" pitchFamily="34" charset="0"/>
+                <a:ea typeface="Times New Roman" pitchFamily="34" charset="-122"/>
+                <a:cs typeface="Times New Roman" pitchFamily="34" charset="-120"/>
+              </a:rPr>
+              <a:t>Split: 15 train / 5 val — val = patients 01, 11, 15, 17, 19</a:t>
+            </a:r>
+            <a:endParaRPr lang="en-US" sz="1600" dirty="0"/>
+          </a:p>
+          <a:p>
+            <a:pPr lvl="1" indent="0" marL="0">
+              <a:lnSpc>
+                <a:spcPct val="118000"/>
+              </a:lnSpc>
+              <a:spcAft>
+                <a:spcPts val="600"/>
+              </a:spcAft>
+              <a:buNone/>
+            </a:pPr>
+            <a:r>
+              <a:rPr lang="en-US" sz="1400" dirty="0">
+                <a:solidFill>
+                  <a:srgbClr val="6B6B6B"/>
+                </a:solidFill>
+                <a:latin typeface="Times New Roman" pitchFamily="34" charset="0"/>
+                <a:ea typeface="Times New Roman" pitchFamily="34" charset="-122"/>
+                <a:cs typeface="Times New Roman" pitchFamily="34" charset="-120"/>
+              </a:rPr>
+              <a:t>Scores below are means over these 5 held-out scans</a:t>
+            </a:r>
+            <a:endParaRPr lang="en-US" sz="1600" dirty="0"/>
+          </a:p>
+        </p:txBody>
+      </p:sp>
+      <p:sp>
+        <p:nvSpPr>
+          <p:cNvPr id="8" name="Shape 6"/>
           <p:cNvSpPr/>
           <p:nvPr/>
         </p:nvSpPr>
         <p:spPr>
           <a:xfrm>
-            <a:off x="2069592" y="1965960"/>
-            <a:ext cx="585216" cy="585216"/>
-          </a:xfrm>
-          <a:prstGeom prst="ellipse">
+            <a:off x="7360920" y="1783080"/>
+            <a:ext cx="4160520" cy="2011680"/>
+          </a:xfrm>
+          <a:prstGeom prst="rect">
             <a:avLst/>
           </a:prstGeom>
           <a:solidFill>
-            <a:srgbClr val="004E92"/>
+            <a:srgbClr val="F1E6EF"/>
           </a:solidFill>
           <a:ln/>
         </p:spPr>
       </p:sp>
       <p:sp>
         <p:nvSpPr>
-          <p:cNvPr id="8" name="Text 6"/>
-          <p:cNvSpPr txBox="1"/>
-          <p:nvPr/>
-        </p:nvSpPr>
-        <p:spPr>
-          <a:xfrm>
-            <a:off x="2069592" y="1965960"/>
-            <a:ext cx="585216" cy="585216"/>
+          <p:cNvPr id="9" name="Shape 7"/>
+          <p:cNvSpPr/>
+          <p:nvPr/>
+        </p:nvSpPr>
+        <p:spPr>
+          <a:xfrm>
+            <a:off x="7360920" y="1783080"/>
+            <a:ext cx="54864" cy="2011680"/>
+          </a:xfrm>
+          <a:prstGeom prst="rect">
+            <a:avLst/>
+          </a:prstGeom>
+          <a:solidFill>
+            <a:srgbClr val="751B68"/>
+          </a:solidFill>
+          <a:ln/>
+        </p:spPr>
+      </p:sp>
+      <p:sp>
+        <p:nvSpPr>
+          <p:cNvPr id="10" name="Text 8"/>
+          <p:cNvSpPr txBox="1"/>
+          <p:nvPr/>
+        </p:nvSpPr>
+        <p:spPr>
+          <a:xfrm>
+            <a:off x="7635240" y="1965960"/>
+            <a:ext cx="3611880" cy="274320"/>
           </a:xfrm>
           <a:prstGeom prst="rect">
             <a:avLst/>
@@ -6518,34 +6692,34 @@
           <a:bodyPr wrap="square" lIns="0" tIns="0" rIns="0" bIns="0" rtlCol="0" anchor="ctr"/>
           <a:lstStyle/>
           <a:p>
-            <a:pPr algn="ctr" indent="0" marL="0">
-              <a:buNone/>
-            </a:pPr>
-            <a:r>
-              <a:rPr lang="en-US" sz="2000" b="1" dirty="0">
-                <a:solidFill>
-                  <a:srgbClr val="FFFFFF"/>
-                </a:solidFill>
-                <a:latin typeface="Times New Roman" pitchFamily="34" charset="0"/>
-                <a:ea typeface="Times New Roman" pitchFamily="34" charset="-122"/>
-                <a:cs typeface="Times New Roman" pitchFamily="34" charset="-120"/>
-              </a:rPr>
-              <a:t>1</a:t>
-            </a:r>
-            <a:endParaRPr lang="en-US" sz="2000" dirty="0"/>
-          </a:p>
-        </p:txBody>
-      </p:sp>
-      <p:sp>
-        <p:nvSpPr>
-          <p:cNvPr id="9" name="Text 7"/>
-          <p:cNvSpPr txBox="1"/>
-          <p:nvPr/>
-        </p:nvSpPr>
-        <p:spPr>
-          <a:xfrm>
-            <a:off x="640080" y="2715768"/>
-            <a:ext cx="3444240" cy="411480"/>
+            <a:pPr indent="0" marL="0">
+              <a:buNone/>
+            </a:pPr>
+            <a:r>
+              <a:rPr lang="en-US" sz="1100" b="1" spc="100" kern="0" dirty="0">
+                <a:solidFill>
+                  <a:srgbClr val="751B68"/>
+                </a:solidFill>
+                <a:latin typeface="Times New Roman" pitchFamily="34" charset="0"/>
+                <a:ea typeface="Times New Roman" pitchFamily="34" charset="-122"/>
+                <a:cs typeface="Times New Roman" pitchFamily="34" charset="-120"/>
+              </a:rPr>
+              <a:t>POSITIVE-SLICE DICE (PATIENT MEANS)</a:t>
+            </a:r>
+            <a:endParaRPr lang="en-US" sz="1100" dirty="0"/>
+          </a:p>
+        </p:txBody>
+      </p:sp>
+      <p:sp>
+        <p:nvSpPr>
+          <p:cNvPr id="11" name="Text 9"/>
+          <p:cNvSpPr txBox="1"/>
+          <p:nvPr/>
+        </p:nvSpPr>
+        <p:spPr>
+          <a:xfrm>
+            <a:off x="7635240" y="2286000"/>
+            <a:ext cx="3611880" cy="1325880"/>
           </a:xfrm>
           <a:prstGeom prst="rect">
             <a:avLst/>
@@ -6557,11 +6731,14 @@
           <a:bodyPr wrap="square" lIns="0" tIns="0" rIns="0" bIns="0" rtlCol="0" anchor="t"/>
           <a:lstStyle/>
           <a:p>
-            <a:pPr algn="ctr" indent="0" marL="0">
-              <a:buNone/>
-            </a:pPr>
-            <a:r>
-              <a:rPr lang="en-US" sz="1350" b="1" dirty="0">
+            <a:pPr indent="0" marL="0">
+              <a:lnSpc>
+                <a:spcPct val="118000"/>
+              </a:lnSpc>
+              <a:buNone/>
+            </a:pPr>
+            <a:r>
+              <a:rPr lang="en-US" sz="1350" dirty="0">
                 <a:solidFill>
                   <a:srgbClr val="1F1D21"/>
                 </a:solidFill>
@@ -6569,159 +6746,19 @@
                 <a:ea typeface="Times New Roman" pitchFamily="34" charset="-122"/>
                 <a:cs typeface="Times New Roman" pitchFamily="34" charset="-120"/>
               </a:rPr>
-              <a:t>Step 1</a:t>
+              <a:t>Esophagus: 0.47</a:t>
             </a:r>
             <a:endParaRPr lang="en-US" sz="1350" dirty="0"/>
           </a:p>
-        </p:txBody>
-      </p:sp>
-      <p:sp>
-        <p:nvSpPr>
-          <p:cNvPr id="10" name="Text 8"/>
-          <p:cNvSpPr txBox="1"/>
-          <p:nvPr/>
-        </p:nvSpPr>
-        <p:spPr>
-          <a:xfrm>
-            <a:off x="640080" y="3154680"/>
-            <a:ext cx="3444240" cy="2743200"/>
-          </a:xfrm>
-          <a:prstGeom prst="rect">
-            <a:avLst/>
-          </a:prstGeom>
-          <a:noFill/>
-          <a:ln/>
-        </p:spPr>
-        <p:txBody>
-          <a:bodyPr wrap="square" lIns="0" tIns="0" rIns="0" bIns="0" rtlCol="0" anchor="t"/>
-          <a:lstStyle/>
-          <a:p>
-            <a:pPr algn="ctr" indent="0" marL="0">
+          <a:p>
+            <a:pPr indent="0" marL="0">
               <a:lnSpc>
-                <a:spcPct val="115000"/>
+                <a:spcPct val="118000"/>
               </a:lnSpc>
               <a:buNone/>
             </a:pPr>
             <a:r>
-              <a:rPr lang="en-US" sz="1200" dirty="0">
-                <a:solidFill>
-                  <a:srgbClr val="6B6B6B"/>
-                </a:solidFill>
-                <a:latin typeface="Times New Roman" pitchFamily="34" charset="0"/>
-                <a:ea typeface="Times New Roman" pitchFamily="34" charset="-122"/>
-                <a:cs typeface="Times New Roman" pitchFamily="34" charset="-120"/>
-              </a:rPr>
-              <a:t>[TODO], motivated by the geometry measurement (slide 3)</a:t>
-            </a:r>
-            <a:endParaRPr lang="en-US" sz="1200" dirty="0"/>
-          </a:p>
-        </p:txBody>
-      </p:sp>
-      <p:sp>
-        <p:nvSpPr>
-          <p:cNvPr id="11" name="Shape 9"/>
-          <p:cNvSpPr/>
-          <p:nvPr/>
-        </p:nvSpPr>
-        <p:spPr>
-          <a:xfrm>
-            <a:off x="4093464" y="2194560"/>
-            <a:ext cx="237744" cy="128016"/>
-          </a:xfrm>
-          <a:prstGeom prst="rightArrow">
-            <a:avLst/>
-          </a:prstGeom>
-          <a:solidFill>
-            <a:srgbClr val="D9D9D9"/>
-          </a:solidFill>
-          <a:ln/>
-        </p:spPr>
-      </p:sp>
-      <p:sp>
-        <p:nvSpPr>
-          <p:cNvPr id="12" name="Shape 10"/>
-          <p:cNvSpPr/>
-          <p:nvPr/>
-        </p:nvSpPr>
-        <p:spPr>
-          <a:xfrm>
-            <a:off x="5788152" y="1965960"/>
-            <a:ext cx="585216" cy="585216"/>
-          </a:xfrm>
-          <a:prstGeom prst="ellipse">
-            <a:avLst/>
-          </a:prstGeom>
-          <a:solidFill>
-            <a:srgbClr val="004E92"/>
-          </a:solidFill>
-          <a:ln/>
-        </p:spPr>
-      </p:sp>
-      <p:sp>
-        <p:nvSpPr>
-          <p:cNvPr id="13" name="Text 11"/>
-          <p:cNvSpPr txBox="1"/>
-          <p:nvPr/>
-        </p:nvSpPr>
-        <p:spPr>
-          <a:xfrm>
-            <a:off x="5788152" y="1965960"/>
-            <a:ext cx="585216" cy="585216"/>
-          </a:xfrm>
-          <a:prstGeom prst="rect">
-            <a:avLst/>
-          </a:prstGeom>
-          <a:noFill/>
-          <a:ln/>
-        </p:spPr>
-        <p:txBody>
-          <a:bodyPr wrap="square" lIns="0" tIns="0" rIns="0" bIns="0" rtlCol="0" anchor="ctr"/>
-          <a:lstStyle/>
-          <a:p>
-            <a:pPr algn="ctr" indent="0" marL="0">
-              <a:buNone/>
-            </a:pPr>
-            <a:r>
-              <a:rPr lang="en-US" sz="2000" b="1" dirty="0">
-                <a:solidFill>
-                  <a:srgbClr val="FFFFFF"/>
-                </a:solidFill>
-                <a:latin typeface="Times New Roman" pitchFamily="34" charset="0"/>
-                <a:ea typeface="Times New Roman" pitchFamily="34" charset="-122"/>
-                <a:cs typeface="Times New Roman" pitchFamily="34" charset="-120"/>
-              </a:rPr>
-              <a:t>2</a:t>
-            </a:r>
-            <a:endParaRPr lang="en-US" sz="2000" dirty="0"/>
-          </a:p>
-        </p:txBody>
-      </p:sp>
-      <p:sp>
-        <p:nvSpPr>
-          <p:cNvPr id="14" name="Text 12"/>
-          <p:cNvSpPr txBox="1"/>
-          <p:nvPr/>
-        </p:nvSpPr>
-        <p:spPr>
-          <a:xfrm>
-            <a:off x="4358640" y="2715768"/>
-            <a:ext cx="3444240" cy="411480"/>
-          </a:xfrm>
-          <a:prstGeom prst="rect">
-            <a:avLst/>
-          </a:prstGeom>
-          <a:noFill/>
-          <a:ln/>
-        </p:spPr>
-        <p:txBody>
-          <a:bodyPr wrap="square" lIns="0" tIns="0" rIns="0" bIns="0" rtlCol="0" anchor="t"/>
-          <a:lstStyle/>
-          <a:p>
-            <a:pPr algn="ctr" indent="0" marL="0">
-              <a:buNone/>
-            </a:pPr>
-            <a:r>
-              <a:rPr lang="en-US" sz="1350" b="1" dirty="0">
+              <a:rPr lang="en-US" sz="1350" dirty="0">
                 <a:solidFill>
                   <a:srgbClr val="1F1D21"/>
                 </a:solidFill>
@@ -6729,159 +6766,19 @@
                 <a:ea typeface="Times New Roman" pitchFamily="34" charset="-122"/>
                 <a:cs typeface="Times New Roman" pitchFamily="34" charset="-120"/>
               </a:rPr>
-              <a:t>Step 2</a:t>
+              <a:t>Heart: 0.58</a:t>
             </a:r>
             <a:endParaRPr lang="en-US" sz="1350" dirty="0"/>
           </a:p>
-        </p:txBody>
-      </p:sp>
-      <p:sp>
-        <p:nvSpPr>
-          <p:cNvPr id="15" name="Text 13"/>
-          <p:cNvSpPr txBox="1"/>
-          <p:nvPr/>
-        </p:nvSpPr>
-        <p:spPr>
-          <a:xfrm>
-            <a:off x="4358640" y="3154680"/>
-            <a:ext cx="3444240" cy="2743200"/>
-          </a:xfrm>
-          <a:prstGeom prst="rect">
-            <a:avLst/>
-          </a:prstGeom>
-          <a:noFill/>
-          <a:ln/>
-        </p:spPr>
-        <p:txBody>
-          <a:bodyPr wrap="square" lIns="0" tIns="0" rIns="0" bIns="0" rtlCol="0" anchor="t"/>
-          <a:lstStyle/>
-          <a:p>
-            <a:pPr algn="ctr" indent="0" marL="0">
+          <a:p>
+            <a:pPr indent="0" marL="0">
               <a:lnSpc>
-                <a:spcPct val="115000"/>
+                <a:spcPct val="118000"/>
               </a:lnSpc>
               <a:buNone/>
             </a:pPr>
             <a:r>
-              <a:rPr lang="en-US" sz="1200" dirty="0">
-                <a:solidFill>
-                  <a:srgbClr val="6B6B6B"/>
-                </a:solidFill>
-                <a:latin typeface="Times New Roman" pitchFamily="34" charset="0"/>
-                <a:ea typeface="Times New Roman" pitchFamily="34" charset="-122"/>
-                <a:cs typeface="Times New Roman" pitchFamily="34" charset="-120"/>
-              </a:rPr>
-              <a:t>[TODO], motivated by the intensity measurement (slide 4)</a:t>
-            </a:r>
-            <a:endParaRPr lang="en-US" sz="1200" dirty="0"/>
-          </a:p>
-        </p:txBody>
-      </p:sp>
-      <p:sp>
-        <p:nvSpPr>
-          <p:cNvPr id="16" name="Shape 14"/>
-          <p:cNvSpPr/>
-          <p:nvPr/>
-        </p:nvSpPr>
-        <p:spPr>
-          <a:xfrm>
-            <a:off x="7812024" y="2194560"/>
-            <a:ext cx="237744" cy="128016"/>
-          </a:xfrm>
-          <a:prstGeom prst="rightArrow">
-            <a:avLst/>
-          </a:prstGeom>
-          <a:solidFill>
-            <a:srgbClr val="D9D9D9"/>
-          </a:solidFill>
-          <a:ln/>
-        </p:spPr>
-      </p:sp>
-      <p:sp>
-        <p:nvSpPr>
-          <p:cNvPr id="17" name="Shape 15"/>
-          <p:cNvSpPr/>
-          <p:nvPr/>
-        </p:nvSpPr>
-        <p:spPr>
-          <a:xfrm>
-            <a:off x="9506712" y="1965960"/>
-            <a:ext cx="585216" cy="585216"/>
-          </a:xfrm>
-          <a:prstGeom prst="ellipse">
-            <a:avLst/>
-          </a:prstGeom>
-          <a:solidFill>
-            <a:srgbClr val="004E92"/>
-          </a:solidFill>
-          <a:ln/>
-        </p:spPr>
-      </p:sp>
-      <p:sp>
-        <p:nvSpPr>
-          <p:cNvPr id="18" name="Text 16"/>
-          <p:cNvSpPr txBox="1"/>
-          <p:nvPr/>
-        </p:nvSpPr>
-        <p:spPr>
-          <a:xfrm>
-            <a:off x="9506712" y="1965960"/>
-            <a:ext cx="585216" cy="585216"/>
-          </a:xfrm>
-          <a:prstGeom prst="rect">
-            <a:avLst/>
-          </a:prstGeom>
-          <a:noFill/>
-          <a:ln/>
-        </p:spPr>
-        <p:txBody>
-          <a:bodyPr wrap="square" lIns="0" tIns="0" rIns="0" bIns="0" rtlCol="0" anchor="ctr"/>
-          <a:lstStyle/>
-          <a:p>
-            <a:pPr algn="ctr" indent="0" marL="0">
-              <a:buNone/>
-            </a:pPr>
-            <a:r>
-              <a:rPr lang="en-US" sz="2000" b="1" dirty="0">
-                <a:solidFill>
-                  <a:srgbClr val="FFFFFF"/>
-                </a:solidFill>
-                <a:latin typeface="Times New Roman" pitchFamily="34" charset="0"/>
-                <a:ea typeface="Times New Roman" pitchFamily="34" charset="-122"/>
-                <a:cs typeface="Times New Roman" pitchFamily="34" charset="-120"/>
-              </a:rPr>
-              <a:t>3</a:t>
-            </a:r>
-            <a:endParaRPr lang="en-US" sz="2000" dirty="0"/>
-          </a:p>
-        </p:txBody>
-      </p:sp>
-      <p:sp>
-        <p:nvSpPr>
-          <p:cNvPr id="19" name="Text 17"/>
-          <p:cNvSpPr txBox="1"/>
-          <p:nvPr/>
-        </p:nvSpPr>
-        <p:spPr>
-          <a:xfrm>
-            <a:off x="8077200" y="2715768"/>
-            <a:ext cx="3444240" cy="411480"/>
-          </a:xfrm>
-          <a:prstGeom prst="rect">
-            <a:avLst/>
-          </a:prstGeom>
-          <a:noFill/>
-          <a:ln/>
-        </p:spPr>
-        <p:txBody>
-          <a:bodyPr wrap="square" lIns="0" tIns="0" rIns="0" bIns="0" rtlCol="0" anchor="t"/>
-          <a:lstStyle/>
-          <a:p>
-            <a:pPr algn="ctr" indent="0" marL="0">
-              <a:buNone/>
-            </a:pPr>
-            <a:r>
-              <a:rPr lang="en-US" sz="1350" b="1" dirty="0">
+              <a:rPr lang="en-US" sz="1350" dirty="0">
                 <a:solidFill>
                   <a:srgbClr val="1F1D21"/>
                 </a:solidFill>
@@ -6889,57 +6786,15 @@
                 <a:ea typeface="Times New Roman" pitchFamily="34" charset="-122"/>
                 <a:cs typeface="Times New Roman" pitchFamily="34" charset="-120"/>
               </a:rPr>
-              <a:t>Step 3</a:t>
+              <a:t>Trachea: 0.50</a:t>
             </a:r>
             <a:endParaRPr lang="en-US" sz="1350" dirty="0"/>
-          </a:p>
-        </p:txBody>
-      </p:sp>
-      <p:sp>
-        <p:nvSpPr>
-          <p:cNvPr id="20" name="Text 18"/>
-          <p:cNvSpPr txBox="1"/>
-          <p:nvPr/>
-        </p:nvSpPr>
-        <p:spPr>
-          <a:xfrm>
-            <a:off x="8077200" y="3154680"/>
-            <a:ext cx="3444240" cy="2743200"/>
-          </a:xfrm>
-          <a:prstGeom prst="rect">
-            <a:avLst/>
-          </a:prstGeom>
-          <a:noFill/>
-          <a:ln/>
-        </p:spPr>
-        <p:txBody>
-          <a:bodyPr wrap="square" lIns="0" tIns="0" rIns="0" bIns="0" rtlCol="0" anchor="t"/>
-          <a:lstStyle/>
-          <a:p>
-            <a:pPr algn="ctr" indent="0" marL="0">
-              <a:lnSpc>
-                <a:spcPct val="115000"/>
-              </a:lnSpc>
-              <a:buNone/>
-            </a:pPr>
-            <a:r>
-              <a:rPr lang="en-US" sz="1200" dirty="0">
-                <a:solidFill>
-                  <a:srgbClr val="6B6B6B"/>
-                </a:solidFill>
-                <a:latin typeface="Times New Roman" pitchFamily="34" charset="0"/>
-                <a:ea typeface="Times New Roman" pitchFamily="34" charset="-122"/>
-                <a:cs typeface="Times New Roman" pitchFamily="34" charset="-120"/>
-              </a:rPr>
-              <a:t>[TODO], motivated by the position/extent measurement (slide 6)</a:t>
-            </a:r>
-            <a:endParaRPr lang="en-US" sz="1200" dirty="0"/>
           </a:p>
         </p:txBody>
       </p:sp>
       <p:pic>
         <p:nvPicPr>
-          <p:cNvPr id="21" name="Image 0" descr="/Users/bellavg/ProjectsMSc/ai4mi_project/deck/assets/uva_logo.png">    </p:cNvPr>
+          <p:cNvPr id="12" name="Image 0" descr="/Users/bellavg/ProjectsMSc/ai4mi_project/.claude/worktrees/segthor-presentation-midpoint-825c66/deck/assets/uva_logo.png">    </p:cNvPr>
           <p:cNvPicPr>
             <a:picLocks noChangeAspect="1"/>
           </p:cNvPicPr>
@@ -6963,7 +6818,7 @@
       </p:pic>
       <p:sp>
         <p:nvSpPr>
-          <p:cNvPr id="22" name="Text 19"/>
+          <p:cNvPr id="13" name="Text 10"/>
           <p:cNvSpPr txBox="1"/>
           <p:nvPr/>
         </p:nvSpPr>
@@ -7085,7 +6940,7 @@
                 <a:ea typeface="Times New Roman" pitchFamily="34" charset="-122"/>
                 <a:cs typeface="Times New Roman" pitchFamily="34" charset="-120"/>
               </a:rPr>
-              <a:t>BASELINE</a:t>
+              <a:t>MODIFICATION &amp; RESULT — LARGEST RUBRIC WEIGHT</a:t>
             </a:r>
             <a:endParaRPr lang="en-US" sz="1200" dirty="0"/>
           </a:p>
@@ -7124,7 +6979,7 @@
                 <a:ea typeface="Times New Roman" pitchFamily="34" charset="-122"/>
                 <a:cs typeface="Times New Roman" pitchFamily="34" charset="-120"/>
               </a:rPr>
-              <a:t>0:35</a:t>
+              <a:t>2:10</a:t>
             </a:r>
             <a:endParaRPr lang="en-US" sz="1200" dirty="0"/>
           </a:p>
@@ -7163,7 +7018,7 @@
                 <a:ea typeface="Times New Roman" pitchFamily="34" charset="-122"/>
                 <a:cs typeface="Times New Roman" pitchFamily="34" charset="-120"/>
               </a:rPr>
-              <a:t>Baseline Performance: Unmodified Pipeline (CE Loss, 25 Epochs)</a:t>
+              <a:t>Proposed Modification: Motivation, Method &amp; Preliminary Result</a:t>
             </a:r>
             <a:endParaRPr lang="en-US" sz="2600" dirty="0"/>
           </a:p>
@@ -7191,105 +7046,16 @@
       </p:sp>
       <p:sp>
         <p:nvSpPr>
-          <p:cNvPr id="7" name="Text 5"/>
-          <p:cNvSpPr txBox="1"/>
-          <p:nvPr/>
-        </p:nvSpPr>
-        <p:spPr>
-          <a:xfrm>
-            <a:off x="640080" y="1783080"/>
-            <a:ext cx="6309360" cy="4206240"/>
-          </a:xfrm>
-          <a:prstGeom prst="rect">
-            <a:avLst/>
-          </a:prstGeom>
-          <a:noFill/>
-          <a:ln/>
-        </p:spPr>
-        <p:txBody>
-          <a:bodyPr wrap="square" lIns="0" tIns="0" rIns="0" bIns="0" rtlCol="0" anchor="t"/>
-          <a:lstStyle/>
-          <a:p>
-            <a:pPr marL="228600" indent="-228600">
-              <a:lnSpc>
-                <a:spcPct val="118000"/>
-              </a:lnSpc>
-              <a:spcAft>
-                <a:spcPts val="1400"/>
-              </a:spcAft>
-              <a:buSzPct val="100000"/>
-              <a:buChar char="▪"/>
-            </a:pPr>
-            <a:r>
-              <a:rPr lang="en-US" sz="1600" b="1" dirty="0">
-                <a:solidFill>
-                  <a:srgbClr val="1F1D21"/>
-                </a:solidFill>
-                <a:latin typeface="Times New Roman" pitchFamily="34" charset="0"/>
-                <a:ea typeface="Times New Roman" pitchFamily="34" charset="-122"/>
-                <a:cs typeface="Times New Roman" pitchFamily="34" charset="-120"/>
-              </a:rPr>
-              <a:t>Split: 15 train / 5 val — val = patients 01, 11, 15, 17, 19</a:t>
-            </a:r>
-            <a:endParaRPr lang="en-US" sz="1600" dirty="0"/>
-          </a:p>
-          <a:p>
-            <a:pPr lvl="1" indent="0" marL="0">
-              <a:lnSpc>
-                <a:spcPct val="118000"/>
-              </a:lnSpc>
-              <a:spcAft>
-                <a:spcPts val="600"/>
-              </a:spcAft>
-              <a:buNone/>
-            </a:pPr>
-            <a:r>
-              <a:rPr lang="en-US" sz="1400" dirty="0">
-                <a:solidFill>
-                  <a:srgbClr val="6B6B6B"/>
-                </a:solidFill>
-                <a:latin typeface="Times New Roman" pitchFamily="34" charset="0"/>
-                <a:ea typeface="Times New Roman" pitchFamily="34" charset="-122"/>
-                <a:cs typeface="Times New Roman" pitchFamily="34" charset="-120"/>
-              </a:rPr>
-              <a:t>Scores below are means over these 5 held-out scans</a:t>
-            </a:r>
-            <a:endParaRPr lang="en-US" sz="1600" dirty="0"/>
-          </a:p>
-        </p:txBody>
-      </p:sp>
-      <p:sp>
-        <p:nvSpPr>
-          <p:cNvPr id="8" name="Shape 6"/>
+          <p:cNvPr id="7" name="Shape 5"/>
           <p:cNvSpPr/>
           <p:nvPr/>
         </p:nvSpPr>
         <p:spPr>
           <a:xfrm>
-            <a:off x="7360920" y="1783080"/>
-            <a:ext cx="4160520" cy="2011680"/>
-          </a:xfrm>
-          <a:prstGeom prst="rect">
-            <a:avLst/>
-          </a:prstGeom>
-          <a:solidFill>
-            <a:srgbClr val="F1E6EF"/>
-          </a:solidFill>
-          <a:ln/>
-        </p:spPr>
-      </p:sp>
-      <p:sp>
-        <p:nvSpPr>
-          <p:cNvPr id="9" name="Shape 7"/>
-          <p:cNvSpPr/>
-          <p:nvPr/>
-        </p:nvSpPr>
-        <p:spPr>
-          <a:xfrm>
-            <a:off x="7360920" y="1783080"/>
-            <a:ext cx="54864" cy="2011680"/>
-          </a:xfrm>
-          <a:prstGeom prst="rect">
+            <a:off x="1604772" y="1965960"/>
+            <a:ext cx="585216" cy="585216"/>
+          </a:xfrm>
+          <a:prstGeom prst="ellipse">
             <a:avLst/>
           </a:prstGeom>
           <a:solidFill>
@@ -7300,14 +7066,174 @@
       </p:sp>
       <p:sp>
         <p:nvSpPr>
+          <p:cNvPr id="8" name="Text 6"/>
+          <p:cNvSpPr txBox="1"/>
+          <p:nvPr/>
+        </p:nvSpPr>
+        <p:spPr>
+          <a:xfrm>
+            <a:off x="1604772" y="1965960"/>
+            <a:ext cx="585216" cy="585216"/>
+          </a:xfrm>
+          <a:prstGeom prst="rect">
+            <a:avLst/>
+          </a:prstGeom>
+          <a:noFill/>
+          <a:ln/>
+        </p:spPr>
+        <p:txBody>
+          <a:bodyPr wrap="square" lIns="0" tIns="0" rIns="0" bIns="0" rtlCol="0" anchor="ctr"/>
+          <a:lstStyle/>
+          <a:p>
+            <a:pPr algn="ctr" indent="0" marL="0">
+              <a:buNone/>
+            </a:pPr>
+            <a:r>
+              <a:rPr lang="en-US" sz="2000" b="1" dirty="0">
+                <a:solidFill>
+                  <a:srgbClr val="FFFFFF"/>
+                </a:solidFill>
+                <a:latin typeface="Times New Roman" pitchFamily="34" charset="0"/>
+                <a:ea typeface="Times New Roman" pitchFamily="34" charset="-122"/>
+                <a:cs typeface="Times New Roman" pitchFamily="34" charset="-120"/>
+              </a:rPr>
+              <a:t>1</a:t>
+            </a:r>
+            <a:endParaRPr lang="en-US" sz="2000" dirty="0"/>
+          </a:p>
+        </p:txBody>
+      </p:sp>
+      <p:sp>
+        <p:nvSpPr>
+          <p:cNvPr id="9" name="Text 7"/>
+          <p:cNvSpPr txBox="1"/>
+          <p:nvPr/>
+        </p:nvSpPr>
+        <p:spPr>
+          <a:xfrm>
+            <a:off x="640080" y="2715768"/>
+            <a:ext cx="2514600" cy="411480"/>
+          </a:xfrm>
+          <a:prstGeom prst="rect">
+            <a:avLst/>
+          </a:prstGeom>
+          <a:noFill/>
+          <a:ln/>
+        </p:spPr>
+        <p:txBody>
+          <a:bodyPr wrap="square" lIns="0" tIns="0" rIns="0" bIns="0" rtlCol="0" anchor="t"/>
+          <a:lstStyle/>
+          <a:p>
+            <a:pPr algn="ctr" indent="0" marL="0">
+              <a:buNone/>
+            </a:pPr>
+            <a:r>
+              <a:rPr lang="en-US" sz="1350" b="1" dirty="0">
+                <a:solidFill>
+                  <a:srgbClr val="1F1D21"/>
+                </a:solidFill>
+                <a:latin typeface="Times New Roman" pitchFamily="34" charset="0"/>
+                <a:ea typeface="Times New Roman" pitchFamily="34" charset="-122"/>
+                <a:cs typeface="Times New Roman" pitchFamily="34" charset="-120"/>
+              </a:rPr>
+              <a:t>Motivation</a:t>
+            </a:r>
+            <a:endParaRPr lang="en-US" sz="1350" dirty="0"/>
+          </a:p>
+        </p:txBody>
+      </p:sp>
+      <p:sp>
+        <p:nvSpPr>
           <p:cNvPr id="10" name="Text 8"/>
           <p:cNvSpPr txBox="1"/>
           <p:nvPr/>
         </p:nvSpPr>
         <p:spPr>
           <a:xfrm>
-            <a:off x="7635240" y="1965960"/>
-            <a:ext cx="3611880" cy="274320"/>
+            <a:off x="640080" y="3154680"/>
+            <a:ext cx="2514600" cy="2743200"/>
+          </a:xfrm>
+          <a:prstGeom prst="rect">
+            <a:avLst/>
+          </a:prstGeom>
+          <a:noFill/>
+          <a:ln/>
+        </p:spPr>
+        <p:txBody>
+          <a:bodyPr wrap="square" lIns="0" tIns="0" rIns="0" bIns="0" rtlCol="0" anchor="t"/>
+          <a:lstStyle/>
+          <a:p>
+            <a:pPr algn="ctr" indent="0" marL="0">
+              <a:lnSpc>
+                <a:spcPct val="115000"/>
+              </a:lnSpc>
+              <a:buNone/>
+            </a:pPr>
+            <a:r>
+              <a:rPr lang="en-US" sz="1200" dirty="0">
+                <a:solidFill>
+                  <a:srgbClr val="6B6B6B"/>
+                </a:solidFill>
+                <a:latin typeface="Times New Roman" pitchFamily="34" charset="0"/>
+                <a:ea typeface="Times New Roman" pitchFamily="34" charset="-122"/>
+                <a:cs typeface="Times New Roman" pitchFamily="34" charset="-120"/>
+              </a:rPr>
+              <a:t>[TODO], tied back to an exploration finding (slides 3–5)</a:t>
+            </a:r>
+            <a:endParaRPr lang="en-US" sz="1200" dirty="0"/>
+          </a:p>
+        </p:txBody>
+      </p:sp>
+      <p:sp>
+        <p:nvSpPr>
+          <p:cNvPr id="11" name="Shape 9"/>
+          <p:cNvSpPr/>
+          <p:nvPr/>
+        </p:nvSpPr>
+        <p:spPr>
+          <a:xfrm>
+            <a:off x="3163824" y="2194560"/>
+            <a:ext cx="237744" cy="128016"/>
+          </a:xfrm>
+          <a:prstGeom prst="rightArrow">
+            <a:avLst/>
+          </a:prstGeom>
+          <a:solidFill>
+            <a:srgbClr val="D9D9D9"/>
+          </a:solidFill>
+          <a:ln/>
+        </p:spPr>
+      </p:sp>
+      <p:sp>
+        <p:nvSpPr>
+          <p:cNvPr id="12" name="Shape 10"/>
+          <p:cNvSpPr/>
+          <p:nvPr/>
+        </p:nvSpPr>
+        <p:spPr>
+          <a:xfrm>
+            <a:off x="4393692" y="1965960"/>
+            <a:ext cx="585216" cy="585216"/>
+          </a:xfrm>
+          <a:prstGeom prst="ellipse">
+            <a:avLst/>
+          </a:prstGeom>
+          <a:solidFill>
+            <a:srgbClr val="751B68"/>
+          </a:solidFill>
+          <a:ln/>
+        </p:spPr>
+      </p:sp>
+      <p:sp>
+        <p:nvSpPr>
+          <p:cNvPr id="13" name="Text 11"/>
+          <p:cNvSpPr txBox="1"/>
+          <p:nvPr/>
+        </p:nvSpPr>
+        <p:spPr>
+          <a:xfrm>
+            <a:off x="4393692" y="1965960"/>
+            <a:ext cx="585216" cy="585216"/>
           </a:xfrm>
           <a:prstGeom prst="rect">
             <a:avLst/>
@@ -7319,34 +7245,34 @@
           <a:bodyPr wrap="square" lIns="0" tIns="0" rIns="0" bIns="0" rtlCol="0" anchor="ctr"/>
           <a:lstStyle/>
           <a:p>
-            <a:pPr indent="0" marL="0">
-              <a:buNone/>
-            </a:pPr>
-            <a:r>
-              <a:rPr lang="en-US" sz="1100" b="1" spc="100" kern="0" dirty="0">
-                <a:solidFill>
-                  <a:srgbClr val="751B68"/>
-                </a:solidFill>
-                <a:latin typeface="Times New Roman" pitchFamily="34" charset="0"/>
-                <a:ea typeface="Times New Roman" pitchFamily="34" charset="-122"/>
-                <a:cs typeface="Times New Roman" pitchFamily="34" charset="-120"/>
-              </a:rPr>
-              <a:t>POSITIVE-SLICE DICE (PATIENT MEANS)</a:t>
-            </a:r>
-            <a:endParaRPr lang="en-US" sz="1100" dirty="0"/>
-          </a:p>
-        </p:txBody>
-      </p:sp>
-      <p:sp>
-        <p:nvSpPr>
-          <p:cNvPr id="11" name="Text 9"/>
-          <p:cNvSpPr txBox="1"/>
-          <p:nvPr/>
-        </p:nvSpPr>
-        <p:spPr>
-          <a:xfrm>
-            <a:off x="7635240" y="2286000"/>
-            <a:ext cx="3611880" cy="1325880"/>
+            <a:pPr algn="ctr" indent="0" marL="0">
+              <a:buNone/>
+            </a:pPr>
+            <a:r>
+              <a:rPr lang="en-US" sz="2000" b="1" dirty="0">
+                <a:solidFill>
+                  <a:srgbClr val="FFFFFF"/>
+                </a:solidFill>
+                <a:latin typeface="Times New Roman" pitchFamily="34" charset="0"/>
+                <a:ea typeface="Times New Roman" pitchFamily="34" charset="-122"/>
+                <a:cs typeface="Times New Roman" pitchFamily="34" charset="-120"/>
+              </a:rPr>
+              <a:t>2</a:t>
+            </a:r>
+            <a:endParaRPr lang="en-US" sz="2000" dirty="0"/>
+          </a:p>
+        </p:txBody>
+      </p:sp>
+      <p:sp>
+        <p:nvSpPr>
+          <p:cNvPr id="14" name="Text 12"/>
+          <p:cNvSpPr txBox="1"/>
+          <p:nvPr/>
+        </p:nvSpPr>
+        <p:spPr>
+          <a:xfrm>
+            <a:off x="3429000" y="2715768"/>
+            <a:ext cx="2514600" cy="411480"/>
           </a:xfrm>
           <a:prstGeom prst="rect">
             <a:avLst/>
@@ -7358,14 +7284,171 @@
           <a:bodyPr wrap="square" lIns="0" tIns="0" rIns="0" bIns="0" rtlCol="0" anchor="t"/>
           <a:lstStyle/>
           <a:p>
-            <a:pPr indent="0" marL="0">
+            <a:pPr algn="ctr" indent="0" marL="0">
+              <a:buNone/>
+            </a:pPr>
+            <a:r>
+              <a:rPr lang="en-US" sz="1350" b="1" dirty="0">
+                <a:solidFill>
+                  <a:srgbClr val="1F1D21"/>
+                </a:solidFill>
+                <a:latin typeface="Times New Roman" pitchFamily="34" charset="0"/>
+                <a:ea typeface="Times New Roman" pitchFamily="34" charset="-122"/>
+                <a:cs typeface="Times New Roman" pitchFamily="34" charset="-120"/>
+              </a:rPr>
+              <a:t>Method</a:t>
+            </a:r>
+            <a:endParaRPr lang="en-US" sz="1350" dirty="0"/>
+          </a:p>
+        </p:txBody>
+      </p:sp>
+      <p:sp>
+        <p:nvSpPr>
+          <p:cNvPr id="15" name="Text 13"/>
+          <p:cNvSpPr txBox="1"/>
+          <p:nvPr/>
+        </p:nvSpPr>
+        <p:spPr>
+          <a:xfrm>
+            <a:off x="3429000" y="3154680"/>
+            <a:ext cx="2514600" cy="2743200"/>
+          </a:xfrm>
+          <a:prstGeom prst="rect">
+            <a:avLst/>
+          </a:prstGeom>
+          <a:noFill/>
+          <a:ln/>
+        </p:spPr>
+        <p:txBody>
+          <a:bodyPr wrap="square" lIns="0" tIns="0" rIns="0" bIns="0" rtlCol="0" anchor="t"/>
+          <a:lstStyle/>
+          <a:p>
+            <a:pPr algn="ctr" indent="0" marL="0">
               <a:lnSpc>
-                <a:spcPct val="118000"/>
+                <a:spcPct val="115000"/>
               </a:lnSpc>
               <a:buNone/>
             </a:pPr>
             <a:r>
-              <a:rPr lang="en-US" sz="1350" dirty="0">
+              <a:rPr lang="en-US" sz="1200" dirty="0">
+                <a:solidFill>
+                  <a:srgbClr val="6B6B6B"/>
+                </a:solidFill>
+                <a:latin typeface="Times New Roman" pitchFamily="34" charset="0"/>
+                <a:ea typeface="Times New Roman" pitchFamily="34" charset="-122"/>
+                <a:cs typeface="Times New Roman" pitchFamily="34" charset="-120"/>
+              </a:rPr>
+              <a:t>[TODO] the modification tried</a:t>
+            </a:r>
+            <a:endParaRPr lang="en-US" sz="1200" dirty="0"/>
+          </a:p>
+        </p:txBody>
+      </p:sp>
+      <p:sp>
+        <p:nvSpPr>
+          <p:cNvPr id="16" name="Shape 14"/>
+          <p:cNvSpPr/>
+          <p:nvPr/>
+        </p:nvSpPr>
+        <p:spPr>
+          <a:xfrm>
+            <a:off x="5952744" y="2194560"/>
+            <a:ext cx="237744" cy="128016"/>
+          </a:xfrm>
+          <a:prstGeom prst="rightArrow">
+            <a:avLst/>
+          </a:prstGeom>
+          <a:solidFill>
+            <a:srgbClr val="D9D9D9"/>
+          </a:solidFill>
+          <a:ln/>
+        </p:spPr>
+      </p:sp>
+      <p:sp>
+        <p:nvSpPr>
+          <p:cNvPr id="17" name="Shape 15"/>
+          <p:cNvSpPr/>
+          <p:nvPr/>
+        </p:nvSpPr>
+        <p:spPr>
+          <a:xfrm>
+            <a:off x="7182612" y="1965960"/>
+            <a:ext cx="585216" cy="585216"/>
+          </a:xfrm>
+          <a:prstGeom prst="ellipse">
+            <a:avLst/>
+          </a:prstGeom>
+          <a:solidFill>
+            <a:srgbClr val="751B68"/>
+          </a:solidFill>
+          <a:ln/>
+        </p:spPr>
+      </p:sp>
+      <p:sp>
+        <p:nvSpPr>
+          <p:cNvPr id="18" name="Text 16"/>
+          <p:cNvSpPr txBox="1"/>
+          <p:nvPr/>
+        </p:nvSpPr>
+        <p:spPr>
+          <a:xfrm>
+            <a:off x="7182612" y="1965960"/>
+            <a:ext cx="585216" cy="585216"/>
+          </a:xfrm>
+          <a:prstGeom prst="rect">
+            <a:avLst/>
+          </a:prstGeom>
+          <a:noFill/>
+          <a:ln/>
+        </p:spPr>
+        <p:txBody>
+          <a:bodyPr wrap="square" lIns="0" tIns="0" rIns="0" bIns="0" rtlCol="0" anchor="ctr"/>
+          <a:lstStyle/>
+          <a:p>
+            <a:pPr algn="ctr" indent="0" marL="0">
+              <a:buNone/>
+            </a:pPr>
+            <a:r>
+              <a:rPr lang="en-US" sz="2000" b="1" dirty="0">
+                <a:solidFill>
+                  <a:srgbClr val="FFFFFF"/>
+                </a:solidFill>
+                <a:latin typeface="Times New Roman" pitchFamily="34" charset="0"/>
+                <a:ea typeface="Times New Roman" pitchFamily="34" charset="-122"/>
+                <a:cs typeface="Times New Roman" pitchFamily="34" charset="-120"/>
+              </a:rPr>
+              <a:t>3</a:t>
+            </a:r>
+            <a:endParaRPr lang="en-US" sz="2000" dirty="0"/>
+          </a:p>
+        </p:txBody>
+      </p:sp>
+      <p:sp>
+        <p:nvSpPr>
+          <p:cNvPr id="19" name="Text 17"/>
+          <p:cNvSpPr txBox="1"/>
+          <p:nvPr/>
+        </p:nvSpPr>
+        <p:spPr>
+          <a:xfrm>
+            <a:off x="6217920" y="2715768"/>
+            <a:ext cx="2514600" cy="411480"/>
+          </a:xfrm>
+          <a:prstGeom prst="rect">
+            <a:avLst/>
+          </a:prstGeom>
+          <a:noFill/>
+          <a:ln/>
+        </p:spPr>
+        <p:txBody>
+          <a:bodyPr wrap="square" lIns="0" tIns="0" rIns="0" bIns="0" rtlCol="0" anchor="t"/>
+          <a:lstStyle/>
+          <a:p>
+            <a:pPr algn="ctr" indent="0" marL="0">
+              <a:buNone/>
+            </a:pPr>
+            <a:r>
+              <a:rPr lang="en-US" sz="1350" b="1" dirty="0">
                 <a:solidFill>
                   <a:srgbClr val="1F1D21"/>
                 </a:solidFill>
@@ -7373,19 +7456,159 @@
                 <a:ea typeface="Times New Roman" pitchFamily="34" charset="-122"/>
                 <a:cs typeface="Times New Roman" pitchFamily="34" charset="-120"/>
               </a:rPr>
-              <a:t>Esophagus: 0.47</a:t>
+              <a:t>Result</a:t>
             </a:r>
             <a:endParaRPr lang="en-US" sz="1350" dirty="0"/>
           </a:p>
-          <a:p>
-            <a:pPr indent="0" marL="0">
+        </p:txBody>
+      </p:sp>
+      <p:sp>
+        <p:nvSpPr>
+          <p:cNvPr id="20" name="Text 18"/>
+          <p:cNvSpPr txBox="1"/>
+          <p:nvPr/>
+        </p:nvSpPr>
+        <p:spPr>
+          <a:xfrm>
+            <a:off x="6217920" y="3154680"/>
+            <a:ext cx="2514600" cy="2743200"/>
+          </a:xfrm>
+          <a:prstGeom prst="rect">
+            <a:avLst/>
+          </a:prstGeom>
+          <a:noFill/>
+          <a:ln/>
+        </p:spPr>
+        <p:txBody>
+          <a:bodyPr wrap="square" lIns="0" tIns="0" rIns="0" bIns="0" rtlCol="0" anchor="t"/>
+          <a:lstStyle/>
+          <a:p>
+            <a:pPr algn="ctr" indent="0" marL="0">
               <a:lnSpc>
-                <a:spcPct val="118000"/>
+                <a:spcPct val="115000"/>
               </a:lnSpc>
               <a:buNone/>
             </a:pPr>
             <a:r>
-              <a:rPr lang="en-US" sz="1350" dirty="0">
+              <a:rPr lang="en-US" sz="1200" dirty="0">
+                <a:solidFill>
+                  <a:srgbClr val="6B6B6B"/>
+                </a:solidFill>
+                <a:latin typeface="Times New Roman" pitchFamily="34" charset="0"/>
+                <a:ea typeface="Times New Roman" pitchFamily="34" charset="-122"/>
+                <a:cs typeface="Times New Roman" pitchFamily="34" charset="-120"/>
+              </a:rPr>
+              <a:t>[TODO] vs. baseline — from the run in progress</a:t>
+            </a:r>
+            <a:endParaRPr lang="en-US" sz="1200" dirty="0"/>
+          </a:p>
+        </p:txBody>
+      </p:sp>
+      <p:sp>
+        <p:nvSpPr>
+          <p:cNvPr id="21" name="Shape 19"/>
+          <p:cNvSpPr/>
+          <p:nvPr/>
+        </p:nvSpPr>
+        <p:spPr>
+          <a:xfrm>
+            <a:off x="8741664" y="2194560"/>
+            <a:ext cx="237744" cy="128016"/>
+          </a:xfrm>
+          <a:prstGeom prst="rightArrow">
+            <a:avLst/>
+          </a:prstGeom>
+          <a:solidFill>
+            <a:srgbClr val="D9D9D9"/>
+          </a:solidFill>
+          <a:ln/>
+        </p:spPr>
+      </p:sp>
+      <p:sp>
+        <p:nvSpPr>
+          <p:cNvPr id="22" name="Shape 20"/>
+          <p:cNvSpPr/>
+          <p:nvPr/>
+        </p:nvSpPr>
+        <p:spPr>
+          <a:xfrm>
+            <a:off x="9971532" y="1965960"/>
+            <a:ext cx="585216" cy="585216"/>
+          </a:xfrm>
+          <a:prstGeom prst="ellipse">
+            <a:avLst/>
+          </a:prstGeom>
+          <a:solidFill>
+            <a:srgbClr val="751B68"/>
+          </a:solidFill>
+          <a:ln/>
+        </p:spPr>
+      </p:sp>
+      <p:sp>
+        <p:nvSpPr>
+          <p:cNvPr id="23" name="Text 21"/>
+          <p:cNvSpPr txBox="1"/>
+          <p:nvPr/>
+        </p:nvSpPr>
+        <p:spPr>
+          <a:xfrm>
+            <a:off x="9971532" y="1965960"/>
+            <a:ext cx="585216" cy="585216"/>
+          </a:xfrm>
+          <a:prstGeom prst="rect">
+            <a:avLst/>
+          </a:prstGeom>
+          <a:noFill/>
+          <a:ln/>
+        </p:spPr>
+        <p:txBody>
+          <a:bodyPr wrap="square" lIns="0" tIns="0" rIns="0" bIns="0" rtlCol="0" anchor="ctr"/>
+          <a:lstStyle/>
+          <a:p>
+            <a:pPr algn="ctr" indent="0" marL="0">
+              <a:buNone/>
+            </a:pPr>
+            <a:r>
+              <a:rPr lang="en-US" sz="2000" b="1" dirty="0">
+                <a:solidFill>
+                  <a:srgbClr val="FFFFFF"/>
+                </a:solidFill>
+                <a:latin typeface="Times New Roman" pitchFamily="34" charset="0"/>
+                <a:ea typeface="Times New Roman" pitchFamily="34" charset="-122"/>
+                <a:cs typeface="Times New Roman" pitchFamily="34" charset="-120"/>
+              </a:rPr>
+              <a:t>4</a:t>
+            </a:r>
+            <a:endParaRPr lang="en-US" sz="2000" dirty="0"/>
+          </a:p>
+        </p:txBody>
+      </p:sp>
+      <p:sp>
+        <p:nvSpPr>
+          <p:cNvPr id="24" name="Text 22"/>
+          <p:cNvSpPr txBox="1"/>
+          <p:nvPr/>
+        </p:nvSpPr>
+        <p:spPr>
+          <a:xfrm>
+            <a:off x="9006840" y="2715768"/>
+            <a:ext cx="2514600" cy="411480"/>
+          </a:xfrm>
+          <a:prstGeom prst="rect">
+            <a:avLst/>
+          </a:prstGeom>
+          <a:noFill/>
+          <a:ln/>
+        </p:spPr>
+        <p:txBody>
+          <a:bodyPr wrap="square" lIns="0" tIns="0" rIns="0" bIns="0" rtlCol="0" anchor="t"/>
+          <a:lstStyle/>
+          <a:p>
+            <a:pPr algn="ctr" indent="0" marL="0">
+              <a:buNone/>
+            </a:pPr>
+            <a:r>
+              <a:rPr lang="en-US" sz="1350" b="1" dirty="0">
                 <a:solidFill>
                   <a:srgbClr val="1F1D21"/>
                 </a:solidFill>
@@ -7393,35 +7616,57 @@
                 <a:ea typeface="Times New Roman" pitchFamily="34" charset="-122"/>
                 <a:cs typeface="Times New Roman" pitchFamily="34" charset="-120"/>
               </a:rPr>
-              <a:t>Heart: 0.58</a:t>
+              <a:t>Next steps</a:t>
             </a:r>
             <a:endParaRPr lang="en-US" sz="1350" dirty="0"/>
           </a:p>
-          <a:p>
-            <a:pPr indent="0" marL="0">
+        </p:txBody>
+      </p:sp>
+      <p:sp>
+        <p:nvSpPr>
+          <p:cNvPr id="25" name="Text 23"/>
+          <p:cNvSpPr txBox="1"/>
+          <p:nvPr/>
+        </p:nvSpPr>
+        <p:spPr>
+          <a:xfrm>
+            <a:off x="9006840" y="3154680"/>
+            <a:ext cx="2514600" cy="2743200"/>
+          </a:xfrm>
+          <a:prstGeom prst="rect">
+            <a:avLst/>
+          </a:prstGeom>
+          <a:noFill/>
+          <a:ln/>
+        </p:spPr>
+        <p:txBody>
+          <a:bodyPr wrap="square" lIns="0" tIns="0" rIns="0" bIns="0" rtlCol="0" anchor="t"/>
+          <a:lstStyle/>
+          <a:p>
+            <a:pPr algn="ctr" indent="0" marL="0">
               <a:lnSpc>
-                <a:spcPct val="118000"/>
+                <a:spcPct val="115000"/>
               </a:lnSpc>
               <a:buNone/>
             </a:pPr>
             <a:r>
-              <a:rPr lang="en-US" sz="1350" dirty="0">
-                <a:solidFill>
-                  <a:srgbClr val="1F1D21"/>
-                </a:solidFill>
-                <a:latin typeface="Times New Roman" pitchFamily="34" charset="0"/>
-                <a:ea typeface="Times New Roman" pitchFamily="34" charset="-122"/>
-                <a:cs typeface="Times New Roman" pitchFamily="34" charset="-120"/>
-              </a:rPr>
-              <a:t>Trachea: 0.50</a:t>
-            </a:r>
-            <a:endParaRPr lang="en-US" sz="1350" dirty="0"/>
+              <a:rPr lang="en-US" sz="1200" dirty="0">
+                <a:solidFill>
+                  <a:srgbClr val="6B6B6B"/>
+                </a:solidFill>
+                <a:latin typeface="Times New Roman" pitchFamily="34" charset="0"/>
+                <a:ea typeface="Times New Roman" pitchFamily="34" charset="-122"/>
+                <a:cs typeface="Times New Roman" pitchFamily="34" charset="-120"/>
+              </a:rPr>
+              <a:t>[TODO] one or two concrete next experiments</a:t>
+            </a:r>
+            <a:endParaRPr lang="en-US" sz="1200" dirty="0"/>
           </a:p>
         </p:txBody>
       </p:sp>
       <p:pic>
         <p:nvPicPr>
-          <p:cNvPr id="12" name="Image 0" descr="/Users/bellavg/ProjectsMSc/ai4mi_project/deck/assets/uva_logo.png">    </p:cNvPr>
+          <p:cNvPr id="26" name="Image 0" descr="/Users/bellavg/ProjectsMSc/ai4mi_project/.claude/worktrees/segthor-presentation-midpoint-825c66/deck/assets/uva_logo.png">    </p:cNvPr>
           <p:cNvPicPr>
             <a:picLocks noChangeAspect="1"/>
           </p:cNvPicPr>
@@ -7445,7 +7690,7 @@
       </p:pic>
       <p:sp>
         <p:nvSpPr>
-          <p:cNvPr id="13" name="Text 10"/>
+          <p:cNvPr id="27" name="Text 24"/>
           <p:cNvSpPr txBox="1"/>
           <p:nvPr/>
         </p:nvSpPr>

--- a/deck/midproject_outline.pptx
+++ b/deck/midproject_outline.pptx
@@ -2776,7 +2776,7 @@
         <p:spPr>
           <a:xfrm>
             <a:off x="640080" y="1783080"/>
-            <a:ext cx="10607040" cy="4206240"/>
+            <a:ext cx="3108960" cy="4206240"/>
           </a:xfrm>
           <a:prstGeom prst="rect">
             <a:avLst/>
@@ -2860,9 +2860,130 @@
           </a:p>
         </p:txBody>
       </p:sp>
+      <p:sp>
+        <p:nvSpPr>
+          <p:cNvPr id="8" name="Shape 6"/>
+          <p:cNvSpPr/>
+          <p:nvPr/>
+        </p:nvSpPr>
+        <p:spPr>
+          <a:xfrm>
+            <a:off x="640080" y="3931920"/>
+            <a:ext cx="3108960" cy="1188720"/>
+          </a:xfrm>
+          <a:prstGeom prst="rect">
+            <a:avLst/>
+          </a:prstGeom>
+          <a:solidFill>
+            <a:srgbClr val="F7E8EC"/>
+          </a:solidFill>
+          <a:ln/>
+        </p:spPr>
+      </p:sp>
+      <p:sp>
+        <p:nvSpPr>
+          <p:cNvPr id="9" name="Shape 7"/>
+          <p:cNvSpPr/>
+          <p:nvPr/>
+        </p:nvSpPr>
+        <p:spPr>
+          <a:xfrm>
+            <a:off x="640080" y="3931920"/>
+            <a:ext cx="54864" cy="1188720"/>
+          </a:xfrm>
+          <a:prstGeom prst="rect">
+            <a:avLst/>
+          </a:prstGeom>
+          <a:solidFill>
+            <a:srgbClr val="BC0031"/>
+          </a:solidFill>
+          <a:ln/>
+        </p:spPr>
+      </p:sp>
+      <p:sp>
+        <p:nvSpPr>
+          <p:cNvPr id="10" name="Text 8"/>
+          <p:cNvSpPr txBox="1"/>
+          <p:nvPr/>
+        </p:nvSpPr>
+        <p:spPr>
+          <a:xfrm>
+            <a:off x="914400" y="4114800"/>
+            <a:ext cx="2560320" cy="274320"/>
+          </a:xfrm>
+          <a:prstGeom prst="rect">
+            <a:avLst/>
+          </a:prstGeom>
+          <a:noFill/>
+          <a:ln/>
+        </p:spPr>
+        <p:txBody>
+          <a:bodyPr wrap="square" lIns="0" tIns="0" rIns="0" bIns="0" rtlCol="0" anchor="ctr"/>
+          <a:lstStyle/>
+          <a:p>
+            <a:pPr indent="0" marL="0">
+              <a:buNone/>
+            </a:pPr>
+            <a:r>
+              <a:rPr lang="en-US" sz="1100" b="1" spc="100" kern="0" dirty="0">
+                <a:solidFill>
+                  <a:srgbClr val="BC0031"/>
+                </a:solidFill>
+                <a:latin typeface="Times New Roman" pitchFamily="34" charset="0"/>
+                <a:ea typeface="Times New Roman" pitchFamily="34" charset="-122"/>
+                <a:cs typeface="Times New Roman" pitchFamily="34" charset="-120"/>
+              </a:rPr>
+              <a:t>TAKEAWAY</a:t>
+            </a:r>
+            <a:endParaRPr lang="en-US" sz="1100" dirty="0"/>
+          </a:p>
+        </p:txBody>
+      </p:sp>
+      <p:sp>
+        <p:nvSpPr>
+          <p:cNvPr id="11" name="Text 9"/>
+          <p:cNvSpPr txBox="1"/>
+          <p:nvPr/>
+        </p:nvSpPr>
+        <p:spPr>
+          <a:xfrm>
+            <a:off x="914400" y="4434840"/>
+            <a:ext cx="2560320" cy="502920"/>
+          </a:xfrm>
+          <a:prstGeom prst="rect">
+            <a:avLst/>
+          </a:prstGeom>
+          <a:noFill/>
+          <a:ln/>
+        </p:spPr>
+        <p:txBody>
+          <a:bodyPr wrap="square" lIns="0" tIns="0" rIns="0" bIns="0" rtlCol="0" anchor="t"/>
+          <a:lstStyle/>
+          <a:p>
+            <a:pPr indent="0" marL="0">
+              <a:lnSpc>
+                <a:spcPct val="118000"/>
+              </a:lnSpc>
+              <a:buNone/>
+            </a:pPr>
+            <a:r>
+              <a:rPr lang="en-US" sz="1350" dirty="0">
+                <a:solidFill>
+                  <a:srgbClr val="1F1D21"/>
+                </a:solidFill>
+                <a:latin typeface="Times New Roman" pitchFamily="34" charset="0"/>
+                <a:ea typeface="Times New Roman" pitchFamily="34" charset="-122"/>
+                <a:cs typeface="Times New Roman" pitchFamily="34" charset="-120"/>
+              </a:rPr>
+              <a:t>[TODO] one-sentence clinical takeaway</a:t>
+            </a:r>
+            <a:endParaRPr lang="en-US" sz="1350" dirty="0"/>
+          </a:p>
+        </p:txBody>
+      </p:sp>
       <p:pic>
         <p:nvPicPr>
-          <p:cNvPr id="8" name="Image 0" descr="/Users/bellavg/ProjectsMSc/ai4mi_project/.claude/worktrees/segthor-presentation-midpoint-825c66/deck/assets/uva_logo.png">    </p:cNvPr>
+          <p:cNvPr id="12" name="Image 0" descr="/Users/bellavg/ProjectsMSc/ai4mi_project/.claude/worktrees/segthor-presentation-midpoint-825c66/figures/comparison/label_example_2D.png">    </p:cNvPr>
           <p:cNvPicPr>
             <a:picLocks noChangeAspect="1"/>
           </p:cNvPicPr>
@@ -2870,6 +2991,91 @@
         </p:nvPicPr>
         <p:blipFill>
           <a:blip r:embed="rId1"/>
+          <a:srcRect l="0" r="0" t="0" b="0"/>
+          <a:stretch/>
+        </p:blipFill>
+        <p:spPr>
+          <a:xfrm>
+            <a:off x="4114800" y="1783080"/>
+            <a:ext cx="5010614" cy="3617186"/>
+          </a:xfrm>
+          <a:prstGeom prst="rect">
+            <a:avLst/>
+          </a:prstGeom>
+        </p:spPr>
+      </p:pic>
+      <p:pic>
+        <p:nvPicPr>
+          <p:cNvPr id="13" name="Image 1" descr="/Users/bellavg/ProjectsMSc/ai4mi_project/.claude/worktrees/segthor-presentation-midpoint-825c66/figures/comparison/label_example_3D.png">    </p:cNvPr>
+          <p:cNvPicPr>
+            <a:picLocks noChangeAspect="1"/>
+          </p:cNvPicPr>
+          <p:nvPr/>
+        </p:nvPicPr>
+        <p:blipFill>
+          <a:blip r:embed="rId2"/>
+          <a:srcRect l="0" r="0" t="0" b="0"/>
+          <a:stretch/>
+        </p:blipFill>
+        <p:spPr>
+          <a:xfrm>
+            <a:off x="9280862" y="1783080"/>
+            <a:ext cx="2268010" cy="3617186"/>
+          </a:xfrm>
+          <a:prstGeom prst="rect">
+            <a:avLst/>
+          </a:prstGeom>
+        </p:spPr>
+      </p:pic>
+      <p:sp>
+        <p:nvSpPr>
+          <p:cNvPr id="14" name="Text 10"/>
+          <p:cNvSpPr txBox="1"/>
+          <p:nvPr/>
+        </p:nvSpPr>
+        <p:spPr>
+          <a:xfrm>
+            <a:off x="4114800" y="5509994"/>
+            <a:ext cx="7434072" cy="320040"/>
+          </a:xfrm>
+          <a:prstGeom prst="rect">
+            <a:avLst/>
+          </a:prstGeom>
+          <a:noFill/>
+          <a:ln/>
+        </p:spPr>
+        <p:txBody>
+          <a:bodyPr wrap="square" lIns="0" tIns="0" rIns="0" bIns="0" rtlCol="0" anchor="ctr"/>
+          <a:lstStyle/>
+          <a:p>
+            <a:pPr indent="0" marL="0">
+              <a:buNone/>
+            </a:pPr>
+            <a:r>
+              <a:rPr lang="en-US" sz="1100" i="1" dirty="0">
+                <a:solidFill>
+                  <a:srgbClr val="6B6B6B"/>
+                </a:solidFill>
+                <a:latin typeface="Times New Roman" pitchFamily="34" charset="0"/>
+                <a:ea typeface="Times New Roman" pitchFamily="34" charset="-122"/>
+                <a:cs typeface="Times New Roman" pitchFamily="34" charset="-120"/>
+              </a:rPr>
+              <a:t>Patient_18: the four organs to segment, as an axial slice (102 of 183) and as 3D surfaces</a:t>
+            </a:r>
+            <a:endParaRPr lang="en-US" sz="1100" dirty="0"/>
+          </a:p>
+        </p:txBody>
+      </p:sp>
+      <p:pic>
+        <p:nvPicPr>
+          <p:cNvPr id="15" name="Image 2" descr="/Users/bellavg/ProjectsMSc/ai4mi_project/.claude/worktrees/segthor-presentation-midpoint-825c66/deck/assets/uva_logo.png">    </p:cNvPr>
+          <p:cNvPicPr>
+            <a:picLocks noChangeAspect="1"/>
+          </p:cNvPicPr>
+          <p:nvPr/>
+        </p:nvPicPr>
+        <p:blipFill>
+          <a:blip r:embed="rId3"/>
           <a:stretch>
             <a:fillRect/>
           </a:stretch>
@@ -2886,7 +3092,7 @@
       </p:pic>
       <p:sp>
         <p:nvSpPr>
-          <p:cNvPr id="9" name="Text 6"/>
+          <p:cNvPr id="16" name="Text 11"/>
           <p:cNvSpPr txBox="1"/>
           <p:nvPr/>
         </p:nvSpPr>
@@ -3062,7 +3268,7 @@
         <p:spPr>
           <a:xfrm>
             <a:off x="640080" y="658368"/>
-            <a:ext cx="10881360" cy="502920"/>
+            <a:ext cx="10881360" cy="822960"/>
           </a:xfrm>
           <a:prstGeom prst="rect">
             <a:avLst/>
@@ -3092,38 +3298,35 @@
           </a:p>
         </p:txBody>
       </p:sp>
-      <p:pic>
-        <p:nvPicPr>
-          <p:cNvPr id="6" name="Image 0" descr="/Users/bellavg/ProjectsMSc/ai4mi_project/.claude/worktrees/segthor-presentation-midpoint-825c66/figures/comparison/connected_components.png">    </p:cNvPr>
-          <p:cNvPicPr>
-            <a:picLocks noChangeAspect="1"/>
-          </p:cNvPicPr>
-          <p:nvPr/>
-        </p:nvPicPr>
-        <p:blipFill>
-          <a:blip r:embed="rId1"/>
-          <a:srcRect l="0" r="0" t="0" b="0"/>
-          <a:stretch/>
-        </p:blipFill>
-        <p:spPr>
-          <a:xfrm>
-            <a:off x="4114800" y="1234440"/>
-            <a:ext cx="7434072" cy="3382503"/>
-          </a:xfrm>
-          <a:prstGeom prst="rect">
-            <a:avLst/>
-          </a:prstGeom>
-        </p:spPr>
-      </p:pic>
-      <p:sp>
-        <p:nvSpPr>
-          <p:cNvPr id="7" name="Text 4"/>
-          <p:cNvSpPr txBox="1"/>
-          <p:nvPr/>
-        </p:nvSpPr>
-        <p:spPr>
-          <a:xfrm>
-            <a:off x="640080" y="1234440"/>
+      <p:sp>
+        <p:nvSpPr>
+          <p:cNvPr id="6" name="Shape 4"/>
+          <p:cNvSpPr/>
+          <p:nvPr/>
+        </p:nvSpPr>
+        <p:spPr>
+          <a:xfrm>
+            <a:off x="658368" y="1463040"/>
+            <a:ext cx="1005840" cy="32004"/>
+          </a:xfrm>
+          <a:prstGeom prst="rect">
+            <a:avLst/>
+          </a:prstGeom>
+          <a:solidFill>
+            <a:srgbClr val="BC0031"/>
+          </a:solidFill>
+          <a:ln/>
+        </p:spPr>
+      </p:sp>
+      <p:sp>
+        <p:nvSpPr>
+          <p:cNvPr id="7" name="Text 5"/>
+          <p:cNvSpPr txBox="1"/>
+          <p:nvPr/>
+        </p:nvSpPr>
+        <p:spPr>
+          <a:xfrm>
+            <a:off x="640080" y="1783080"/>
             <a:ext cx="3108960" cy="256032"/>
           </a:xfrm>
           <a:prstGeom prst="rect">
@@ -3156,14 +3359,14 @@
       </p:sp>
       <p:sp>
         <p:nvSpPr>
-          <p:cNvPr id="8" name="Text 5"/>
-          <p:cNvSpPr txBox="1"/>
-          <p:nvPr/>
-        </p:nvSpPr>
-        <p:spPr>
-          <a:xfrm>
-            <a:off x="640080" y="1527048"/>
-            <a:ext cx="3108960" cy="1164717"/>
+          <p:cNvPr id="8" name="Text 6"/>
+          <p:cNvSpPr txBox="1"/>
+          <p:nvPr/>
+        </p:nvSpPr>
+        <p:spPr>
+          <a:xfrm>
+            <a:off x="640080" y="2075688"/>
+            <a:ext cx="3108960" cy="1046988"/>
           </a:xfrm>
           <a:prstGeom prst="rect">
             <a:avLst/>
@@ -3194,7 +3397,7 @@
                 <a:ea typeface="Times New Roman" pitchFamily="34" charset="-122"/>
                 <a:cs typeface="Times New Roman" pitchFamily="34" charset="-120"/>
               </a:rPr>
-              <a:t>Connected pieces per label, for all patients: % of axial slices (2D) or patients (3D) with 1, 2 or 3+ pieces</a:t>
+              <a:t>Patient_02: axial slice 111 and 3D view</a:t>
             </a:r>
             <a:endParaRPr lang="en-US" sz="1250" dirty="0"/>
           </a:p>
@@ -3218,71 +3421,10 @@
                 <a:ea typeface="Times New Roman" pitchFamily="34" charset="-122"/>
                 <a:cs typeface="Times New Roman" pitchFamily="34" charset="-120"/>
               </a:rPr>
-              <a:t>Top: aorta merged (3 labels). Bottom: aorta separate (4 labels)</a:t>
+              <a:t>Before: two pieces carry the esophagus label</a:t>
             </a:r>
             <a:endParaRPr lang="en-US" sz="1250" dirty="0"/>
           </a:p>
-        </p:txBody>
-      </p:sp>
-      <p:sp>
-        <p:nvSpPr>
-          <p:cNvPr id="9" name="Text 6"/>
-          <p:cNvSpPr txBox="1"/>
-          <p:nvPr/>
-        </p:nvSpPr>
-        <p:spPr>
-          <a:xfrm>
-            <a:off x="640080" y="2920365"/>
-            <a:ext cx="3108960" cy="256032"/>
-          </a:xfrm>
-          <a:prstGeom prst="rect">
-            <a:avLst/>
-          </a:prstGeom>
-          <a:noFill/>
-          <a:ln/>
-        </p:spPr>
-        <p:txBody>
-          <a:bodyPr wrap="square" lIns="0" tIns="0" rIns="0" bIns="0" rtlCol="0" anchor="ctr"/>
-          <a:lstStyle/>
-          <a:p>
-            <a:pPr indent="0" marL="0">
-              <a:buNone/>
-            </a:pPr>
-            <a:r>
-              <a:rPr lang="en-US" sz="1150" b="1" spc="100" kern="0" dirty="0">
-                <a:solidFill>
-                  <a:srgbClr val="BC0031"/>
-                </a:solidFill>
-                <a:latin typeface="Times New Roman" pitchFamily="34" charset="0"/>
-                <a:ea typeface="Times New Roman" pitchFamily="34" charset="-122"/>
-                <a:cs typeface="Times New Roman" pitchFamily="34" charset="-120"/>
-              </a:rPr>
-              <a:t>VALIDATION</a:t>
-            </a:r>
-            <a:endParaRPr lang="en-US" sz="1150" dirty="0"/>
-          </a:p>
-        </p:txBody>
-      </p:sp>
-      <p:sp>
-        <p:nvSpPr>
-          <p:cNvPr id="10" name="Text 7"/>
-          <p:cNvSpPr txBox="1"/>
-          <p:nvPr/>
-        </p:nvSpPr>
-        <p:spPr>
-          <a:xfrm>
-            <a:off x="640080" y="3212973"/>
-            <a:ext cx="3108960" cy="1729359"/>
-          </a:xfrm>
-          <a:prstGeom prst="rect">
-            <a:avLst/>
-          </a:prstGeom>
-          <a:noFill/>
-          <a:ln/>
-        </p:spPr>
-        <p:txBody>
-          <a:bodyPr wrap="square" lIns="0" tIns="0" rIns="0" bIns="0" rtlCol="0" anchor="t"/>
-          <a:lstStyle/>
           <a:p>
             <a:pPr marL="177800" indent="-177800">
               <a:lnSpc>
@@ -3303,10 +3445,71 @@
                 <a:ea typeface="Times New Roman" pitchFamily="34" charset="-122"/>
                 <a:cs typeface="Times New Roman" pitchFamily="34" charset="-120"/>
               </a:rPr>
-              <a:t>[TODO] how the mislabeling was found and fixed</a:t>
+              <a:t>After: one piece relabelled aorta</a:t>
             </a:r>
             <a:endParaRPr lang="en-US" sz="1250" dirty="0"/>
           </a:p>
+        </p:txBody>
+      </p:sp>
+      <p:sp>
+        <p:nvSpPr>
+          <p:cNvPr id="9" name="Text 7"/>
+          <p:cNvSpPr txBox="1"/>
+          <p:nvPr/>
+        </p:nvSpPr>
+        <p:spPr>
+          <a:xfrm>
+            <a:off x="640080" y="3351276"/>
+            <a:ext cx="3108960" cy="256032"/>
+          </a:xfrm>
+          <a:prstGeom prst="rect">
+            <a:avLst/>
+          </a:prstGeom>
+          <a:noFill/>
+          <a:ln/>
+        </p:spPr>
+        <p:txBody>
+          <a:bodyPr wrap="square" lIns="0" tIns="0" rIns="0" bIns="0" rtlCol="0" anchor="ctr"/>
+          <a:lstStyle/>
+          <a:p>
+            <a:pPr indent="0" marL="0">
+              <a:buNone/>
+            </a:pPr>
+            <a:r>
+              <a:rPr lang="en-US" sz="1150" b="1" spc="100" kern="0" dirty="0">
+                <a:solidFill>
+                  <a:srgbClr val="BC0031"/>
+                </a:solidFill>
+                <a:latin typeface="Times New Roman" pitchFamily="34" charset="0"/>
+                <a:ea typeface="Times New Roman" pitchFamily="34" charset="-122"/>
+                <a:cs typeface="Times New Roman" pitchFamily="34" charset="-120"/>
+              </a:rPr>
+              <a:t>VALIDATION</a:t>
+            </a:r>
+            <a:endParaRPr lang="en-US" sz="1150" dirty="0"/>
+          </a:p>
+        </p:txBody>
+      </p:sp>
+      <p:sp>
+        <p:nvSpPr>
+          <p:cNvPr id="10" name="Text 8"/>
+          <p:cNvSpPr txBox="1"/>
+          <p:nvPr/>
+        </p:nvSpPr>
+        <p:spPr>
+          <a:xfrm>
+            <a:off x="640080" y="3643884"/>
+            <a:ext cx="3108960" cy="1729359"/>
+          </a:xfrm>
+          <a:prstGeom prst="rect">
+            <a:avLst/>
+          </a:prstGeom>
+          <a:noFill/>
+          <a:ln/>
+        </p:spPr>
+        <p:txBody>
+          <a:bodyPr wrap="square" lIns="0" tIns="0" rIns="0" bIns="0" rtlCol="0" anchor="t"/>
+          <a:lstStyle/>
           <a:p>
             <a:pPr marL="177800" indent="-177800">
               <a:lnSpc>
@@ -3327,7 +3530,7 @@
                 <a:ea typeface="Times New Roman" pitchFamily="34" charset="-122"/>
                 <a:cs typeface="Times New Roman" pitchFamily="34" charset="-120"/>
               </a:rPr>
-              <a:t>[TODO] real per-class voxel share, now corrected — as numbers, not a bar chart</a:t>
+              <a:t>[TODO] how the mislabeling was found and fixed</a:t>
             </a:r>
             <a:endParaRPr lang="en-US" sz="1250" dirty="0"/>
           </a:p>
@@ -3351,7 +3554,7 @@
                 <a:ea typeface="Times New Roman" pitchFamily="34" charset="-122"/>
                 <a:cs typeface="Times New Roman" pitchFamily="34" charset="-120"/>
               </a:rPr>
-              <a:t>[TODO] any other integrity checks run (e.g. alignment)</a:t>
+              <a:t>[TODO] real per-class voxel share, now corrected — as numbers, not a bar chart</a:t>
             </a:r>
             <a:endParaRPr lang="en-US" sz="1250" dirty="0"/>
           </a:p>
@@ -3375,6 +3578,30 @@
                 <a:ea typeface="Times New Roman" pitchFamily="34" charset="-122"/>
                 <a:cs typeface="Times New Roman" pitchFamily="34" charset="-120"/>
               </a:rPr>
+              <a:t>[TODO] any other integrity checks run (e.g. alignment)</a:t>
+            </a:r>
+            <a:endParaRPr lang="en-US" sz="1250" dirty="0"/>
+          </a:p>
+          <a:p>
+            <a:pPr marL="177800" indent="-177800">
+              <a:lnSpc>
+                <a:spcPct val="115000"/>
+              </a:lnSpc>
+              <a:spcAft>
+                <a:spcPts val="500"/>
+              </a:spcAft>
+              <a:buSzPct val="100000"/>
+              <a:buChar char="▪"/>
+            </a:pPr>
+            <a:r>
+              <a:rPr lang="en-US" sz="1250" dirty="0">
+                <a:solidFill>
+                  <a:srgbClr val="1F1D21"/>
+                </a:solidFill>
+                <a:latin typeface="Times New Roman" pitchFamily="34" charset="0"/>
+                <a:ea typeface="Times New Roman" pitchFamily="34" charset="-122"/>
+                <a:cs typeface="Times New Roman" pitchFamily="34" charset="-120"/>
+              </a:rPr>
               <a:t>[TODO] fragmentation risk, if any</a:t>
             </a:r>
             <a:endParaRPr lang="en-US" sz="1250" dirty="0"/>
@@ -3383,13 +3610,157 @@
       </p:sp>
       <p:sp>
         <p:nvSpPr>
-          <p:cNvPr id="11" name="Shape 8"/>
+          <p:cNvPr id="11" name="Text 9"/>
+          <p:cNvSpPr txBox="1"/>
+          <p:nvPr/>
+        </p:nvSpPr>
+        <p:spPr>
+          <a:xfrm>
+            <a:off x="4114800" y="1783080"/>
+            <a:ext cx="3374136" cy="256032"/>
+          </a:xfrm>
+          <a:prstGeom prst="rect">
+            <a:avLst/>
+          </a:prstGeom>
+          <a:noFill/>
+          <a:ln/>
+        </p:spPr>
+        <p:txBody>
+          <a:bodyPr wrap="square" lIns="0" tIns="0" rIns="0" bIns="0" rtlCol="0" anchor="ctr"/>
+          <a:lstStyle/>
+          <a:p>
+            <a:pPr indent="0" marL="0">
+              <a:buNone/>
+            </a:pPr>
+            <a:r>
+              <a:rPr lang="en-US" sz="1150" b="1" spc="100" kern="0" dirty="0">
+                <a:solidFill>
+                  <a:srgbClr val="6B6B6B"/>
+                </a:solidFill>
+                <a:latin typeface="Times New Roman" pitchFamily="34" charset="0"/>
+                <a:ea typeface="Times New Roman" pitchFamily="34" charset="-122"/>
+                <a:cs typeface="Times New Roman" pitchFamily="34" charset="-120"/>
+              </a:rPr>
+              <a:t>BEFORE</a:t>
+            </a:r>
+            <a:endParaRPr lang="en-US" sz="1150" dirty="0"/>
+          </a:p>
+        </p:txBody>
+      </p:sp>
+      <p:pic>
+        <p:nvPicPr>
+          <p:cNvPr id="12" name="Image 0" descr="/Users/bellavg/ProjectsMSc/ai4mi_project/.claude/worktrees/segthor-presentation-midpoint-825c66/figures/comparison/label_correction_example_before.png">    </p:cNvPr>
+          <p:cNvPicPr>
+            <a:picLocks noChangeAspect="1"/>
+          </p:cNvPicPr>
+          <p:nvPr/>
+        </p:nvPicPr>
+        <p:blipFill>
+          <a:blip r:embed="rId1"/>
+          <a:srcRect l="0" r="0" t="0" b="0"/>
+          <a:stretch/>
+        </p:blipFill>
+        <p:spPr>
+          <a:xfrm>
+            <a:off x="4114800" y="2148840"/>
+            <a:ext cx="3374136" cy="1872044"/>
+          </a:xfrm>
+          <a:prstGeom prst="rect">
+            <a:avLst/>
+          </a:prstGeom>
+        </p:spPr>
+      </p:pic>
+      <p:sp>
+        <p:nvSpPr>
+          <p:cNvPr id="13" name="Text 10"/>
+          <p:cNvSpPr txBox="1"/>
+          <p:nvPr/>
+        </p:nvSpPr>
+        <p:spPr>
+          <a:xfrm>
+            <a:off x="8174736" y="1783080"/>
+            <a:ext cx="3374136" cy="256032"/>
+          </a:xfrm>
+          <a:prstGeom prst="rect">
+            <a:avLst/>
+          </a:prstGeom>
+          <a:noFill/>
+          <a:ln/>
+        </p:spPr>
+        <p:txBody>
+          <a:bodyPr wrap="square" lIns="0" tIns="0" rIns="0" bIns="0" rtlCol="0" anchor="ctr"/>
+          <a:lstStyle/>
+          <a:p>
+            <a:pPr indent="0" marL="0">
+              <a:buNone/>
+            </a:pPr>
+            <a:r>
+              <a:rPr lang="en-US" sz="1150" b="1" spc="100" kern="0" dirty="0">
+                <a:solidFill>
+                  <a:srgbClr val="BC0031"/>
+                </a:solidFill>
+                <a:latin typeface="Times New Roman" pitchFamily="34" charset="0"/>
+                <a:ea typeface="Times New Roman" pitchFamily="34" charset="-122"/>
+                <a:cs typeface="Times New Roman" pitchFamily="34" charset="-120"/>
+              </a:rPr>
+              <a:t>AFTER</a:t>
+            </a:r>
+            <a:endParaRPr lang="en-US" sz="1150" dirty="0"/>
+          </a:p>
+        </p:txBody>
+      </p:sp>
+      <p:pic>
+        <p:nvPicPr>
+          <p:cNvPr id="14" name="Image 1" descr="/Users/bellavg/ProjectsMSc/ai4mi_project/.claude/worktrees/segthor-presentation-midpoint-825c66/figures/comparison/label_correction_example_after.png">    </p:cNvPr>
+          <p:cNvPicPr>
+            <a:picLocks noChangeAspect="1"/>
+          </p:cNvPicPr>
+          <p:nvPr/>
+        </p:nvPicPr>
+        <p:blipFill>
+          <a:blip r:embed="rId2"/>
+          <a:srcRect l="0" r="0" t="0" b="0"/>
+          <a:stretch/>
+        </p:blipFill>
+        <p:spPr>
+          <a:xfrm>
+            <a:off x="8174736" y="2148840"/>
+            <a:ext cx="3374136" cy="1872044"/>
+          </a:xfrm>
+          <a:prstGeom prst="rect">
+            <a:avLst/>
+          </a:prstGeom>
+        </p:spPr>
+      </p:pic>
+      <p:sp>
+        <p:nvSpPr>
+          <p:cNvPr id="15" name="Shape 11"/>
           <p:cNvSpPr/>
           <p:nvPr/>
         </p:nvSpPr>
         <p:spPr>
           <a:xfrm>
-            <a:off x="4114800" y="4891263"/>
+            <a:off x="7603236" y="2947702"/>
+            <a:ext cx="457200" cy="274320"/>
+          </a:xfrm>
+          <a:prstGeom prst="rightArrow">
+            <a:avLst/>
+          </a:prstGeom>
+          <a:solidFill>
+            <a:srgbClr val="BC0031"/>
+          </a:solidFill>
+          <a:ln/>
+        </p:spPr>
+      </p:sp>
+      <p:sp>
+        <p:nvSpPr>
+          <p:cNvPr id="16" name="Shape 12"/>
+          <p:cNvSpPr/>
+          <p:nvPr/>
+        </p:nvSpPr>
+        <p:spPr>
+          <a:xfrm>
+            <a:off x="4114800" y="4340924"/>
             <a:ext cx="7434072" cy="1143000"/>
           </a:xfrm>
           <a:prstGeom prst="rect">
@@ -3403,13 +3774,13 @@
       </p:sp>
       <p:sp>
         <p:nvSpPr>
-          <p:cNvPr id="12" name="Shape 9"/>
+          <p:cNvPr id="17" name="Shape 13"/>
           <p:cNvSpPr/>
           <p:nvPr/>
         </p:nvSpPr>
         <p:spPr>
           <a:xfrm>
-            <a:off x="4114800" y="4891263"/>
+            <a:off x="4114800" y="4340924"/>
             <a:ext cx="54864" cy="1143000"/>
           </a:xfrm>
           <a:prstGeom prst="rect">
@@ -3423,13 +3794,13 @@
       </p:sp>
       <p:sp>
         <p:nvSpPr>
-          <p:cNvPr id="13" name="Text 10"/>
-          <p:cNvSpPr txBox="1"/>
-          <p:nvPr/>
-        </p:nvSpPr>
-        <p:spPr>
-          <a:xfrm>
-            <a:off x="4389120" y="5074143"/>
+          <p:cNvPr id="18" name="Text 14"/>
+          <p:cNvSpPr txBox="1"/>
+          <p:nvPr/>
+        </p:nvSpPr>
+        <p:spPr>
+          <a:xfrm>
+            <a:off x="4389120" y="4523804"/>
             <a:ext cx="6885432" cy="274320"/>
           </a:xfrm>
           <a:prstGeom prst="rect">
@@ -3462,13 +3833,13 @@
       </p:sp>
       <p:sp>
         <p:nvSpPr>
-          <p:cNvPr id="14" name="Text 11"/>
-          <p:cNvSpPr txBox="1"/>
-          <p:nvPr/>
-        </p:nvSpPr>
-        <p:spPr>
-          <a:xfrm>
-            <a:off x="4389120" y="5394183"/>
+          <p:cNvPr id="19" name="Text 15"/>
+          <p:cNvSpPr txBox="1"/>
+          <p:nvPr/>
+        </p:nvSpPr>
+        <p:spPr>
+          <a:xfrm>
+            <a:off x="4389120" y="4843844"/>
             <a:ext cx="6885432" cy="457200"/>
           </a:xfrm>
           <a:prstGeom prst="rect">
@@ -3504,14 +3875,14 @@
       </p:sp>
       <p:pic>
         <p:nvPicPr>
-          <p:cNvPr id="15" name="Image 1" descr="/Users/bellavg/ProjectsMSc/ai4mi_project/.claude/worktrees/segthor-presentation-midpoint-825c66/deck/assets/uva_logo.png">    </p:cNvPr>
+          <p:cNvPr id="20" name="Image 2" descr="/Users/bellavg/ProjectsMSc/ai4mi_project/.claude/worktrees/segthor-presentation-midpoint-825c66/deck/assets/uva_logo.png">    </p:cNvPr>
           <p:cNvPicPr>
             <a:picLocks noChangeAspect="1"/>
           </p:cNvPicPr>
           <p:nvPr/>
         </p:nvPicPr>
         <p:blipFill>
-          <a:blip r:embed="rId2"/>
+          <a:blip r:embed="rId3"/>
           <a:stretch>
             <a:fillRect/>
           </a:stretch>
@@ -3528,7 +3899,7 @@
       </p:pic>
       <p:sp>
         <p:nvSpPr>
-          <p:cNvPr id="16" name="Text 12"/>
+          <p:cNvPr id="21" name="Text 16"/>
           <p:cNvSpPr txBox="1"/>
           <p:nvPr/>
         </p:nvSpPr>

--- a/deck/midproject_outline.pptx
+++ b/deck/midproject_outline.pptx
@@ -2875,7 +2875,7 @@
             <a:avLst/>
           </a:prstGeom>
           <a:solidFill>
-            <a:srgbClr val="F7E8EC"/>
+            <a:srgbClr val="F0F0F0"/>
           </a:solidFill>
           <a:ln/>
         </p:spPr>
@@ -2895,7 +2895,7 @@
             <a:avLst/>
           </a:prstGeom>
           <a:solidFill>
-            <a:srgbClr val="BC0031"/>
+            <a:srgbClr val="1F1D21"/>
           </a:solidFill>
           <a:ln/>
         </p:spPr>
@@ -2927,7 +2927,7 @@
             <a:r>
               <a:rPr lang="en-US" sz="1100" b="1" spc="100" kern="0" dirty="0">
                 <a:solidFill>
-                  <a:srgbClr val="BC0031"/>
+                  <a:srgbClr val="1F1D21"/>
                 </a:solidFill>
                 <a:latin typeface="Times New Roman" pitchFamily="34" charset="0"/>
                 <a:ea typeface="Times New Roman" pitchFamily="34" charset="-122"/>

--- a/deck/midproject_outline.pptx
+++ b/deck/midproject_outline.pptx
@@ -16,9 +16,10 @@
     <p:sldId id="264" r:id="rId10"/>
     <p:sldId id="265" r:id="rId11"/>
     <p:sldId id="266" r:id="rId12"/>
+    <p:sldId id="267" r:id="rId13"/>
   </p:sldIdLst>
   <p:notesMasterIdLst>
-    <p:notesMasterId r:id="rId13"/>
+    <p:notesMasterId r:id="rId14"/>
   </p:notesMasterIdLst>
   <p:sldSz cx="12192000" cy="6858000"/>
   <p:notesSz cx="6858000" cy="12192000"/>
@@ -712,6 +713,94 @@
             <a:fld id="{F7021451-1387-4CA6-816F-3879F97B5CBC}" type="slidenum">
               <a:rPr lang="en-US"/>
               <a:t>11</a:t>
+            </a:fld>
+            <a:endParaRPr lang="en-US"/>
+          </a:p>
+        </p:txBody>
+      </p:sp>
+    </p:spTree>
+    <p:extLst>
+      <p:ext uri="{BB962C8B-B14F-4D97-AF65-F5344CB8AC3E}">
+        <p14:creationId xmlns:p14="http://schemas.microsoft.com/office/powerpoint/2010/main" val="1024086991"/>
+      </p:ext>
+    </p:extLst>
+  </p:cSld>
+  <p:clrMapOvr>
+    <a:masterClrMapping/>
+  </p:clrMapOvr>
+</p:notes>
+</file>
+
+<file path=ppt/notesSlides/notesSlide12.xml><?xml version="1.0" encoding="utf-8"?>
+<p:notes xmlns:a="http://schemas.openxmlformats.org/drawingml/2006/main" xmlns:r="http://schemas.openxmlformats.org/officeDocument/2006/relationships" xmlns:p="http://schemas.openxmlformats.org/presentationml/2006/main">
+  <p:cSld>
+    <p:spTree>
+      <p:nvGrpSpPr>
+        <p:cNvPr id="1" name=""/>
+        <p:cNvGrpSpPr/>
+        <p:nvPr/>
+      </p:nvGrpSpPr>
+      <p:grpSpPr>
+        <a:xfrm>
+          <a:off x="0" y="0"/>
+          <a:ext cx="0" cy="0"/>
+          <a:chOff x="0" y="0"/>
+          <a:chExt cx="0" cy="0"/>
+        </a:xfrm>
+      </p:grpSpPr>
+      <p:sp>
+        <p:nvSpPr>
+          <p:cNvPr id="2" name="Slide Image Placeholder 1"/>
+          <p:cNvSpPr>
+            <a:spLocks noGrp="1" noRot="1" noChangeAspect="1"/>
+          </p:cNvSpPr>
+          <p:nvPr>
+            <p:ph type="sldImg"/>
+          </p:nvPr>
+        </p:nvSpPr>
+        <p:spPr/>
+      </p:sp>
+      <p:sp>
+        <p:nvSpPr>
+          <p:cNvPr id="3" name="Notes Placeholder 2"/>
+          <p:cNvSpPr>
+            <a:spLocks noGrp="1"/>
+          </p:cNvSpPr>
+          <p:nvPr>
+            <p:ph type="body" idx="1"/>
+          </p:nvPr>
+        </p:nvSpPr>
+        <p:spPr/>
+        <p:txBody>
+          <a:bodyPr/>
+          <a:lstStyle/>
+          <a:p>
+            <a:r>
+              <a:rPr lang="en-US" dirty="0"/>
+              <a:t/>
+            </a:r>
+            <a:endParaRPr lang="en-US" dirty="0"/>
+          </a:p>
+        </p:txBody>
+      </p:sp>
+      <p:sp>
+        <p:nvSpPr>
+          <p:cNvPr id="4" name="Slide Number Placeholder 3"/>
+          <p:cNvSpPr>
+            <a:spLocks noGrp="1"/>
+          </p:cNvSpPr>
+          <p:nvPr>
+            <p:ph type="sldNum" sz="quarter" idx="10"/>
+          </p:nvPr>
+        </p:nvSpPr>
+        <p:spPr/>
+        <p:txBody>
+          <a:bodyPr/>
+          <a:lstStyle/>
+          <a:p>
+            <a:fld id="{F7021451-1387-4CA6-816F-3879F97B5CBC}" type="slidenum">
+              <a:rPr lang="en-US"/>
+              <a:t>12</a:t>
             </a:fld>
             <a:endParaRPr lang="en-US"/>
           </a:p>
@@ -1999,6 +2088,878 @@
     <p:bg>
       <p:bgPr>
         <a:solidFill>
+          <a:srgbClr val="FFFFFF"/>
+        </a:solidFill>
+      </p:bgPr>
+    </p:bg>
+    <p:spTree>
+      <p:nvGrpSpPr>
+        <p:cNvPr id="1" name=""/>
+        <p:cNvGrpSpPr/>
+        <p:nvPr/>
+      </p:nvGrpSpPr>
+      <p:grpSpPr>
+        <a:xfrm>
+          <a:off x="0" y="0"/>
+          <a:ext cx="0" cy="0"/>
+          <a:chOff x="0" y="0"/>
+          <a:chExt cx="0" cy="0"/>
+        </a:xfrm>
+      </p:grpSpPr>
+      <p:sp>
+        <p:nvSpPr>
+          <p:cNvPr id="2" name="Shape 0"/>
+          <p:cNvSpPr/>
+          <p:nvPr/>
+        </p:nvSpPr>
+        <p:spPr>
+          <a:xfrm>
+            <a:off x="0" y="0"/>
+            <a:ext cx="164592" cy="6858000"/>
+          </a:xfrm>
+          <a:prstGeom prst="rect">
+            <a:avLst/>
+          </a:prstGeom>
+          <a:solidFill>
+            <a:srgbClr val="751B68"/>
+          </a:solidFill>
+          <a:ln/>
+        </p:spPr>
+      </p:sp>
+      <p:sp>
+        <p:nvSpPr>
+          <p:cNvPr id="3" name="Text 1"/>
+          <p:cNvSpPr txBox="1"/>
+          <p:nvPr/>
+        </p:nvSpPr>
+        <p:spPr>
+          <a:xfrm>
+            <a:off x="640080" y="384048"/>
+            <a:ext cx="8686800" cy="274320"/>
+          </a:xfrm>
+          <a:prstGeom prst="rect">
+            <a:avLst/>
+          </a:prstGeom>
+          <a:noFill/>
+          <a:ln/>
+        </p:spPr>
+        <p:txBody>
+          <a:bodyPr wrap="square" lIns="0" tIns="0" rIns="0" bIns="0" rtlCol="0" anchor="ctr"/>
+          <a:lstStyle/>
+          <a:p>
+            <a:pPr indent="0" marL="0">
+              <a:buNone/>
+            </a:pPr>
+            <a:r>
+              <a:rPr lang="en-US" sz="1200" b="1" spc="150" kern="0" dirty="0">
+                <a:solidFill>
+                  <a:srgbClr val="751B68"/>
+                </a:solidFill>
+                <a:latin typeface="Times New Roman" pitchFamily="34" charset="0"/>
+                <a:ea typeface="Times New Roman" pitchFamily="34" charset="-122"/>
+                <a:cs typeface="Times New Roman" pitchFamily="34" charset="-120"/>
+              </a:rPr>
+              <a:t>MODIFICATION &amp; RESULT — LARGEST RUBRIC WEIGHT</a:t>
+            </a:r>
+            <a:endParaRPr lang="en-US" sz="1200" dirty="0"/>
+          </a:p>
+        </p:txBody>
+      </p:sp>
+      <p:sp>
+        <p:nvSpPr>
+          <p:cNvPr id="4" name="Text 2"/>
+          <p:cNvSpPr txBox="1"/>
+          <p:nvPr/>
+        </p:nvSpPr>
+        <p:spPr>
+          <a:xfrm>
+            <a:off x="10424160" y="384048"/>
+            <a:ext cx="1097280" cy="274320"/>
+          </a:xfrm>
+          <a:prstGeom prst="rect">
+            <a:avLst/>
+          </a:prstGeom>
+          <a:noFill/>
+          <a:ln/>
+        </p:spPr>
+        <p:txBody>
+          <a:bodyPr wrap="square" lIns="0" tIns="0" rIns="0" bIns="0" rtlCol="0" anchor="ctr"/>
+          <a:lstStyle/>
+          <a:p>
+            <a:pPr algn="r" indent="0" marL="0">
+              <a:buNone/>
+            </a:pPr>
+            <a:r>
+              <a:rPr lang="en-US" sz="1200" b="1" dirty="0">
+                <a:solidFill>
+                  <a:srgbClr val="6B6B6B"/>
+                </a:solidFill>
+                <a:latin typeface="Times New Roman" pitchFamily="34" charset="0"/>
+                <a:ea typeface="Times New Roman" pitchFamily="34" charset="-122"/>
+                <a:cs typeface="Times New Roman" pitchFamily="34" charset="-120"/>
+              </a:rPr>
+              <a:t>2:10</a:t>
+            </a:r>
+            <a:endParaRPr lang="en-US" sz="1200" dirty="0"/>
+          </a:p>
+        </p:txBody>
+      </p:sp>
+      <p:sp>
+        <p:nvSpPr>
+          <p:cNvPr id="5" name="Text 3"/>
+          <p:cNvSpPr txBox="1"/>
+          <p:nvPr/>
+        </p:nvSpPr>
+        <p:spPr>
+          <a:xfrm>
+            <a:off x="640080" y="658368"/>
+            <a:ext cx="10881360" cy="822960"/>
+          </a:xfrm>
+          <a:prstGeom prst="rect">
+            <a:avLst/>
+          </a:prstGeom>
+          <a:noFill/>
+          <a:ln/>
+        </p:spPr>
+        <p:txBody>
+          <a:bodyPr wrap="square" lIns="0" tIns="0" rIns="0" bIns="0" rtlCol="0" anchor="ctr"/>
+          <a:lstStyle/>
+          <a:p>
+            <a:pPr indent="0" marL="0">
+              <a:buNone/>
+            </a:pPr>
+            <a:r>
+              <a:rPr lang="en-US" sz="2600" b="1" dirty="0">
+                <a:solidFill>
+                  <a:srgbClr val="1F1D21"/>
+                </a:solidFill>
+                <a:latin typeface="Times New Roman" pitchFamily="34" charset="0"/>
+                <a:ea typeface="Times New Roman" pitchFamily="34" charset="-122"/>
+                <a:cs typeface="Times New Roman" pitchFamily="34" charset="-120"/>
+              </a:rPr>
+              <a:t>Proposed Modification: Motivation, Method &amp; Preliminary Result</a:t>
+            </a:r>
+            <a:endParaRPr lang="en-US" sz="2600" dirty="0"/>
+          </a:p>
+        </p:txBody>
+      </p:sp>
+      <p:sp>
+        <p:nvSpPr>
+          <p:cNvPr id="6" name="Shape 4"/>
+          <p:cNvSpPr/>
+          <p:nvPr/>
+        </p:nvSpPr>
+        <p:spPr>
+          <a:xfrm>
+            <a:off x="658368" y="1463040"/>
+            <a:ext cx="1005840" cy="32004"/>
+          </a:xfrm>
+          <a:prstGeom prst="rect">
+            <a:avLst/>
+          </a:prstGeom>
+          <a:solidFill>
+            <a:srgbClr val="751B68"/>
+          </a:solidFill>
+          <a:ln/>
+        </p:spPr>
+      </p:sp>
+      <p:sp>
+        <p:nvSpPr>
+          <p:cNvPr id="7" name="Shape 5"/>
+          <p:cNvSpPr/>
+          <p:nvPr/>
+        </p:nvSpPr>
+        <p:spPr>
+          <a:xfrm>
+            <a:off x="1604772" y="1965960"/>
+            <a:ext cx="585216" cy="585216"/>
+          </a:xfrm>
+          <a:prstGeom prst="ellipse">
+            <a:avLst/>
+          </a:prstGeom>
+          <a:solidFill>
+            <a:srgbClr val="751B68"/>
+          </a:solidFill>
+          <a:ln/>
+        </p:spPr>
+      </p:sp>
+      <p:sp>
+        <p:nvSpPr>
+          <p:cNvPr id="8" name="Text 6"/>
+          <p:cNvSpPr txBox="1"/>
+          <p:nvPr/>
+        </p:nvSpPr>
+        <p:spPr>
+          <a:xfrm>
+            <a:off x="1604772" y="1965960"/>
+            <a:ext cx="585216" cy="585216"/>
+          </a:xfrm>
+          <a:prstGeom prst="rect">
+            <a:avLst/>
+          </a:prstGeom>
+          <a:noFill/>
+          <a:ln/>
+        </p:spPr>
+        <p:txBody>
+          <a:bodyPr wrap="square" lIns="0" tIns="0" rIns="0" bIns="0" rtlCol="0" anchor="ctr"/>
+          <a:lstStyle/>
+          <a:p>
+            <a:pPr algn="ctr" indent="0" marL="0">
+              <a:buNone/>
+            </a:pPr>
+            <a:r>
+              <a:rPr lang="en-US" sz="2000" b="1" dirty="0">
+                <a:solidFill>
+                  <a:srgbClr val="FFFFFF"/>
+                </a:solidFill>
+                <a:latin typeface="Times New Roman" pitchFamily="34" charset="0"/>
+                <a:ea typeface="Times New Roman" pitchFamily="34" charset="-122"/>
+                <a:cs typeface="Times New Roman" pitchFamily="34" charset="-120"/>
+              </a:rPr>
+              <a:t>1</a:t>
+            </a:r>
+            <a:endParaRPr lang="en-US" sz="2000" dirty="0"/>
+          </a:p>
+        </p:txBody>
+      </p:sp>
+      <p:sp>
+        <p:nvSpPr>
+          <p:cNvPr id="9" name="Text 7"/>
+          <p:cNvSpPr txBox="1"/>
+          <p:nvPr/>
+        </p:nvSpPr>
+        <p:spPr>
+          <a:xfrm>
+            <a:off x="640080" y="2715768"/>
+            <a:ext cx="2514600" cy="411480"/>
+          </a:xfrm>
+          <a:prstGeom prst="rect">
+            <a:avLst/>
+          </a:prstGeom>
+          <a:noFill/>
+          <a:ln/>
+        </p:spPr>
+        <p:txBody>
+          <a:bodyPr wrap="square" lIns="0" tIns="0" rIns="0" bIns="0" rtlCol="0" anchor="t"/>
+          <a:lstStyle/>
+          <a:p>
+            <a:pPr algn="ctr" indent="0" marL="0">
+              <a:buNone/>
+            </a:pPr>
+            <a:r>
+              <a:rPr lang="en-US" sz="1350" b="1" dirty="0">
+                <a:solidFill>
+                  <a:srgbClr val="1F1D21"/>
+                </a:solidFill>
+                <a:latin typeface="Times New Roman" pitchFamily="34" charset="0"/>
+                <a:ea typeface="Times New Roman" pitchFamily="34" charset="-122"/>
+                <a:cs typeface="Times New Roman" pitchFamily="34" charset="-120"/>
+              </a:rPr>
+              <a:t>Motivation</a:t>
+            </a:r>
+            <a:endParaRPr lang="en-US" sz="1350" dirty="0"/>
+          </a:p>
+        </p:txBody>
+      </p:sp>
+      <p:sp>
+        <p:nvSpPr>
+          <p:cNvPr id="10" name="Text 8"/>
+          <p:cNvSpPr txBox="1"/>
+          <p:nvPr/>
+        </p:nvSpPr>
+        <p:spPr>
+          <a:xfrm>
+            <a:off x="640080" y="3154680"/>
+            <a:ext cx="2514600" cy="2743200"/>
+          </a:xfrm>
+          <a:prstGeom prst="rect">
+            <a:avLst/>
+          </a:prstGeom>
+          <a:noFill/>
+          <a:ln/>
+        </p:spPr>
+        <p:txBody>
+          <a:bodyPr wrap="square" lIns="0" tIns="0" rIns="0" bIns="0" rtlCol="0" anchor="t"/>
+          <a:lstStyle/>
+          <a:p>
+            <a:pPr algn="ctr" indent="0" marL="0">
+              <a:lnSpc>
+                <a:spcPct val="115000"/>
+              </a:lnSpc>
+              <a:buNone/>
+            </a:pPr>
+            <a:r>
+              <a:rPr lang="en-US" sz="1200" dirty="0">
+                <a:solidFill>
+                  <a:srgbClr val="6B6B6B"/>
+                </a:solidFill>
+                <a:latin typeface="Times New Roman" pitchFamily="34" charset="0"/>
+                <a:ea typeface="Times New Roman" pitchFamily="34" charset="-122"/>
+                <a:cs typeface="Times New Roman" pitchFamily="34" charset="-120"/>
+              </a:rPr>
+              <a:t>[TODO], tied back to an exploration finding (slides 4–6)</a:t>
+            </a:r>
+            <a:endParaRPr lang="en-US" sz="1200" dirty="0"/>
+          </a:p>
+        </p:txBody>
+      </p:sp>
+      <p:sp>
+        <p:nvSpPr>
+          <p:cNvPr id="11" name="Shape 9"/>
+          <p:cNvSpPr/>
+          <p:nvPr/>
+        </p:nvSpPr>
+        <p:spPr>
+          <a:xfrm>
+            <a:off x="3163824" y="2194560"/>
+            <a:ext cx="237744" cy="128016"/>
+          </a:xfrm>
+          <a:prstGeom prst="rightArrow">
+            <a:avLst/>
+          </a:prstGeom>
+          <a:solidFill>
+            <a:srgbClr val="D9D9D9"/>
+          </a:solidFill>
+          <a:ln/>
+        </p:spPr>
+      </p:sp>
+      <p:sp>
+        <p:nvSpPr>
+          <p:cNvPr id="12" name="Shape 10"/>
+          <p:cNvSpPr/>
+          <p:nvPr/>
+        </p:nvSpPr>
+        <p:spPr>
+          <a:xfrm>
+            <a:off x="4393692" y="1965960"/>
+            <a:ext cx="585216" cy="585216"/>
+          </a:xfrm>
+          <a:prstGeom prst="ellipse">
+            <a:avLst/>
+          </a:prstGeom>
+          <a:solidFill>
+            <a:srgbClr val="751B68"/>
+          </a:solidFill>
+          <a:ln/>
+        </p:spPr>
+      </p:sp>
+      <p:sp>
+        <p:nvSpPr>
+          <p:cNvPr id="13" name="Text 11"/>
+          <p:cNvSpPr txBox="1"/>
+          <p:nvPr/>
+        </p:nvSpPr>
+        <p:spPr>
+          <a:xfrm>
+            <a:off x="4393692" y="1965960"/>
+            <a:ext cx="585216" cy="585216"/>
+          </a:xfrm>
+          <a:prstGeom prst="rect">
+            <a:avLst/>
+          </a:prstGeom>
+          <a:noFill/>
+          <a:ln/>
+        </p:spPr>
+        <p:txBody>
+          <a:bodyPr wrap="square" lIns="0" tIns="0" rIns="0" bIns="0" rtlCol="0" anchor="ctr"/>
+          <a:lstStyle/>
+          <a:p>
+            <a:pPr algn="ctr" indent="0" marL="0">
+              <a:buNone/>
+            </a:pPr>
+            <a:r>
+              <a:rPr lang="en-US" sz="2000" b="1" dirty="0">
+                <a:solidFill>
+                  <a:srgbClr val="FFFFFF"/>
+                </a:solidFill>
+                <a:latin typeface="Times New Roman" pitchFamily="34" charset="0"/>
+                <a:ea typeface="Times New Roman" pitchFamily="34" charset="-122"/>
+                <a:cs typeface="Times New Roman" pitchFamily="34" charset="-120"/>
+              </a:rPr>
+              <a:t>2</a:t>
+            </a:r>
+            <a:endParaRPr lang="en-US" sz="2000" dirty="0"/>
+          </a:p>
+        </p:txBody>
+      </p:sp>
+      <p:sp>
+        <p:nvSpPr>
+          <p:cNvPr id="14" name="Text 12"/>
+          <p:cNvSpPr txBox="1"/>
+          <p:nvPr/>
+        </p:nvSpPr>
+        <p:spPr>
+          <a:xfrm>
+            <a:off x="3429000" y="2715768"/>
+            <a:ext cx="2514600" cy="411480"/>
+          </a:xfrm>
+          <a:prstGeom prst="rect">
+            <a:avLst/>
+          </a:prstGeom>
+          <a:noFill/>
+          <a:ln/>
+        </p:spPr>
+        <p:txBody>
+          <a:bodyPr wrap="square" lIns="0" tIns="0" rIns="0" bIns="0" rtlCol="0" anchor="t"/>
+          <a:lstStyle/>
+          <a:p>
+            <a:pPr algn="ctr" indent="0" marL="0">
+              <a:buNone/>
+            </a:pPr>
+            <a:r>
+              <a:rPr lang="en-US" sz="1350" b="1" dirty="0">
+                <a:solidFill>
+                  <a:srgbClr val="1F1D21"/>
+                </a:solidFill>
+                <a:latin typeface="Times New Roman" pitchFamily="34" charset="0"/>
+                <a:ea typeface="Times New Roman" pitchFamily="34" charset="-122"/>
+                <a:cs typeface="Times New Roman" pitchFamily="34" charset="-120"/>
+              </a:rPr>
+              <a:t>Method</a:t>
+            </a:r>
+            <a:endParaRPr lang="en-US" sz="1350" dirty="0"/>
+          </a:p>
+        </p:txBody>
+      </p:sp>
+      <p:sp>
+        <p:nvSpPr>
+          <p:cNvPr id="15" name="Text 13"/>
+          <p:cNvSpPr txBox="1"/>
+          <p:nvPr/>
+        </p:nvSpPr>
+        <p:spPr>
+          <a:xfrm>
+            <a:off x="3429000" y="3154680"/>
+            <a:ext cx="2514600" cy="2743200"/>
+          </a:xfrm>
+          <a:prstGeom prst="rect">
+            <a:avLst/>
+          </a:prstGeom>
+          <a:noFill/>
+          <a:ln/>
+        </p:spPr>
+        <p:txBody>
+          <a:bodyPr wrap="square" lIns="0" tIns="0" rIns="0" bIns="0" rtlCol="0" anchor="t"/>
+          <a:lstStyle/>
+          <a:p>
+            <a:pPr algn="ctr" indent="0" marL="0">
+              <a:lnSpc>
+                <a:spcPct val="115000"/>
+              </a:lnSpc>
+              <a:buNone/>
+            </a:pPr>
+            <a:r>
+              <a:rPr lang="en-US" sz="1200" dirty="0">
+                <a:solidFill>
+                  <a:srgbClr val="6B6B6B"/>
+                </a:solidFill>
+                <a:latin typeface="Times New Roman" pitchFamily="34" charset="0"/>
+                <a:ea typeface="Times New Roman" pitchFamily="34" charset="-122"/>
+                <a:cs typeface="Times New Roman" pitchFamily="34" charset="-120"/>
+              </a:rPr>
+              <a:t>[TODO] the modification tried</a:t>
+            </a:r>
+            <a:endParaRPr lang="en-US" sz="1200" dirty="0"/>
+          </a:p>
+        </p:txBody>
+      </p:sp>
+      <p:sp>
+        <p:nvSpPr>
+          <p:cNvPr id="16" name="Shape 14"/>
+          <p:cNvSpPr/>
+          <p:nvPr/>
+        </p:nvSpPr>
+        <p:spPr>
+          <a:xfrm>
+            <a:off x="5952744" y="2194560"/>
+            <a:ext cx="237744" cy="128016"/>
+          </a:xfrm>
+          <a:prstGeom prst="rightArrow">
+            <a:avLst/>
+          </a:prstGeom>
+          <a:solidFill>
+            <a:srgbClr val="D9D9D9"/>
+          </a:solidFill>
+          <a:ln/>
+        </p:spPr>
+      </p:sp>
+      <p:sp>
+        <p:nvSpPr>
+          <p:cNvPr id="17" name="Shape 15"/>
+          <p:cNvSpPr/>
+          <p:nvPr/>
+        </p:nvSpPr>
+        <p:spPr>
+          <a:xfrm>
+            <a:off x="7182612" y="1965960"/>
+            <a:ext cx="585216" cy="585216"/>
+          </a:xfrm>
+          <a:prstGeom prst="ellipse">
+            <a:avLst/>
+          </a:prstGeom>
+          <a:solidFill>
+            <a:srgbClr val="751B68"/>
+          </a:solidFill>
+          <a:ln/>
+        </p:spPr>
+      </p:sp>
+      <p:sp>
+        <p:nvSpPr>
+          <p:cNvPr id="18" name="Text 16"/>
+          <p:cNvSpPr txBox="1"/>
+          <p:nvPr/>
+        </p:nvSpPr>
+        <p:spPr>
+          <a:xfrm>
+            <a:off x="7182612" y="1965960"/>
+            <a:ext cx="585216" cy="585216"/>
+          </a:xfrm>
+          <a:prstGeom prst="rect">
+            <a:avLst/>
+          </a:prstGeom>
+          <a:noFill/>
+          <a:ln/>
+        </p:spPr>
+        <p:txBody>
+          <a:bodyPr wrap="square" lIns="0" tIns="0" rIns="0" bIns="0" rtlCol="0" anchor="ctr"/>
+          <a:lstStyle/>
+          <a:p>
+            <a:pPr algn="ctr" indent="0" marL="0">
+              <a:buNone/>
+            </a:pPr>
+            <a:r>
+              <a:rPr lang="en-US" sz="2000" b="1" dirty="0">
+                <a:solidFill>
+                  <a:srgbClr val="FFFFFF"/>
+                </a:solidFill>
+                <a:latin typeface="Times New Roman" pitchFamily="34" charset="0"/>
+                <a:ea typeface="Times New Roman" pitchFamily="34" charset="-122"/>
+                <a:cs typeface="Times New Roman" pitchFamily="34" charset="-120"/>
+              </a:rPr>
+              <a:t>3</a:t>
+            </a:r>
+            <a:endParaRPr lang="en-US" sz="2000" dirty="0"/>
+          </a:p>
+        </p:txBody>
+      </p:sp>
+      <p:sp>
+        <p:nvSpPr>
+          <p:cNvPr id="19" name="Text 17"/>
+          <p:cNvSpPr txBox="1"/>
+          <p:nvPr/>
+        </p:nvSpPr>
+        <p:spPr>
+          <a:xfrm>
+            <a:off x="6217920" y="2715768"/>
+            <a:ext cx="2514600" cy="411480"/>
+          </a:xfrm>
+          <a:prstGeom prst="rect">
+            <a:avLst/>
+          </a:prstGeom>
+          <a:noFill/>
+          <a:ln/>
+        </p:spPr>
+        <p:txBody>
+          <a:bodyPr wrap="square" lIns="0" tIns="0" rIns="0" bIns="0" rtlCol="0" anchor="t"/>
+          <a:lstStyle/>
+          <a:p>
+            <a:pPr algn="ctr" indent="0" marL="0">
+              <a:buNone/>
+            </a:pPr>
+            <a:r>
+              <a:rPr lang="en-US" sz="1350" b="1" dirty="0">
+                <a:solidFill>
+                  <a:srgbClr val="1F1D21"/>
+                </a:solidFill>
+                <a:latin typeface="Times New Roman" pitchFamily="34" charset="0"/>
+                <a:ea typeface="Times New Roman" pitchFamily="34" charset="-122"/>
+                <a:cs typeface="Times New Roman" pitchFamily="34" charset="-120"/>
+              </a:rPr>
+              <a:t>Result</a:t>
+            </a:r>
+            <a:endParaRPr lang="en-US" sz="1350" dirty="0"/>
+          </a:p>
+        </p:txBody>
+      </p:sp>
+      <p:sp>
+        <p:nvSpPr>
+          <p:cNvPr id="20" name="Text 18"/>
+          <p:cNvSpPr txBox="1"/>
+          <p:nvPr/>
+        </p:nvSpPr>
+        <p:spPr>
+          <a:xfrm>
+            <a:off x="6217920" y="3154680"/>
+            <a:ext cx="2514600" cy="2743200"/>
+          </a:xfrm>
+          <a:prstGeom prst="rect">
+            <a:avLst/>
+          </a:prstGeom>
+          <a:noFill/>
+          <a:ln/>
+        </p:spPr>
+        <p:txBody>
+          <a:bodyPr wrap="square" lIns="0" tIns="0" rIns="0" bIns="0" rtlCol="0" anchor="t"/>
+          <a:lstStyle/>
+          <a:p>
+            <a:pPr algn="ctr" indent="0" marL="0">
+              <a:lnSpc>
+                <a:spcPct val="115000"/>
+              </a:lnSpc>
+              <a:buNone/>
+            </a:pPr>
+            <a:r>
+              <a:rPr lang="en-US" sz="1200" dirty="0">
+                <a:solidFill>
+                  <a:srgbClr val="6B6B6B"/>
+                </a:solidFill>
+                <a:latin typeface="Times New Roman" pitchFamily="34" charset="0"/>
+                <a:ea typeface="Times New Roman" pitchFamily="34" charset="-122"/>
+                <a:cs typeface="Times New Roman" pitchFamily="34" charset="-120"/>
+              </a:rPr>
+              <a:t>[TODO] vs. baseline — from the run in progress</a:t>
+            </a:r>
+            <a:endParaRPr lang="en-US" sz="1200" dirty="0"/>
+          </a:p>
+        </p:txBody>
+      </p:sp>
+      <p:sp>
+        <p:nvSpPr>
+          <p:cNvPr id="21" name="Shape 19"/>
+          <p:cNvSpPr/>
+          <p:nvPr/>
+        </p:nvSpPr>
+        <p:spPr>
+          <a:xfrm>
+            <a:off x="8741664" y="2194560"/>
+            <a:ext cx="237744" cy="128016"/>
+          </a:xfrm>
+          <a:prstGeom prst="rightArrow">
+            <a:avLst/>
+          </a:prstGeom>
+          <a:solidFill>
+            <a:srgbClr val="D9D9D9"/>
+          </a:solidFill>
+          <a:ln/>
+        </p:spPr>
+      </p:sp>
+      <p:sp>
+        <p:nvSpPr>
+          <p:cNvPr id="22" name="Shape 20"/>
+          <p:cNvSpPr/>
+          <p:nvPr/>
+        </p:nvSpPr>
+        <p:spPr>
+          <a:xfrm>
+            <a:off x="9971532" y="1965960"/>
+            <a:ext cx="585216" cy="585216"/>
+          </a:xfrm>
+          <a:prstGeom prst="ellipse">
+            <a:avLst/>
+          </a:prstGeom>
+          <a:solidFill>
+            <a:srgbClr val="751B68"/>
+          </a:solidFill>
+          <a:ln/>
+        </p:spPr>
+      </p:sp>
+      <p:sp>
+        <p:nvSpPr>
+          <p:cNvPr id="23" name="Text 21"/>
+          <p:cNvSpPr txBox="1"/>
+          <p:nvPr/>
+        </p:nvSpPr>
+        <p:spPr>
+          <a:xfrm>
+            <a:off x="9971532" y="1965960"/>
+            <a:ext cx="585216" cy="585216"/>
+          </a:xfrm>
+          <a:prstGeom prst="rect">
+            <a:avLst/>
+          </a:prstGeom>
+          <a:noFill/>
+          <a:ln/>
+        </p:spPr>
+        <p:txBody>
+          <a:bodyPr wrap="square" lIns="0" tIns="0" rIns="0" bIns="0" rtlCol="0" anchor="ctr"/>
+          <a:lstStyle/>
+          <a:p>
+            <a:pPr algn="ctr" indent="0" marL="0">
+              <a:buNone/>
+            </a:pPr>
+            <a:r>
+              <a:rPr lang="en-US" sz="2000" b="1" dirty="0">
+                <a:solidFill>
+                  <a:srgbClr val="FFFFFF"/>
+                </a:solidFill>
+                <a:latin typeface="Times New Roman" pitchFamily="34" charset="0"/>
+                <a:ea typeface="Times New Roman" pitchFamily="34" charset="-122"/>
+                <a:cs typeface="Times New Roman" pitchFamily="34" charset="-120"/>
+              </a:rPr>
+              <a:t>4</a:t>
+            </a:r>
+            <a:endParaRPr lang="en-US" sz="2000" dirty="0"/>
+          </a:p>
+        </p:txBody>
+      </p:sp>
+      <p:sp>
+        <p:nvSpPr>
+          <p:cNvPr id="24" name="Text 22"/>
+          <p:cNvSpPr txBox="1"/>
+          <p:nvPr/>
+        </p:nvSpPr>
+        <p:spPr>
+          <a:xfrm>
+            <a:off x="9006840" y="2715768"/>
+            <a:ext cx="2514600" cy="411480"/>
+          </a:xfrm>
+          <a:prstGeom prst="rect">
+            <a:avLst/>
+          </a:prstGeom>
+          <a:noFill/>
+          <a:ln/>
+        </p:spPr>
+        <p:txBody>
+          <a:bodyPr wrap="square" lIns="0" tIns="0" rIns="0" bIns="0" rtlCol="0" anchor="t"/>
+          <a:lstStyle/>
+          <a:p>
+            <a:pPr algn="ctr" indent="0" marL="0">
+              <a:buNone/>
+            </a:pPr>
+            <a:r>
+              <a:rPr lang="en-US" sz="1350" b="1" dirty="0">
+                <a:solidFill>
+                  <a:srgbClr val="1F1D21"/>
+                </a:solidFill>
+                <a:latin typeface="Times New Roman" pitchFamily="34" charset="0"/>
+                <a:ea typeface="Times New Roman" pitchFamily="34" charset="-122"/>
+                <a:cs typeface="Times New Roman" pitchFamily="34" charset="-120"/>
+              </a:rPr>
+              <a:t>Next steps</a:t>
+            </a:r>
+            <a:endParaRPr lang="en-US" sz="1350" dirty="0"/>
+          </a:p>
+        </p:txBody>
+      </p:sp>
+      <p:sp>
+        <p:nvSpPr>
+          <p:cNvPr id="25" name="Text 23"/>
+          <p:cNvSpPr txBox="1"/>
+          <p:nvPr/>
+        </p:nvSpPr>
+        <p:spPr>
+          <a:xfrm>
+            <a:off x="9006840" y="3154680"/>
+            <a:ext cx="2514600" cy="2743200"/>
+          </a:xfrm>
+          <a:prstGeom prst="rect">
+            <a:avLst/>
+          </a:prstGeom>
+          <a:noFill/>
+          <a:ln/>
+        </p:spPr>
+        <p:txBody>
+          <a:bodyPr wrap="square" lIns="0" tIns="0" rIns="0" bIns="0" rtlCol="0" anchor="t"/>
+          <a:lstStyle/>
+          <a:p>
+            <a:pPr algn="ctr" indent="0" marL="0">
+              <a:lnSpc>
+                <a:spcPct val="115000"/>
+              </a:lnSpc>
+              <a:buNone/>
+            </a:pPr>
+            <a:r>
+              <a:rPr lang="en-US" sz="1200" dirty="0">
+                <a:solidFill>
+                  <a:srgbClr val="6B6B6B"/>
+                </a:solidFill>
+                <a:latin typeface="Times New Roman" pitchFamily="34" charset="0"/>
+                <a:ea typeface="Times New Roman" pitchFamily="34" charset="-122"/>
+                <a:cs typeface="Times New Roman" pitchFamily="34" charset="-120"/>
+              </a:rPr>
+              <a:t>[TODO] one or two concrete next experiments</a:t>
+            </a:r>
+            <a:endParaRPr lang="en-US" sz="1200" dirty="0"/>
+          </a:p>
+        </p:txBody>
+      </p:sp>
+      <p:pic>
+        <p:nvPicPr>
+          <p:cNvPr id="26" name="Image 0" descr="/Users/bellavg/ProjectsMSc/ai4mi_project/.claude/worktrees/segthor-presentation-midpoint-825c66/deck/assets/uva_logo.png">    </p:cNvPr>
+          <p:cNvPicPr>
+            <a:picLocks noChangeAspect="1"/>
+          </p:cNvPicPr>
+          <p:nvPr/>
+        </p:nvPicPr>
+        <p:blipFill>
+          <a:blip r:embed="rId1"/>
+          <a:stretch>
+            <a:fillRect/>
+          </a:stretch>
+        </p:blipFill>
+        <p:spPr>
+          <a:xfrm>
+            <a:off x="457200" y="6446520"/>
+            <a:ext cx="1371600" cy="137160"/>
+          </a:xfrm>
+          <a:prstGeom prst="rect">
+            <a:avLst/>
+          </a:prstGeom>
+        </p:spPr>
+      </p:pic>
+      <p:sp>
+        <p:nvSpPr>
+          <p:cNvPr id="27" name="Text 24"/>
+          <p:cNvSpPr txBox="1"/>
+          <p:nvPr/>
+        </p:nvSpPr>
+        <p:spPr>
+          <a:xfrm>
+            <a:off x="9902952" y="6446520"/>
+            <a:ext cx="1828800" cy="274320"/>
+          </a:xfrm>
+          <a:prstGeom prst="rect">
+            <a:avLst/>
+          </a:prstGeom>
+          <a:noFill/>
+          <a:ln/>
+        </p:spPr>
+        <p:txBody>
+          <a:bodyPr wrap="square" lIns="0" tIns="0" rIns="0" bIns="0" rtlCol="0" anchor="ctr"/>
+          <a:lstStyle/>
+          <a:p>
+            <a:pPr algn="r" indent="0" marL="0">
+              <a:buNone/>
+            </a:pPr>
+            <a:r>
+              <a:rPr lang="en-US" sz="900" dirty="0">
+                <a:solidFill>
+                  <a:srgbClr val="6B6B6B"/>
+                </a:solidFill>
+                <a:latin typeface="Times New Roman" pitchFamily="34" charset="0"/>
+                <a:ea typeface="Times New Roman" pitchFamily="34" charset="-122"/>
+                <a:cs typeface="Times New Roman" pitchFamily="34" charset="-120"/>
+              </a:rPr>
+              <a:t>09</a:t>
+            </a:r>
+            <a:endParaRPr lang="en-US" sz="900" dirty="0"/>
+          </a:p>
+        </p:txBody>
+      </p:sp>
+    </p:spTree>
+  </p:cSld>
+  <p:clrMapOvr>
+    <a:masterClrMapping/>
+  </p:clrMapOvr>
+</p:sld>
+</file>
+
+<file path=ppt/slides/slide11.xml><?xml version="1.0" encoding="utf-8"?>
+<p:sld xmlns:a="http://schemas.openxmlformats.org/drawingml/2006/main" xmlns:r="http://schemas.openxmlformats.org/officeDocument/2006/relationships" xmlns:p="http://schemas.openxmlformats.org/presentationml/2006/main">
+  <p:cSld name="Slide 11">
+    <p:bg>
+      <p:bgPr>
+        <a:solidFill>
           <a:srgbClr val="1F1D21"/>
         </a:solidFill>
       </p:bgPr>
@@ -2266,7 +3227,7 @@
                 <a:ea typeface="Times New Roman" pitchFamily="34" charset="-122"/>
                 <a:cs typeface="Times New Roman" pitchFamily="34" charset="-120"/>
               </a:rPr>
-              <a:t>09</a:t>
+              <a:t>10</a:t>
             </a:r>
             <a:endParaRPr lang="en-US" sz="900" dirty="0"/>
           </a:p>
@@ -2280,9 +3241,9 @@
 </p:sld>
 </file>
 
-<file path=ppt/slides/slide11.xml><?xml version="1.0" encoding="utf-8"?>
+<file path=ppt/slides/slide12.xml><?xml version="1.0" encoding="utf-8"?>
 <p:sld xmlns:a="http://schemas.openxmlformats.org/drawingml/2006/main" xmlns:r="http://schemas.openxmlformats.org/officeDocument/2006/relationships" xmlns:p="http://schemas.openxmlformats.org/presentationml/2006/main">
-  <p:cSld name="Slide 11">
+  <p:cSld name="Slide 12">
     <p:bg>
       <p:bgPr>
         <a:solidFill>
@@ -3253,7 +4214,7 @@
                 <a:ea typeface="Times New Roman" pitchFamily="34" charset="-122"/>
                 <a:cs typeface="Times New Roman" pitchFamily="34" charset="-120"/>
               </a:rPr>
-              <a:t>0:35</a:t>
+              <a:t>0:20</a:t>
             </a:r>
             <a:endParaRPr lang="en-US" sz="1200" dirty="0"/>
           </a:p>
@@ -3292,7 +4253,7 @@
                 <a:ea typeface="Times New Roman" pitchFamily="34" charset="-122"/>
                 <a:cs typeface="Times New Roman" pitchFamily="34" charset="-120"/>
               </a:rPr>
-              <a:t>Dataset Validation: Correcting the Aorta Label</a:t>
+              <a:t>Dataset Validation: Finding the Missing Aorta</a:t>
             </a:r>
             <a:endParaRPr lang="en-US" sz="2600" dirty="0"/>
           </a:p>
@@ -3326,8 +4287,8 @@
         </p:nvSpPr>
         <p:spPr>
           <a:xfrm>
-            <a:off x="640080" y="1783080"/>
-            <a:ext cx="3108960" cy="256032"/>
+            <a:off x="640080" y="1645920"/>
+            <a:ext cx="4233672" cy="256032"/>
           </a:xfrm>
           <a:prstGeom prst="rect">
             <a:avLst/>
@@ -3351,7 +4312,7 @@
                 <a:ea typeface="Times New Roman" pitchFamily="34" charset="-122"/>
                 <a:cs typeface="Times New Roman" pitchFamily="34" charset="-120"/>
               </a:rPr>
-              <a:t>WHAT IT SHOWS</a:t>
+              <a:t>DATASET MAKE-UP</a:t>
             </a:r>
             <a:endParaRPr lang="en-US" sz="1150" dirty="0"/>
           </a:p>
@@ -3365,8 +4326,8 @@
         </p:nvSpPr>
         <p:spPr>
           <a:xfrm>
-            <a:off x="640080" y="2075688"/>
-            <a:ext cx="3108960" cy="1046988"/>
+            <a:off x="640080" y="1938528"/>
+            <a:ext cx="4233672" cy="482346"/>
           </a:xfrm>
           <a:prstGeom prst="rect">
             <a:avLst/>
@@ -3397,10 +4358,71 @@
                 <a:ea typeface="Times New Roman" pitchFamily="34" charset="-122"/>
                 <a:cs typeface="Times New Roman" pitchFamily="34" charset="-120"/>
               </a:rPr>
-              <a:t>Patient_02: axial slice 111 and 3D view</a:t>
+              <a:t>[TODO] real per-class voxel share, now corrected — as numbers, not a bar chart</a:t>
             </a:r>
             <a:endParaRPr lang="en-US" sz="1250" dirty="0"/>
           </a:p>
+        </p:txBody>
+      </p:sp>
+      <p:sp>
+        <p:nvSpPr>
+          <p:cNvPr id="9" name="Text 7"/>
+          <p:cNvSpPr txBox="1"/>
+          <p:nvPr/>
+        </p:nvSpPr>
+        <p:spPr>
+          <a:xfrm>
+            <a:off x="640080" y="2649474"/>
+            <a:ext cx="4233672" cy="256032"/>
+          </a:xfrm>
+          <a:prstGeom prst="rect">
+            <a:avLst/>
+          </a:prstGeom>
+          <a:noFill/>
+          <a:ln/>
+        </p:spPr>
+        <p:txBody>
+          <a:bodyPr wrap="square" lIns="0" tIns="0" rIns="0" bIns="0" rtlCol="0" anchor="ctr"/>
+          <a:lstStyle/>
+          <a:p>
+            <a:pPr indent="0" marL="0">
+              <a:buNone/>
+            </a:pPr>
+            <a:r>
+              <a:rPr lang="en-US" sz="1150" b="1" spc="100" kern="0" dirty="0">
+                <a:solidFill>
+                  <a:srgbClr val="BC0031"/>
+                </a:solidFill>
+                <a:latin typeface="Times New Roman" pitchFamily="34" charset="0"/>
+                <a:ea typeface="Times New Roman" pitchFamily="34" charset="-122"/>
+                <a:cs typeface="Times New Roman" pitchFamily="34" charset="-120"/>
+              </a:rPr>
+              <a:t>CONNECTED COMPONENTS</a:t>
+            </a:r>
+            <a:endParaRPr lang="en-US" sz="1150" dirty="0"/>
+          </a:p>
+        </p:txBody>
+      </p:sp>
+      <p:sp>
+        <p:nvSpPr>
+          <p:cNvPr id="10" name="Text 8"/>
+          <p:cNvSpPr txBox="1"/>
+          <p:nvPr/>
+        </p:nvSpPr>
+        <p:spPr>
+          <a:xfrm>
+            <a:off x="640080" y="2942082"/>
+            <a:ext cx="4233672" cy="1247013"/>
+          </a:xfrm>
+          <a:prstGeom prst="rect">
+            <a:avLst/>
+          </a:prstGeom>
+          <a:noFill/>
+          <a:ln/>
+        </p:spPr>
+        <p:txBody>
+          <a:bodyPr wrap="square" lIns="0" tIns="0" rIns="0" bIns="0" rtlCol="0" anchor="t"/>
+          <a:lstStyle/>
           <a:p>
             <a:pPr marL="177800" indent="-177800">
               <a:lnSpc>
@@ -3421,7 +4443,7 @@
                 <a:ea typeface="Times New Roman" pitchFamily="34" charset="-122"/>
                 <a:cs typeface="Times New Roman" pitchFamily="34" charset="-120"/>
               </a:rPr>
-              <a:t>Before: two pieces carry the esophagus label</a:t>
+              <a:t>Connected pieces per label, for all patients: % of axial slices (2D) or patients (3D) with 1, 2 or 3+ pieces</a:t>
             </a:r>
             <a:endParaRPr lang="en-US" sz="1250" dirty="0"/>
           </a:p>
@@ -3445,71 +4467,10 @@
                 <a:ea typeface="Times New Roman" pitchFamily="34" charset="-122"/>
                 <a:cs typeface="Times New Roman" pitchFamily="34" charset="-120"/>
               </a:rPr>
-              <a:t>After: one piece relabelled aorta</a:t>
+              <a:t>Top: aorta merged (3 labels). Bottom: aorta separate (4 labels)</a:t>
             </a:r>
             <a:endParaRPr lang="en-US" sz="1250" dirty="0"/>
           </a:p>
-        </p:txBody>
-      </p:sp>
-      <p:sp>
-        <p:nvSpPr>
-          <p:cNvPr id="9" name="Text 7"/>
-          <p:cNvSpPr txBox="1"/>
-          <p:nvPr/>
-        </p:nvSpPr>
-        <p:spPr>
-          <a:xfrm>
-            <a:off x="640080" y="3351276"/>
-            <a:ext cx="3108960" cy="256032"/>
-          </a:xfrm>
-          <a:prstGeom prst="rect">
-            <a:avLst/>
-          </a:prstGeom>
-          <a:noFill/>
-          <a:ln/>
-        </p:spPr>
-        <p:txBody>
-          <a:bodyPr wrap="square" lIns="0" tIns="0" rIns="0" bIns="0" rtlCol="0" anchor="ctr"/>
-          <a:lstStyle/>
-          <a:p>
-            <a:pPr indent="0" marL="0">
-              <a:buNone/>
-            </a:pPr>
-            <a:r>
-              <a:rPr lang="en-US" sz="1150" b="1" spc="100" kern="0" dirty="0">
-                <a:solidFill>
-                  <a:srgbClr val="BC0031"/>
-                </a:solidFill>
-                <a:latin typeface="Times New Roman" pitchFamily="34" charset="0"/>
-                <a:ea typeface="Times New Roman" pitchFamily="34" charset="-122"/>
-                <a:cs typeface="Times New Roman" pitchFamily="34" charset="-120"/>
-              </a:rPr>
-              <a:t>VALIDATION</a:t>
-            </a:r>
-            <a:endParaRPr lang="en-US" sz="1150" dirty="0"/>
-          </a:p>
-        </p:txBody>
-      </p:sp>
-      <p:sp>
-        <p:nvSpPr>
-          <p:cNvPr id="10" name="Text 8"/>
-          <p:cNvSpPr txBox="1"/>
-          <p:nvPr/>
-        </p:nvSpPr>
-        <p:spPr>
-          <a:xfrm>
-            <a:off x="640080" y="3643884"/>
-            <a:ext cx="3108960" cy="1729359"/>
-          </a:xfrm>
-          <a:prstGeom prst="rect">
-            <a:avLst/>
-          </a:prstGeom>
-          <a:noFill/>
-          <a:ln/>
-        </p:spPr>
-        <p:txBody>
-          <a:bodyPr wrap="square" lIns="0" tIns="0" rIns="0" bIns="0" rtlCol="0" anchor="t"/>
-          <a:lstStyle/>
           <a:p>
             <a:pPr marL="177800" indent="-177800">
               <a:lnSpc>
@@ -3530,23 +4491,120 @@
                 <a:ea typeface="Times New Roman" pitchFamily="34" charset="-122"/>
                 <a:cs typeface="Times New Roman" pitchFamily="34" charset="-120"/>
               </a:rPr>
-              <a:t>[TODO] how the mislabeling was found and fixed</a:t>
+              <a:t>[TODO] fragmentation risk, if any</a:t>
             </a:r>
             <a:endParaRPr lang="en-US" sz="1250" dirty="0"/>
           </a:p>
-          <a:p>
-            <a:pPr marL="177800" indent="-177800">
+        </p:txBody>
+      </p:sp>
+      <p:sp>
+        <p:nvSpPr>
+          <p:cNvPr id="11" name="Shape 9"/>
+          <p:cNvSpPr/>
+          <p:nvPr/>
+        </p:nvSpPr>
+        <p:spPr>
+          <a:xfrm>
+            <a:off x="640080" y="4417695"/>
+            <a:ext cx="4233672" cy="1005840"/>
+          </a:xfrm>
+          <a:prstGeom prst="rect">
+            <a:avLst/>
+          </a:prstGeom>
+          <a:solidFill>
+            <a:srgbClr val="F7E8EC"/>
+          </a:solidFill>
+          <a:ln/>
+        </p:spPr>
+      </p:sp>
+      <p:sp>
+        <p:nvSpPr>
+          <p:cNvPr id="12" name="Shape 10"/>
+          <p:cNvSpPr/>
+          <p:nvPr/>
+        </p:nvSpPr>
+        <p:spPr>
+          <a:xfrm>
+            <a:off x="640080" y="4417695"/>
+            <a:ext cx="54864" cy="1005840"/>
+          </a:xfrm>
+          <a:prstGeom prst="rect">
+            <a:avLst/>
+          </a:prstGeom>
+          <a:solidFill>
+            <a:srgbClr val="BC0031"/>
+          </a:solidFill>
+          <a:ln/>
+        </p:spPr>
+      </p:sp>
+      <p:sp>
+        <p:nvSpPr>
+          <p:cNvPr id="13" name="Text 11"/>
+          <p:cNvSpPr txBox="1"/>
+          <p:nvPr/>
+        </p:nvSpPr>
+        <p:spPr>
+          <a:xfrm>
+            <a:off x="914400" y="4600575"/>
+            <a:ext cx="3685032" cy="274320"/>
+          </a:xfrm>
+          <a:prstGeom prst="rect">
+            <a:avLst/>
+          </a:prstGeom>
+          <a:noFill/>
+          <a:ln/>
+        </p:spPr>
+        <p:txBody>
+          <a:bodyPr wrap="square" lIns="0" tIns="0" rIns="0" bIns="0" rtlCol="0" anchor="ctr"/>
+          <a:lstStyle/>
+          <a:p>
+            <a:pPr indent="0" marL="0">
+              <a:buNone/>
+            </a:pPr>
+            <a:r>
+              <a:rPr lang="en-US" sz="1100" b="1" spc="100" kern="0" dirty="0">
+                <a:solidFill>
+                  <a:srgbClr val="BC0031"/>
+                </a:solidFill>
+                <a:latin typeface="Times New Roman" pitchFamily="34" charset="0"/>
+                <a:ea typeface="Times New Roman" pitchFamily="34" charset="-122"/>
+                <a:cs typeface="Times New Roman" pitchFamily="34" charset="-120"/>
+              </a:rPr>
+              <a:t>FINDING</a:t>
+            </a:r>
+            <a:endParaRPr lang="en-US" sz="1100" dirty="0"/>
+          </a:p>
+        </p:txBody>
+      </p:sp>
+      <p:sp>
+        <p:nvSpPr>
+          <p:cNvPr id="14" name="Text 12"/>
+          <p:cNvSpPr txBox="1"/>
+          <p:nvPr/>
+        </p:nvSpPr>
+        <p:spPr>
+          <a:xfrm>
+            <a:off x="914400" y="4920615"/>
+            <a:ext cx="3685032" cy="320040"/>
+          </a:xfrm>
+          <a:prstGeom prst="rect">
+            <a:avLst/>
+          </a:prstGeom>
+          <a:noFill/>
+          <a:ln/>
+        </p:spPr>
+        <p:txBody>
+          <a:bodyPr wrap="square" lIns="0" tIns="0" rIns="0" bIns="0" rtlCol="0" anchor="t"/>
+          <a:lstStyle/>
+          <a:p>
+            <a:pPr indent="0" marL="0">
               <a:lnSpc>
-                <a:spcPct val="115000"/>
+                <a:spcPct val="118000"/>
               </a:lnSpc>
-              <a:spcAft>
-                <a:spcPts val="500"/>
-              </a:spcAft>
-              <a:buSzPct val="100000"/>
-              <a:buChar char="▪"/>
-            </a:pPr>
-            <a:r>
-              <a:rPr lang="en-US" sz="1250" dirty="0">
+              <a:buNone/>
+            </a:pPr>
+            <a:r>
+              <a:rPr lang="en-US" sz="1350" dirty="0">
                 <a:solidFill>
                   <a:srgbClr val="1F1D21"/>
                 </a:solidFill>
@@ -3554,70 +4612,47 @@
                 <a:ea typeface="Times New Roman" pitchFamily="34" charset="-122"/>
                 <a:cs typeface="Times New Roman" pitchFamily="34" charset="-120"/>
               </a:rPr>
-              <a:t>[TODO] real per-class voxel share, now corrected — as numbers, not a bar chart</a:t>
-            </a:r>
-            <a:endParaRPr lang="en-US" sz="1250" dirty="0"/>
-          </a:p>
-          <a:p>
-            <a:pPr marL="177800" indent="-177800">
-              <a:lnSpc>
-                <a:spcPct val="115000"/>
-              </a:lnSpc>
-              <a:spcAft>
-                <a:spcPts val="500"/>
-              </a:spcAft>
-              <a:buSzPct val="100000"/>
-              <a:buChar char="▪"/>
-            </a:pPr>
-            <a:r>
-              <a:rPr lang="en-US" sz="1250" dirty="0">
-                <a:solidFill>
-                  <a:srgbClr val="1F1D21"/>
-                </a:solidFill>
-                <a:latin typeface="Times New Roman" pitchFamily="34" charset="0"/>
-                <a:ea typeface="Times New Roman" pitchFamily="34" charset="-122"/>
-                <a:cs typeface="Times New Roman" pitchFamily="34" charset="-120"/>
-              </a:rPr>
-              <a:t>[TODO] any other integrity checks run (e.g. alignment)</a:t>
-            </a:r>
-            <a:endParaRPr lang="en-US" sz="1250" dirty="0"/>
-          </a:p>
-          <a:p>
-            <a:pPr marL="177800" indent="-177800">
-              <a:lnSpc>
-                <a:spcPct val="115000"/>
-              </a:lnSpc>
-              <a:spcAft>
-                <a:spcPts val="500"/>
-              </a:spcAft>
-              <a:buSzPct val="100000"/>
-              <a:buChar char="▪"/>
-            </a:pPr>
-            <a:r>
-              <a:rPr lang="en-US" sz="1250" dirty="0">
-                <a:solidFill>
-                  <a:srgbClr val="1F1D21"/>
-                </a:solidFill>
-                <a:latin typeface="Times New Roman" pitchFamily="34" charset="0"/>
-                <a:ea typeface="Times New Roman" pitchFamily="34" charset="-122"/>
-                <a:cs typeface="Times New Roman" pitchFamily="34" charset="-120"/>
-              </a:rPr>
-              <a:t>[TODO] fragmentation risk, if any</a:t>
-            </a:r>
-            <a:endParaRPr lang="en-US" sz="1250" dirty="0"/>
-          </a:p>
-        </p:txBody>
-      </p:sp>
-      <p:sp>
-        <p:nvSpPr>
-          <p:cNvPr id="11" name="Text 9"/>
-          <p:cNvSpPr txBox="1"/>
-          <p:nvPr/>
-        </p:nvSpPr>
-        <p:spPr>
-          <a:xfrm>
-            <a:off x="4114800" y="1783080"/>
-            <a:ext cx="3374136" cy="256032"/>
+              <a:t>Aorta (label 4) was mislabeled — 0 / 20 patients had it before the fix.</a:t>
+            </a:r>
+            <a:endParaRPr lang="en-US" sz="1350" dirty="0"/>
+          </a:p>
+        </p:txBody>
+      </p:sp>
+      <p:sp>
+        <p:nvSpPr>
+          <p:cNvPr id="15" name="Shape 13"/>
+          <p:cNvSpPr/>
+          <p:nvPr/>
+        </p:nvSpPr>
+        <p:spPr>
+          <a:xfrm>
+            <a:off x="5239512" y="1645920"/>
+            <a:ext cx="6309360" cy="1371600"/>
+          </a:xfrm>
+          <a:prstGeom prst="rect">
+            <a:avLst/>
+          </a:prstGeom>
+          <a:solidFill>
+            <a:srgbClr val="FFFFFF"/>
+          </a:solidFill>
+          <a:ln w="19050">
+            <a:solidFill>
+              <a:srgbClr val="D9A0AE"/>
+            </a:solidFill>
+            <a:prstDash val="dash"/>
+          </a:ln>
+        </p:spPr>
+      </p:sp>
+      <p:sp>
+        <p:nvSpPr>
+          <p:cNvPr id="16" name="Text 14"/>
+          <p:cNvSpPr txBox="1"/>
+          <p:nvPr/>
+        </p:nvSpPr>
+        <p:spPr>
+          <a:xfrm>
+            <a:off x="5239512" y="1645920"/>
+            <a:ext cx="6309360" cy="1371600"/>
           </a:xfrm>
           <a:prstGeom prst="rect">
             <a:avLst/>
@@ -3629,11 +4664,11 @@
           <a:bodyPr wrap="square" lIns="0" tIns="0" rIns="0" bIns="0" rtlCol="0" anchor="ctr"/>
           <a:lstStyle/>
           <a:p>
-            <a:pPr indent="0" marL="0">
-              <a:buNone/>
-            </a:pPr>
-            <a:r>
-              <a:rPr lang="en-US" sz="1150" b="1" spc="100" kern="0" dirty="0">
+            <a:pPr algn="ctr" indent="0" marL="0">
+              <a:buNone/>
+            </a:pPr>
+            <a:r>
+              <a:rPr lang="en-US" sz="1200" i="1" dirty="0">
                 <a:solidFill>
                   <a:srgbClr val="6B6B6B"/>
                 </a:solidFill>
@@ -3641,15 +4676,15 @@
                 <a:ea typeface="Times New Roman" pitchFamily="34" charset="-122"/>
                 <a:cs typeface="Times New Roman" pitchFamily="34" charset="-120"/>
               </a:rPr>
-              <a:t>BEFORE</a:t>
-            </a:r>
-            <a:endParaRPr lang="en-US" sz="1150" dirty="0"/>
+              <a:t>Dataset make-up figure (to add)</a:t>
+            </a:r>
+            <a:endParaRPr lang="en-US" sz="1200" dirty="0"/>
           </a:p>
         </p:txBody>
       </p:sp>
       <p:pic>
         <p:nvPicPr>
-          <p:cNvPr id="12" name="Image 0" descr="/Users/bellavg/ProjectsMSc/ai4mi_project/.claude/worktrees/segthor-presentation-midpoint-825c66/figures/comparison/label_correction_example_before.png">    </p:cNvPr>
+          <p:cNvPr id="17" name="Image 0" descr="/Users/bellavg/ProjectsMSc/ai4mi_project/.claude/worktrees/segthor-presentation-midpoint-825c66/figures/comparison/connected_components.png">    </p:cNvPr>
           <p:cNvPicPr>
             <a:picLocks noChangeAspect="1"/>
           </p:cNvPicPr>
@@ -3662,56 +4697,17 @@
         </p:blipFill>
         <p:spPr>
           <a:xfrm>
-            <a:off x="4114800" y="2148840"/>
-            <a:ext cx="3374136" cy="1872044"/>
+            <a:off x="5239512" y="3154680"/>
+            <a:ext cx="6309360" cy="2870759"/>
           </a:xfrm>
           <a:prstGeom prst="rect">
             <a:avLst/>
           </a:prstGeom>
         </p:spPr>
       </p:pic>
-      <p:sp>
-        <p:nvSpPr>
-          <p:cNvPr id="13" name="Text 10"/>
-          <p:cNvSpPr txBox="1"/>
-          <p:nvPr/>
-        </p:nvSpPr>
-        <p:spPr>
-          <a:xfrm>
-            <a:off x="8174736" y="1783080"/>
-            <a:ext cx="3374136" cy="256032"/>
-          </a:xfrm>
-          <a:prstGeom prst="rect">
-            <a:avLst/>
-          </a:prstGeom>
-          <a:noFill/>
-          <a:ln/>
-        </p:spPr>
-        <p:txBody>
-          <a:bodyPr wrap="square" lIns="0" tIns="0" rIns="0" bIns="0" rtlCol="0" anchor="ctr"/>
-          <a:lstStyle/>
-          <a:p>
-            <a:pPr indent="0" marL="0">
-              <a:buNone/>
-            </a:pPr>
-            <a:r>
-              <a:rPr lang="en-US" sz="1150" b="1" spc="100" kern="0" dirty="0">
-                <a:solidFill>
-                  <a:srgbClr val="BC0031"/>
-                </a:solidFill>
-                <a:latin typeface="Times New Roman" pitchFamily="34" charset="0"/>
-                <a:ea typeface="Times New Roman" pitchFamily="34" charset="-122"/>
-                <a:cs typeface="Times New Roman" pitchFamily="34" charset="-120"/>
-              </a:rPr>
-              <a:t>AFTER</a:t>
-            </a:r>
-            <a:endParaRPr lang="en-US" sz="1150" dirty="0"/>
-          </a:p>
-        </p:txBody>
-      </p:sp>
       <p:pic>
         <p:nvPicPr>
-          <p:cNvPr id="14" name="Image 1" descr="/Users/bellavg/ProjectsMSc/ai4mi_project/.claude/worktrees/segthor-presentation-midpoint-825c66/figures/comparison/label_correction_example_after.png">    </p:cNvPr>
+          <p:cNvPr id="18" name="Image 1" descr="/Users/bellavg/ProjectsMSc/ai4mi_project/.claude/worktrees/segthor-presentation-midpoint-825c66/deck/assets/uva_logo.png">    </p:cNvPr>
           <p:cNvPicPr>
             <a:picLocks noChangeAspect="1"/>
           </p:cNvPicPr>
@@ -3719,170 +4715,6 @@
         </p:nvPicPr>
         <p:blipFill>
           <a:blip r:embed="rId2"/>
-          <a:srcRect l="0" r="0" t="0" b="0"/>
-          <a:stretch/>
-        </p:blipFill>
-        <p:spPr>
-          <a:xfrm>
-            <a:off x="8174736" y="2148840"/>
-            <a:ext cx="3374136" cy="1872044"/>
-          </a:xfrm>
-          <a:prstGeom prst="rect">
-            <a:avLst/>
-          </a:prstGeom>
-        </p:spPr>
-      </p:pic>
-      <p:sp>
-        <p:nvSpPr>
-          <p:cNvPr id="15" name="Shape 11"/>
-          <p:cNvSpPr/>
-          <p:nvPr/>
-        </p:nvSpPr>
-        <p:spPr>
-          <a:xfrm>
-            <a:off x="7603236" y="2947702"/>
-            <a:ext cx="457200" cy="274320"/>
-          </a:xfrm>
-          <a:prstGeom prst="rightArrow">
-            <a:avLst/>
-          </a:prstGeom>
-          <a:solidFill>
-            <a:srgbClr val="BC0031"/>
-          </a:solidFill>
-          <a:ln/>
-        </p:spPr>
-      </p:sp>
-      <p:sp>
-        <p:nvSpPr>
-          <p:cNvPr id="16" name="Shape 12"/>
-          <p:cNvSpPr/>
-          <p:nvPr/>
-        </p:nvSpPr>
-        <p:spPr>
-          <a:xfrm>
-            <a:off x="4114800" y="4340924"/>
-            <a:ext cx="7434072" cy="1143000"/>
-          </a:xfrm>
-          <a:prstGeom prst="rect">
-            <a:avLst/>
-          </a:prstGeom>
-          <a:solidFill>
-            <a:srgbClr val="F7E8EC"/>
-          </a:solidFill>
-          <a:ln/>
-        </p:spPr>
-      </p:sp>
-      <p:sp>
-        <p:nvSpPr>
-          <p:cNvPr id="17" name="Shape 13"/>
-          <p:cNvSpPr/>
-          <p:nvPr/>
-        </p:nvSpPr>
-        <p:spPr>
-          <a:xfrm>
-            <a:off x="4114800" y="4340924"/>
-            <a:ext cx="54864" cy="1143000"/>
-          </a:xfrm>
-          <a:prstGeom prst="rect">
-            <a:avLst/>
-          </a:prstGeom>
-          <a:solidFill>
-            <a:srgbClr val="BC0031"/>
-          </a:solidFill>
-          <a:ln/>
-        </p:spPr>
-      </p:sp>
-      <p:sp>
-        <p:nvSpPr>
-          <p:cNvPr id="18" name="Text 14"/>
-          <p:cNvSpPr txBox="1"/>
-          <p:nvPr/>
-        </p:nvSpPr>
-        <p:spPr>
-          <a:xfrm>
-            <a:off x="4389120" y="4523804"/>
-            <a:ext cx="6885432" cy="274320"/>
-          </a:xfrm>
-          <a:prstGeom prst="rect">
-            <a:avLst/>
-          </a:prstGeom>
-          <a:noFill/>
-          <a:ln/>
-        </p:spPr>
-        <p:txBody>
-          <a:bodyPr wrap="square" lIns="0" tIns="0" rIns="0" bIns="0" rtlCol="0" anchor="ctr"/>
-          <a:lstStyle/>
-          <a:p>
-            <a:pPr indent="0" marL="0">
-              <a:buNone/>
-            </a:pPr>
-            <a:r>
-              <a:rPr lang="en-US" sz="1100" b="1" spc="100" kern="0" dirty="0">
-                <a:solidFill>
-                  <a:srgbClr val="BC0031"/>
-                </a:solidFill>
-                <a:latin typeface="Times New Roman" pitchFamily="34" charset="0"/>
-                <a:ea typeface="Times New Roman" pitchFamily="34" charset="-122"/>
-                <a:cs typeface="Times New Roman" pitchFamily="34" charset="-120"/>
-              </a:rPr>
-              <a:t>FINDING</a:t>
-            </a:r>
-            <a:endParaRPr lang="en-US" sz="1100" dirty="0"/>
-          </a:p>
-        </p:txBody>
-      </p:sp>
-      <p:sp>
-        <p:nvSpPr>
-          <p:cNvPr id="19" name="Text 15"/>
-          <p:cNvSpPr txBox="1"/>
-          <p:nvPr/>
-        </p:nvSpPr>
-        <p:spPr>
-          <a:xfrm>
-            <a:off x="4389120" y="4843844"/>
-            <a:ext cx="6885432" cy="457200"/>
-          </a:xfrm>
-          <a:prstGeom prst="rect">
-            <a:avLst/>
-          </a:prstGeom>
-          <a:noFill/>
-          <a:ln/>
-        </p:spPr>
-        <p:txBody>
-          <a:bodyPr wrap="square" lIns="0" tIns="0" rIns="0" bIns="0" rtlCol="0" anchor="t"/>
-          <a:lstStyle/>
-          <a:p>
-            <a:pPr indent="0" marL="0">
-              <a:lnSpc>
-                <a:spcPct val="118000"/>
-              </a:lnSpc>
-              <a:buNone/>
-            </a:pPr>
-            <a:r>
-              <a:rPr lang="en-US" sz="1350" dirty="0">
-                <a:solidFill>
-                  <a:srgbClr val="1F1D21"/>
-                </a:solidFill>
-                <a:latin typeface="Times New Roman" pitchFamily="34" charset="0"/>
-                <a:ea typeface="Times New Roman" pitchFamily="34" charset="-122"/>
-                <a:cs typeface="Times New Roman" pitchFamily="34" charset="-120"/>
-              </a:rPr>
-              <a:t>Aorta (label 4) was mislabeled — 0 / 20 patients had it before the fix. Caught and corrected before any preprocessing or training ran on it.</a:t>
-            </a:r>
-            <a:endParaRPr lang="en-US" sz="1350" dirty="0"/>
-          </a:p>
-        </p:txBody>
-      </p:sp>
-      <p:pic>
-        <p:nvPicPr>
-          <p:cNvPr id="20" name="Image 2" descr="/Users/bellavg/ProjectsMSc/ai4mi_project/.claude/worktrees/segthor-presentation-midpoint-825c66/deck/assets/uva_logo.png">    </p:cNvPr>
-          <p:cNvPicPr>
-            <a:picLocks noChangeAspect="1"/>
-          </p:cNvPicPr>
-          <p:nvPr/>
-        </p:nvPicPr>
-        <p:blipFill>
-          <a:blip r:embed="rId3"/>
           <a:stretch>
             <a:fillRect/>
           </a:stretch>
@@ -3899,7 +4731,7 @@
       </p:pic>
       <p:sp>
         <p:nvSpPr>
-          <p:cNvPr id="21" name="Text 16"/>
+          <p:cNvPr id="19" name="Text 15"/>
           <p:cNvSpPr txBox="1"/>
           <p:nvPr/>
         </p:nvSpPr>
@@ -3983,7 +4815,7 @@
             <a:avLst/>
           </a:prstGeom>
           <a:solidFill>
-            <a:srgbClr val="E98300"/>
+            <a:srgbClr val="BC0031"/>
           </a:solidFill>
           <a:ln/>
         </p:spPr>
@@ -4015,13 +4847,13 @@
             <a:r>
               <a:rPr lang="en-US" sz="1200" b="1" spc="150" kern="0" dirty="0">
                 <a:solidFill>
-                  <a:srgbClr val="E98300"/>
-                </a:solidFill>
-                <a:latin typeface="Times New Roman" pitchFamily="34" charset="0"/>
-                <a:ea typeface="Times New Roman" pitchFamily="34" charset="-122"/>
-                <a:cs typeface="Times New Roman" pitchFamily="34" charset="-120"/>
-              </a:rPr>
-              <a:t>DATA EXPLORATION</a:t>
+                  <a:srgbClr val="BC0031"/>
+                </a:solidFill>
+                <a:latin typeface="Times New Roman" pitchFamily="34" charset="0"/>
+                <a:ea typeface="Times New Roman" pitchFamily="34" charset="-122"/>
+                <a:cs typeface="Times New Roman" pitchFamily="34" charset="-120"/>
+              </a:rPr>
+              <a:t>DATA INTEGRITY — STEP 0</a:t>
             </a:r>
             <a:endParaRPr lang="en-US" sz="1200" dirty="0"/>
           </a:p>
@@ -4060,7 +4892,7 @@
                 <a:ea typeface="Times New Roman" pitchFamily="34" charset="-122"/>
                 <a:cs typeface="Times New Roman" pitchFamily="34" charset="-120"/>
               </a:rPr>
-              <a:t>0:35</a:t>
+              <a:t>0:15</a:t>
             </a:r>
             <a:endParaRPr lang="en-US" sz="1200" dirty="0"/>
           </a:p>
@@ -4075,7 +4907,7 @@
         <p:spPr>
           <a:xfrm>
             <a:off x="640080" y="658368"/>
-            <a:ext cx="10881360" cy="502920"/>
+            <a:ext cx="10881360" cy="822960"/>
           </a:xfrm>
           <a:prstGeom prst="rect">
             <a:avLst/>
@@ -4099,45 +4931,42 @@
                 <a:ea typeface="Times New Roman" pitchFamily="34" charset="-122"/>
                 <a:cs typeface="Times New Roman" pitchFamily="34" charset="-120"/>
               </a:rPr>
-              <a:t>Exploratory Analysis I: Scan Geometry for the 20 CT Scans</a:t>
+              <a:t>Dataset Validation: Correcting the Aorta Label</a:t>
             </a:r>
             <a:endParaRPr lang="en-US" sz="2600" dirty="0"/>
           </a:p>
         </p:txBody>
       </p:sp>
-      <p:pic>
-        <p:nvPicPr>
-          <p:cNvPr id="6" name="Image 0" descr="/Users/bellavg/ProjectsMSc/ai4mi_project/.claude/worktrees/segthor-presentation-midpoint-825c66/figures/profile/scan_geometry/field_of_view.png">    </p:cNvPr>
-          <p:cNvPicPr>
-            <a:picLocks noChangeAspect="1"/>
-          </p:cNvPicPr>
-          <p:nvPr/>
-        </p:nvPicPr>
-        <p:blipFill>
-          <a:blip r:embed="rId1"/>
-          <a:srcRect l="0" r="0" t="0" b="0"/>
-          <a:stretch/>
-        </p:blipFill>
-        <p:spPr>
-          <a:xfrm>
-            <a:off x="640080" y="1234440"/>
-            <a:ext cx="7251192" cy="4925338"/>
-          </a:xfrm>
-          <a:prstGeom prst="rect">
-            <a:avLst/>
-          </a:prstGeom>
-        </p:spPr>
-      </p:pic>
-      <p:sp>
-        <p:nvSpPr>
-          <p:cNvPr id="7" name="Text 4"/>
-          <p:cNvSpPr txBox="1"/>
-          <p:nvPr/>
-        </p:nvSpPr>
-        <p:spPr>
-          <a:xfrm>
-            <a:off x="8257032" y="1234440"/>
-            <a:ext cx="3291840" cy="256032"/>
+      <p:sp>
+        <p:nvSpPr>
+          <p:cNvPr id="6" name="Shape 4"/>
+          <p:cNvSpPr/>
+          <p:nvPr/>
+        </p:nvSpPr>
+        <p:spPr>
+          <a:xfrm>
+            <a:off x="658368" y="1463040"/>
+            <a:ext cx="1005840" cy="32004"/>
+          </a:xfrm>
+          <a:prstGeom prst="rect">
+            <a:avLst/>
+          </a:prstGeom>
+          <a:solidFill>
+            <a:srgbClr val="BC0031"/>
+          </a:solidFill>
+          <a:ln/>
+        </p:spPr>
+      </p:sp>
+      <p:sp>
+        <p:nvSpPr>
+          <p:cNvPr id="7" name="Text 5"/>
+          <p:cNvSpPr txBox="1"/>
+          <p:nvPr/>
+        </p:nvSpPr>
+        <p:spPr>
+          <a:xfrm>
+            <a:off x="640080" y="1783080"/>
+            <a:ext cx="3108960" cy="256032"/>
           </a:xfrm>
           <a:prstGeom prst="rect">
             <a:avLst/>
@@ -4155,7 +4984,7 @@
             <a:r>
               <a:rPr lang="en-US" sz="1150" b="1" spc="100" kern="0" dirty="0">
                 <a:solidFill>
-                  <a:srgbClr val="E98300"/>
+                  <a:srgbClr val="BC0031"/>
                 </a:solidFill>
                 <a:latin typeface="Times New Roman" pitchFamily="34" charset="0"/>
                 <a:ea typeface="Times New Roman" pitchFamily="34" charset="-122"/>
@@ -4169,14 +4998,14 @@
       </p:sp>
       <p:sp>
         <p:nvSpPr>
-          <p:cNvPr id="8" name="Text 5"/>
-          <p:cNvSpPr txBox="1"/>
-          <p:nvPr/>
-        </p:nvSpPr>
-        <p:spPr>
-          <a:xfrm>
-            <a:off x="8257032" y="1527048"/>
-            <a:ext cx="3291840" cy="1046988"/>
+          <p:cNvPr id="8" name="Text 6"/>
+          <p:cNvSpPr txBox="1"/>
+          <p:nvPr/>
+        </p:nvSpPr>
+        <p:spPr>
+          <a:xfrm>
+            <a:off x="640080" y="2075688"/>
+            <a:ext cx="3108960" cy="1046988"/>
           </a:xfrm>
           <a:prstGeom prst="rect">
             <a:avLst/>
@@ -4207,7 +5036,7 @@
                 <a:ea typeface="Times New Roman" pitchFamily="34" charset="-122"/>
                 <a:cs typeface="Times New Roman" pitchFamily="34" charset="-120"/>
               </a:rPr>
-              <a:t>[TODO] voxel spacing across patients, slice count / scan length</a:t>
+              <a:t>Patient_02: axial slice 111 and 3D view</a:t>
             </a:r>
             <a:endParaRPr lang="en-US" sz="1250" dirty="0"/>
           </a:p>
@@ -4231,7 +5060,7 @@
                 <a:ea typeface="Times New Roman" pitchFamily="34" charset="-122"/>
                 <a:cs typeface="Times New Roman" pitchFamily="34" charset="-120"/>
               </a:rPr>
-              <a:t>[TODO]</a:t>
+              <a:t>Before: two pieces carry the esophagus label</a:t>
             </a:r>
             <a:endParaRPr lang="en-US" sz="1250" dirty="0"/>
           </a:p>
@@ -4255,7 +5084,7 @@
                 <a:ea typeface="Times New Roman" pitchFamily="34" charset="-122"/>
                 <a:cs typeface="Times New Roman" pitchFamily="34" charset="-120"/>
               </a:rPr>
-              <a:t>[TODO]</a:t>
+              <a:t>After: one piece relabelled aorta</a:t>
             </a:r>
             <a:endParaRPr lang="en-US" sz="1250" dirty="0"/>
           </a:p>
@@ -4263,14 +5092,14 @@
       </p:sp>
       <p:sp>
         <p:nvSpPr>
-          <p:cNvPr id="9" name="Text 6"/>
-          <p:cNvSpPr txBox="1"/>
-          <p:nvPr/>
-        </p:nvSpPr>
-        <p:spPr>
-          <a:xfrm>
-            <a:off x="8257032" y="2802636"/>
-            <a:ext cx="3291840" cy="256032"/>
+          <p:cNvPr id="9" name="Text 7"/>
+          <p:cNvSpPr txBox="1"/>
+          <p:nvPr/>
+        </p:nvSpPr>
+        <p:spPr>
+          <a:xfrm>
+            <a:off x="640080" y="3351276"/>
+            <a:ext cx="3108960" cy="256032"/>
           </a:xfrm>
           <a:prstGeom prst="rect">
             <a:avLst/>
@@ -4294,7 +5123,7 @@
                 <a:ea typeface="Times New Roman" pitchFamily="34" charset="-122"/>
                 <a:cs typeface="Times New Roman" pitchFamily="34" charset="-120"/>
               </a:rPr>
-              <a:t>HOW IT WAS MADE</a:t>
+              <a:t>HOW IT WAS DONE</a:t>
             </a:r>
             <a:endParaRPr lang="en-US" sz="1150" dirty="0"/>
           </a:p>
@@ -4302,14 +5131,14 @@
       </p:sp>
       <p:sp>
         <p:nvSpPr>
-          <p:cNvPr id="10" name="Text 7"/>
-          <p:cNvSpPr txBox="1"/>
-          <p:nvPr/>
-        </p:nvSpPr>
-        <p:spPr>
-          <a:xfrm>
-            <a:off x="8257032" y="3095244"/>
-            <a:ext cx="3291840" cy="846963"/>
+          <p:cNvPr id="10" name="Text 8"/>
+          <p:cNvSpPr txBox="1"/>
+          <p:nvPr/>
+        </p:nvSpPr>
+        <p:spPr>
+          <a:xfrm>
+            <a:off x="640080" y="3643884"/>
+            <a:ext cx="3108960" cy="1247013"/>
           </a:xfrm>
           <a:prstGeom prst="rect">
             <a:avLst/>
@@ -4340,7 +5169,7 @@
                 <a:ea typeface="Times New Roman" pitchFamily="34" charset="-122"/>
                 <a:cs typeface="Times New Roman" pitchFamily="34" charset="-120"/>
               </a:rPr>
-              <a:t>[TODO] how it was measured</a:t>
+              <a:t>[TODO] how the mislabeling was found and fixed</a:t>
             </a:r>
             <a:endParaRPr lang="en-US" sz="1250" dirty="0"/>
           </a:p>
@@ -4364,7 +5193,7 @@
                 <a:ea typeface="Times New Roman" pitchFamily="34" charset="-122"/>
                 <a:cs typeface="Times New Roman" pitchFamily="34" charset="-120"/>
               </a:rPr>
-              <a:t>[TODO]</a:t>
+              <a:t>[TODO] any other integrity checks run (e.g. alignment)</a:t>
             </a:r>
             <a:endParaRPr lang="en-US" sz="1250" dirty="0"/>
           </a:p>
@@ -4396,54 +5225,198 @@
       </p:sp>
       <p:sp>
         <p:nvSpPr>
-          <p:cNvPr id="11" name="Shape 8"/>
+          <p:cNvPr id="11" name="Text 9"/>
+          <p:cNvSpPr txBox="1"/>
+          <p:nvPr/>
+        </p:nvSpPr>
+        <p:spPr>
+          <a:xfrm>
+            <a:off x="4114800" y="1783080"/>
+            <a:ext cx="3374136" cy="256032"/>
+          </a:xfrm>
+          <a:prstGeom prst="rect">
+            <a:avLst/>
+          </a:prstGeom>
+          <a:noFill/>
+          <a:ln/>
+        </p:spPr>
+        <p:txBody>
+          <a:bodyPr wrap="square" lIns="0" tIns="0" rIns="0" bIns="0" rtlCol="0" anchor="ctr"/>
+          <a:lstStyle/>
+          <a:p>
+            <a:pPr indent="0" marL="0">
+              <a:buNone/>
+            </a:pPr>
+            <a:r>
+              <a:rPr lang="en-US" sz="1150" b="1" spc="100" kern="0" dirty="0">
+                <a:solidFill>
+                  <a:srgbClr val="6B6B6B"/>
+                </a:solidFill>
+                <a:latin typeface="Times New Roman" pitchFamily="34" charset="0"/>
+                <a:ea typeface="Times New Roman" pitchFamily="34" charset="-122"/>
+                <a:cs typeface="Times New Roman" pitchFamily="34" charset="-120"/>
+              </a:rPr>
+              <a:t>BEFORE</a:t>
+            </a:r>
+            <a:endParaRPr lang="en-US" sz="1150" dirty="0"/>
+          </a:p>
+        </p:txBody>
+      </p:sp>
+      <p:pic>
+        <p:nvPicPr>
+          <p:cNvPr id="12" name="Image 0" descr="/Users/bellavg/ProjectsMSc/ai4mi_project/.claude/worktrees/segthor-presentation-midpoint-825c66/figures/comparison/label_correction_example_before.png">    </p:cNvPr>
+          <p:cNvPicPr>
+            <a:picLocks noChangeAspect="1"/>
+          </p:cNvPicPr>
+          <p:nvPr/>
+        </p:nvPicPr>
+        <p:blipFill>
+          <a:blip r:embed="rId1"/>
+          <a:srcRect l="0" r="0" t="0" b="0"/>
+          <a:stretch/>
+        </p:blipFill>
+        <p:spPr>
+          <a:xfrm>
+            <a:off x="4114800" y="2148840"/>
+            <a:ext cx="3374136" cy="1872044"/>
+          </a:xfrm>
+          <a:prstGeom prst="rect">
+            <a:avLst/>
+          </a:prstGeom>
+        </p:spPr>
+      </p:pic>
+      <p:sp>
+        <p:nvSpPr>
+          <p:cNvPr id="13" name="Text 10"/>
+          <p:cNvSpPr txBox="1"/>
+          <p:nvPr/>
+        </p:nvSpPr>
+        <p:spPr>
+          <a:xfrm>
+            <a:off x="8174736" y="1783080"/>
+            <a:ext cx="3374136" cy="256032"/>
+          </a:xfrm>
+          <a:prstGeom prst="rect">
+            <a:avLst/>
+          </a:prstGeom>
+          <a:noFill/>
+          <a:ln/>
+        </p:spPr>
+        <p:txBody>
+          <a:bodyPr wrap="square" lIns="0" tIns="0" rIns="0" bIns="0" rtlCol="0" anchor="ctr"/>
+          <a:lstStyle/>
+          <a:p>
+            <a:pPr indent="0" marL="0">
+              <a:buNone/>
+            </a:pPr>
+            <a:r>
+              <a:rPr lang="en-US" sz="1150" b="1" spc="100" kern="0" dirty="0">
+                <a:solidFill>
+                  <a:srgbClr val="BC0031"/>
+                </a:solidFill>
+                <a:latin typeface="Times New Roman" pitchFamily="34" charset="0"/>
+                <a:ea typeface="Times New Roman" pitchFamily="34" charset="-122"/>
+                <a:cs typeface="Times New Roman" pitchFamily="34" charset="-120"/>
+              </a:rPr>
+              <a:t>AFTER</a:t>
+            </a:r>
+            <a:endParaRPr lang="en-US" sz="1150" dirty="0"/>
+          </a:p>
+        </p:txBody>
+      </p:sp>
+      <p:pic>
+        <p:nvPicPr>
+          <p:cNvPr id="14" name="Image 1" descr="/Users/bellavg/ProjectsMSc/ai4mi_project/.claude/worktrees/segthor-presentation-midpoint-825c66/figures/comparison/label_correction_example_after.png">    </p:cNvPr>
+          <p:cNvPicPr>
+            <a:picLocks noChangeAspect="1"/>
+          </p:cNvPicPr>
+          <p:nvPr/>
+        </p:nvPicPr>
+        <p:blipFill>
+          <a:blip r:embed="rId2"/>
+          <a:srcRect l="0" r="0" t="0" b="0"/>
+          <a:stretch/>
+        </p:blipFill>
+        <p:spPr>
+          <a:xfrm>
+            <a:off x="8174736" y="2148840"/>
+            <a:ext cx="3374136" cy="1872044"/>
+          </a:xfrm>
+          <a:prstGeom prst="rect">
+            <a:avLst/>
+          </a:prstGeom>
+        </p:spPr>
+      </p:pic>
+      <p:sp>
+        <p:nvSpPr>
+          <p:cNvPr id="15" name="Shape 11"/>
           <p:cNvSpPr/>
           <p:nvPr/>
         </p:nvSpPr>
         <p:spPr>
           <a:xfrm>
-            <a:off x="8257032" y="4170807"/>
-            <a:ext cx="3291840" cy="1051560"/>
-          </a:xfrm>
-          <a:prstGeom prst="rect">
+            <a:off x="7603236" y="2947702"/>
+            <a:ext cx="457200" cy="274320"/>
+          </a:xfrm>
+          <a:prstGeom prst="rightArrow">
             <a:avLst/>
           </a:prstGeom>
           <a:solidFill>
-            <a:srgbClr val="FCEEDC"/>
+            <a:srgbClr val="BC0031"/>
           </a:solidFill>
           <a:ln/>
         </p:spPr>
       </p:sp>
       <p:sp>
         <p:nvSpPr>
-          <p:cNvPr id="12" name="Shape 9"/>
+          <p:cNvPr id="16" name="Shape 12"/>
           <p:cNvSpPr/>
           <p:nvPr/>
         </p:nvSpPr>
         <p:spPr>
           <a:xfrm>
-            <a:off x="8257032" y="4170807"/>
-            <a:ext cx="54864" cy="1051560"/>
+            <a:off x="4114800" y="4340924"/>
+            <a:ext cx="7434072" cy="1143000"/>
           </a:xfrm>
           <a:prstGeom prst="rect">
             <a:avLst/>
           </a:prstGeom>
           <a:solidFill>
-            <a:srgbClr val="E98300"/>
+            <a:srgbClr val="F7E8EC"/>
           </a:solidFill>
           <a:ln/>
         </p:spPr>
       </p:sp>
       <p:sp>
         <p:nvSpPr>
-          <p:cNvPr id="13" name="Text 10"/>
-          <p:cNvSpPr txBox="1"/>
-          <p:nvPr/>
-        </p:nvSpPr>
-        <p:spPr>
-          <a:xfrm>
-            <a:off x="8531352" y="4353687"/>
-            <a:ext cx="2743200" cy="274320"/>
+          <p:cNvPr id="17" name="Shape 13"/>
+          <p:cNvSpPr/>
+          <p:nvPr/>
+        </p:nvSpPr>
+        <p:spPr>
+          <a:xfrm>
+            <a:off x="4114800" y="4340924"/>
+            <a:ext cx="54864" cy="1143000"/>
+          </a:xfrm>
+          <a:prstGeom prst="rect">
+            <a:avLst/>
+          </a:prstGeom>
+          <a:solidFill>
+            <a:srgbClr val="BC0031"/>
+          </a:solidFill>
+          <a:ln/>
+        </p:spPr>
+      </p:sp>
+      <p:sp>
+        <p:nvSpPr>
+          <p:cNvPr id="18" name="Text 14"/>
+          <p:cNvSpPr txBox="1"/>
+          <p:nvPr/>
+        </p:nvSpPr>
+        <p:spPr>
+          <a:xfrm>
+            <a:off x="4389120" y="4523804"/>
+            <a:ext cx="6885432" cy="274320"/>
           </a:xfrm>
           <a:prstGeom prst="rect">
             <a:avLst/>
@@ -4461,13 +5434,13 @@
             <a:r>
               <a:rPr lang="en-US" sz="1100" b="1" spc="100" kern="0" dirty="0">
                 <a:solidFill>
-                  <a:srgbClr val="1F1D21"/>
-                </a:solidFill>
-                <a:latin typeface="Times New Roman" pitchFamily="34" charset="0"/>
-                <a:ea typeface="Times New Roman" pitchFamily="34" charset="-122"/>
-                <a:cs typeface="Times New Roman" pitchFamily="34" charset="-120"/>
-              </a:rPr>
-              <a:t>WHAT WE LEARN</a:t>
+                  <a:srgbClr val="BC0031"/>
+                </a:solidFill>
+                <a:latin typeface="Times New Roman" pitchFamily="34" charset="0"/>
+                <a:ea typeface="Times New Roman" pitchFamily="34" charset="-122"/>
+                <a:cs typeface="Times New Roman" pitchFamily="34" charset="-120"/>
+              </a:rPr>
+              <a:t>OUTCOME</a:t>
             </a:r>
             <a:endParaRPr lang="en-US" sz="1100" dirty="0"/>
           </a:p>
@@ -4475,14 +5448,14 @@
       </p:sp>
       <p:sp>
         <p:nvSpPr>
-          <p:cNvPr id="14" name="Text 11"/>
-          <p:cNvSpPr txBox="1"/>
-          <p:nvPr/>
-        </p:nvSpPr>
-        <p:spPr>
-          <a:xfrm>
-            <a:off x="8531352" y="4673727"/>
-            <a:ext cx="2743200" cy="365760"/>
+          <p:cNvPr id="19" name="Text 15"/>
+          <p:cNvSpPr txBox="1"/>
+          <p:nvPr/>
+        </p:nvSpPr>
+        <p:spPr>
+          <a:xfrm>
+            <a:off x="4389120" y="4843844"/>
+            <a:ext cx="6885432" cy="457200"/>
           </a:xfrm>
           <a:prstGeom prst="rect">
             <a:avLst/>
@@ -4509,7 +5482,7 @@
                 <a:ea typeface="Times New Roman" pitchFamily="34" charset="-122"/>
                 <a:cs typeface="Times New Roman" pitchFamily="34" charset="-120"/>
               </a:rPr>
-              <a:t>[TODO] what this implies</a:t>
+              <a:t>Caught and corrected before any preprocessing or training ran on it.</a:t>
             </a:r>
             <a:endParaRPr lang="en-US" sz="1350" dirty="0"/>
           </a:p>
@@ -4517,14 +5490,14 @@
       </p:sp>
       <p:pic>
         <p:nvPicPr>
-          <p:cNvPr id="15" name="Image 1" descr="/Users/bellavg/ProjectsMSc/ai4mi_project/.claude/worktrees/segthor-presentation-midpoint-825c66/deck/assets/uva_logo.png">    </p:cNvPr>
+          <p:cNvPr id="20" name="Image 2" descr="/Users/bellavg/ProjectsMSc/ai4mi_project/.claude/worktrees/segthor-presentation-midpoint-825c66/deck/assets/uva_logo.png">    </p:cNvPr>
           <p:cNvPicPr>
             <a:picLocks noChangeAspect="1"/>
           </p:cNvPicPr>
           <p:nvPr/>
         </p:nvPicPr>
         <p:blipFill>
-          <a:blip r:embed="rId2"/>
+          <a:blip r:embed="rId3"/>
           <a:stretch>
             <a:fillRect/>
           </a:stretch>
@@ -4541,7 +5514,7 @@
       </p:pic>
       <p:sp>
         <p:nvSpPr>
-          <p:cNvPr id="16" name="Text 12"/>
+          <p:cNvPr id="21" name="Text 16"/>
           <p:cNvSpPr txBox="1"/>
           <p:nvPr/>
         </p:nvSpPr>
@@ -4741,7 +5714,7 @@
                 <a:ea typeface="Times New Roman" pitchFamily="34" charset="-122"/>
                 <a:cs typeface="Times New Roman" pitchFamily="34" charset="-120"/>
               </a:rPr>
-              <a:t>Exploratory Analysis II: Organ HU Intensity, All Patients</a:t>
+              <a:t>Exploratory Analysis I: Scan Geometry for the 20 CT Scans</a:t>
             </a:r>
             <a:endParaRPr lang="en-US" sz="2600" dirty="0"/>
           </a:p>
@@ -4749,7 +5722,7 @@
       </p:sp>
       <p:pic>
         <p:nvPicPr>
-          <p:cNvPr id="6" name="Image 0" descr="/Users/bellavg/ProjectsMSc/ai4mi_project/.claude/worktrees/segthor-presentation-midpoint-825c66/figures/comparison/label_hu_distribution.png">    </p:cNvPr>
+          <p:cNvPr id="6" name="Image 0" descr="/Users/bellavg/ProjectsMSc/ai4mi_project/.claude/worktrees/segthor-presentation-midpoint-825c66/figures/profile/scan_geometry/field_of_view.png">    </p:cNvPr>
           <p:cNvPicPr>
             <a:picLocks noChangeAspect="1"/>
           </p:cNvPicPr>
@@ -4762,8 +5735,8 @@
         </p:blipFill>
         <p:spPr>
           <a:xfrm>
-            <a:off x="5209032" y="1234440"/>
-            <a:ext cx="6339840" cy="4937760"/>
+            <a:off x="640080" y="1234440"/>
+            <a:ext cx="7251192" cy="4925338"/>
           </a:xfrm>
           <a:prstGeom prst="rect">
             <a:avLst/>
@@ -4778,8 +5751,8 @@
         </p:nvSpPr>
         <p:spPr>
           <a:xfrm>
-            <a:off x="640080" y="1234440"/>
-            <a:ext cx="4114800" cy="256032"/>
+            <a:off x="8257032" y="1234440"/>
+            <a:ext cx="3291840" cy="256032"/>
           </a:xfrm>
           <a:prstGeom prst="rect">
             <a:avLst/>
@@ -4817,8 +5790,8 @@
         </p:nvSpPr>
         <p:spPr>
           <a:xfrm>
-            <a:off x="640080" y="1527048"/>
-            <a:ext cx="4114800" cy="1046988"/>
+            <a:off x="8257032" y="1527048"/>
+            <a:ext cx="3291840" cy="1046988"/>
           </a:xfrm>
           <a:prstGeom prst="rect">
             <a:avLst/>
@@ -4849,7 +5822,7 @@
                 <a:ea typeface="Times New Roman" pitchFamily="34" charset="-122"/>
                 <a:cs typeface="Times New Roman" pitchFamily="34" charset="-120"/>
               </a:rPr>
-              <a:t>HU inside each annotated organ, for all patients</a:t>
+              <a:t>[TODO] voxel spacing across patients, slice count / scan length</a:t>
             </a:r>
             <a:endParaRPr lang="en-US" sz="1250" dirty="0"/>
           </a:p>
@@ -4873,7 +5846,7 @@
                 <a:ea typeface="Times New Roman" pitchFamily="34" charset="-122"/>
                 <a:cs typeface="Times New Roman" pitchFamily="34" charset="-120"/>
               </a:rPr>
-              <a:t>Bars are labelled voxels per 10 HU bin</a:t>
+              <a:t>[TODO]</a:t>
             </a:r>
             <a:endParaRPr lang="en-US" sz="1250" dirty="0"/>
           </a:p>
@@ -4897,7 +5870,7 @@
                 <a:ea typeface="Times New Roman" pitchFamily="34" charset="-122"/>
                 <a:cs typeface="Times New Roman" pitchFamily="34" charset="-120"/>
               </a:rPr>
-              <a:t>Top: original labels (aorta merged). Bottom: corrected labels (aorta separate)</a:t>
+              <a:t>[TODO]</a:t>
             </a:r>
             <a:endParaRPr lang="en-US" sz="1250" dirty="0"/>
           </a:p>
@@ -4911,8 +5884,8 @@
         </p:nvSpPr>
         <p:spPr>
           <a:xfrm>
-            <a:off x="640080" y="2802636"/>
-            <a:ext cx="4114800" cy="256032"/>
+            <a:off x="8257032" y="2802636"/>
+            <a:ext cx="3291840" cy="256032"/>
           </a:xfrm>
           <a:prstGeom prst="rect">
             <a:avLst/>
@@ -4936,7 +5909,7 @@
                 <a:ea typeface="Times New Roman" pitchFamily="34" charset="-122"/>
                 <a:cs typeface="Times New Roman" pitchFamily="34" charset="-120"/>
               </a:rPr>
-              <a:t>AORTA VS. HEART</a:t>
+              <a:t>HOW IT WAS MADE</a:t>
             </a:r>
             <a:endParaRPr lang="en-US" sz="1150" dirty="0"/>
           </a:p>
@@ -4950,8 +5923,8 @@
         </p:nvSpPr>
         <p:spPr>
           <a:xfrm>
-            <a:off x="640080" y="3095244"/>
-            <a:ext cx="4114800" cy="846963"/>
+            <a:off x="8257032" y="3095244"/>
+            <a:ext cx="3291840" cy="846963"/>
           </a:xfrm>
           <a:prstGeom prst="rect">
             <a:avLst/>
@@ -4982,7 +5955,7 @@
                 <a:ea typeface="Times New Roman" pitchFamily="34" charset="-122"/>
                 <a:cs typeface="Times New Roman" pitchFamily="34" charset="-120"/>
               </a:rPr>
-              <a:t>[TODO] aorta vs. heart in HU</a:t>
+              <a:t>[TODO] how it was measured</a:t>
             </a:r>
             <a:endParaRPr lang="en-US" sz="1250" dirty="0"/>
           </a:p>
@@ -5044,8 +6017,8 @@
         </p:nvSpPr>
         <p:spPr>
           <a:xfrm>
-            <a:off x="640080" y="4170807"/>
-            <a:ext cx="4114800" cy="1051560"/>
+            <a:off x="8257032" y="4170807"/>
+            <a:ext cx="3291840" cy="1051560"/>
           </a:xfrm>
           <a:prstGeom prst="rect">
             <a:avLst/>
@@ -5064,7 +6037,7 @@
         </p:nvSpPr>
         <p:spPr>
           <a:xfrm>
-            <a:off x="640080" y="4170807"/>
+            <a:off x="8257032" y="4170807"/>
             <a:ext cx="54864" cy="1051560"/>
           </a:xfrm>
           <a:prstGeom prst="rect">
@@ -5084,8 +6057,8 @@
         </p:nvSpPr>
         <p:spPr>
           <a:xfrm>
-            <a:off x="914400" y="4353687"/>
-            <a:ext cx="3566160" cy="274320"/>
+            <a:off x="8531352" y="4353687"/>
+            <a:ext cx="2743200" cy="274320"/>
           </a:xfrm>
           <a:prstGeom prst="rect">
             <a:avLst/>
@@ -5123,8 +6096,8 @@
         </p:nvSpPr>
         <p:spPr>
           <a:xfrm>
-            <a:off x="914400" y="4673727"/>
-            <a:ext cx="3566160" cy="365760"/>
+            <a:off x="8531352" y="4673727"/>
+            <a:ext cx="2743200" cy="365760"/>
           </a:xfrm>
           <a:prstGeom prst="rect">
             <a:avLst/>
@@ -5344,7 +6317,7 @@
                 <a:ea typeface="Times New Roman" pitchFamily="34" charset="-122"/>
                 <a:cs typeface="Times New Roman" pitchFamily="34" charset="-120"/>
               </a:rPr>
-              <a:t>0:50</a:t>
+              <a:t>0:35</a:t>
             </a:r>
             <a:endParaRPr lang="en-US" sz="1200" dirty="0"/>
           </a:p>
@@ -5359,7 +6332,7 @@
         <p:spPr>
           <a:xfrm>
             <a:off x="640080" y="658368"/>
-            <a:ext cx="10881360" cy="822960"/>
+            <a:ext cx="10881360" cy="502920"/>
           </a:xfrm>
           <a:prstGeom prst="rect">
             <a:avLst/>
@@ -5383,42 +6356,45 @@
                 <a:ea typeface="Times New Roman" pitchFamily="34" charset="-122"/>
                 <a:cs typeface="Times New Roman" pitchFamily="34" charset="-120"/>
               </a:rPr>
-              <a:t>Exploratory Analysis III: Spatial Layout &amp; Label Adjacency</a:t>
+              <a:t>Exploratory Analysis II: Organ HU Intensity, All Patients</a:t>
             </a:r>
             <a:endParaRPr lang="en-US" sz="2600" dirty="0"/>
           </a:p>
         </p:txBody>
       </p:sp>
-      <p:sp>
-        <p:nvSpPr>
-          <p:cNvPr id="6" name="Shape 4"/>
-          <p:cNvSpPr/>
-          <p:nvPr/>
-        </p:nvSpPr>
-        <p:spPr>
-          <a:xfrm>
-            <a:off x="658368" y="1463040"/>
-            <a:ext cx="1005840" cy="32004"/>
-          </a:xfrm>
-          <a:prstGeom prst="rect">
-            <a:avLst/>
-          </a:prstGeom>
-          <a:solidFill>
-            <a:srgbClr val="E98300"/>
-          </a:solidFill>
-          <a:ln/>
-        </p:spPr>
-      </p:sp>
-      <p:sp>
-        <p:nvSpPr>
-          <p:cNvPr id="7" name="Text 5"/>
-          <p:cNvSpPr txBox="1"/>
-          <p:nvPr/>
-        </p:nvSpPr>
-        <p:spPr>
-          <a:xfrm>
-            <a:off x="640080" y="1783080"/>
-            <a:ext cx="3322320" cy="274320"/>
+      <p:pic>
+        <p:nvPicPr>
+          <p:cNvPr id="6" name="Image 0" descr="/Users/bellavg/ProjectsMSc/ai4mi_project/.claude/worktrees/segthor-presentation-midpoint-825c66/figures/comparison/label_hu_distribution.png">    </p:cNvPr>
+          <p:cNvPicPr>
+            <a:picLocks noChangeAspect="1"/>
+          </p:cNvPicPr>
+          <p:nvPr/>
+        </p:nvPicPr>
+        <p:blipFill>
+          <a:blip r:embed="rId1"/>
+          <a:srcRect l="0" r="0" t="0" b="0"/>
+          <a:stretch/>
+        </p:blipFill>
+        <p:spPr>
+          <a:xfrm>
+            <a:off x="5209032" y="1234440"/>
+            <a:ext cx="6339840" cy="4937760"/>
+          </a:xfrm>
+          <a:prstGeom prst="rect">
+            <a:avLst/>
+          </a:prstGeom>
+        </p:spPr>
+      </p:pic>
+      <p:sp>
+        <p:nvSpPr>
+          <p:cNvPr id="7" name="Text 4"/>
+          <p:cNvSpPr txBox="1"/>
+          <p:nvPr/>
+        </p:nvSpPr>
+        <p:spPr>
+          <a:xfrm>
+            <a:off x="640080" y="1234440"/>
+            <a:ext cx="4114800" cy="256032"/>
           </a:xfrm>
           <a:prstGeom prst="rect">
             <a:avLst/>
@@ -5434,7 +6410,7 @@
               <a:buNone/>
             </a:pPr>
             <a:r>
-              <a:rPr lang="en-US" sz="1200" b="1" spc="100" kern="0" dirty="0">
+              <a:rPr lang="en-US" sz="1150" b="1" spc="100" kern="0" dirty="0">
                 <a:solidFill>
                   <a:srgbClr val="E98300"/>
                 </a:solidFill>
@@ -5442,22 +6418,22 @@
                 <a:ea typeface="Times New Roman" pitchFamily="34" charset="-122"/>
                 <a:cs typeface="Times New Roman" pitchFamily="34" charset="-120"/>
               </a:rPr>
-              <a:t>POSITION</a:t>
-            </a:r>
-            <a:endParaRPr lang="en-US" sz="1200" dirty="0"/>
-          </a:p>
-        </p:txBody>
-      </p:sp>
-      <p:sp>
-        <p:nvSpPr>
-          <p:cNvPr id="8" name="Text 6"/>
-          <p:cNvSpPr txBox="1"/>
-          <p:nvPr/>
-        </p:nvSpPr>
-        <p:spPr>
-          <a:xfrm>
-            <a:off x="640080" y="2148840"/>
-            <a:ext cx="3322320" cy="1143000"/>
+              <a:t>WHAT IT SHOWS</a:t>
+            </a:r>
+            <a:endParaRPr lang="en-US" sz="1150" dirty="0"/>
+          </a:p>
+        </p:txBody>
+      </p:sp>
+      <p:sp>
+        <p:nvSpPr>
+          <p:cNvPr id="8" name="Text 5"/>
+          <p:cNvSpPr txBox="1"/>
+          <p:nvPr/>
+        </p:nvSpPr>
+        <p:spPr>
+          <a:xfrm>
+            <a:off x="640080" y="1527048"/>
+            <a:ext cx="4114800" cy="1046988"/>
           </a:xfrm>
           <a:prstGeom prst="rect">
             <a:avLst/>
@@ -5480,7 +6456,7 @@
               <a:buChar char="▪"/>
             </a:pPr>
             <a:r>
-              <a:rPr lang="en-US" sz="1400" dirty="0">
+              <a:rPr lang="en-US" sz="1250" dirty="0">
                 <a:solidFill>
                   <a:srgbClr val="1F1D21"/>
                 </a:solidFill>
@@ -5488,9 +6464,9 @@
                 <a:ea typeface="Times New Roman" pitchFamily="34" charset="-122"/>
                 <a:cs typeface="Times New Roman" pitchFamily="34" charset="-120"/>
               </a:rPr>
-              <a:t>[TODO] where each organ sits in 3D</a:t>
-            </a:r>
-            <a:endParaRPr lang="en-US" sz="1400" dirty="0"/>
+              <a:t>HU inside each annotated organ, for all patients</a:t>
+            </a:r>
+            <a:endParaRPr lang="en-US" sz="1250" dirty="0"/>
           </a:p>
           <a:p>
             <a:pPr marL="177800" indent="-177800">
@@ -5504,7 +6480,7 @@
               <a:buChar char="▪"/>
             </a:pPr>
             <a:r>
-              <a:rPr lang="en-US" sz="1400" dirty="0">
+              <a:rPr lang="en-US" sz="1250" dirty="0">
                 <a:solidFill>
                   <a:srgbClr val="1F1D21"/>
                 </a:solidFill>
@@ -5512,9 +6488,9 @@
                 <a:ea typeface="Times New Roman" pitchFamily="34" charset="-122"/>
                 <a:cs typeface="Times New Roman" pitchFamily="34" charset="-120"/>
               </a:rPr>
-              <a:t>[TODO]</a:t>
-            </a:r>
-            <a:endParaRPr lang="en-US" sz="1400" dirty="0"/>
+              <a:t>Bars are labelled voxels per 10 HU bin</a:t>
+            </a:r>
+            <a:endParaRPr lang="en-US" sz="1250" dirty="0"/>
           </a:p>
           <a:p>
             <a:pPr marL="177800" indent="-177800">
@@ -5528,7 +6504,7 @@
               <a:buChar char="▪"/>
             </a:pPr>
             <a:r>
-              <a:rPr lang="en-US" sz="1400" dirty="0">
+              <a:rPr lang="en-US" sz="1250" dirty="0">
                 <a:solidFill>
                   <a:srgbClr val="1F1D21"/>
                 </a:solidFill>
@@ -5536,42 +6512,22 @@
                 <a:ea typeface="Times New Roman" pitchFamily="34" charset="-122"/>
                 <a:cs typeface="Times New Roman" pitchFamily="34" charset="-120"/>
               </a:rPr>
-              <a:t>[TODO]</a:t>
-            </a:r>
-            <a:endParaRPr lang="en-US" sz="1400" dirty="0"/>
-          </a:p>
-        </p:txBody>
-      </p:sp>
-      <p:sp>
-        <p:nvSpPr>
-          <p:cNvPr id="9" name="Shape 7"/>
-          <p:cNvSpPr/>
-          <p:nvPr/>
-        </p:nvSpPr>
-        <p:spPr>
-          <a:xfrm>
-            <a:off x="4191000" y="1783080"/>
-            <a:ext cx="13716" cy="1508760"/>
-          </a:xfrm>
-          <a:prstGeom prst="rect">
-            <a:avLst/>
-          </a:prstGeom>
-          <a:solidFill>
-            <a:srgbClr val="E3E3E3"/>
-          </a:solidFill>
-          <a:ln/>
-        </p:spPr>
-      </p:sp>
-      <p:sp>
-        <p:nvSpPr>
-          <p:cNvPr id="10" name="Text 8"/>
-          <p:cNvSpPr txBox="1"/>
-          <p:nvPr/>
-        </p:nvSpPr>
-        <p:spPr>
-          <a:xfrm>
-            <a:off x="4419600" y="1783080"/>
-            <a:ext cx="3322320" cy="274320"/>
+              <a:t>Top: original labels (aorta merged). Bottom: corrected labels (aorta separate)</a:t>
+            </a:r>
+            <a:endParaRPr lang="en-US" sz="1250" dirty="0"/>
+          </a:p>
+        </p:txBody>
+      </p:sp>
+      <p:sp>
+        <p:nvSpPr>
+          <p:cNvPr id="9" name="Text 6"/>
+          <p:cNvSpPr txBox="1"/>
+          <p:nvPr/>
+        </p:nvSpPr>
+        <p:spPr>
+          <a:xfrm>
+            <a:off x="640080" y="2802636"/>
+            <a:ext cx="4114800" cy="256032"/>
           </a:xfrm>
           <a:prstGeom prst="rect">
             <a:avLst/>
@@ -5587,30 +6543,30 @@
               <a:buNone/>
             </a:pPr>
             <a:r>
-              <a:rPr lang="en-US" sz="1200" b="1" spc="100" kern="0" dirty="0">
-                <a:solidFill>
-                  <a:srgbClr val="E98300"/>
-                </a:solidFill>
-                <a:latin typeface="Times New Roman" pitchFamily="34" charset="0"/>
-                <a:ea typeface="Times New Roman" pitchFamily="34" charset="-122"/>
-                <a:cs typeface="Times New Roman" pitchFamily="34" charset="-120"/>
-              </a:rPr>
-              <a:t>EXTENT</a:t>
-            </a:r>
-            <a:endParaRPr lang="en-US" sz="1200" dirty="0"/>
-          </a:p>
-        </p:txBody>
-      </p:sp>
-      <p:sp>
-        <p:nvSpPr>
-          <p:cNvPr id="11" name="Text 9"/>
-          <p:cNvSpPr txBox="1"/>
-          <p:nvPr/>
-        </p:nvSpPr>
-        <p:spPr>
-          <a:xfrm>
-            <a:off x="4419600" y="2148840"/>
-            <a:ext cx="3322320" cy="1143000"/>
+              <a:rPr lang="en-US" sz="1150" b="1" spc="100" kern="0" dirty="0">
+                <a:solidFill>
+                  <a:srgbClr val="BC0031"/>
+                </a:solidFill>
+                <a:latin typeface="Times New Roman" pitchFamily="34" charset="0"/>
+                <a:ea typeface="Times New Roman" pitchFamily="34" charset="-122"/>
+                <a:cs typeface="Times New Roman" pitchFamily="34" charset="-120"/>
+              </a:rPr>
+              <a:t>AORTA VS. HEART</a:t>
+            </a:r>
+            <a:endParaRPr lang="en-US" sz="1150" dirty="0"/>
+          </a:p>
+        </p:txBody>
+      </p:sp>
+      <p:sp>
+        <p:nvSpPr>
+          <p:cNvPr id="10" name="Text 7"/>
+          <p:cNvSpPr txBox="1"/>
+          <p:nvPr/>
+        </p:nvSpPr>
+        <p:spPr>
+          <a:xfrm>
+            <a:off x="640080" y="3095244"/>
+            <a:ext cx="4114800" cy="846963"/>
           </a:xfrm>
           <a:prstGeom prst="rect">
             <a:avLst/>
@@ -5633,7 +6589,7 @@
               <a:buChar char="▪"/>
             </a:pPr>
             <a:r>
-              <a:rPr lang="en-US" sz="1400" dirty="0">
+              <a:rPr lang="en-US" sz="1250" dirty="0">
                 <a:solidFill>
                   <a:srgbClr val="1F1D21"/>
                 </a:solidFill>
@@ -5641,9 +6597,9 @@
                 <a:ea typeface="Times New Roman" pitchFamily="34" charset="-122"/>
                 <a:cs typeface="Times New Roman" pitchFamily="34" charset="-120"/>
               </a:rPr>
-              <a:t>[TODO] coverage along the body axis</a:t>
-            </a:r>
-            <a:endParaRPr lang="en-US" sz="1400" dirty="0"/>
+              <a:t>[TODO] aorta vs. heart in HU</a:t>
+            </a:r>
+            <a:endParaRPr lang="en-US" sz="1250" dirty="0"/>
           </a:p>
           <a:p>
             <a:pPr marL="177800" indent="-177800">
@@ -5657,7 +6613,7 @@
               <a:buChar char="▪"/>
             </a:pPr>
             <a:r>
-              <a:rPr lang="en-US" sz="1400" dirty="0">
+              <a:rPr lang="en-US" sz="1250" dirty="0">
                 <a:solidFill>
                   <a:srgbClr val="1F1D21"/>
                 </a:solidFill>
@@ -5667,7 +6623,7 @@
               </a:rPr>
               <a:t>[TODO]</a:t>
             </a:r>
-            <a:endParaRPr lang="en-US" sz="1400" dirty="0"/>
+            <a:endParaRPr lang="en-US" sz="1250" dirty="0"/>
           </a:p>
           <a:p>
             <a:pPr marL="177800" indent="-177800">
@@ -5681,7 +6637,7 @@
               <a:buChar char="▪"/>
             </a:pPr>
             <a:r>
-              <a:rPr lang="en-US" sz="1400" dirty="0">
+              <a:rPr lang="en-US" sz="1250" dirty="0">
                 <a:solidFill>
                   <a:srgbClr val="1F1D21"/>
                 </a:solidFill>
@@ -5691,173 +6647,20 @@
               </a:rPr>
               <a:t>[TODO]</a:t>
             </a:r>
-            <a:endParaRPr lang="en-US" sz="1400" dirty="0"/>
-          </a:p>
-        </p:txBody>
-      </p:sp>
-      <p:sp>
-        <p:nvSpPr>
-          <p:cNvPr id="12" name="Shape 10"/>
+            <a:endParaRPr lang="en-US" sz="1250" dirty="0"/>
+          </a:p>
+        </p:txBody>
+      </p:sp>
+      <p:sp>
+        <p:nvSpPr>
+          <p:cNvPr id="11" name="Shape 8"/>
           <p:cNvSpPr/>
           <p:nvPr/>
         </p:nvSpPr>
         <p:spPr>
           <a:xfrm>
-            <a:off x="7970520" y="1783080"/>
-            <a:ext cx="13716" cy="1508760"/>
-          </a:xfrm>
-          <a:prstGeom prst="rect">
-            <a:avLst/>
-          </a:prstGeom>
-          <a:solidFill>
-            <a:srgbClr val="E3E3E3"/>
-          </a:solidFill>
-          <a:ln/>
-        </p:spPr>
-      </p:sp>
-      <p:sp>
-        <p:nvSpPr>
-          <p:cNvPr id="13" name="Text 11"/>
-          <p:cNvSpPr txBox="1"/>
-          <p:nvPr/>
-        </p:nvSpPr>
-        <p:spPr>
-          <a:xfrm>
-            <a:off x="8199120" y="1783080"/>
-            <a:ext cx="3322320" cy="274320"/>
-          </a:xfrm>
-          <a:prstGeom prst="rect">
-            <a:avLst/>
-          </a:prstGeom>
-          <a:noFill/>
-          <a:ln/>
-        </p:spPr>
-        <p:txBody>
-          <a:bodyPr wrap="square" lIns="0" tIns="0" rIns="0" bIns="0" rtlCol="0" anchor="ctr"/>
-          <a:lstStyle/>
-          <a:p>
-            <a:pPr indent="0" marL="0">
-              <a:buNone/>
-            </a:pPr>
-            <a:r>
-              <a:rPr lang="en-US" sz="1200" b="1" spc="100" kern="0" dirty="0">
-                <a:solidFill>
-                  <a:srgbClr val="E98300"/>
-                </a:solidFill>
-                <a:latin typeface="Times New Roman" pitchFamily="34" charset="0"/>
-                <a:ea typeface="Times New Roman" pitchFamily="34" charset="-122"/>
-                <a:cs typeface="Times New Roman" pitchFamily="34" charset="-120"/>
-              </a:rPr>
-              <a:t>ADJACENCY</a:t>
-            </a:r>
-            <a:endParaRPr lang="en-US" sz="1200" dirty="0"/>
-          </a:p>
-        </p:txBody>
-      </p:sp>
-      <p:sp>
-        <p:nvSpPr>
-          <p:cNvPr id="14" name="Text 12"/>
-          <p:cNvSpPr txBox="1"/>
-          <p:nvPr/>
-        </p:nvSpPr>
-        <p:spPr>
-          <a:xfrm>
-            <a:off x="8199120" y="2148840"/>
-            <a:ext cx="3322320" cy="1143000"/>
-          </a:xfrm>
-          <a:prstGeom prst="rect">
-            <a:avLst/>
-          </a:prstGeom>
-          <a:noFill/>
-          <a:ln/>
-        </p:spPr>
-        <p:txBody>
-          <a:bodyPr wrap="square" lIns="0" tIns="0" rIns="0" bIns="0" rtlCol="0" anchor="t"/>
-          <a:lstStyle/>
-          <a:p>
-            <a:pPr marL="177800" indent="-177800">
-              <a:lnSpc>
-                <a:spcPct val="115000"/>
-              </a:lnSpc>
-              <a:spcAft>
-                <a:spcPts val="500"/>
-              </a:spcAft>
-              <a:buSzPct val="100000"/>
-              <a:buChar char="▪"/>
-            </a:pPr>
-            <a:r>
-              <a:rPr lang="en-US" sz="1400" dirty="0">
-                <a:solidFill>
-                  <a:srgbClr val="1F1D21"/>
-                </a:solidFill>
-                <a:latin typeface="Times New Roman" pitchFamily="34" charset="0"/>
-                <a:ea typeface="Times New Roman" pitchFamily="34" charset="-122"/>
-                <a:cs typeface="Times New Roman" pitchFamily="34" charset="-120"/>
-              </a:rPr>
-              <a:t>[TODO] contact between label pairs</a:t>
-            </a:r>
-            <a:endParaRPr lang="en-US" sz="1400" dirty="0"/>
-          </a:p>
-          <a:p>
-            <a:pPr marL="177800" indent="-177800">
-              <a:lnSpc>
-                <a:spcPct val="115000"/>
-              </a:lnSpc>
-              <a:spcAft>
-                <a:spcPts val="500"/>
-              </a:spcAft>
-              <a:buSzPct val="100000"/>
-              <a:buChar char="▪"/>
-            </a:pPr>
-            <a:r>
-              <a:rPr lang="en-US" sz="1400" dirty="0">
-                <a:solidFill>
-                  <a:srgbClr val="1F1D21"/>
-                </a:solidFill>
-                <a:latin typeface="Times New Roman" pitchFamily="34" charset="0"/>
-                <a:ea typeface="Times New Roman" pitchFamily="34" charset="-122"/>
-                <a:cs typeface="Times New Roman" pitchFamily="34" charset="-120"/>
-              </a:rPr>
-              <a:t>[TODO] which pairs matter most, now that aorta is real</a:t>
-            </a:r>
-            <a:endParaRPr lang="en-US" sz="1400" dirty="0"/>
-          </a:p>
-          <a:p>
-            <a:pPr marL="177800" indent="-177800">
-              <a:lnSpc>
-                <a:spcPct val="115000"/>
-              </a:lnSpc>
-              <a:spcAft>
-                <a:spcPts val="500"/>
-              </a:spcAft>
-              <a:buSzPct val="100000"/>
-              <a:buChar char="▪"/>
-            </a:pPr>
-            <a:r>
-              <a:rPr lang="en-US" sz="1400" dirty="0">
-                <a:solidFill>
-                  <a:srgbClr val="1F1D21"/>
-                </a:solidFill>
-                <a:latin typeface="Times New Roman" pitchFamily="34" charset="0"/>
-                <a:ea typeface="Times New Roman" pitchFamily="34" charset="-122"/>
-                <a:cs typeface="Times New Roman" pitchFamily="34" charset="-120"/>
-              </a:rPr>
-              <a:t>[TODO]</a:t>
-            </a:r>
-            <a:endParaRPr lang="en-US" sz="1400" dirty="0"/>
-          </a:p>
-        </p:txBody>
-      </p:sp>
-      <p:sp>
-        <p:nvSpPr>
-          <p:cNvPr id="15" name="Shape 13"/>
-          <p:cNvSpPr/>
-          <p:nvPr/>
-        </p:nvSpPr>
-        <p:spPr>
-          <a:xfrm>
-            <a:off x="640080" y="3611880"/>
-            <a:ext cx="10881360" cy="914400"/>
+            <a:off x="640080" y="4170807"/>
+            <a:ext cx="4114800" cy="1051560"/>
           </a:xfrm>
           <a:prstGeom prst="rect">
             <a:avLst/>
@@ -5870,14 +6673,14 @@
       </p:sp>
       <p:sp>
         <p:nvSpPr>
-          <p:cNvPr id="16" name="Shape 14"/>
+          <p:cNvPr id="12" name="Shape 9"/>
           <p:cNvSpPr/>
           <p:nvPr/>
         </p:nvSpPr>
         <p:spPr>
           <a:xfrm>
-            <a:off x="640080" y="3611880"/>
-            <a:ext cx="54864" cy="914400"/>
+            <a:off x="640080" y="4170807"/>
+            <a:ext cx="54864" cy="1051560"/>
           </a:xfrm>
           <a:prstGeom prst="rect">
             <a:avLst/>
@@ -5890,14 +6693,14 @@
       </p:sp>
       <p:sp>
         <p:nvSpPr>
-          <p:cNvPr id="17" name="Text 15"/>
-          <p:cNvSpPr txBox="1"/>
-          <p:nvPr/>
-        </p:nvSpPr>
-        <p:spPr>
-          <a:xfrm>
-            <a:off x="914400" y="3794760"/>
-            <a:ext cx="10332720" cy="274320"/>
+          <p:cNvPr id="13" name="Text 10"/>
+          <p:cNvSpPr txBox="1"/>
+          <p:nvPr/>
+        </p:nvSpPr>
+        <p:spPr>
+          <a:xfrm>
+            <a:off x="914400" y="4353687"/>
+            <a:ext cx="3566160" cy="274320"/>
           </a:xfrm>
           <a:prstGeom prst="rect">
             <a:avLst/>
@@ -5915,13 +6718,13 @@
             <a:r>
               <a:rPr lang="en-US" sz="1100" b="1" spc="100" kern="0" dirty="0">
                 <a:solidFill>
-                  <a:srgbClr val="E98300"/>
-                </a:solidFill>
-                <a:latin typeface="Times New Roman" pitchFamily="34" charset="0"/>
-                <a:ea typeface="Times New Roman" pitchFamily="34" charset="-122"/>
-                <a:cs typeface="Times New Roman" pitchFamily="34" charset="-120"/>
-              </a:rPr>
-              <a:t>WHY THIS MATTERS</a:t>
+                  <a:srgbClr val="1F1D21"/>
+                </a:solidFill>
+                <a:latin typeface="Times New Roman" pitchFamily="34" charset="0"/>
+                <a:ea typeface="Times New Roman" pitchFamily="34" charset="-122"/>
+                <a:cs typeface="Times New Roman" pitchFamily="34" charset="-120"/>
+              </a:rPr>
+              <a:t>WHAT WE LEARN</a:t>
             </a:r>
             <a:endParaRPr lang="en-US" sz="1100" dirty="0"/>
           </a:p>
@@ -5929,14 +6732,14 @@
       </p:sp>
       <p:sp>
         <p:nvSpPr>
-          <p:cNvPr id="18" name="Text 16"/>
-          <p:cNvSpPr txBox="1"/>
-          <p:nvPr/>
-        </p:nvSpPr>
-        <p:spPr>
-          <a:xfrm>
-            <a:off x="914400" y="4114800"/>
-            <a:ext cx="10332720" cy="228600"/>
+          <p:cNvPr id="14" name="Text 11"/>
+          <p:cNvSpPr txBox="1"/>
+          <p:nvPr/>
+        </p:nvSpPr>
+        <p:spPr>
+          <a:xfrm>
+            <a:off x="914400" y="4673727"/>
+            <a:ext cx="3566160" cy="365760"/>
           </a:xfrm>
           <a:prstGeom prst="rect">
             <a:avLst/>
@@ -5963,7 +6766,7 @@
                 <a:ea typeface="Times New Roman" pitchFamily="34" charset="-122"/>
                 <a:cs typeface="Times New Roman" pitchFamily="34" charset="-120"/>
               </a:rPr>
-              <a:t>[TODO] how position and extent inform the preprocessing decisions on the next slide.</a:t>
+              <a:t>[TODO] what this implies</a:t>
             </a:r>
             <a:endParaRPr lang="en-US" sz="1350" dirty="0"/>
           </a:p>
@@ -5971,14 +6774,14 @@
       </p:sp>
       <p:pic>
         <p:nvPicPr>
-          <p:cNvPr id="19" name="Image 0" descr="/Users/bellavg/ProjectsMSc/ai4mi_project/.claude/worktrees/segthor-presentation-midpoint-825c66/deck/assets/uva_logo.png">    </p:cNvPr>
+          <p:cNvPr id="15" name="Image 1" descr="/Users/bellavg/ProjectsMSc/ai4mi_project/.claude/worktrees/segthor-presentation-midpoint-825c66/deck/assets/uva_logo.png">    </p:cNvPr>
           <p:cNvPicPr>
             <a:picLocks noChangeAspect="1"/>
           </p:cNvPicPr>
           <p:nvPr/>
         </p:nvPicPr>
         <p:blipFill>
-          <a:blip r:embed="rId1"/>
+          <a:blip r:embed="rId2"/>
           <a:stretch>
             <a:fillRect/>
           </a:stretch>
@@ -5995,7 +6798,7 @@
       </p:pic>
       <p:sp>
         <p:nvSpPr>
-          <p:cNvPr id="20" name="Text 17"/>
+          <p:cNvPr id="16" name="Text 12"/>
           <p:cNvSpPr txBox="1"/>
           <p:nvPr/>
         </p:nvSpPr>
@@ -6079,7 +6882,7 @@
             <a:avLst/>
           </a:prstGeom>
           <a:solidFill>
-            <a:srgbClr val="004E92"/>
+            <a:srgbClr val="E98300"/>
           </a:solidFill>
           <a:ln/>
         </p:spPr>
@@ -6111,13 +6914,13 @@
             <a:r>
               <a:rPr lang="en-US" sz="1200" b="1" spc="150" kern="0" dirty="0">
                 <a:solidFill>
-                  <a:srgbClr val="004E92"/>
-                </a:solidFill>
-                <a:latin typeface="Times New Roman" pitchFamily="34" charset="0"/>
-                <a:ea typeface="Times New Roman" pitchFamily="34" charset="-122"/>
-                <a:cs typeface="Times New Roman" pitchFamily="34" charset="-120"/>
-              </a:rPr>
-              <a:t>PREPROCESSING PIPELINE</a:t>
+                  <a:srgbClr val="E98300"/>
+                </a:solidFill>
+                <a:latin typeface="Times New Roman" pitchFamily="34" charset="0"/>
+                <a:ea typeface="Times New Roman" pitchFamily="34" charset="-122"/>
+                <a:cs typeface="Times New Roman" pitchFamily="34" charset="-120"/>
+              </a:rPr>
+              <a:t>DATA EXPLORATION</a:t>
             </a:r>
             <a:endParaRPr lang="en-US" sz="1200" dirty="0"/>
           </a:p>
@@ -6156,7 +6959,7 @@
                 <a:ea typeface="Times New Roman" pitchFamily="34" charset="-122"/>
                 <a:cs typeface="Times New Roman" pitchFamily="34" charset="-120"/>
               </a:rPr>
-              <a:t>0:55</a:t>
+              <a:t>0:50</a:t>
             </a:r>
             <a:endParaRPr lang="en-US" sz="1200" dirty="0"/>
           </a:p>
@@ -6195,7 +6998,7 @@
                 <a:ea typeface="Times New Roman" pitchFamily="34" charset="-122"/>
                 <a:cs typeface="Times New Roman" pitchFamily="34" charset="-120"/>
               </a:rPr>
-              <a:t>Preprocessing: From Measurement to Method</a:t>
+              <a:t>Exploratory Analysis III: Spatial Layout &amp; Label Adjacency</a:t>
             </a:r>
             <a:endParaRPr lang="en-US" sz="2600" dirty="0"/>
           </a:p>
@@ -6216,30 +7019,49 @@
             <a:avLst/>
           </a:prstGeom>
           <a:solidFill>
-            <a:srgbClr val="004E92"/>
+            <a:srgbClr val="E98300"/>
           </a:solidFill>
           <a:ln/>
         </p:spPr>
       </p:sp>
       <p:sp>
         <p:nvSpPr>
-          <p:cNvPr id="7" name="Shape 5"/>
-          <p:cNvSpPr/>
-          <p:nvPr/>
-        </p:nvSpPr>
-        <p:spPr>
-          <a:xfrm>
-            <a:off x="2069592" y="1965960"/>
-            <a:ext cx="585216" cy="585216"/>
-          </a:xfrm>
-          <a:prstGeom prst="ellipse">
-            <a:avLst/>
-          </a:prstGeom>
-          <a:solidFill>
-            <a:srgbClr val="004E92"/>
-          </a:solidFill>
-          <a:ln/>
-        </p:spPr>
+          <p:cNvPr id="7" name="Text 5"/>
+          <p:cNvSpPr txBox="1"/>
+          <p:nvPr/>
+        </p:nvSpPr>
+        <p:spPr>
+          <a:xfrm>
+            <a:off x="640080" y="1783080"/>
+            <a:ext cx="3322320" cy="274320"/>
+          </a:xfrm>
+          <a:prstGeom prst="rect">
+            <a:avLst/>
+          </a:prstGeom>
+          <a:noFill/>
+          <a:ln/>
+        </p:spPr>
+        <p:txBody>
+          <a:bodyPr wrap="square" lIns="0" tIns="0" rIns="0" bIns="0" rtlCol="0" anchor="ctr"/>
+          <a:lstStyle/>
+          <a:p>
+            <a:pPr indent="0" marL="0">
+              <a:buNone/>
+            </a:pPr>
+            <a:r>
+              <a:rPr lang="en-US" sz="1200" b="1" spc="100" kern="0" dirty="0">
+                <a:solidFill>
+                  <a:srgbClr val="E98300"/>
+                </a:solidFill>
+                <a:latin typeface="Times New Roman" pitchFamily="34" charset="0"/>
+                <a:ea typeface="Times New Roman" pitchFamily="34" charset="-122"/>
+                <a:cs typeface="Times New Roman" pitchFamily="34" charset="-120"/>
+              </a:rPr>
+              <a:t>POSITION</a:t>
+            </a:r>
+            <a:endParaRPr lang="en-US" sz="1200" dirty="0"/>
+          </a:p>
+        </p:txBody>
       </p:sp>
       <p:sp>
         <p:nvSpPr>
@@ -6249,47 +7071,8 @@
         </p:nvSpPr>
         <p:spPr>
           <a:xfrm>
-            <a:off x="2069592" y="1965960"/>
-            <a:ext cx="585216" cy="585216"/>
-          </a:xfrm>
-          <a:prstGeom prst="rect">
-            <a:avLst/>
-          </a:prstGeom>
-          <a:noFill/>
-          <a:ln/>
-        </p:spPr>
-        <p:txBody>
-          <a:bodyPr wrap="square" lIns="0" tIns="0" rIns="0" bIns="0" rtlCol="0" anchor="ctr"/>
-          <a:lstStyle/>
-          <a:p>
-            <a:pPr algn="ctr" indent="0" marL="0">
-              <a:buNone/>
-            </a:pPr>
-            <a:r>
-              <a:rPr lang="en-US" sz="2000" b="1" dirty="0">
-                <a:solidFill>
-                  <a:srgbClr val="FFFFFF"/>
-                </a:solidFill>
-                <a:latin typeface="Times New Roman" pitchFamily="34" charset="0"/>
-                <a:ea typeface="Times New Roman" pitchFamily="34" charset="-122"/>
-                <a:cs typeface="Times New Roman" pitchFamily="34" charset="-120"/>
-              </a:rPr>
-              <a:t>1</a:t>
-            </a:r>
-            <a:endParaRPr lang="en-US" sz="2000" dirty="0"/>
-          </a:p>
-        </p:txBody>
-      </p:sp>
-      <p:sp>
-        <p:nvSpPr>
-          <p:cNvPr id="9" name="Text 7"/>
-          <p:cNvSpPr txBox="1"/>
-          <p:nvPr/>
-        </p:nvSpPr>
-        <p:spPr>
-          <a:xfrm>
-            <a:off x="640080" y="2715768"/>
-            <a:ext cx="3444240" cy="411480"/>
+            <a:off x="640080" y="2148840"/>
+            <a:ext cx="3322320" cy="1143000"/>
           </a:xfrm>
           <a:prstGeom prst="rect">
             <a:avLst/>
@@ -6301,171 +7084,18 @@
           <a:bodyPr wrap="square" lIns="0" tIns="0" rIns="0" bIns="0" rtlCol="0" anchor="t"/>
           <a:lstStyle/>
           <a:p>
-            <a:pPr algn="ctr" indent="0" marL="0">
-              <a:buNone/>
-            </a:pPr>
-            <a:r>
-              <a:rPr lang="en-US" sz="1350" b="1" dirty="0">
-                <a:solidFill>
-                  <a:srgbClr val="1F1D21"/>
-                </a:solidFill>
-                <a:latin typeface="Times New Roman" pitchFamily="34" charset="0"/>
-                <a:ea typeface="Times New Roman" pitchFamily="34" charset="-122"/>
-                <a:cs typeface="Times New Roman" pitchFamily="34" charset="-120"/>
-              </a:rPr>
-              <a:t>Step 1</a:t>
-            </a:r>
-            <a:endParaRPr lang="en-US" sz="1350" dirty="0"/>
-          </a:p>
-        </p:txBody>
-      </p:sp>
-      <p:sp>
-        <p:nvSpPr>
-          <p:cNvPr id="10" name="Text 8"/>
-          <p:cNvSpPr txBox="1"/>
-          <p:nvPr/>
-        </p:nvSpPr>
-        <p:spPr>
-          <a:xfrm>
-            <a:off x="640080" y="3154680"/>
-            <a:ext cx="3444240" cy="2743200"/>
-          </a:xfrm>
-          <a:prstGeom prst="rect">
-            <a:avLst/>
-          </a:prstGeom>
-          <a:noFill/>
-          <a:ln/>
-        </p:spPr>
-        <p:txBody>
-          <a:bodyPr wrap="square" lIns="0" tIns="0" rIns="0" bIns="0" rtlCol="0" anchor="t"/>
-          <a:lstStyle/>
-          <a:p>
-            <a:pPr algn="ctr" indent="0" marL="0">
+            <a:pPr marL="177800" indent="-177800">
               <a:lnSpc>
                 <a:spcPct val="115000"/>
               </a:lnSpc>
-              <a:buNone/>
-            </a:pPr>
-            <a:r>
-              <a:rPr lang="en-US" sz="1200" dirty="0">
-                <a:solidFill>
-                  <a:srgbClr val="6B6B6B"/>
-                </a:solidFill>
-                <a:latin typeface="Times New Roman" pitchFamily="34" charset="0"/>
-                <a:ea typeface="Times New Roman" pitchFamily="34" charset="-122"/>
-                <a:cs typeface="Times New Roman" pitchFamily="34" charset="-120"/>
-              </a:rPr>
-              <a:t>[TODO], motivated by the geometry measurement (slide 3)</a:t>
-            </a:r>
-            <a:endParaRPr lang="en-US" sz="1200" dirty="0"/>
-          </a:p>
-        </p:txBody>
-      </p:sp>
-      <p:sp>
-        <p:nvSpPr>
-          <p:cNvPr id="11" name="Shape 9"/>
-          <p:cNvSpPr/>
-          <p:nvPr/>
-        </p:nvSpPr>
-        <p:spPr>
-          <a:xfrm>
-            <a:off x="4093464" y="2194560"/>
-            <a:ext cx="237744" cy="128016"/>
-          </a:xfrm>
-          <a:prstGeom prst="rightArrow">
-            <a:avLst/>
-          </a:prstGeom>
-          <a:solidFill>
-            <a:srgbClr val="D9D9D9"/>
-          </a:solidFill>
-          <a:ln/>
-        </p:spPr>
-      </p:sp>
-      <p:sp>
-        <p:nvSpPr>
-          <p:cNvPr id="12" name="Shape 10"/>
-          <p:cNvSpPr/>
-          <p:nvPr/>
-        </p:nvSpPr>
-        <p:spPr>
-          <a:xfrm>
-            <a:off x="5788152" y="1965960"/>
-            <a:ext cx="585216" cy="585216"/>
-          </a:xfrm>
-          <a:prstGeom prst="ellipse">
-            <a:avLst/>
-          </a:prstGeom>
-          <a:solidFill>
-            <a:srgbClr val="004E92"/>
-          </a:solidFill>
-          <a:ln/>
-        </p:spPr>
-      </p:sp>
-      <p:sp>
-        <p:nvSpPr>
-          <p:cNvPr id="13" name="Text 11"/>
-          <p:cNvSpPr txBox="1"/>
-          <p:nvPr/>
-        </p:nvSpPr>
-        <p:spPr>
-          <a:xfrm>
-            <a:off x="5788152" y="1965960"/>
-            <a:ext cx="585216" cy="585216"/>
-          </a:xfrm>
-          <a:prstGeom prst="rect">
-            <a:avLst/>
-          </a:prstGeom>
-          <a:noFill/>
-          <a:ln/>
-        </p:spPr>
-        <p:txBody>
-          <a:bodyPr wrap="square" lIns="0" tIns="0" rIns="0" bIns="0" rtlCol="0" anchor="ctr"/>
-          <a:lstStyle/>
-          <a:p>
-            <a:pPr algn="ctr" indent="0" marL="0">
-              <a:buNone/>
-            </a:pPr>
-            <a:r>
-              <a:rPr lang="en-US" sz="2000" b="1" dirty="0">
-                <a:solidFill>
-                  <a:srgbClr val="FFFFFF"/>
-                </a:solidFill>
-                <a:latin typeface="Times New Roman" pitchFamily="34" charset="0"/>
-                <a:ea typeface="Times New Roman" pitchFamily="34" charset="-122"/>
-                <a:cs typeface="Times New Roman" pitchFamily="34" charset="-120"/>
-              </a:rPr>
-              <a:t>2</a:t>
-            </a:r>
-            <a:endParaRPr lang="en-US" sz="2000" dirty="0"/>
-          </a:p>
-        </p:txBody>
-      </p:sp>
-      <p:sp>
-        <p:nvSpPr>
-          <p:cNvPr id="14" name="Text 12"/>
-          <p:cNvSpPr txBox="1"/>
-          <p:nvPr/>
-        </p:nvSpPr>
-        <p:spPr>
-          <a:xfrm>
-            <a:off x="4358640" y="2715768"/>
-            <a:ext cx="3444240" cy="411480"/>
-          </a:xfrm>
-          <a:prstGeom prst="rect">
-            <a:avLst/>
-          </a:prstGeom>
-          <a:noFill/>
-          <a:ln/>
-        </p:spPr>
-        <p:txBody>
-          <a:bodyPr wrap="square" lIns="0" tIns="0" rIns="0" bIns="0" rtlCol="0" anchor="t"/>
-          <a:lstStyle/>
-          <a:p>
-            <a:pPr algn="ctr" indent="0" marL="0">
-              <a:buNone/>
-            </a:pPr>
-            <a:r>
-              <a:rPr lang="en-US" sz="1350" b="1" dirty="0">
+              <a:spcAft>
+                <a:spcPts val="500"/>
+              </a:spcAft>
+              <a:buSzPct val="100000"/>
+              <a:buChar char="▪"/>
+            </a:pPr>
+            <a:r>
+              <a:rPr lang="en-US" sz="1400" dirty="0">
                 <a:solidFill>
                   <a:srgbClr val="1F1D21"/>
                 </a:solidFill>
@@ -6473,159 +7103,23 @@
                 <a:ea typeface="Times New Roman" pitchFamily="34" charset="-122"/>
                 <a:cs typeface="Times New Roman" pitchFamily="34" charset="-120"/>
               </a:rPr>
-              <a:t>Step 2</a:t>
-            </a:r>
-            <a:endParaRPr lang="en-US" sz="1350" dirty="0"/>
-          </a:p>
-        </p:txBody>
-      </p:sp>
-      <p:sp>
-        <p:nvSpPr>
-          <p:cNvPr id="15" name="Text 13"/>
-          <p:cNvSpPr txBox="1"/>
-          <p:nvPr/>
-        </p:nvSpPr>
-        <p:spPr>
-          <a:xfrm>
-            <a:off x="4358640" y="3154680"/>
-            <a:ext cx="3444240" cy="2743200"/>
-          </a:xfrm>
-          <a:prstGeom prst="rect">
-            <a:avLst/>
-          </a:prstGeom>
-          <a:noFill/>
-          <a:ln/>
-        </p:spPr>
-        <p:txBody>
-          <a:bodyPr wrap="square" lIns="0" tIns="0" rIns="0" bIns="0" rtlCol="0" anchor="t"/>
-          <a:lstStyle/>
-          <a:p>
-            <a:pPr algn="ctr" indent="0" marL="0">
+              <a:t>[TODO] where each organ sits in 3D</a:t>
+            </a:r>
+            <a:endParaRPr lang="en-US" sz="1400" dirty="0"/>
+          </a:p>
+          <a:p>
+            <a:pPr marL="177800" indent="-177800">
               <a:lnSpc>
                 <a:spcPct val="115000"/>
               </a:lnSpc>
-              <a:buNone/>
-            </a:pPr>
-            <a:r>
-              <a:rPr lang="en-US" sz="1200" dirty="0">
-                <a:solidFill>
-                  <a:srgbClr val="6B6B6B"/>
-                </a:solidFill>
-                <a:latin typeface="Times New Roman" pitchFamily="34" charset="0"/>
-                <a:ea typeface="Times New Roman" pitchFamily="34" charset="-122"/>
-                <a:cs typeface="Times New Roman" pitchFamily="34" charset="-120"/>
-              </a:rPr>
-              <a:t>[TODO], motivated by the intensity measurement (slide 4)</a:t>
-            </a:r>
-            <a:endParaRPr lang="en-US" sz="1200" dirty="0"/>
-          </a:p>
-        </p:txBody>
-      </p:sp>
-      <p:sp>
-        <p:nvSpPr>
-          <p:cNvPr id="16" name="Shape 14"/>
-          <p:cNvSpPr/>
-          <p:nvPr/>
-        </p:nvSpPr>
-        <p:spPr>
-          <a:xfrm>
-            <a:off x="7812024" y="2194560"/>
-            <a:ext cx="237744" cy="128016"/>
-          </a:xfrm>
-          <a:prstGeom prst="rightArrow">
-            <a:avLst/>
-          </a:prstGeom>
-          <a:solidFill>
-            <a:srgbClr val="D9D9D9"/>
-          </a:solidFill>
-          <a:ln/>
-        </p:spPr>
-      </p:sp>
-      <p:sp>
-        <p:nvSpPr>
-          <p:cNvPr id="17" name="Shape 15"/>
-          <p:cNvSpPr/>
-          <p:nvPr/>
-        </p:nvSpPr>
-        <p:spPr>
-          <a:xfrm>
-            <a:off x="9506712" y="1965960"/>
-            <a:ext cx="585216" cy="585216"/>
-          </a:xfrm>
-          <a:prstGeom prst="ellipse">
-            <a:avLst/>
-          </a:prstGeom>
-          <a:solidFill>
-            <a:srgbClr val="004E92"/>
-          </a:solidFill>
-          <a:ln/>
-        </p:spPr>
-      </p:sp>
-      <p:sp>
-        <p:nvSpPr>
-          <p:cNvPr id="18" name="Text 16"/>
-          <p:cNvSpPr txBox="1"/>
-          <p:nvPr/>
-        </p:nvSpPr>
-        <p:spPr>
-          <a:xfrm>
-            <a:off x="9506712" y="1965960"/>
-            <a:ext cx="585216" cy="585216"/>
-          </a:xfrm>
-          <a:prstGeom prst="rect">
-            <a:avLst/>
-          </a:prstGeom>
-          <a:noFill/>
-          <a:ln/>
-        </p:spPr>
-        <p:txBody>
-          <a:bodyPr wrap="square" lIns="0" tIns="0" rIns="0" bIns="0" rtlCol="0" anchor="ctr"/>
-          <a:lstStyle/>
-          <a:p>
-            <a:pPr algn="ctr" indent="0" marL="0">
-              <a:buNone/>
-            </a:pPr>
-            <a:r>
-              <a:rPr lang="en-US" sz="2000" b="1" dirty="0">
-                <a:solidFill>
-                  <a:srgbClr val="FFFFFF"/>
-                </a:solidFill>
-                <a:latin typeface="Times New Roman" pitchFamily="34" charset="0"/>
-                <a:ea typeface="Times New Roman" pitchFamily="34" charset="-122"/>
-                <a:cs typeface="Times New Roman" pitchFamily="34" charset="-120"/>
-              </a:rPr>
-              <a:t>3</a:t>
-            </a:r>
-            <a:endParaRPr lang="en-US" sz="2000" dirty="0"/>
-          </a:p>
-        </p:txBody>
-      </p:sp>
-      <p:sp>
-        <p:nvSpPr>
-          <p:cNvPr id="19" name="Text 17"/>
-          <p:cNvSpPr txBox="1"/>
-          <p:nvPr/>
-        </p:nvSpPr>
-        <p:spPr>
-          <a:xfrm>
-            <a:off x="8077200" y="2715768"/>
-            <a:ext cx="3444240" cy="411480"/>
-          </a:xfrm>
-          <a:prstGeom prst="rect">
-            <a:avLst/>
-          </a:prstGeom>
-          <a:noFill/>
-          <a:ln/>
-        </p:spPr>
-        <p:txBody>
-          <a:bodyPr wrap="square" lIns="0" tIns="0" rIns="0" bIns="0" rtlCol="0" anchor="t"/>
-          <a:lstStyle/>
-          <a:p>
-            <a:pPr algn="ctr" indent="0" marL="0">
-              <a:buNone/>
-            </a:pPr>
-            <a:r>
-              <a:rPr lang="en-US" sz="1350" b="1" dirty="0">
+              <a:spcAft>
+                <a:spcPts val="500"/>
+              </a:spcAft>
+              <a:buSzPct val="100000"/>
+              <a:buChar char="▪"/>
+            </a:pPr>
+            <a:r>
+              <a:rPr lang="en-US" sz="1400" dirty="0">
                 <a:solidFill>
                   <a:srgbClr val="1F1D21"/>
                 </a:solidFill>
@@ -6633,57 +7127,466 @@
                 <a:ea typeface="Times New Roman" pitchFamily="34" charset="-122"/>
                 <a:cs typeface="Times New Roman" pitchFamily="34" charset="-120"/>
               </a:rPr>
-              <a:t>Step 3</a:t>
-            </a:r>
-            <a:endParaRPr lang="en-US" sz="1350" dirty="0"/>
-          </a:p>
-        </p:txBody>
-      </p:sp>
-      <p:sp>
-        <p:nvSpPr>
-          <p:cNvPr id="20" name="Text 18"/>
-          <p:cNvSpPr txBox="1"/>
-          <p:nvPr/>
-        </p:nvSpPr>
-        <p:spPr>
-          <a:xfrm>
-            <a:off x="8077200" y="3154680"/>
-            <a:ext cx="3444240" cy="2743200"/>
-          </a:xfrm>
-          <a:prstGeom prst="rect">
-            <a:avLst/>
-          </a:prstGeom>
-          <a:noFill/>
-          <a:ln/>
-        </p:spPr>
-        <p:txBody>
-          <a:bodyPr wrap="square" lIns="0" tIns="0" rIns="0" bIns="0" rtlCol="0" anchor="t"/>
-          <a:lstStyle/>
-          <a:p>
-            <a:pPr algn="ctr" indent="0" marL="0">
+              <a:t>[TODO]</a:t>
+            </a:r>
+            <a:endParaRPr lang="en-US" sz="1400" dirty="0"/>
+          </a:p>
+          <a:p>
+            <a:pPr marL="177800" indent="-177800">
               <a:lnSpc>
                 <a:spcPct val="115000"/>
               </a:lnSpc>
-              <a:buNone/>
-            </a:pPr>
-            <a:r>
-              <a:rPr lang="en-US" sz="1200" dirty="0">
-                <a:solidFill>
-                  <a:srgbClr val="6B6B6B"/>
-                </a:solidFill>
-                <a:latin typeface="Times New Roman" pitchFamily="34" charset="0"/>
-                <a:ea typeface="Times New Roman" pitchFamily="34" charset="-122"/>
-                <a:cs typeface="Times New Roman" pitchFamily="34" charset="-120"/>
-              </a:rPr>
-              <a:t>[TODO], motivated by the position/extent measurement (slide 5)</a:t>
+              <a:spcAft>
+                <a:spcPts val="500"/>
+              </a:spcAft>
+              <a:buSzPct val="100000"/>
+              <a:buChar char="▪"/>
+            </a:pPr>
+            <a:r>
+              <a:rPr lang="en-US" sz="1400" dirty="0">
+                <a:solidFill>
+                  <a:srgbClr val="1F1D21"/>
+                </a:solidFill>
+                <a:latin typeface="Times New Roman" pitchFamily="34" charset="0"/>
+                <a:ea typeface="Times New Roman" pitchFamily="34" charset="-122"/>
+                <a:cs typeface="Times New Roman" pitchFamily="34" charset="-120"/>
+              </a:rPr>
+              <a:t>[TODO]</a:t>
+            </a:r>
+            <a:endParaRPr lang="en-US" sz="1400" dirty="0"/>
+          </a:p>
+        </p:txBody>
+      </p:sp>
+      <p:sp>
+        <p:nvSpPr>
+          <p:cNvPr id="9" name="Shape 7"/>
+          <p:cNvSpPr/>
+          <p:nvPr/>
+        </p:nvSpPr>
+        <p:spPr>
+          <a:xfrm>
+            <a:off x="4191000" y="1783080"/>
+            <a:ext cx="13716" cy="1508760"/>
+          </a:xfrm>
+          <a:prstGeom prst="rect">
+            <a:avLst/>
+          </a:prstGeom>
+          <a:solidFill>
+            <a:srgbClr val="E3E3E3"/>
+          </a:solidFill>
+          <a:ln/>
+        </p:spPr>
+      </p:sp>
+      <p:sp>
+        <p:nvSpPr>
+          <p:cNvPr id="10" name="Text 8"/>
+          <p:cNvSpPr txBox="1"/>
+          <p:nvPr/>
+        </p:nvSpPr>
+        <p:spPr>
+          <a:xfrm>
+            <a:off x="4419600" y="1783080"/>
+            <a:ext cx="3322320" cy="274320"/>
+          </a:xfrm>
+          <a:prstGeom prst="rect">
+            <a:avLst/>
+          </a:prstGeom>
+          <a:noFill/>
+          <a:ln/>
+        </p:spPr>
+        <p:txBody>
+          <a:bodyPr wrap="square" lIns="0" tIns="0" rIns="0" bIns="0" rtlCol="0" anchor="ctr"/>
+          <a:lstStyle/>
+          <a:p>
+            <a:pPr indent="0" marL="0">
+              <a:buNone/>
+            </a:pPr>
+            <a:r>
+              <a:rPr lang="en-US" sz="1200" b="1" spc="100" kern="0" dirty="0">
+                <a:solidFill>
+                  <a:srgbClr val="E98300"/>
+                </a:solidFill>
+                <a:latin typeface="Times New Roman" pitchFamily="34" charset="0"/>
+                <a:ea typeface="Times New Roman" pitchFamily="34" charset="-122"/>
+                <a:cs typeface="Times New Roman" pitchFamily="34" charset="-120"/>
+              </a:rPr>
+              <a:t>EXTENT</a:t>
             </a:r>
             <a:endParaRPr lang="en-US" sz="1200" dirty="0"/>
+          </a:p>
+        </p:txBody>
+      </p:sp>
+      <p:sp>
+        <p:nvSpPr>
+          <p:cNvPr id="11" name="Text 9"/>
+          <p:cNvSpPr txBox="1"/>
+          <p:nvPr/>
+        </p:nvSpPr>
+        <p:spPr>
+          <a:xfrm>
+            <a:off x="4419600" y="2148840"/>
+            <a:ext cx="3322320" cy="1143000"/>
+          </a:xfrm>
+          <a:prstGeom prst="rect">
+            <a:avLst/>
+          </a:prstGeom>
+          <a:noFill/>
+          <a:ln/>
+        </p:spPr>
+        <p:txBody>
+          <a:bodyPr wrap="square" lIns="0" tIns="0" rIns="0" bIns="0" rtlCol="0" anchor="t"/>
+          <a:lstStyle/>
+          <a:p>
+            <a:pPr marL="177800" indent="-177800">
+              <a:lnSpc>
+                <a:spcPct val="115000"/>
+              </a:lnSpc>
+              <a:spcAft>
+                <a:spcPts val="500"/>
+              </a:spcAft>
+              <a:buSzPct val="100000"/>
+              <a:buChar char="▪"/>
+            </a:pPr>
+            <a:r>
+              <a:rPr lang="en-US" sz="1400" dirty="0">
+                <a:solidFill>
+                  <a:srgbClr val="1F1D21"/>
+                </a:solidFill>
+                <a:latin typeface="Times New Roman" pitchFamily="34" charset="0"/>
+                <a:ea typeface="Times New Roman" pitchFamily="34" charset="-122"/>
+                <a:cs typeface="Times New Roman" pitchFamily="34" charset="-120"/>
+              </a:rPr>
+              <a:t>[TODO] coverage along the body axis</a:t>
+            </a:r>
+            <a:endParaRPr lang="en-US" sz="1400" dirty="0"/>
+          </a:p>
+          <a:p>
+            <a:pPr marL="177800" indent="-177800">
+              <a:lnSpc>
+                <a:spcPct val="115000"/>
+              </a:lnSpc>
+              <a:spcAft>
+                <a:spcPts val="500"/>
+              </a:spcAft>
+              <a:buSzPct val="100000"/>
+              <a:buChar char="▪"/>
+            </a:pPr>
+            <a:r>
+              <a:rPr lang="en-US" sz="1400" dirty="0">
+                <a:solidFill>
+                  <a:srgbClr val="1F1D21"/>
+                </a:solidFill>
+                <a:latin typeface="Times New Roman" pitchFamily="34" charset="0"/>
+                <a:ea typeface="Times New Roman" pitchFamily="34" charset="-122"/>
+                <a:cs typeface="Times New Roman" pitchFamily="34" charset="-120"/>
+              </a:rPr>
+              <a:t>[TODO]</a:t>
+            </a:r>
+            <a:endParaRPr lang="en-US" sz="1400" dirty="0"/>
+          </a:p>
+          <a:p>
+            <a:pPr marL="177800" indent="-177800">
+              <a:lnSpc>
+                <a:spcPct val="115000"/>
+              </a:lnSpc>
+              <a:spcAft>
+                <a:spcPts val="500"/>
+              </a:spcAft>
+              <a:buSzPct val="100000"/>
+              <a:buChar char="▪"/>
+            </a:pPr>
+            <a:r>
+              <a:rPr lang="en-US" sz="1400" dirty="0">
+                <a:solidFill>
+                  <a:srgbClr val="1F1D21"/>
+                </a:solidFill>
+                <a:latin typeface="Times New Roman" pitchFamily="34" charset="0"/>
+                <a:ea typeface="Times New Roman" pitchFamily="34" charset="-122"/>
+                <a:cs typeface="Times New Roman" pitchFamily="34" charset="-120"/>
+              </a:rPr>
+              <a:t>[TODO]</a:t>
+            </a:r>
+            <a:endParaRPr lang="en-US" sz="1400" dirty="0"/>
+          </a:p>
+        </p:txBody>
+      </p:sp>
+      <p:sp>
+        <p:nvSpPr>
+          <p:cNvPr id="12" name="Shape 10"/>
+          <p:cNvSpPr/>
+          <p:nvPr/>
+        </p:nvSpPr>
+        <p:spPr>
+          <a:xfrm>
+            <a:off x="7970520" y="1783080"/>
+            <a:ext cx="13716" cy="1508760"/>
+          </a:xfrm>
+          <a:prstGeom prst="rect">
+            <a:avLst/>
+          </a:prstGeom>
+          <a:solidFill>
+            <a:srgbClr val="E3E3E3"/>
+          </a:solidFill>
+          <a:ln/>
+        </p:spPr>
+      </p:sp>
+      <p:sp>
+        <p:nvSpPr>
+          <p:cNvPr id="13" name="Text 11"/>
+          <p:cNvSpPr txBox="1"/>
+          <p:nvPr/>
+        </p:nvSpPr>
+        <p:spPr>
+          <a:xfrm>
+            <a:off x="8199120" y="1783080"/>
+            <a:ext cx="3322320" cy="274320"/>
+          </a:xfrm>
+          <a:prstGeom prst="rect">
+            <a:avLst/>
+          </a:prstGeom>
+          <a:noFill/>
+          <a:ln/>
+        </p:spPr>
+        <p:txBody>
+          <a:bodyPr wrap="square" lIns="0" tIns="0" rIns="0" bIns="0" rtlCol="0" anchor="ctr"/>
+          <a:lstStyle/>
+          <a:p>
+            <a:pPr indent="0" marL="0">
+              <a:buNone/>
+            </a:pPr>
+            <a:r>
+              <a:rPr lang="en-US" sz="1200" b="1" spc="100" kern="0" dirty="0">
+                <a:solidFill>
+                  <a:srgbClr val="E98300"/>
+                </a:solidFill>
+                <a:latin typeface="Times New Roman" pitchFamily="34" charset="0"/>
+                <a:ea typeface="Times New Roman" pitchFamily="34" charset="-122"/>
+                <a:cs typeface="Times New Roman" pitchFamily="34" charset="-120"/>
+              </a:rPr>
+              <a:t>ADJACENCY</a:t>
+            </a:r>
+            <a:endParaRPr lang="en-US" sz="1200" dirty="0"/>
+          </a:p>
+        </p:txBody>
+      </p:sp>
+      <p:sp>
+        <p:nvSpPr>
+          <p:cNvPr id="14" name="Text 12"/>
+          <p:cNvSpPr txBox="1"/>
+          <p:nvPr/>
+        </p:nvSpPr>
+        <p:spPr>
+          <a:xfrm>
+            <a:off x="8199120" y="2148840"/>
+            <a:ext cx="3322320" cy="1143000"/>
+          </a:xfrm>
+          <a:prstGeom prst="rect">
+            <a:avLst/>
+          </a:prstGeom>
+          <a:noFill/>
+          <a:ln/>
+        </p:spPr>
+        <p:txBody>
+          <a:bodyPr wrap="square" lIns="0" tIns="0" rIns="0" bIns="0" rtlCol="0" anchor="t"/>
+          <a:lstStyle/>
+          <a:p>
+            <a:pPr marL="177800" indent="-177800">
+              <a:lnSpc>
+                <a:spcPct val="115000"/>
+              </a:lnSpc>
+              <a:spcAft>
+                <a:spcPts val="500"/>
+              </a:spcAft>
+              <a:buSzPct val="100000"/>
+              <a:buChar char="▪"/>
+            </a:pPr>
+            <a:r>
+              <a:rPr lang="en-US" sz="1400" dirty="0">
+                <a:solidFill>
+                  <a:srgbClr val="1F1D21"/>
+                </a:solidFill>
+                <a:latin typeface="Times New Roman" pitchFamily="34" charset="0"/>
+                <a:ea typeface="Times New Roman" pitchFamily="34" charset="-122"/>
+                <a:cs typeface="Times New Roman" pitchFamily="34" charset="-120"/>
+              </a:rPr>
+              <a:t>[TODO] contact between label pairs</a:t>
+            </a:r>
+            <a:endParaRPr lang="en-US" sz="1400" dirty="0"/>
+          </a:p>
+          <a:p>
+            <a:pPr marL="177800" indent="-177800">
+              <a:lnSpc>
+                <a:spcPct val="115000"/>
+              </a:lnSpc>
+              <a:spcAft>
+                <a:spcPts val="500"/>
+              </a:spcAft>
+              <a:buSzPct val="100000"/>
+              <a:buChar char="▪"/>
+            </a:pPr>
+            <a:r>
+              <a:rPr lang="en-US" sz="1400" dirty="0">
+                <a:solidFill>
+                  <a:srgbClr val="1F1D21"/>
+                </a:solidFill>
+                <a:latin typeface="Times New Roman" pitchFamily="34" charset="0"/>
+                <a:ea typeface="Times New Roman" pitchFamily="34" charset="-122"/>
+                <a:cs typeface="Times New Roman" pitchFamily="34" charset="-120"/>
+              </a:rPr>
+              <a:t>[TODO] which pairs matter most, now that aorta is real</a:t>
+            </a:r>
+            <a:endParaRPr lang="en-US" sz="1400" dirty="0"/>
+          </a:p>
+          <a:p>
+            <a:pPr marL="177800" indent="-177800">
+              <a:lnSpc>
+                <a:spcPct val="115000"/>
+              </a:lnSpc>
+              <a:spcAft>
+                <a:spcPts val="500"/>
+              </a:spcAft>
+              <a:buSzPct val="100000"/>
+              <a:buChar char="▪"/>
+            </a:pPr>
+            <a:r>
+              <a:rPr lang="en-US" sz="1400" dirty="0">
+                <a:solidFill>
+                  <a:srgbClr val="1F1D21"/>
+                </a:solidFill>
+                <a:latin typeface="Times New Roman" pitchFamily="34" charset="0"/>
+                <a:ea typeface="Times New Roman" pitchFamily="34" charset="-122"/>
+                <a:cs typeface="Times New Roman" pitchFamily="34" charset="-120"/>
+              </a:rPr>
+              <a:t>[TODO]</a:t>
+            </a:r>
+            <a:endParaRPr lang="en-US" sz="1400" dirty="0"/>
+          </a:p>
+        </p:txBody>
+      </p:sp>
+      <p:sp>
+        <p:nvSpPr>
+          <p:cNvPr id="15" name="Shape 13"/>
+          <p:cNvSpPr/>
+          <p:nvPr/>
+        </p:nvSpPr>
+        <p:spPr>
+          <a:xfrm>
+            <a:off x="640080" y="3611880"/>
+            <a:ext cx="10881360" cy="914400"/>
+          </a:xfrm>
+          <a:prstGeom prst="rect">
+            <a:avLst/>
+          </a:prstGeom>
+          <a:solidFill>
+            <a:srgbClr val="FCEEDC"/>
+          </a:solidFill>
+          <a:ln/>
+        </p:spPr>
+      </p:sp>
+      <p:sp>
+        <p:nvSpPr>
+          <p:cNvPr id="16" name="Shape 14"/>
+          <p:cNvSpPr/>
+          <p:nvPr/>
+        </p:nvSpPr>
+        <p:spPr>
+          <a:xfrm>
+            <a:off x="640080" y="3611880"/>
+            <a:ext cx="54864" cy="914400"/>
+          </a:xfrm>
+          <a:prstGeom prst="rect">
+            <a:avLst/>
+          </a:prstGeom>
+          <a:solidFill>
+            <a:srgbClr val="E98300"/>
+          </a:solidFill>
+          <a:ln/>
+        </p:spPr>
+      </p:sp>
+      <p:sp>
+        <p:nvSpPr>
+          <p:cNvPr id="17" name="Text 15"/>
+          <p:cNvSpPr txBox="1"/>
+          <p:nvPr/>
+        </p:nvSpPr>
+        <p:spPr>
+          <a:xfrm>
+            <a:off x="914400" y="3794760"/>
+            <a:ext cx="10332720" cy="274320"/>
+          </a:xfrm>
+          <a:prstGeom prst="rect">
+            <a:avLst/>
+          </a:prstGeom>
+          <a:noFill/>
+          <a:ln/>
+        </p:spPr>
+        <p:txBody>
+          <a:bodyPr wrap="square" lIns="0" tIns="0" rIns="0" bIns="0" rtlCol="0" anchor="ctr"/>
+          <a:lstStyle/>
+          <a:p>
+            <a:pPr indent="0" marL="0">
+              <a:buNone/>
+            </a:pPr>
+            <a:r>
+              <a:rPr lang="en-US" sz="1100" b="1" spc="100" kern="0" dirty="0">
+                <a:solidFill>
+                  <a:srgbClr val="E98300"/>
+                </a:solidFill>
+                <a:latin typeface="Times New Roman" pitchFamily="34" charset="0"/>
+                <a:ea typeface="Times New Roman" pitchFamily="34" charset="-122"/>
+                <a:cs typeface="Times New Roman" pitchFamily="34" charset="-120"/>
+              </a:rPr>
+              <a:t>WHY THIS MATTERS</a:t>
+            </a:r>
+            <a:endParaRPr lang="en-US" sz="1100" dirty="0"/>
+          </a:p>
+        </p:txBody>
+      </p:sp>
+      <p:sp>
+        <p:nvSpPr>
+          <p:cNvPr id="18" name="Text 16"/>
+          <p:cNvSpPr txBox="1"/>
+          <p:nvPr/>
+        </p:nvSpPr>
+        <p:spPr>
+          <a:xfrm>
+            <a:off x="914400" y="4114800"/>
+            <a:ext cx="10332720" cy="228600"/>
+          </a:xfrm>
+          <a:prstGeom prst="rect">
+            <a:avLst/>
+          </a:prstGeom>
+          <a:noFill/>
+          <a:ln/>
+        </p:spPr>
+        <p:txBody>
+          <a:bodyPr wrap="square" lIns="0" tIns="0" rIns="0" bIns="0" rtlCol="0" anchor="t"/>
+          <a:lstStyle/>
+          <a:p>
+            <a:pPr indent="0" marL="0">
+              <a:lnSpc>
+                <a:spcPct val="118000"/>
+              </a:lnSpc>
+              <a:buNone/>
+            </a:pPr>
+            <a:r>
+              <a:rPr lang="en-US" sz="1350" dirty="0">
+                <a:solidFill>
+                  <a:srgbClr val="1F1D21"/>
+                </a:solidFill>
+                <a:latin typeface="Times New Roman" pitchFamily="34" charset="0"/>
+                <a:ea typeface="Times New Roman" pitchFamily="34" charset="-122"/>
+                <a:cs typeface="Times New Roman" pitchFamily="34" charset="-120"/>
+              </a:rPr>
+              <a:t>[TODO] how position and extent inform the preprocessing decisions on the next slide.</a:t>
+            </a:r>
+            <a:endParaRPr lang="en-US" sz="1350" dirty="0"/>
           </a:p>
         </p:txBody>
       </p:sp>
       <p:pic>
         <p:nvPicPr>
-          <p:cNvPr id="21" name="Image 0" descr="/Users/bellavg/ProjectsMSc/ai4mi_project/.claude/worktrees/segthor-presentation-midpoint-825c66/deck/assets/uva_logo.png">    </p:cNvPr>
+          <p:cNvPr id="19" name="Image 0" descr="/Users/bellavg/ProjectsMSc/ai4mi_project/.claude/worktrees/segthor-presentation-midpoint-825c66/deck/assets/uva_logo.png">    </p:cNvPr>
           <p:cNvPicPr>
             <a:picLocks noChangeAspect="1"/>
           </p:cNvPicPr>
@@ -6707,7 +7610,7 @@
       </p:pic>
       <p:sp>
         <p:nvSpPr>
-          <p:cNvPr id="22" name="Text 19"/>
+          <p:cNvPr id="20" name="Text 17"/>
           <p:cNvSpPr txBox="1"/>
           <p:nvPr/>
         </p:nvSpPr>
@@ -6791,7 +7694,7 @@
             <a:avLst/>
           </a:prstGeom>
           <a:solidFill>
-            <a:srgbClr val="751B68"/>
+            <a:srgbClr val="004E92"/>
           </a:solidFill>
           <a:ln/>
         </p:spPr>
@@ -6823,13 +7726,13 @@
             <a:r>
               <a:rPr lang="en-US" sz="1200" b="1" spc="150" kern="0" dirty="0">
                 <a:solidFill>
-                  <a:srgbClr val="751B68"/>
-                </a:solidFill>
-                <a:latin typeface="Times New Roman" pitchFamily="34" charset="0"/>
-                <a:ea typeface="Times New Roman" pitchFamily="34" charset="-122"/>
-                <a:cs typeface="Times New Roman" pitchFamily="34" charset="-120"/>
-              </a:rPr>
-              <a:t>BASELINE</a:t>
+                  <a:srgbClr val="004E92"/>
+                </a:solidFill>
+                <a:latin typeface="Times New Roman" pitchFamily="34" charset="0"/>
+                <a:ea typeface="Times New Roman" pitchFamily="34" charset="-122"/>
+                <a:cs typeface="Times New Roman" pitchFamily="34" charset="-120"/>
+              </a:rPr>
+              <a:t>PREPROCESSING PIPELINE</a:t>
             </a:r>
             <a:endParaRPr lang="en-US" sz="1200" dirty="0"/>
           </a:p>
@@ -6868,7 +7771,7 @@
                 <a:ea typeface="Times New Roman" pitchFamily="34" charset="-122"/>
                 <a:cs typeface="Times New Roman" pitchFamily="34" charset="-120"/>
               </a:rPr>
-              <a:t>0:35</a:t>
+              <a:t>0:55</a:t>
             </a:r>
             <a:endParaRPr lang="en-US" sz="1200" dirty="0"/>
           </a:p>
@@ -6907,7 +7810,7 @@
                 <a:ea typeface="Times New Roman" pitchFamily="34" charset="-122"/>
                 <a:cs typeface="Times New Roman" pitchFamily="34" charset="-120"/>
               </a:rPr>
-              <a:t>Baseline Performance: Unmodified Pipeline (CE Loss, 25 Epochs)</a:t>
+              <a:t>Preprocessing: From Measurement to Method</a:t>
             </a:r>
             <a:endParaRPr lang="en-US" sz="2600" dirty="0"/>
           </a:p>
@@ -6928,21 +7831,80 @@
             <a:avLst/>
           </a:prstGeom>
           <a:solidFill>
-            <a:srgbClr val="751B68"/>
+            <a:srgbClr val="004E92"/>
           </a:solidFill>
           <a:ln/>
         </p:spPr>
       </p:sp>
       <p:sp>
         <p:nvSpPr>
-          <p:cNvPr id="7" name="Text 5"/>
-          <p:cNvSpPr txBox="1"/>
-          <p:nvPr/>
-        </p:nvSpPr>
-        <p:spPr>
-          <a:xfrm>
-            <a:off x="640080" y="1783080"/>
-            <a:ext cx="6309360" cy="4206240"/>
+          <p:cNvPr id="7" name="Shape 5"/>
+          <p:cNvSpPr/>
+          <p:nvPr/>
+        </p:nvSpPr>
+        <p:spPr>
+          <a:xfrm>
+            <a:off x="2069592" y="1965960"/>
+            <a:ext cx="585216" cy="585216"/>
+          </a:xfrm>
+          <a:prstGeom prst="ellipse">
+            <a:avLst/>
+          </a:prstGeom>
+          <a:solidFill>
+            <a:srgbClr val="004E92"/>
+          </a:solidFill>
+          <a:ln/>
+        </p:spPr>
+      </p:sp>
+      <p:sp>
+        <p:nvSpPr>
+          <p:cNvPr id="8" name="Text 6"/>
+          <p:cNvSpPr txBox="1"/>
+          <p:nvPr/>
+        </p:nvSpPr>
+        <p:spPr>
+          <a:xfrm>
+            <a:off x="2069592" y="1965960"/>
+            <a:ext cx="585216" cy="585216"/>
+          </a:xfrm>
+          <a:prstGeom prst="rect">
+            <a:avLst/>
+          </a:prstGeom>
+          <a:noFill/>
+          <a:ln/>
+        </p:spPr>
+        <p:txBody>
+          <a:bodyPr wrap="square" lIns="0" tIns="0" rIns="0" bIns="0" rtlCol="0" anchor="ctr"/>
+          <a:lstStyle/>
+          <a:p>
+            <a:pPr algn="ctr" indent="0" marL="0">
+              <a:buNone/>
+            </a:pPr>
+            <a:r>
+              <a:rPr lang="en-US" sz="2000" b="1" dirty="0">
+                <a:solidFill>
+                  <a:srgbClr val="FFFFFF"/>
+                </a:solidFill>
+                <a:latin typeface="Times New Roman" pitchFamily="34" charset="0"/>
+                <a:ea typeface="Times New Roman" pitchFamily="34" charset="-122"/>
+                <a:cs typeface="Times New Roman" pitchFamily="34" charset="-120"/>
+              </a:rPr>
+              <a:t>1</a:t>
+            </a:r>
+            <a:endParaRPr lang="en-US" sz="2000" dirty="0"/>
+          </a:p>
+        </p:txBody>
+      </p:sp>
+      <p:sp>
+        <p:nvSpPr>
+          <p:cNvPr id="9" name="Text 7"/>
+          <p:cNvSpPr txBox="1"/>
+          <p:nvPr/>
+        </p:nvSpPr>
+        <p:spPr>
+          <a:xfrm>
+            <a:off x="640080" y="2715768"/>
+            <a:ext cx="3444240" cy="411480"/>
           </a:xfrm>
           <a:prstGeom prst="rect">
             <a:avLst/>
@@ -6954,18 +7916,171 @@
           <a:bodyPr wrap="square" lIns="0" tIns="0" rIns="0" bIns="0" rtlCol="0" anchor="t"/>
           <a:lstStyle/>
           <a:p>
-            <a:pPr marL="228600" indent="-228600">
+            <a:pPr algn="ctr" indent="0" marL="0">
+              <a:buNone/>
+            </a:pPr>
+            <a:r>
+              <a:rPr lang="en-US" sz="1350" b="1" dirty="0">
+                <a:solidFill>
+                  <a:srgbClr val="1F1D21"/>
+                </a:solidFill>
+                <a:latin typeface="Times New Roman" pitchFamily="34" charset="0"/>
+                <a:ea typeface="Times New Roman" pitchFamily="34" charset="-122"/>
+                <a:cs typeface="Times New Roman" pitchFamily="34" charset="-120"/>
+              </a:rPr>
+              <a:t>Step 1</a:t>
+            </a:r>
+            <a:endParaRPr lang="en-US" sz="1350" dirty="0"/>
+          </a:p>
+        </p:txBody>
+      </p:sp>
+      <p:sp>
+        <p:nvSpPr>
+          <p:cNvPr id="10" name="Text 8"/>
+          <p:cNvSpPr txBox="1"/>
+          <p:nvPr/>
+        </p:nvSpPr>
+        <p:spPr>
+          <a:xfrm>
+            <a:off x="640080" y="3154680"/>
+            <a:ext cx="3444240" cy="2743200"/>
+          </a:xfrm>
+          <a:prstGeom prst="rect">
+            <a:avLst/>
+          </a:prstGeom>
+          <a:noFill/>
+          <a:ln/>
+        </p:spPr>
+        <p:txBody>
+          <a:bodyPr wrap="square" lIns="0" tIns="0" rIns="0" bIns="0" rtlCol="0" anchor="t"/>
+          <a:lstStyle/>
+          <a:p>
+            <a:pPr algn="ctr" indent="0" marL="0">
               <a:lnSpc>
-                <a:spcPct val="118000"/>
+                <a:spcPct val="115000"/>
               </a:lnSpc>
-              <a:spcAft>
-                <a:spcPts val="1400"/>
-              </a:spcAft>
-              <a:buSzPct val="100000"/>
-              <a:buChar char="▪"/>
-            </a:pPr>
-            <a:r>
-              <a:rPr lang="en-US" sz="1600" b="1" dirty="0">
+              <a:buNone/>
+            </a:pPr>
+            <a:r>
+              <a:rPr lang="en-US" sz="1200" dirty="0">
+                <a:solidFill>
+                  <a:srgbClr val="6B6B6B"/>
+                </a:solidFill>
+                <a:latin typeface="Times New Roman" pitchFamily="34" charset="0"/>
+                <a:ea typeface="Times New Roman" pitchFamily="34" charset="-122"/>
+                <a:cs typeface="Times New Roman" pitchFamily="34" charset="-120"/>
+              </a:rPr>
+              <a:t>[TODO], motivated by the geometry measurement (slide 4)</a:t>
+            </a:r>
+            <a:endParaRPr lang="en-US" sz="1200" dirty="0"/>
+          </a:p>
+        </p:txBody>
+      </p:sp>
+      <p:sp>
+        <p:nvSpPr>
+          <p:cNvPr id="11" name="Shape 9"/>
+          <p:cNvSpPr/>
+          <p:nvPr/>
+        </p:nvSpPr>
+        <p:spPr>
+          <a:xfrm>
+            <a:off x="4093464" y="2194560"/>
+            <a:ext cx="237744" cy="128016"/>
+          </a:xfrm>
+          <a:prstGeom prst="rightArrow">
+            <a:avLst/>
+          </a:prstGeom>
+          <a:solidFill>
+            <a:srgbClr val="D9D9D9"/>
+          </a:solidFill>
+          <a:ln/>
+        </p:spPr>
+      </p:sp>
+      <p:sp>
+        <p:nvSpPr>
+          <p:cNvPr id="12" name="Shape 10"/>
+          <p:cNvSpPr/>
+          <p:nvPr/>
+        </p:nvSpPr>
+        <p:spPr>
+          <a:xfrm>
+            <a:off x="5788152" y="1965960"/>
+            <a:ext cx="585216" cy="585216"/>
+          </a:xfrm>
+          <a:prstGeom prst="ellipse">
+            <a:avLst/>
+          </a:prstGeom>
+          <a:solidFill>
+            <a:srgbClr val="004E92"/>
+          </a:solidFill>
+          <a:ln/>
+        </p:spPr>
+      </p:sp>
+      <p:sp>
+        <p:nvSpPr>
+          <p:cNvPr id="13" name="Text 11"/>
+          <p:cNvSpPr txBox="1"/>
+          <p:nvPr/>
+        </p:nvSpPr>
+        <p:spPr>
+          <a:xfrm>
+            <a:off x="5788152" y="1965960"/>
+            <a:ext cx="585216" cy="585216"/>
+          </a:xfrm>
+          <a:prstGeom prst="rect">
+            <a:avLst/>
+          </a:prstGeom>
+          <a:noFill/>
+          <a:ln/>
+        </p:spPr>
+        <p:txBody>
+          <a:bodyPr wrap="square" lIns="0" tIns="0" rIns="0" bIns="0" rtlCol="0" anchor="ctr"/>
+          <a:lstStyle/>
+          <a:p>
+            <a:pPr algn="ctr" indent="0" marL="0">
+              <a:buNone/>
+            </a:pPr>
+            <a:r>
+              <a:rPr lang="en-US" sz="2000" b="1" dirty="0">
+                <a:solidFill>
+                  <a:srgbClr val="FFFFFF"/>
+                </a:solidFill>
+                <a:latin typeface="Times New Roman" pitchFamily="34" charset="0"/>
+                <a:ea typeface="Times New Roman" pitchFamily="34" charset="-122"/>
+                <a:cs typeface="Times New Roman" pitchFamily="34" charset="-120"/>
+              </a:rPr>
+              <a:t>2</a:t>
+            </a:r>
+            <a:endParaRPr lang="en-US" sz="2000" dirty="0"/>
+          </a:p>
+        </p:txBody>
+      </p:sp>
+      <p:sp>
+        <p:nvSpPr>
+          <p:cNvPr id="14" name="Text 12"/>
+          <p:cNvSpPr txBox="1"/>
+          <p:nvPr/>
+        </p:nvSpPr>
+        <p:spPr>
+          <a:xfrm>
+            <a:off x="4358640" y="2715768"/>
+            <a:ext cx="3444240" cy="411480"/>
+          </a:xfrm>
+          <a:prstGeom prst="rect">
+            <a:avLst/>
+          </a:prstGeom>
+          <a:noFill/>
+          <a:ln/>
+        </p:spPr>
+        <p:txBody>
+          <a:bodyPr wrap="square" lIns="0" tIns="0" rIns="0" bIns="0" rtlCol="0" anchor="t"/>
+          <a:lstStyle/>
+          <a:p>
+            <a:pPr algn="ctr" indent="0" marL="0">
+              <a:buNone/>
+            </a:pPr>
+            <a:r>
+              <a:rPr lang="en-US" sz="1350" b="1" dirty="0">
                 <a:solidFill>
                   <a:srgbClr val="1F1D21"/>
                 </a:solidFill>
@@ -6973,22 +8088,41 @@
                 <a:ea typeface="Times New Roman" pitchFamily="34" charset="-122"/>
                 <a:cs typeface="Times New Roman" pitchFamily="34" charset="-120"/>
               </a:rPr>
-              <a:t>Split: 15 train / 5 val — val = patients 01, 11, 15, 17, 19</a:t>
-            </a:r>
-            <a:endParaRPr lang="en-US" sz="1600" dirty="0"/>
-          </a:p>
-          <a:p>
-            <a:pPr lvl="1" indent="0" marL="0">
+              <a:t>Step 2</a:t>
+            </a:r>
+            <a:endParaRPr lang="en-US" sz="1350" dirty="0"/>
+          </a:p>
+        </p:txBody>
+      </p:sp>
+      <p:sp>
+        <p:nvSpPr>
+          <p:cNvPr id="15" name="Text 13"/>
+          <p:cNvSpPr txBox="1"/>
+          <p:nvPr/>
+        </p:nvSpPr>
+        <p:spPr>
+          <a:xfrm>
+            <a:off x="4358640" y="3154680"/>
+            <a:ext cx="3444240" cy="2743200"/>
+          </a:xfrm>
+          <a:prstGeom prst="rect">
+            <a:avLst/>
+          </a:prstGeom>
+          <a:noFill/>
+          <a:ln/>
+        </p:spPr>
+        <p:txBody>
+          <a:bodyPr wrap="square" lIns="0" tIns="0" rIns="0" bIns="0" rtlCol="0" anchor="t"/>
+          <a:lstStyle/>
+          <a:p>
+            <a:pPr algn="ctr" indent="0" marL="0">
               <a:lnSpc>
-                <a:spcPct val="118000"/>
+                <a:spcPct val="115000"/>
               </a:lnSpc>
-              <a:spcAft>
-                <a:spcPts val="600"/>
-              </a:spcAft>
-              <a:buNone/>
-            </a:pPr>
-            <a:r>
-              <a:rPr lang="en-US" sz="1400" dirty="0">
+              <a:buNone/>
+            </a:pPr>
+            <a:r>
+              <a:rPr lang="en-US" sz="1200" dirty="0">
                 <a:solidFill>
                   <a:srgbClr val="6B6B6B"/>
                 </a:solidFill>
@@ -6996,62 +8130,62 @@
                 <a:ea typeface="Times New Roman" pitchFamily="34" charset="-122"/>
                 <a:cs typeface="Times New Roman" pitchFamily="34" charset="-120"/>
               </a:rPr>
-              <a:t>Scores below are means over these 5 held-out scans</a:t>
-            </a:r>
-            <a:endParaRPr lang="en-US" sz="1600" dirty="0"/>
-          </a:p>
-        </p:txBody>
-      </p:sp>
-      <p:sp>
-        <p:nvSpPr>
-          <p:cNvPr id="8" name="Shape 6"/>
+              <a:t>[TODO], motivated by the intensity measurement (slide 5)</a:t>
+            </a:r>
+            <a:endParaRPr lang="en-US" sz="1200" dirty="0"/>
+          </a:p>
+        </p:txBody>
+      </p:sp>
+      <p:sp>
+        <p:nvSpPr>
+          <p:cNvPr id="16" name="Shape 14"/>
           <p:cNvSpPr/>
           <p:nvPr/>
         </p:nvSpPr>
         <p:spPr>
           <a:xfrm>
-            <a:off x="7360920" y="1783080"/>
-            <a:ext cx="4160520" cy="2011680"/>
-          </a:xfrm>
-          <a:prstGeom prst="rect">
+            <a:off x="7812024" y="2194560"/>
+            <a:ext cx="237744" cy="128016"/>
+          </a:xfrm>
+          <a:prstGeom prst="rightArrow">
             <a:avLst/>
           </a:prstGeom>
           <a:solidFill>
-            <a:srgbClr val="F1E6EF"/>
+            <a:srgbClr val="D9D9D9"/>
           </a:solidFill>
           <a:ln/>
         </p:spPr>
       </p:sp>
       <p:sp>
         <p:nvSpPr>
-          <p:cNvPr id="9" name="Shape 7"/>
+          <p:cNvPr id="17" name="Shape 15"/>
           <p:cNvSpPr/>
           <p:nvPr/>
         </p:nvSpPr>
         <p:spPr>
           <a:xfrm>
-            <a:off x="7360920" y="1783080"/>
-            <a:ext cx="54864" cy="2011680"/>
-          </a:xfrm>
-          <a:prstGeom prst="rect">
+            <a:off x="9506712" y="1965960"/>
+            <a:ext cx="585216" cy="585216"/>
+          </a:xfrm>
+          <a:prstGeom prst="ellipse">
             <a:avLst/>
           </a:prstGeom>
           <a:solidFill>
-            <a:srgbClr val="751B68"/>
+            <a:srgbClr val="004E92"/>
           </a:solidFill>
           <a:ln/>
         </p:spPr>
       </p:sp>
       <p:sp>
         <p:nvSpPr>
-          <p:cNvPr id="10" name="Text 8"/>
-          <p:cNvSpPr txBox="1"/>
-          <p:nvPr/>
-        </p:nvSpPr>
-        <p:spPr>
-          <a:xfrm>
-            <a:off x="7635240" y="1965960"/>
-            <a:ext cx="3611880" cy="274320"/>
+          <p:cNvPr id="18" name="Text 16"/>
+          <p:cNvSpPr txBox="1"/>
+          <p:nvPr/>
+        </p:nvSpPr>
+        <p:spPr>
+          <a:xfrm>
+            <a:off x="9506712" y="1965960"/>
+            <a:ext cx="585216" cy="585216"/>
           </a:xfrm>
           <a:prstGeom prst="rect">
             <a:avLst/>
@@ -7063,34 +8197,34 @@
           <a:bodyPr wrap="square" lIns="0" tIns="0" rIns="0" bIns="0" rtlCol="0" anchor="ctr"/>
           <a:lstStyle/>
           <a:p>
-            <a:pPr indent="0" marL="0">
-              <a:buNone/>
-            </a:pPr>
-            <a:r>
-              <a:rPr lang="en-US" sz="1100" b="1" spc="100" kern="0" dirty="0">
-                <a:solidFill>
-                  <a:srgbClr val="751B68"/>
-                </a:solidFill>
-                <a:latin typeface="Times New Roman" pitchFamily="34" charset="0"/>
-                <a:ea typeface="Times New Roman" pitchFamily="34" charset="-122"/>
-                <a:cs typeface="Times New Roman" pitchFamily="34" charset="-120"/>
-              </a:rPr>
-              <a:t>POSITIVE-SLICE DICE (PATIENT MEANS)</a:t>
-            </a:r>
-            <a:endParaRPr lang="en-US" sz="1100" dirty="0"/>
-          </a:p>
-        </p:txBody>
-      </p:sp>
-      <p:sp>
-        <p:nvSpPr>
-          <p:cNvPr id="11" name="Text 9"/>
-          <p:cNvSpPr txBox="1"/>
-          <p:nvPr/>
-        </p:nvSpPr>
-        <p:spPr>
-          <a:xfrm>
-            <a:off x="7635240" y="2286000"/>
-            <a:ext cx="3611880" cy="1325880"/>
+            <a:pPr algn="ctr" indent="0" marL="0">
+              <a:buNone/>
+            </a:pPr>
+            <a:r>
+              <a:rPr lang="en-US" sz="2000" b="1" dirty="0">
+                <a:solidFill>
+                  <a:srgbClr val="FFFFFF"/>
+                </a:solidFill>
+                <a:latin typeface="Times New Roman" pitchFamily="34" charset="0"/>
+                <a:ea typeface="Times New Roman" pitchFamily="34" charset="-122"/>
+                <a:cs typeface="Times New Roman" pitchFamily="34" charset="-120"/>
+              </a:rPr>
+              <a:t>3</a:t>
+            </a:r>
+            <a:endParaRPr lang="en-US" sz="2000" dirty="0"/>
+          </a:p>
+        </p:txBody>
+      </p:sp>
+      <p:sp>
+        <p:nvSpPr>
+          <p:cNvPr id="19" name="Text 17"/>
+          <p:cNvSpPr txBox="1"/>
+          <p:nvPr/>
+        </p:nvSpPr>
+        <p:spPr>
+          <a:xfrm>
+            <a:off x="8077200" y="2715768"/>
+            <a:ext cx="3444240" cy="411480"/>
           </a:xfrm>
           <a:prstGeom prst="rect">
             <a:avLst/>
@@ -7102,70 +8236,69 @@
           <a:bodyPr wrap="square" lIns="0" tIns="0" rIns="0" bIns="0" rtlCol="0" anchor="t"/>
           <a:lstStyle/>
           <a:p>
-            <a:pPr indent="0" marL="0">
+            <a:pPr algn="ctr" indent="0" marL="0">
+              <a:buNone/>
+            </a:pPr>
+            <a:r>
+              <a:rPr lang="en-US" sz="1350" b="1" dirty="0">
+                <a:solidFill>
+                  <a:srgbClr val="1F1D21"/>
+                </a:solidFill>
+                <a:latin typeface="Times New Roman" pitchFamily="34" charset="0"/>
+                <a:ea typeface="Times New Roman" pitchFamily="34" charset="-122"/>
+                <a:cs typeface="Times New Roman" pitchFamily="34" charset="-120"/>
+              </a:rPr>
+              <a:t>Step 3</a:t>
+            </a:r>
+            <a:endParaRPr lang="en-US" sz="1350" dirty="0"/>
+          </a:p>
+        </p:txBody>
+      </p:sp>
+      <p:sp>
+        <p:nvSpPr>
+          <p:cNvPr id="20" name="Text 18"/>
+          <p:cNvSpPr txBox="1"/>
+          <p:nvPr/>
+        </p:nvSpPr>
+        <p:spPr>
+          <a:xfrm>
+            <a:off x="8077200" y="3154680"/>
+            <a:ext cx="3444240" cy="2743200"/>
+          </a:xfrm>
+          <a:prstGeom prst="rect">
+            <a:avLst/>
+          </a:prstGeom>
+          <a:noFill/>
+          <a:ln/>
+        </p:spPr>
+        <p:txBody>
+          <a:bodyPr wrap="square" lIns="0" tIns="0" rIns="0" bIns="0" rtlCol="0" anchor="t"/>
+          <a:lstStyle/>
+          <a:p>
+            <a:pPr algn="ctr" indent="0" marL="0">
               <a:lnSpc>
-                <a:spcPct val="118000"/>
+                <a:spcPct val="115000"/>
               </a:lnSpc>
               <a:buNone/>
             </a:pPr>
             <a:r>
-              <a:rPr lang="en-US" sz="1350" dirty="0">
-                <a:solidFill>
-                  <a:srgbClr val="1F1D21"/>
-                </a:solidFill>
-                <a:latin typeface="Times New Roman" pitchFamily="34" charset="0"/>
-                <a:ea typeface="Times New Roman" pitchFamily="34" charset="-122"/>
-                <a:cs typeface="Times New Roman" pitchFamily="34" charset="-120"/>
-              </a:rPr>
-              <a:t>Esophagus: 0.47</a:t>
-            </a:r>
-            <a:endParaRPr lang="en-US" sz="1350" dirty="0"/>
-          </a:p>
-          <a:p>
-            <a:pPr indent="0" marL="0">
-              <a:lnSpc>
-                <a:spcPct val="118000"/>
-              </a:lnSpc>
-              <a:buNone/>
-            </a:pPr>
-            <a:r>
-              <a:rPr lang="en-US" sz="1350" dirty="0">
-                <a:solidFill>
-                  <a:srgbClr val="1F1D21"/>
-                </a:solidFill>
-                <a:latin typeface="Times New Roman" pitchFamily="34" charset="0"/>
-                <a:ea typeface="Times New Roman" pitchFamily="34" charset="-122"/>
-                <a:cs typeface="Times New Roman" pitchFamily="34" charset="-120"/>
-              </a:rPr>
-              <a:t>Heart: 0.58</a:t>
-            </a:r>
-            <a:endParaRPr lang="en-US" sz="1350" dirty="0"/>
-          </a:p>
-          <a:p>
-            <a:pPr indent="0" marL="0">
-              <a:lnSpc>
-                <a:spcPct val="118000"/>
-              </a:lnSpc>
-              <a:buNone/>
-            </a:pPr>
-            <a:r>
-              <a:rPr lang="en-US" sz="1350" dirty="0">
-                <a:solidFill>
-                  <a:srgbClr val="1F1D21"/>
-                </a:solidFill>
-                <a:latin typeface="Times New Roman" pitchFamily="34" charset="0"/>
-                <a:ea typeface="Times New Roman" pitchFamily="34" charset="-122"/>
-                <a:cs typeface="Times New Roman" pitchFamily="34" charset="-120"/>
-              </a:rPr>
-              <a:t>Trachea: 0.50</a:t>
-            </a:r>
-            <a:endParaRPr lang="en-US" sz="1350" dirty="0"/>
+              <a:rPr lang="en-US" sz="1200" dirty="0">
+                <a:solidFill>
+                  <a:srgbClr val="6B6B6B"/>
+                </a:solidFill>
+                <a:latin typeface="Times New Roman" pitchFamily="34" charset="0"/>
+                <a:ea typeface="Times New Roman" pitchFamily="34" charset="-122"/>
+                <a:cs typeface="Times New Roman" pitchFamily="34" charset="-120"/>
+              </a:rPr>
+              <a:t>[TODO], motivated by the position/extent measurement (slide 6)</a:t>
+            </a:r>
+            <a:endParaRPr lang="en-US" sz="1200" dirty="0"/>
           </a:p>
         </p:txBody>
       </p:sp>
       <p:pic>
         <p:nvPicPr>
-          <p:cNvPr id="12" name="Image 0" descr="/Users/bellavg/ProjectsMSc/ai4mi_project/.claude/worktrees/segthor-presentation-midpoint-825c66/deck/assets/uva_logo.png">    </p:cNvPr>
+          <p:cNvPr id="21" name="Image 0" descr="/Users/bellavg/ProjectsMSc/ai4mi_project/.claude/worktrees/segthor-presentation-midpoint-825c66/deck/assets/uva_logo.png">    </p:cNvPr>
           <p:cNvPicPr>
             <a:picLocks noChangeAspect="1"/>
           </p:cNvPicPr>
@@ -7189,7 +8322,7 @@
       </p:pic>
       <p:sp>
         <p:nvSpPr>
-          <p:cNvPr id="13" name="Text 10"/>
+          <p:cNvPr id="22" name="Text 19"/>
           <p:cNvSpPr txBox="1"/>
           <p:nvPr/>
         </p:nvSpPr>
@@ -7311,7 +8444,7 @@
                 <a:ea typeface="Times New Roman" pitchFamily="34" charset="-122"/>
                 <a:cs typeface="Times New Roman" pitchFamily="34" charset="-120"/>
               </a:rPr>
-              <a:t>MODIFICATION &amp; RESULT — LARGEST RUBRIC WEIGHT</a:t>
+              <a:t>BASELINE</a:t>
             </a:r>
             <a:endParaRPr lang="en-US" sz="1200" dirty="0"/>
           </a:p>
@@ -7350,7 +8483,7 @@
                 <a:ea typeface="Times New Roman" pitchFamily="34" charset="-122"/>
                 <a:cs typeface="Times New Roman" pitchFamily="34" charset="-120"/>
               </a:rPr>
-              <a:t>2:10</a:t>
+              <a:t>0:35</a:t>
             </a:r>
             <a:endParaRPr lang="en-US" sz="1200" dirty="0"/>
           </a:p>
@@ -7389,7 +8522,7 @@
                 <a:ea typeface="Times New Roman" pitchFamily="34" charset="-122"/>
                 <a:cs typeface="Times New Roman" pitchFamily="34" charset="-120"/>
               </a:rPr>
-              <a:t>Proposed Modification: Motivation, Method &amp; Preliminary Result</a:t>
+              <a:t>Baseline Performance: Unmodified Pipeline (CE Loss, 25 Epochs)</a:t>
             </a:r>
             <a:endParaRPr lang="en-US" sz="2600" dirty="0"/>
           </a:p>
@@ -7417,16 +8550,105 @@
       </p:sp>
       <p:sp>
         <p:nvSpPr>
-          <p:cNvPr id="7" name="Shape 5"/>
+          <p:cNvPr id="7" name="Text 5"/>
+          <p:cNvSpPr txBox="1"/>
+          <p:nvPr/>
+        </p:nvSpPr>
+        <p:spPr>
+          <a:xfrm>
+            <a:off x="640080" y="1783080"/>
+            <a:ext cx="6309360" cy="4206240"/>
+          </a:xfrm>
+          <a:prstGeom prst="rect">
+            <a:avLst/>
+          </a:prstGeom>
+          <a:noFill/>
+          <a:ln/>
+        </p:spPr>
+        <p:txBody>
+          <a:bodyPr wrap="square" lIns="0" tIns="0" rIns="0" bIns="0" rtlCol="0" anchor="t"/>
+          <a:lstStyle/>
+          <a:p>
+            <a:pPr marL="228600" indent="-228600">
+              <a:lnSpc>
+                <a:spcPct val="118000"/>
+              </a:lnSpc>
+              <a:spcAft>
+                <a:spcPts val="1400"/>
+              </a:spcAft>
+              <a:buSzPct val="100000"/>
+              <a:buChar char="▪"/>
+            </a:pPr>
+            <a:r>
+              <a:rPr lang="en-US" sz="1600" b="1" dirty="0">
+                <a:solidFill>
+                  <a:srgbClr val="1F1D21"/>
+                </a:solidFill>
+                <a:latin typeface="Times New Roman" pitchFamily="34" charset="0"/>
+                <a:ea typeface="Times New Roman" pitchFamily="34" charset="-122"/>
+                <a:cs typeface="Times New Roman" pitchFamily="34" charset="-120"/>
+              </a:rPr>
+              <a:t>Split: 15 train / 5 val — val = patients 01, 11, 15, 17, 19</a:t>
+            </a:r>
+            <a:endParaRPr lang="en-US" sz="1600" dirty="0"/>
+          </a:p>
+          <a:p>
+            <a:pPr lvl="1" indent="0" marL="0">
+              <a:lnSpc>
+                <a:spcPct val="118000"/>
+              </a:lnSpc>
+              <a:spcAft>
+                <a:spcPts val="600"/>
+              </a:spcAft>
+              <a:buNone/>
+            </a:pPr>
+            <a:r>
+              <a:rPr lang="en-US" sz="1400" dirty="0">
+                <a:solidFill>
+                  <a:srgbClr val="6B6B6B"/>
+                </a:solidFill>
+                <a:latin typeface="Times New Roman" pitchFamily="34" charset="0"/>
+                <a:ea typeface="Times New Roman" pitchFamily="34" charset="-122"/>
+                <a:cs typeface="Times New Roman" pitchFamily="34" charset="-120"/>
+              </a:rPr>
+              <a:t>Scores below are means over these 5 held-out scans</a:t>
+            </a:r>
+            <a:endParaRPr lang="en-US" sz="1600" dirty="0"/>
+          </a:p>
+        </p:txBody>
+      </p:sp>
+      <p:sp>
+        <p:nvSpPr>
+          <p:cNvPr id="8" name="Shape 6"/>
           <p:cNvSpPr/>
           <p:nvPr/>
         </p:nvSpPr>
         <p:spPr>
           <a:xfrm>
-            <a:off x="1604772" y="1965960"/>
-            <a:ext cx="585216" cy="585216"/>
-          </a:xfrm>
-          <a:prstGeom prst="ellipse">
+            <a:off x="7360920" y="1783080"/>
+            <a:ext cx="4160520" cy="2011680"/>
+          </a:xfrm>
+          <a:prstGeom prst="rect">
+            <a:avLst/>
+          </a:prstGeom>
+          <a:solidFill>
+            <a:srgbClr val="F1E6EF"/>
+          </a:solidFill>
+          <a:ln/>
+        </p:spPr>
+      </p:sp>
+      <p:sp>
+        <p:nvSpPr>
+          <p:cNvPr id="9" name="Shape 7"/>
+          <p:cNvSpPr/>
+          <p:nvPr/>
+        </p:nvSpPr>
+        <p:spPr>
+          <a:xfrm>
+            <a:off x="7360920" y="1783080"/>
+            <a:ext cx="54864" cy="2011680"/>
+          </a:xfrm>
+          <a:prstGeom prst="rect">
             <a:avLst/>
           </a:prstGeom>
           <a:solidFill>
@@ -7437,14 +8659,14 @@
       </p:sp>
       <p:sp>
         <p:nvSpPr>
-          <p:cNvPr id="8" name="Text 6"/>
-          <p:cNvSpPr txBox="1"/>
-          <p:nvPr/>
-        </p:nvSpPr>
-        <p:spPr>
-          <a:xfrm>
-            <a:off x="1604772" y="1965960"/>
-            <a:ext cx="585216" cy="585216"/>
+          <p:cNvPr id="10" name="Text 8"/>
+          <p:cNvSpPr txBox="1"/>
+          <p:nvPr/>
+        </p:nvSpPr>
+        <p:spPr>
+          <a:xfrm>
+            <a:off x="7635240" y="1965960"/>
+            <a:ext cx="3611880" cy="274320"/>
           </a:xfrm>
           <a:prstGeom prst="rect">
             <a:avLst/>
@@ -7456,34 +8678,34 @@
           <a:bodyPr wrap="square" lIns="0" tIns="0" rIns="0" bIns="0" rtlCol="0" anchor="ctr"/>
           <a:lstStyle/>
           <a:p>
-            <a:pPr algn="ctr" indent="0" marL="0">
-              <a:buNone/>
-            </a:pPr>
-            <a:r>
-              <a:rPr lang="en-US" sz="2000" b="1" dirty="0">
-                <a:solidFill>
-                  <a:srgbClr val="FFFFFF"/>
-                </a:solidFill>
-                <a:latin typeface="Times New Roman" pitchFamily="34" charset="0"/>
-                <a:ea typeface="Times New Roman" pitchFamily="34" charset="-122"/>
-                <a:cs typeface="Times New Roman" pitchFamily="34" charset="-120"/>
-              </a:rPr>
-              <a:t>1</a:t>
-            </a:r>
-            <a:endParaRPr lang="en-US" sz="2000" dirty="0"/>
-          </a:p>
-        </p:txBody>
-      </p:sp>
-      <p:sp>
-        <p:nvSpPr>
-          <p:cNvPr id="9" name="Text 7"/>
-          <p:cNvSpPr txBox="1"/>
-          <p:nvPr/>
-        </p:nvSpPr>
-        <p:spPr>
-          <a:xfrm>
-            <a:off x="640080" y="2715768"/>
-            <a:ext cx="2514600" cy="411480"/>
+            <a:pPr indent="0" marL="0">
+              <a:buNone/>
+            </a:pPr>
+            <a:r>
+              <a:rPr lang="en-US" sz="1100" b="1" spc="100" kern="0" dirty="0">
+                <a:solidFill>
+                  <a:srgbClr val="751B68"/>
+                </a:solidFill>
+                <a:latin typeface="Times New Roman" pitchFamily="34" charset="0"/>
+                <a:ea typeface="Times New Roman" pitchFamily="34" charset="-122"/>
+                <a:cs typeface="Times New Roman" pitchFamily="34" charset="-120"/>
+              </a:rPr>
+              <a:t>POSITIVE-SLICE DICE (PATIENT MEANS)</a:t>
+            </a:r>
+            <a:endParaRPr lang="en-US" sz="1100" dirty="0"/>
+          </a:p>
+        </p:txBody>
+      </p:sp>
+      <p:sp>
+        <p:nvSpPr>
+          <p:cNvPr id="11" name="Text 9"/>
+          <p:cNvSpPr txBox="1"/>
+          <p:nvPr/>
+        </p:nvSpPr>
+        <p:spPr>
+          <a:xfrm>
+            <a:off x="7635240" y="2286000"/>
+            <a:ext cx="3611880" cy="1325880"/>
           </a:xfrm>
           <a:prstGeom prst="rect">
             <a:avLst/>
@@ -7495,11 +8717,14 @@
           <a:bodyPr wrap="square" lIns="0" tIns="0" rIns="0" bIns="0" rtlCol="0" anchor="t"/>
           <a:lstStyle/>
           <a:p>
-            <a:pPr algn="ctr" indent="0" marL="0">
-              <a:buNone/>
-            </a:pPr>
-            <a:r>
-              <a:rPr lang="en-US" sz="1350" b="1" dirty="0">
+            <a:pPr indent="0" marL="0">
+              <a:lnSpc>
+                <a:spcPct val="118000"/>
+              </a:lnSpc>
+              <a:buNone/>
+            </a:pPr>
+            <a:r>
+              <a:rPr lang="en-US" sz="1350" dirty="0">
                 <a:solidFill>
                   <a:srgbClr val="1F1D21"/>
                 </a:solidFill>
@@ -7507,159 +8732,19 @@
                 <a:ea typeface="Times New Roman" pitchFamily="34" charset="-122"/>
                 <a:cs typeface="Times New Roman" pitchFamily="34" charset="-120"/>
               </a:rPr>
-              <a:t>Motivation</a:t>
+              <a:t>Esophagus: 0.47</a:t>
             </a:r>
             <a:endParaRPr lang="en-US" sz="1350" dirty="0"/>
           </a:p>
-        </p:txBody>
-      </p:sp>
-      <p:sp>
-        <p:nvSpPr>
-          <p:cNvPr id="10" name="Text 8"/>
-          <p:cNvSpPr txBox="1"/>
-          <p:nvPr/>
-        </p:nvSpPr>
-        <p:spPr>
-          <a:xfrm>
-            <a:off x="640080" y="3154680"/>
-            <a:ext cx="2514600" cy="2743200"/>
-          </a:xfrm>
-          <a:prstGeom prst="rect">
-            <a:avLst/>
-          </a:prstGeom>
-          <a:noFill/>
-          <a:ln/>
-        </p:spPr>
-        <p:txBody>
-          <a:bodyPr wrap="square" lIns="0" tIns="0" rIns="0" bIns="0" rtlCol="0" anchor="t"/>
-          <a:lstStyle/>
-          <a:p>
-            <a:pPr algn="ctr" indent="0" marL="0">
+          <a:p>
+            <a:pPr indent="0" marL="0">
               <a:lnSpc>
-                <a:spcPct val="115000"/>
+                <a:spcPct val="118000"/>
               </a:lnSpc>
               <a:buNone/>
             </a:pPr>
             <a:r>
-              <a:rPr lang="en-US" sz="1200" dirty="0">
-                <a:solidFill>
-                  <a:srgbClr val="6B6B6B"/>
-                </a:solidFill>
-                <a:latin typeface="Times New Roman" pitchFamily="34" charset="0"/>
-                <a:ea typeface="Times New Roman" pitchFamily="34" charset="-122"/>
-                <a:cs typeface="Times New Roman" pitchFamily="34" charset="-120"/>
-              </a:rPr>
-              <a:t>[TODO], tied back to an exploration finding (slides 3–5)</a:t>
-            </a:r>
-            <a:endParaRPr lang="en-US" sz="1200" dirty="0"/>
-          </a:p>
-        </p:txBody>
-      </p:sp>
-      <p:sp>
-        <p:nvSpPr>
-          <p:cNvPr id="11" name="Shape 9"/>
-          <p:cNvSpPr/>
-          <p:nvPr/>
-        </p:nvSpPr>
-        <p:spPr>
-          <a:xfrm>
-            <a:off x="3163824" y="2194560"/>
-            <a:ext cx="237744" cy="128016"/>
-          </a:xfrm>
-          <a:prstGeom prst="rightArrow">
-            <a:avLst/>
-          </a:prstGeom>
-          <a:solidFill>
-            <a:srgbClr val="D9D9D9"/>
-          </a:solidFill>
-          <a:ln/>
-        </p:spPr>
-      </p:sp>
-      <p:sp>
-        <p:nvSpPr>
-          <p:cNvPr id="12" name="Shape 10"/>
-          <p:cNvSpPr/>
-          <p:nvPr/>
-        </p:nvSpPr>
-        <p:spPr>
-          <a:xfrm>
-            <a:off x="4393692" y="1965960"/>
-            <a:ext cx="585216" cy="585216"/>
-          </a:xfrm>
-          <a:prstGeom prst="ellipse">
-            <a:avLst/>
-          </a:prstGeom>
-          <a:solidFill>
-            <a:srgbClr val="751B68"/>
-          </a:solidFill>
-          <a:ln/>
-        </p:spPr>
-      </p:sp>
-      <p:sp>
-        <p:nvSpPr>
-          <p:cNvPr id="13" name="Text 11"/>
-          <p:cNvSpPr txBox="1"/>
-          <p:nvPr/>
-        </p:nvSpPr>
-        <p:spPr>
-          <a:xfrm>
-            <a:off x="4393692" y="1965960"/>
-            <a:ext cx="585216" cy="585216"/>
-          </a:xfrm>
-          <a:prstGeom prst="rect">
-            <a:avLst/>
-          </a:prstGeom>
-          <a:noFill/>
-          <a:ln/>
-        </p:spPr>
-        <p:txBody>
-          <a:bodyPr wrap="square" lIns="0" tIns="0" rIns="0" bIns="0" rtlCol="0" anchor="ctr"/>
-          <a:lstStyle/>
-          <a:p>
-            <a:pPr algn="ctr" indent="0" marL="0">
-              <a:buNone/>
-            </a:pPr>
-            <a:r>
-              <a:rPr lang="en-US" sz="2000" b="1" dirty="0">
-                <a:solidFill>
-                  <a:srgbClr val="FFFFFF"/>
-                </a:solidFill>
-                <a:latin typeface="Times New Roman" pitchFamily="34" charset="0"/>
-                <a:ea typeface="Times New Roman" pitchFamily="34" charset="-122"/>
-                <a:cs typeface="Times New Roman" pitchFamily="34" charset="-120"/>
-              </a:rPr>
-              <a:t>2</a:t>
-            </a:r>
-            <a:endParaRPr lang="en-US" sz="2000" dirty="0"/>
-          </a:p>
-        </p:txBody>
-      </p:sp>
-      <p:sp>
-        <p:nvSpPr>
-          <p:cNvPr id="14" name="Text 12"/>
-          <p:cNvSpPr txBox="1"/>
-          <p:nvPr/>
-        </p:nvSpPr>
-        <p:spPr>
-          <a:xfrm>
-            <a:off x="3429000" y="2715768"/>
-            <a:ext cx="2514600" cy="411480"/>
-          </a:xfrm>
-          <a:prstGeom prst="rect">
-            <a:avLst/>
-          </a:prstGeom>
-          <a:noFill/>
-          <a:ln/>
-        </p:spPr>
-        <p:txBody>
-          <a:bodyPr wrap="square" lIns="0" tIns="0" rIns="0" bIns="0" rtlCol="0" anchor="t"/>
-          <a:lstStyle/>
-          <a:p>
-            <a:pPr algn="ctr" indent="0" marL="0">
-              <a:buNone/>
-            </a:pPr>
-            <a:r>
-              <a:rPr lang="en-US" sz="1350" b="1" dirty="0">
+              <a:rPr lang="en-US" sz="1350" dirty="0">
                 <a:solidFill>
                   <a:srgbClr val="1F1D21"/>
                 </a:solidFill>
@@ -7667,159 +8752,19 @@
                 <a:ea typeface="Times New Roman" pitchFamily="34" charset="-122"/>
                 <a:cs typeface="Times New Roman" pitchFamily="34" charset="-120"/>
               </a:rPr>
-              <a:t>Method</a:t>
+              <a:t>Heart: 0.58</a:t>
             </a:r>
             <a:endParaRPr lang="en-US" sz="1350" dirty="0"/>
           </a:p>
-        </p:txBody>
-      </p:sp>
-      <p:sp>
-        <p:nvSpPr>
-          <p:cNvPr id="15" name="Text 13"/>
-          <p:cNvSpPr txBox="1"/>
-          <p:nvPr/>
-        </p:nvSpPr>
-        <p:spPr>
-          <a:xfrm>
-            <a:off x="3429000" y="3154680"/>
-            <a:ext cx="2514600" cy="2743200"/>
-          </a:xfrm>
-          <a:prstGeom prst="rect">
-            <a:avLst/>
-          </a:prstGeom>
-          <a:noFill/>
-          <a:ln/>
-        </p:spPr>
-        <p:txBody>
-          <a:bodyPr wrap="square" lIns="0" tIns="0" rIns="0" bIns="0" rtlCol="0" anchor="t"/>
-          <a:lstStyle/>
-          <a:p>
-            <a:pPr algn="ctr" indent="0" marL="0">
+          <a:p>
+            <a:pPr indent="0" marL="0">
               <a:lnSpc>
-                <a:spcPct val="115000"/>
+                <a:spcPct val="118000"/>
               </a:lnSpc>
               <a:buNone/>
             </a:pPr>
             <a:r>
-              <a:rPr lang="en-US" sz="1200" dirty="0">
-                <a:solidFill>
-                  <a:srgbClr val="6B6B6B"/>
-                </a:solidFill>
-                <a:latin typeface="Times New Roman" pitchFamily="34" charset="0"/>
-                <a:ea typeface="Times New Roman" pitchFamily="34" charset="-122"/>
-                <a:cs typeface="Times New Roman" pitchFamily="34" charset="-120"/>
-              </a:rPr>
-              <a:t>[TODO] the modification tried</a:t>
-            </a:r>
-            <a:endParaRPr lang="en-US" sz="1200" dirty="0"/>
-          </a:p>
-        </p:txBody>
-      </p:sp>
-      <p:sp>
-        <p:nvSpPr>
-          <p:cNvPr id="16" name="Shape 14"/>
-          <p:cNvSpPr/>
-          <p:nvPr/>
-        </p:nvSpPr>
-        <p:spPr>
-          <a:xfrm>
-            <a:off x="5952744" y="2194560"/>
-            <a:ext cx="237744" cy="128016"/>
-          </a:xfrm>
-          <a:prstGeom prst="rightArrow">
-            <a:avLst/>
-          </a:prstGeom>
-          <a:solidFill>
-            <a:srgbClr val="D9D9D9"/>
-          </a:solidFill>
-          <a:ln/>
-        </p:spPr>
-      </p:sp>
-      <p:sp>
-        <p:nvSpPr>
-          <p:cNvPr id="17" name="Shape 15"/>
-          <p:cNvSpPr/>
-          <p:nvPr/>
-        </p:nvSpPr>
-        <p:spPr>
-          <a:xfrm>
-            <a:off x="7182612" y="1965960"/>
-            <a:ext cx="585216" cy="585216"/>
-          </a:xfrm>
-          <a:prstGeom prst="ellipse">
-            <a:avLst/>
-          </a:prstGeom>
-          <a:solidFill>
-            <a:srgbClr val="751B68"/>
-          </a:solidFill>
-          <a:ln/>
-        </p:spPr>
-      </p:sp>
-      <p:sp>
-        <p:nvSpPr>
-          <p:cNvPr id="18" name="Text 16"/>
-          <p:cNvSpPr txBox="1"/>
-          <p:nvPr/>
-        </p:nvSpPr>
-        <p:spPr>
-          <a:xfrm>
-            <a:off x="7182612" y="1965960"/>
-            <a:ext cx="585216" cy="585216"/>
-          </a:xfrm>
-          <a:prstGeom prst="rect">
-            <a:avLst/>
-          </a:prstGeom>
-          <a:noFill/>
-          <a:ln/>
-        </p:spPr>
-        <p:txBody>
-          <a:bodyPr wrap="square" lIns="0" tIns="0" rIns="0" bIns="0" rtlCol="0" anchor="ctr"/>
-          <a:lstStyle/>
-          <a:p>
-            <a:pPr algn="ctr" indent="0" marL="0">
-              <a:buNone/>
-            </a:pPr>
-            <a:r>
-              <a:rPr lang="en-US" sz="2000" b="1" dirty="0">
-                <a:solidFill>
-                  <a:srgbClr val="FFFFFF"/>
-                </a:solidFill>
-                <a:latin typeface="Times New Roman" pitchFamily="34" charset="0"/>
-                <a:ea typeface="Times New Roman" pitchFamily="34" charset="-122"/>
-                <a:cs typeface="Times New Roman" pitchFamily="34" charset="-120"/>
-              </a:rPr>
-              <a:t>3</a:t>
-            </a:r>
-            <a:endParaRPr lang="en-US" sz="2000" dirty="0"/>
-          </a:p>
-        </p:txBody>
-      </p:sp>
-      <p:sp>
-        <p:nvSpPr>
-          <p:cNvPr id="19" name="Text 17"/>
-          <p:cNvSpPr txBox="1"/>
-          <p:nvPr/>
-        </p:nvSpPr>
-        <p:spPr>
-          <a:xfrm>
-            <a:off x="6217920" y="2715768"/>
-            <a:ext cx="2514600" cy="411480"/>
-          </a:xfrm>
-          <a:prstGeom prst="rect">
-            <a:avLst/>
-          </a:prstGeom>
-          <a:noFill/>
-          <a:ln/>
-        </p:spPr>
-        <p:txBody>
-          <a:bodyPr wrap="square" lIns="0" tIns="0" rIns="0" bIns="0" rtlCol="0" anchor="t"/>
-          <a:lstStyle/>
-          <a:p>
-            <a:pPr algn="ctr" indent="0" marL="0">
-              <a:buNone/>
-            </a:pPr>
-            <a:r>
-              <a:rPr lang="en-US" sz="1350" b="1" dirty="0">
+              <a:rPr lang="en-US" sz="1350" dirty="0">
                 <a:solidFill>
                   <a:srgbClr val="1F1D21"/>
                 </a:solidFill>
@@ -7827,217 +8772,15 @@
                 <a:ea typeface="Times New Roman" pitchFamily="34" charset="-122"/>
                 <a:cs typeface="Times New Roman" pitchFamily="34" charset="-120"/>
               </a:rPr>
-              <a:t>Result</a:t>
+              <a:t>Trachea: 0.50</a:t>
             </a:r>
             <a:endParaRPr lang="en-US" sz="1350" dirty="0"/>
-          </a:p>
-        </p:txBody>
-      </p:sp>
-      <p:sp>
-        <p:nvSpPr>
-          <p:cNvPr id="20" name="Text 18"/>
-          <p:cNvSpPr txBox="1"/>
-          <p:nvPr/>
-        </p:nvSpPr>
-        <p:spPr>
-          <a:xfrm>
-            <a:off x="6217920" y="3154680"/>
-            <a:ext cx="2514600" cy="2743200"/>
-          </a:xfrm>
-          <a:prstGeom prst="rect">
-            <a:avLst/>
-          </a:prstGeom>
-          <a:noFill/>
-          <a:ln/>
-        </p:spPr>
-        <p:txBody>
-          <a:bodyPr wrap="square" lIns="0" tIns="0" rIns="0" bIns="0" rtlCol="0" anchor="t"/>
-          <a:lstStyle/>
-          <a:p>
-            <a:pPr algn="ctr" indent="0" marL="0">
-              <a:lnSpc>
-                <a:spcPct val="115000"/>
-              </a:lnSpc>
-              <a:buNone/>
-            </a:pPr>
-            <a:r>
-              <a:rPr lang="en-US" sz="1200" dirty="0">
-                <a:solidFill>
-                  <a:srgbClr val="6B6B6B"/>
-                </a:solidFill>
-                <a:latin typeface="Times New Roman" pitchFamily="34" charset="0"/>
-                <a:ea typeface="Times New Roman" pitchFamily="34" charset="-122"/>
-                <a:cs typeface="Times New Roman" pitchFamily="34" charset="-120"/>
-              </a:rPr>
-              <a:t>[TODO] vs. baseline — from the run in progress</a:t>
-            </a:r>
-            <a:endParaRPr lang="en-US" sz="1200" dirty="0"/>
-          </a:p>
-        </p:txBody>
-      </p:sp>
-      <p:sp>
-        <p:nvSpPr>
-          <p:cNvPr id="21" name="Shape 19"/>
-          <p:cNvSpPr/>
-          <p:nvPr/>
-        </p:nvSpPr>
-        <p:spPr>
-          <a:xfrm>
-            <a:off x="8741664" y="2194560"/>
-            <a:ext cx="237744" cy="128016"/>
-          </a:xfrm>
-          <a:prstGeom prst="rightArrow">
-            <a:avLst/>
-          </a:prstGeom>
-          <a:solidFill>
-            <a:srgbClr val="D9D9D9"/>
-          </a:solidFill>
-          <a:ln/>
-        </p:spPr>
-      </p:sp>
-      <p:sp>
-        <p:nvSpPr>
-          <p:cNvPr id="22" name="Shape 20"/>
-          <p:cNvSpPr/>
-          <p:nvPr/>
-        </p:nvSpPr>
-        <p:spPr>
-          <a:xfrm>
-            <a:off x="9971532" y="1965960"/>
-            <a:ext cx="585216" cy="585216"/>
-          </a:xfrm>
-          <a:prstGeom prst="ellipse">
-            <a:avLst/>
-          </a:prstGeom>
-          <a:solidFill>
-            <a:srgbClr val="751B68"/>
-          </a:solidFill>
-          <a:ln/>
-        </p:spPr>
-      </p:sp>
-      <p:sp>
-        <p:nvSpPr>
-          <p:cNvPr id="23" name="Text 21"/>
-          <p:cNvSpPr txBox="1"/>
-          <p:nvPr/>
-        </p:nvSpPr>
-        <p:spPr>
-          <a:xfrm>
-            <a:off x="9971532" y="1965960"/>
-            <a:ext cx="585216" cy="585216"/>
-          </a:xfrm>
-          <a:prstGeom prst="rect">
-            <a:avLst/>
-          </a:prstGeom>
-          <a:noFill/>
-          <a:ln/>
-        </p:spPr>
-        <p:txBody>
-          <a:bodyPr wrap="square" lIns="0" tIns="0" rIns="0" bIns="0" rtlCol="0" anchor="ctr"/>
-          <a:lstStyle/>
-          <a:p>
-            <a:pPr algn="ctr" indent="0" marL="0">
-              <a:buNone/>
-            </a:pPr>
-            <a:r>
-              <a:rPr lang="en-US" sz="2000" b="1" dirty="0">
-                <a:solidFill>
-                  <a:srgbClr val="FFFFFF"/>
-                </a:solidFill>
-                <a:latin typeface="Times New Roman" pitchFamily="34" charset="0"/>
-                <a:ea typeface="Times New Roman" pitchFamily="34" charset="-122"/>
-                <a:cs typeface="Times New Roman" pitchFamily="34" charset="-120"/>
-              </a:rPr>
-              <a:t>4</a:t>
-            </a:r>
-            <a:endParaRPr lang="en-US" sz="2000" dirty="0"/>
-          </a:p>
-        </p:txBody>
-      </p:sp>
-      <p:sp>
-        <p:nvSpPr>
-          <p:cNvPr id="24" name="Text 22"/>
-          <p:cNvSpPr txBox="1"/>
-          <p:nvPr/>
-        </p:nvSpPr>
-        <p:spPr>
-          <a:xfrm>
-            <a:off x="9006840" y="2715768"/>
-            <a:ext cx="2514600" cy="411480"/>
-          </a:xfrm>
-          <a:prstGeom prst="rect">
-            <a:avLst/>
-          </a:prstGeom>
-          <a:noFill/>
-          <a:ln/>
-        </p:spPr>
-        <p:txBody>
-          <a:bodyPr wrap="square" lIns="0" tIns="0" rIns="0" bIns="0" rtlCol="0" anchor="t"/>
-          <a:lstStyle/>
-          <a:p>
-            <a:pPr algn="ctr" indent="0" marL="0">
-              <a:buNone/>
-            </a:pPr>
-            <a:r>
-              <a:rPr lang="en-US" sz="1350" b="1" dirty="0">
-                <a:solidFill>
-                  <a:srgbClr val="1F1D21"/>
-                </a:solidFill>
-                <a:latin typeface="Times New Roman" pitchFamily="34" charset="0"/>
-                <a:ea typeface="Times New Roman" pitchFamily="34" charset="-122"/>
-                <a:cs typeface="Times New Roman" pitchFamily="34" charset="-120"/>
-              </a:rPr>
-              <a:t>Next steps</a:t>
-            </a:r>
-            <a:endParaRPr lang="en-US" sz="1350" dirty="0"/>
-          </a:p>
-        </p:txBody>
-      </p:sp>
-      <p:sp>
-        <p:nvSpPr>
-          <p:cNvPr id="25" name="Text 23"/>
-          <p:cNvSpPr txBox="1"/>
-          <p:nvPr/>
-        </p:nvSpPr>
-        <p:spPr>
-          <a:xfrm>
-            <a:off x="9006840" y="3154680"/>
-            <a:ext cx="2514600" cy="2743200"/>
-          </a:xfrm>
-          <a:prstGeom prst="rect">
-            <a:avLst/>
-          </a:prstGeom>
-          <a:noFill/>
-          <a:ln/>
-        </p:spPr>
-        <p:txBody>
-          <a:bodyPr wrap="square" lIns="0" tIns="0" rIns="0" bIns="0" rtlCol="0" anchor="t"/>
-          <a:lstStyle/>
-          <a:p>
-            <a:pPr algn="ctr" indent="0" marL="0">
-              <a:lnSpc>
-                <a:spcPct val="115000"/>
-              </a:lnSpc>
-              <a:buNone/>
-            </a:pPr>
-            <a:r>
-              <a:rPr lang="en-US" sz="1200" dirty="0">
-                <a:solidFill>
-                  <a:srgbClr val="6B6B6B"/>
-                </a:solidFill>
-                <a:latin typeface="Times New Roman" pitchFamily="34" charset="0"/>
-                <a:ea typeface="Times New Roman" pitchFamily="34" charset="-122"/>
-                <a:cs typeface="Times New Roman" pitchFamily="34" charset="-120"/>
-              </a:rPr>
-              <a:t>[TODO] one or two concrete next experiments</a:t>
-            </a:r>
-            <a:endParaRPr lang="en-US" sz="1200" dirty="0"/>
           </a:p>
         </p:txBody>
       </p:sp>
       <p:pic>
         <p:nvPicPr>
-          <p:cNvPr id="26" name="Image 0" descr="/Users/bellavg/ProjectsMSc/ai4mi_project/.claude/worktrees/segthor-presentation-midpoint-825c66/deck/assets/uva_logo.png">    </p:cNvPr>
+          <p:cNvPr id="12" name="Image 0" descr="/Users/bellavg/ProjectsMSc/ai4mi_project/.claude/worktrees/segthor-presentation-midpoint-825c66/deck/assets/uva_logo.png">    </p:cNvPr>
           <p:cNvPicPr>
             <a:picLocks noChangeAspect="1"/>
           </p:cNvPicPr>
@@ -8061,7 +8804,7 @@
       </p:pic>
       <p:sp>
         <p:nvSpPr>
-          <p:cNvPr id="27" name="Text 24"/>
+          <p:cNvPr id="13" name="Text 10"/>
           <p:cNvSpPr txBox="1"/>
           <p:nvPr/>
         </p:nvSpPr>

--- a/deck/midproject_outline.pptx
+++ b/deck/midproject_outline.pptx
@@ -4279,16 +4279,39 @@
           <a:ln/>
         </p:spPr>
       </p:sp>
-      <p:sp>
-        <p:nvSpPr>
-          <p:cNvPr id="7" name="Text 5"/>
-          <p:cNvSpPr txBox="1"/>
-          <p:nvPr/>
-        </p:nvSpPr>
+      <p:pic>
+        <p:nvPicPr>
+          <p:cNvPr id="7" name="Image 0" descr="/Users/bellavg/ProjectsMSc/ai4mi_project/.claude/worktrees/segthor-presentation-midpoint-825c66/figures/comparison/label_makeup_rings.png">    </p:cNvPr>
+          <p:cNvPicPr>
+            <a:picLocks noChangeAspect="1"/>
+          </p:cNvPicPr>
+          <p:nvPr/>
+        </p:nvPicPr>
+        <p:blipFill>
+          <a:blip r:embed="rId1"/>
+          <a:srcRect l="0" r="0" t="0" b="0"/>
+          <a:stretch/>
+        </p:blipFill>
         <p:spPr>
           <a:xfrm>
             <a:off x="640080" y="1645920"/>
-            <a:ext cx="4233672" cy="256032"/>
+            <a:ext cx="4206240" cy="2196592"/>
+          </a:xfrm>
+          <a:prstGeom prst="rect">
+            <a:avLst/>
+          </a:prstGeom>
+        </p:spPr>
+      </p:pic>
+      <p:sp>
+        <p:nvSpPr>
+          <p:cNvPr id="8" name="Text 5"/>
+          <p:cNvSpPr txBox="1"/>
+          <p:nvPr/>
+        </p:nvSpPr>
+        <p:spPr>
+          <a:xfrm>
+            <a:off x="640080" y="3952240"/>
+            <a:ext cx="4828032" cy="256032"/>
           </a:xfrm>
           <a:prstGeom prst="rect">
             <a:avLst/>
@@ -4320,14 +4343,14 @@
       </p:sp>
       <p:sp>
         <p:nvSpPr>
-          <p:cNvPr id="8" name="Text 6"/>
-          <p:cNvSpPr txBox="1"/>
-          <p:nvPr/>
-        </p:nvSpPr>
-        <p:spPr>
-          <a:xfrm>
-            <a:off x="640080" y="1938528"/>
-            <a:ext cx="4233672" cy="482346"/>
+          <p:cNvPr id="9" name="Text 6"/>
+          <p:cNvSpPr txBox="1"/>
+          <p:nvPr/>
+        </p:nvSpPr>
+        <p:spPr>
+          <a:xfrm>
+            <a:off x="640080" y="4244848"/>
+            <a:ext cx="4828032" cy="964692"/>
           </a:xfrm>
           <a:prstGeom prst="rect">
             <a:avLst/>
@@ -4358,71 +4381,10 @@
                 <a:ea typeface="Times New Roman" pitchFamily="34" charset="-122"/>
                 <a:cs typeface="Times New Roman" pitchFamily="34" charset="-120"/>
               </a:rPr>
-              <a:t>[TODO] real per-class voxel share, now corrected — as numbers, not a bar chart</a:t>
+              <a:t>20 patients, 978 million voxels: 98.96% background, 1.04% labelled (10.2 M)</a:t>
             </a:r>
             <a:endParaRPr lang="en-US" sz="1250" dirty="0"/>
           </a:p>
-        </p:txBody>
-      </p:sp>
-      <p:sp>
-        <p:nvSpPr>
-          <p:cNvPr id="9" name="Text 7"/>
-          <p:cNvSpPr txBox="1"/>
-          <p:nvPr/>
-        </p:nvSpPr>
-        <p:spPr>
-          <a:xfrm>
-            <a:off x="640080" y="2649474"/>
-            <a:ext cx="4233672" cy="256032"/>
-          </a:xfrm>
-          <a:prstGeom prst="rect">
-            <a:avLst/>
-          </a:prstGeom>
-          <a:noFill/>
-          <a:ln/>
-        </p:spPr>
-        <p:txBody>
-          <a:bodyPr wrap="square" lIns="0" tIns="0" rIns="0" bIns="0" rtlCol="0" anchor="ctr"/>
-          <a:lstStyle/>
-          <a:p>
-            <a:pPr indent="0" marL="0">
-              <a:buNone/>
-            </a:pPr>
-            <a:r>
-              <a:rPr lang="en-US" sz="1150" b="1" spc="100" kern="0" dirty="0">
-                <a:solidFill>
-                  <a:srgbClr val="BC0031"/>
-                </a:solidFill>
-                <a:latin typeface="Times New Roman" pitchFamily="34" charset="0"/>
-                <a:ea typeface="Times New Roman" pitchFamily="34" charset="-122"/>
-                <a:cs typeface="Times New Roman" pitchFamily="34" charset="-120"/>
-              </a:rPr>
-              <a:t>CONNECTED COMPONENTS</a:t>
-            </a:r>
-            <a:endParaRPr lang="en-US" sz="1150" dirty="0"/>
-          </a:p>
-        </p:txBody>
-      </p:sp>
-      <p:sp>
-        <p:nvSpPr>
-          <p:cNvPr id="10" name="Text 8"/>
-          <p:cNvSpPr txBox="1"/>
-          <p:nvPr/>
-        </p:nvSpPr>
-        <p:spPr>
-          <a:xfrm>
-            <a:off x="640080" y="2942082"/>
-            <a:ext cx="4233672" cy="1247013"/>
-          </a:xfrm>
-          <a:prstGeom prst="rect">
-            <a:avLst/>
-          </a:prstGeom>
-          <a:noFill/>
-          <a:ln/>
-        </p:spPr>
-        <p:txBody>
-          <a:bodyPr wrap="square" lIns="0" tIns="0" rIns="0" bIns="0" rtlCol="0" anchor="t"/>
-          <a:lstStyle/>
           <a:p>
             <a:pPr marL="177800" indent="-177800">
               <a:lnSpc>
@@ -4443,10 +4405,94 @@
                 <a:ea typeface="Times New Roman" pitchFamily="34" charset="-122"/>
                 <a:cs typeface="Times New Roman" pitchFamily="34" charset="-120"/>
               </a:rPr>
-              <a:t>Connected pieces per label, for all patients: % of axial slices (2D) or patients (3D) with 1, 2 or 3+ pieces</a:t>
+              <a:t>Share of labelled voxels, 3 labels → 4 labels: esophagus 23.1% → 4.1%; aorta 18.9%</a:t>
             </a:r>
             <a:endParaRPr lang="en-US" sz="1250" dirty="0"/>
           </a:p>
+        </p:txBody>
+      </p:sp>
+      <p:pic>
+        <p:nvPicPr>
+          <p:cNvPr id="10" name="Image 1" descr="/Users/bellavg/ProjectsMSc/ai4mi_project/.claude/worktrees/segthor-presentation-midpoint-825c66/figures/comparison/connected_components.png">    </p:cNvPr>
+          <p:cNvPicPr>
+            <a:picLocks noChangeAspect="1"/>
+          </p:cNvPicPr>
+          <p:nvPr/>
+        </p:nvPicPr>
+        <p:blipFill>
+          <a:blip r:embed="rId2"/>
+          <a:srcRect l="0" r="0" t="0" b="0"/>
+          <a:stretch/>
+        </p:blipFill>
+        <p:spPr>
+          <a:xfrm>
+            <a:off x="6720840" y="1645920"/>
+            <a:ext cx="4206240" cy="2154416"/>
+          </a:xfrm>
+          <a:prstGeom prst="rect">
+            <a:avLst/>
+          </a:prstGeom>
+        </p:spPr>
+      </p:pic>
+      <p:sp>
+        <p:nvSpPr>
+          <p:cNvPr id="11" name="Text 7"/>
+          <p:cNvSpPr txBox="1"/>
+          <p:nvPr/>
+        </p:nvSpPr>
+        <p:spPr>
+          <a:xfrm>
+            <a:off x="6720840" y="3910064"/>
+            <a:ext cx="4828032" cy="256032"/>
+          </a:xfrm>
+          <a:prstGeom prst="rect">
+            <a:avLst/>
+          </a:prstGeom>
+          <a:noFill/>
+          <a:ln/>
+        </p:spPr>
+        <p:txBody>
+          <a:bodyPr wrap="square" lIns="0" tIns="0" rIns="0" bIns="0" rtlCol="0" anchor="ctr"/>
+          <a:lstStyle/>
+          <a:p>
+            <a:pPr indent="0" marL="0">
+              <a:buNone/>
+            </a:pPr>
+            <a:r>
+              <a:rPr lang="en-US" sz="1150" b="1" spc="100" kern="0" dirty="0">
+                <a:solidFill>
+                  <a:srgbClr val="BC0031"/>
+                </a:solidFill>
+                <a:latin typeface="Times New Roman" pitchFamily="34" charset="0"/>
+                <a:ea typeface="Times New Roman" pitchFamily="34" charset="-122"/>
+                <a:cs typeface="Times New Roman" pitchFamily="34" charset="-120"/>
+              </a:rPr>
+              <a:t>CONNECTED COMPONENTS</a:t>
+            </a:r>
+            <a:endParaRPr lang="en-US" sz="1150" dirty="0"/>
+          </a:p>
+        </p:txBody>
+      </p:sp>
+      <p:sp>
+        <p:nvSpPr>
+          <p:cNvPr id="12" name="Text 8"/>
+          <p:cNvSpPr txBox="1"/>
+          <p:nvPr/>
+        </p:nvSpPr>
+        <p:spPr>
+          <a:xfrm>
+            <a:off x="6720840" y="4202672"/>
+            <a:ext cx="4828032" cy="846963"/>
+          </a:xfrm>
+          <a:prstGeom prst="rect">
+            <a:avLst/>
+          </a:prstGeom>
+          <a:noFill/>
+          <a:ln/>
+        </p:spPr>
+        <p:txBody>
+          <a:bodyPr wrap="square" lIns="0" tIns="0" rIns="0" bIns="0" rtlCol="0" anchor="t"/>
+          <a:lstStyle/>
           <a:p>
             <a:pPr marL="177800" indent="-177800">
               <a:lnSpc>
@@ -4467,7 +4513,7 @@
                 <a:ea typeface="Times New Roman" pitchFamily="34" charset="-122"/>
                 <a:cs typeface="Times New Roman" pitchFamily="34" charset="-120"/>
               </a:rPr>
-              <a:t>Top: aorta merged (3 labels). Bottom: aorta separate (4 labels)</a:t>
+              <a:t>% of slices (2D) or patients (3D) with 1, 2 or 3+ pieces</a:t>
             </a:r>
             <a:endParaRPr lang="en-US" sz="1250" dirty="0"/>
           </a:p>
@@ -4491,6 +4537,30 @@
                 <a:ea typeface="Times New Roman" pitchFamily="34" charset="-122"/>
                 <a:cs typeface="Times New Roman" pitchFamily="34" charset="-120"/>
               </a:rPr>
+              <a:t>Top: aorta merged (3 labels). Bottom: aorta separate (4 labels)</a:t>
+            </a:r>
+            <a:endParaRPr lang="en-US" sz="1250" dirty="0"/>
+          </a:p>
+          <a:p>
+            <a:pPr marL="177800" indent="-177800">
+              <a:lnSpc>
+                <a:spcPct val="115000"/>
+              </a:lnSpc>
+              <a:spcAft>
+                <a:spcPts val="500"/>
+              </a:spcAft>
+              <a:buSzPct val="100000"/>
+              <a:buChar char="▪"/>
+            </a:pPr>
+            <a:r>
+              <a:rPr lang="en-US" sz="1250" dirty="0">
+                <a:solidFill>
+                  <a:srgbClr val="1F1D21"/>
+                </a:solidFill>
+                <a:latin typeface="Times New Roman" pitchFamily="34" charset="0"/>
+                <a:ea typeface="Times New Roman" pitchFamily="34" charset="-122"/>
+                <a:cs typeface="Times New Roman" pitchFamily="34" charset="-120"/>
+              </a:rPr>
               <a:t>[TODO] fragmentation risk, if any</a:t>
             </a:r>
             <a:endParaRPr lang="en-US" sz="1250" dirty="0"/>
@@ -4499,14 +4569,14 @@
       </p:sp>
       <p:sp>
         <p:nvSpPr>
-          <p:cNvPr id="11" name="Shape 9"/>
+          <p:cNvPr id="13" name="Shape 9"/>
           <p:cNvSpPr/>
           <p:nvPr/>
         </p:nvSpPr>
         <p:spPr>
           <a:xfrm>
-            <a:off x="640080" y="4417695"/>
-            <a:ext cx="4233672" cy="1005840"/>
+            <a:off x="640080" y="5349240"/>
+            <a:ext cx="10908792" cy="868680"/>
           </a:xfrm>
           <a:prstGeom prst="rect">
             <a:avLst/>
@@ -4519,14 +4589,14 @@
       </p:sp>
       <p:sp>
         <p:nvSpPr>
-          <p:cNvPr id="12" name="Shape 10"/>
+          <p:cNvPr id="14" name="Shape 10"/>
           <p:cNvSpPr/>
           <p:nvPr/>
         </p:nvSpPr>
         <p:spPr>
           <a:xfrm>
-            <a:off x="640080" y="4417695"/>
-            <a:ext cx="54864" cy="1005840"/>
+            <a:off x="640080" y="5349240"/>
+            <a:ext cx="54864" cy="868680"/>
           </a:xfrm>
           <a:prstGeom prst="rect">
             <a:avLst/>
@@ -4539,14 +4609,14 @@
       </p:sp>
       <p:sp>
         <p:nvSpPr>
-          <p:cNvPr id="13" name="Text 11"/>
-          <p:cNvSpPr txBox="1"/>
-          <p:nvPr/>
-        </p:nvSpPr>
-        <p:spPr>
-          <a:xfrm>
-            <a:off x="914400" y="4600575"/>
-            <a:ext cx="3685032" cy="274320"/>
+          <p:cNvPr id="15" name="Text 11"/>
+          <p:cNvSpPr txBox="1"/>
+          <p:nvPr/>
+        </p:nvSpPr>
+        <p:spPr>
+          <a:xfrm>
+            <a:off x="914400" y="5532120"/>
+            <a:ext cx="10360152" cy="274320"/>
           </a:xfrm>
           <a:prstGeom prst="rect">
             <a:avLst/>
@@ -4578,14 +4648,14 @@
       </p:sp>
       <p:sp>
         <p:nvSpPr>
-          <p:cNvPr id="14" name="Text 12"/>
-          <p:cNvSpPr txBox="1"/>
-          <p:nvPr/>
-        </p:nvSpPr>
-        <p:spPr>
-          <a:xfrm>
-            <a:off x="914400" y="4920615"/>
-            <a:ext cx="3685032" cy="320040"/>
+          <p:cNvPr id="16" name="Text 12"/>
+          <p:cNvSpPr txBox="1"/>
+          <p:nvPr/>
+        </p:nvSpPr>
+        <p:spPr>
+          <a:xfrm>
+            <a:off x="914400" y="5852160"/>
+            <a:ext cx="10360152" cy="182880"/>
           </a:xfrm>
           <a:prstGeom prst="rect">
             <a:avLst/>
@@ -4618,103 +4688,16 @@
           </a:p>
         </p:txBody>
       </p:sp>
-      <p:sp>
-        <p:nvSpPr>
-          <p:cNvPr id="15" name="Shape 13"/>
-          <p:cNvSpPr/>
-          <p:nvPr/>
-        </p:nvSpPr>
-        <p:spPr>
-          <a:xfrm>
-            <a:off x="5239512" y="1645920"/>
-            <a:ext cx="6309360" cy="1371600"/>
-          </a:xfrm>
-          <a:prstGeom prst="rect">
-            <a:avLst/>
-          </a:prstGeom>
-          <a:solidFill>
-            <a:srgbClr val="FFFFFF"/>
-          </a:solidFill>
-          <a:ln w="19050">
-            <a:solidFill>
-              <a:srgbClr val="D9A0AE"/>
-            </a:solidFill>
-            <a:prstDash val="dash"/>
-          </a:ln>
-        </p:spPr>
-      </p:sp>
-      <p:sp>
-        <p:nvSpPr>
-          <p:cNvPr id="16" name="Text 14"/>
-          <p:cNvSpPr txBox="1"/>
-          <p:nvPr/>
-        </p:nvSpPr>
-        <p:spPr>
-          <a:xfrm>
-            <a:off x="5239512" y="1645920"/>
-            <a:ext cx="6309360" cy="1371600"/>
-          </a:xfrm>
-          <a:prstGeom prst="rect">
-            <a:avLst/>
-          </a:prstGeom>
-          <a:noFill/>
-          <a:ln/>
-        </p:spPr>
-        <p:txBody>
-          <a:bodyPr wrap="square" lIns="0" tIns="0" rIns="0" bIns="0" rtlCol="0" anchor="ctr"/>
-          <a:lstStyle/>
-          <a:p>
-            <a:pPr algn="ctr" indent="0" marL="0">
-              <a:buNone/>
-            </a:pPr>
-            <a:r>
-              <a:rPr lang="en-US" sz="1200" i="1" dirty="0">
-                <a:solidFill>
-                  <a:srgbClr val="6B6B6B"/>
-                </a:solidFill>
-                <a:latin typeface="Times New Roman" pitchFamily="34" charset="0"/>
-                <a:ea typeface="Times New Roman" pitchFamily="34" charset="-122"/>
-                <a:cs typeface="Times New Roman" pitchFamily="34" charset="-120"/>
-              </a:rPr>
-              <a:t>Dataset make-up figure (to add)</a:t>
-            </a:r>
-            <a:endParaRPr lang="en-US" sz="1200" dirty="0"/>
-          </a:p>
-        </p:txBody>
-      </p:sp>
       <p:pic>
         <p:nvPicPr>
-          <p:cNvPr id="17" name="Image 0" descr="/Users/bellavg/ProjectsMSc/ai4mi_project/.claude/worktrees/segthor-presentation-midpoint-825c66/figures/comparison/connected_components.png">    </p:cNvPr>
+          <p:cNvPr id="17" name="Image 2" descr="/Users/bellavg/ProjectsMSc/ai4mi_project/.claude/worktrees/segthor-presentation-midpoint-825c66/deck/assets/uva_logo.png">    </p:cNvPr>
           <p:cNvPicPr>
             <a:picLocks noChangeAspect="1"/>
           </p:cNvPicPr>
           <p:nvPr/>
         </p:nvPicPr>
         <p:blipFill>
-          <a:blip r:embed="rId1"/>
-          <a:srcRect l="0" r="0" t="0" b="0"/>
-          <a:stretch/>
-        </p:blipFill>
-        <p:spPr>
-          <a:xfrm>
-            <a:off x="5239512" y="3154680"/>
-            <a:ext cx="6309360" cy="2870759"/>
-          </a:xfrm>
-          <a:prstGeom prst="rect">
-            <a:avLst/>
-          </a:prstGeom>
-        </p:spPr>
-      </p:pic>
-      <p:pic>
-        <p:nvPicPr>
-          <p:cNvPr id="18" name="Image 1" descr="/Users/bellavg/ProjectsMSc/ai4mi_project/.claude/worktrees/segthor-presentation-midpoint-825c66/deck/assets/uva_logo.png">    </p:cNvPr>
-          <p:cNvPicPr>
-            <a:picLocks noChangeAspect="1"/>
-          </p:cNvPicPr>
-          <p:nvPr/>
-        </p:nvPicPr>
-        <p:blipFill>
-          <a:blip r:embed="rId2"/>
+          <a:blip r:embed="rId3"/>
           <a:stretch>
             <a:fillRect/>
           </a:stretch>
@@ -4731,7 +4714,7 @@
       </p:pic>
       <p:sp>
         <p:nvSpPr>
-          <p:cNvPr id="19" name="Text 15"/>
+          <p:cNvPr id="18" name="Text 13"/>
           <p:cNvSpPr txBox="1"/>
           <p:nvPr/>
         </p:nvSpPr>

--- a/deck/midproject_outline.pptx
+++ b/deck/midproject_outline.pptx
@@ -7007,16 +7007,39 @@
           <a:ln/>
         </p:spPr>
       </p:sp>
-      <p:sp>
-        <p:nvSpPr>
-          <p:cNvPr id="7" name="Text 5"/>
-          <p:cNvSpPr txBox="1"/>
-          <p:nvPr/>
-        </p:nvSpPr>
-        <p:spPr>
-          <a:xfrm>
-            <a:off x="640080" y="1783080"/>
-            <a:ext cx="3322320" cy="274320"/>
+      <p:pic>
+        <p:nvPicPr>
+          <p:cNvPr id="7" name="Image 0" descr="/Users/bellavg/ProjectsMSc/ai4mi_project/.claude/worktrees/segthor-presentation-midpoint-825c66/figures/profile/organ_position_3d/organ_position_3d.png">    </p:cNvPr>
+          <p:cNvPicPr>
+            <a:picLocks noChangeAspect="1"/>
+          </p:cNvPicPr>
+          <p:nvPr/>
+        </p:nvPicPr>
+        <p:blipFill>
+          <a:blip r:embed="rId1"/>
+          <a:srcRect l="0" r="0" t="0" b="0"/>
+          <a:stretch/>
+        </p:blipFill>
+        <p:spPr>
+          <a:xfrm>
+            <a:off x="640080" y="1645920"/>
+            <a:ext cx="8778240" cy="2858032"/>
+          </a:xfrm>
+          <a:prstGeom prst="rect">
+            <a:avLst/>
+          </a:prstGeom>
+        </p:spPr>
+      </p:pic>
+      <p:sp>
+        <p:nvSpPr>
+          <p:cNvPr id="8" name="Text 5"/>
+          <p:cNvSpPr txBox="1"/>
+          <p:nvPr/>
+        </p:nvSpPr>
+        <p:spPr>
+          <a:xfrm>
+            <a:off x="640080" y="4641112"/>
+            <a:ext cx="2555748" cy="256032"/>
           </a:xfrm>
           <a:prstGeom prst="rect">
             <a:avLst/>
@@ -7032,7 +7055,7 @@
               <a:buNone/>
             </a:pPr>
             <a:r>
-              <a:rPr lang="en-US" sz="1200" b="1" spc="100" kern="0" dirty="0">
+              <a:rPr lang="en-US" sz="1150" b="1" spc="100" kern="0" dirty="0">
                 <a:solidFill>
                   <a:srgbClr val="E98300"/>
                 </a:solidFill>
@@ -7042,20 +7065,20 @@
               </a:rPr>
               <a:t>POSITION</a:t>
             </a:r>
-            <a:endParaRPr lang="en-US" sz="1200" dirty="0"/>
-          </a:p>
-        </p:txBody>
-      </p:sp>
-      <p:sp>
-        <p:nvSpPr>
-          <p:cNvPr id="8" name="Text 6"/>
-          <p:cNvSpPr txBox="1"/>
-          <p:nvPr/>
-        </p:nvSpPr>
-        <p:spPr>
-          <a:xfrm>
-            <a:off x="640080" y="2148840"/>
-            <a:ext cx="3322320" cy="1143000"/>
+            <a:endParaRPr lang="en-US" sz="1150" dirty="0"/>
+          </a:p>
+        </p:txBody>
+      </p:sp>
+      <p:sp>
+        <p:nvSpPr>
+          <p:cNvPr id="9" name="Text 6"/>
+          <p:cNvSpPr txBox="1"/>
+          <p:nvPr/>
+        </p:nvSpPr>
+        <p:spPr>
+          <a:xfrm>
+            <a:off x="640080" y="4933720"/>
+            <a:ext cx="2555748" cy="822960"/>
           </a:xfrm>
           <a:prstGeom prst="rect">
             <a:avLst/>
@@ -7078,7 +7101,7 @@
               <a:buChar char="▪"/>
             </a:pPr>
             <a:r>
-              <a:rPr lang="en-US" sz="1400" dirty="0">
+              <a:rPr lang="en-US" sz="1200" dirty="0">
                 <a:solidFill>
                   <a:srgbClr val="1F1D21"/>
                 </a:solidFill>
@@ -7088,7 +7111,7 @@
               </a:rPr>
               <a:t>[TODO] where each organ sits in 3D</a:t>
             </a:r>
-            <a:endParaRPr lang="en-US" sz="1400" dirty="0"/>
+            <a:endParaRPr lang="en-US" sz="1200" dirty="0"/>
           </a:p>
           <a:p>
             <a:pPr marL="177800" indent="-177800">
@@ -7102,7 +7125,7 @@
               <a:buChar char="▪"/>
             </a:pPr>
             <a:r>
-              <a:rPr lang="en-US" sz="1400" dirty="0">
+              <a:rPr lang="en-US" sz="1200" dirty="0">
                 <a:solidFill>
                   <a:srgbClr val="1F1D21"/>
                 </a:solidFill>
@@ -7112,7 +7135,7 @@
               </a:rPr>
               <a:t>[TODO]</a:t>
             </a:r>
-            <a:endParaRPr lang="en-US" sz="1400" dirty="0"/>
+            <a:endParaRPr lang="en-US" sz="1200" dirty="0"/>
           </a:p>
           <a:p>
             <a:pPr marL="177800" indent="-177800">
@@ -7126,7 +7149,7 @@
               <a:buChar char="▪"/>
             </a:pPr>
             <a:r>
-              <a:rPr lang="en-US" sz="1400" dirty="0">
+              <a:rPr lang="en-US" sz="1200" dirty="0">
                 <a:solidFill>
                   <a:srgbClr val="1F1D21"/>
                 </a:solidFill>
@@ -7136,40 +7159,20 @@
               </a:rPr>
               <a:t>[TODO]</a:t>
             </a:r>
-            <a:endParaRPr lang="en-US" sz="1400" dirty="0"/>
-          </a:p>
-        </p:txBody>
-      </p:sp>
-      <p:sp>
-        <p:nvSpPr>
-          <p:cNvPr id="9" name="Shape 7"/>
-          <p:cNvSpPr/>
-          <p:nvPr/>
-        </p:nvSpPr>
-        <p:spPr>
-          <a:xfrm>
-            <a:off x="4191000" y="1783080"/>
-            <a:ext cx="13716" cy="1508760"/>
-          </a:xfrm>
-          <a:prstGeom prst="rect">
-            <a:avLst/>
-          </a:prstGeom>
-          <a:solidFill>
-            <a:srgbClr val="E3E3E3"/>
-          </a:solidFill>
-          <a:ln/>
-        </p:spPr>
-      </p:sp>
-      <p:sp>
-        <p:nvSpPr>
-          <p:cNvPr id="10" name="Text 8"/>
-          <p:cNvSpPr txBox="1"/>
-          <p:nvPr/>
-        </p:nvSpPr>
-        <p:spPr>
-          <a:xfrm>
-            <a:off x="4419600" y="1783080"/>
-            <a:ext cx="3322320" cy="274320"/>
+            <a:endParaRPr lang="en-US" sz="1200" dirty="0"/>
+          </a:p>
+        </p:txBody>
+      </p:sp>
+      <p:sp>
+        <p:nvSpPr>
+          <p:cNvPr id="10" name="Text 7"/>
+          <p:cNvSpPr txBox="1"/>
+          <p:nvPr/>
+        </p:nvSpPr>
+        <p:spPr>
+          <a:xfrm>
+            <a:off x="3424428" y="4641112"/>
+            <a:ext cx="2555748" cy="256032"/>
           </a:xfrm>
           <a:prstGeom prst="rect">
             <a:avLst/>
@@ -7185,7 +7188,7 @@
               <a:buNone/>
             </a:pPr>
             <a:r>
-              <a:rPr lang="en-US" sz="1200" b="1" spc="100" kern="0" dirty="0">
+              <a:rPr lang="en-US" sz="1150" b="1" spc="100" kern="0" dirty="0">
                 <a:solidFill>
                   <a:srgbClr val="E98300"/>
                 </a:solidFill>
@@ -7195,20 +7198,20 @@
               </a:rPr>
               <a:t>EXTENT</a:t>
             </a:r>
-            <a:endParaRPr lang="en-US" sz="1200" dirty="0"/>
-          </a:p>
-        </p:txBody>
-      </p:sp>
-      <p:sp>
-        <p:nvSpPr>
-          <p:cNvPr id="11" name="Text 9"/>
-          <p:cNvSpPr txBox="1"/>
-          <p:nvPr/>
-        </p:nvSpPr>
-        <p:spPr>
-          <a:xfrm>
-            <a:off x="4419600" y="2148840"/>
-            <a:ext cx="3322320" cy="1143000"/>
+            <a:endParaRPr lang="en-US" sz="1150" dirty="0"/>
+          </a:p>
+        </p:txBody>
+      </p:sp>
+      <p:sp>
+        <p:nvSpPr>
+          <p:cNvPr id="11" name="Text 8"/>
+          <p:cNvSpPr txBox="1"/>
+          <p:nvPr/>
+        </p:nvSpPr>
+        <p:spPr>
+          <a:xfrm>
+            <a:off x="3424428" y="4933720"/>
+            <a:ext cx="2555748" cy="1014984"/>
           </a:xfrm>
           <a:prstGeom prst="rect">
             <a:avLst/>
@@ -7231,7 +7234,7 @@
               <a:buChar char="▪"/>
             </a:pPr>
             <a:r>
-              <a:rPr lang="en-US" sz="1400" dirty="0">
+              <a:rPr lang="en-US" sz="1200" dirty="0">
                 <a:solidFill>
                   <a:srgbClr val="1F1D21"/>
                 </a:solidFill>
@@ -7241,7 +7244,7 @@
               </a:rPr>
               <a:t>[TODO] coverage along the body axis</a:t>
             </a:r>
-            <a:endParaRPr lang="en-US" sz="1400" dirty="0"/>
+            <a:endParaRPr lang="en-US" sz="1200" dirty="0"/>
           </a:p>
           <a:p>
             <a:pPr marL="177800" indent="-177800">
@@ -7255,7 +7258,7 @@
               <a:buChar char="▪"/>
             </a:pPr>
             <a:r>
-              <a:rPr lang="en-US" sz="1400" dirty="0">
+              <a:rPr lang="en-US" sz="1200" dirty="0">
                 <a:solidFill>
                   <a:srgbClr val="1F1D21"/>
                 </a:solidFill>
@@ -7265,7 +7268,7 @@
               </a:rPr>
               <a:t>[TODO]</a:t>
             </a:r>
-            <a:endParaRPr lang="en-US" sz="1400" dirty="0"/>
+            <a:endParaRPr lang="en-US" sz="1200" dirty="0"/>
           </a:p>
           <a:p>
             <a:pPr marL="177800" indent="-177800">
@@ -7279,7 +7282,7 @@
               <a:buChar char="▪"/>
             </a:pPr>
             <a:r>
-              <a:rPr lang="en-US" sz="1400" dirty="0">
+              <a:rPr lang="en-US" sz="1200" dirty="0">
                 <a:solidFill>
                   <a:srgbClr val="1F1D21"/>
                 </a:solidFill>
@@ -7289,40 +7292,20 @@
               </a:rPr>
               <a:t>[TODO]</a:t>
             </a:r>
-            <a:endParaRPr lang="en-US" sz="1400" dirty="0"/>
-          </a:p>
-        </p:txBody>
-      </p:sp>
-      <p:sp>
-        <p:nvSpPr>
-          <p:cNvPr id="12" name="Shape 10"/>
-          <p:cNvSpPr/>
-          <p:nvPr/>
-        </p:nvSpPr>
-        <p:spPr>
-          <a:xfrm>
-            <a:off x="7970520" y="1783080"/>
-            <a:ext cx="13716" cy="1508760"/>
-          </a:xfrm>
-          <a:prstGeom prst="rect">
-            <a:avLst/>
-          </a:prstGeom>
-          <a:solidFill>
-            <a:srgbClr val="E3E3E3"/>
-          </a:solidFill>
-          <a:ln/>
-        </p:spPr>
-      </p:sp>
-      <p:sp>
-        <p:nvSpPr>
-          <p:cNvPr id="13" name="Text 11"/>
-          <p:cNvSpPr txBox="1"/>
-          <p:nvPr/>
-        </p:nvSpPr>
-        <p:spPr>
-          <a:xfrm>
-            <a:off x="8199120" y="1783080"/>
-            <a:ext cx="3322320" cy="274320"/>
+            <a:endParaRPr lang="en-US" sz="1200" dirty="0"/>
+          </a:p>
+        </p:txBody>
+      </p:sp>
+      <p:sp>
+        <p:nvSpPr>
+          <p:cNvPr id="12" name="Text 9"/>
+          <p:cNvSpPr txBox="1"/>
+          <p:nvPr/>
+        </p:nvSpPr>
+        <p:spPr>
+          <a:xfrm>
+            <a:off x="6208776" y="4641112"/>
+            <a:ext cx="2555748" cy="256032"/>
           </a:xfrm>
           <a:prstGeom prst="rect">
             <a:avLst/>
@@ -7338,7 +7321,7 @@
               <a:buNone/>
             </a:pPr>
             <a:r>
-              <a:rPr lang="en-US" sz="1200" b="1" spc="100" kern="0" dirty="0">
+              <a:rPr lang="en-US" sz="1150" b="1" spc="100" kern="0" dirty="0">
                 <a:solidFill>
                   <a:srgbClr val="E98300"/>
                 </a:solidFill>
@@ -7348,20 +7331,20 @@
               </a:rPr>
               <a:t>ADJACENCY</a:t>
             </a:r>
-            <a:endParaRPr lang="en-US" sz="1200" dirty="0"/>
-          </a:p>
-        </p:txBody>
-      </p:sp>
-      <p:sp>
-        <p:nvSpPr>
-          <p:cNvPr id="14" name="Text 12"/>
-          <p:cNvSpPr txBox="1"/>
-          <p:nvPr/>
-        </p:nvSpPr>
-        <p:spPr>
-          <a:xfrm>
-            <a:off x="8199120" y="2148840"/>
-            <a:ext cx="3322320" cy="1143000"/>
+            <a:endParaRPr lang="en-US" sz="1150" dirty="0"/>
+          </a:p>
+        </p:txBody>
+      </p:sp>
+      <p:sp>
+        <p:nvSpPr>
+          <p:cNvPr id="13" name="Text 10"/>
+          <p:cNvSpPr txBox="1"/>
+          <p:nvPr/>
+        </p:nvSpPr>
+        <p:spPr>
+          <a:xfrm>
+            <a:off x="6208776" y="4933720"/>
+            <a:ext cx="2555748" cy="1014984"/>
           </a:xfrm>
           <a:prstGeom prst="rect">
             <a:avLst/>
@@ -7384,7 +7367,7 @@
               <a:buChar char="▪"/>
             </a:pPr>
             <a:r>
-              <a:rPr lang="en-US" sz="1400" dirty="0">
+              <a:rPr lang="en-US" sz="1200" dirty="0">
                 <a:solidFill>
                   <a:srgbClr val="1F1D21"/>
                 </a:solidFill>
@@ -7394,7 +7377,7 @@
               </a:rPr>
               <a:t>[TODO] contact between label pairs</a:t>
             </a:r>
-            <a:endParaRPr lang="en-US" sz="1400" dirty="0"/>
+            <a:endParaRPr lang="en-US" sz="1200" dirty="0"/>
           </a:p>
           <a:p>
             <a:pPr marL="177800" indent="-177800">
@@ -7408,7 +7391,7 @@
               <a:buChar char="▪"/>
             </a:pPr>
             <a:r>
-              <a:rPr lang="en-US" sz="1400" dirty="0">
+              <a:rPr lang="en-US" sz="1200" dirty="0">
                 <a:solidFill>
                   <a:srgbClr val="1F1D21"/>
                 </a:solidFill>
@@ -7418,7 +7401,7 @@
               </a:rPr>
               <a:t>[TODO] which pairs matter most, now that aorta is real</a:t>
             </a:r>
-            <a:endParaRPr lang="en-US" sz="1400" dirty="0"/>
+            <a:endParaRPr lang="en-US" sz="1200" dirty="0"/>
           </a:p>
           <a:p>
             <a:pPr marL="177800" indent="-177800">
@@ -7432,7 +7415,7 @@
               <a:buChar char="▪"/>
             </a:pPr>
             <a:r>
-              <a:rPr lang="en-US" sz="1400" dirty="0">
+              <a:rPr lang="en-US" sz="1200" dirty="0">
                 <a:solidFill>
                   <a:srgbClr val="1F1D21"/>
                 </a:solidFill>
@@ -7442,20 +7425,20 @@
               </a:rPr>
               <a:t>[TODO]</a:t>
             </a:r>
-            <a:endParaRPr lang="en-US" sz="1400" dirty="0"/>
-          </a:p>
-        </p:txBody>
-      </p:sp>
-      <p:sp>
-        <p:nvSpPr>
-          <p:cNvPr id="15" name="Shape 13"/>
+            <a:endParaRPr lang="en-US" sz="1200" dirty="0"/>
+          </a:p>
+        </p:txBody>
+      </p:sp>
+      <p:sp>
+        <p:nvSpPr>
+          <p:cNvPr id="14" name="Shape 11"/>
           <p:cNvSpPr/>
           <p:nvPr/>
         </p:nvSpPr>
         <p:spPr>
           <a:xfrm>
-            <a:off x="640080" y="3611880"/>
-            <a:ext cx="10881360" cy="914400"/>
+            <a:off x="8993124" y="4641112"/>
+            <a:ext cx="2555748" cy="1554480"/>
           </a:xfrm>
           <a:prstGeom prst="rect">
             <a:avLst/>
@@ -7468,14 +7451,14 @@
       </p:sp>
       <p:sp>
         <p:nvSpPr>
-          <p:cNvPr id="16" name="Shape 14"/>
+          <p:cNvPr id="15" name="Shape 12"/>
           <p:cNvSpPr/>
           <p:nvPr/>
         </p:nvSpPr>
         <p:spPr>
           <a:xfrm>
-            <a:off x="640080" y="3611880"/>
-            <a:ext cx="54864" cy="914400"/>
+            <a:off x="8993124" y="4641112"/>
+            <a:ext cx="54864" cy="1554480"/>
           </a:xfrm>
           <a:prstGeom prst="rect">
             <a:avLst/>
@@ -7488,14 +7471,14 @@
       </p:sp>
       <p:sp>
         <p:nvSpPr>
-          <p:cNvPr id="17" name="Text 15"/>
-          <p:cNvSpPr txBox="1"/>
-          <p:nvPr/>
-        </p:nvSpPr>
-        <p:spPr>
-          <a:xfrm>
-            <a:off x="914400" y="3794760"/>
-            <a:ext cx="10332720" cy="274320"/>
+          <p:cNvPr id="16" name="Text 13"/>
+          <p:cNvSpPr txBox="1"/>
+          <p:nvPr/>
+        </p:nvSpPr>
+        <p:spPr>
+          <a:xfrm>
+            <a:off x="9267444" y="4823992"/>
+            <a:ext cx="2007108" cy="274320"/>
           </a:xfrm>
           <a:prstGeom prst="rect">
             <a:avLst/>
@@ -7527,14 +7510,14 @@
       </p:sp>
       <p:sp>
         <p:nvSpPr>
-          <p:cNvPr id="18" name="Text 16"/>
-          <p:cNvSpPr txBox="1"/>
-          <p:nvPr/>
-        </p:nvSpPr>
-        <p:spPr>
-          <a:xfrm>
-            <a:off x="914400" y="4114800"/>
-            <a:ext cx="10332720" cy="228600"/>
+          <p:cNvPr id="17" name="Text 14"/>
+          <p:cNvSpPr txBox="1"/>
+          <p:nvPr/>
+        </p:nvSpPr>
+        <p:spPr>
+          <a:xfrm>
+            <a:off x="9267444" y="5144032"/>
+            <a:ext cx="2007108" cy="868680"/>
           </a:xfrm>
           <a:prstGeom prst="rect">
             <a:avLst/>
@@ -7569,14 +7552,14 @@
       </p:sp>
       <p:pic>
         <p:nvPicPr>
-          <p:cNvPr id="19" name="Image 0" descr="/Users/bellavg/ProjectsMSc/ai4mi_project/.claude/worktrees/segthor-presentation-midpoint-825c66/deck/assets/uva_logo.png">    </p:cNvPr>
+          <p:cNvPr id="18" name="Image 1" descr="/Users/bellavg/ProjectsMSc/ai4mi_project/.claude/worktrees/segthor-presentation-midpoint-825c66/deck/assets/uva_logo.png">    </p:cNvPr>
           <p:cNvPicPr>
             <a:picLocks noChangeAspect="1"/>
           </p:cNvPicPr>
           <p:nvPr/>
         </p:nvPicPr>
         <p:blipFill>
-          <a:blip r:embed="rId1"/>
+          <a:blip r:embed="rId2"/>
           <a:stretch>
             <a:fillRect/>
           </a:stretch>
@@ -7593,7 +7576,7 @@
       </p:pic>
       <p:sp>
         <p:nvSpPr>
-          <p:cNvPr id="20" name="Text 17"/>
+          <p:cNvPr id="19" name="Text 15"/>
           <p:cNvSpPr txBox="1"/>
           <p:nvPr/>
         </p:nvSpPr>

--- a/deck/midproject_outline.pptx
+++ b/deck/midproject_outline.pptx
@@ -7022,8 +7022,8 @@
         </p:blipFill>
         <p:spPr>
           <a:xfrm>
-            <a:off x="640080" y="1645920"/>
-            <a:ext cx="8778240" cy="2858032"/>
+            <a:off x="699371" y="1631950"/>
+            <a:ext cx="8815614" cy="2870200"/>
           </a:xfrm>
           <a:prstGeom prst="rect">
             <a:avLst/>
@@ -7032,14 +7032,54 @@
       </p:pic>
       <p:sp>
         <p:nvSpPr>
-          <p:cNvPr id="8" name="Text 5"/>
-          <p:cNvSpPr txBox="1"/>
-          <p:nvPr/>
-        </p:nvSpPr>
-        <p:spPr>
-          <a:xfrm>
-            <a:off x="640080" y="4641112"/>
-            <a:ext cx="2555748" cy="256032"/>
+          <p:cNvPr id="8" name="Shape 5"/>
+          <p:cNvSpPr/>
+          <p:nvPr/>
+        </p:nvSpPr>
+        <p:spPr>
+          <a:xfrm>
+            <a:off x="9804908" y="1835150"/>
+            <a:ext cx="1574356" cy="2518791"/>
+          </a:xfrm>
+          <a:prstGeom prst="rect">
+            <a:avLst/>
+          </a:prstGeom>
+          <a:solidFill>
+            <a:srgbClr val="FCEEDC"/>
+          </a:solidFill>
+          <a:ln/>
+        </p:spPr>
+      </p:sp>
+      <p:sp>
+        <p:nvSpPr>
+          <p:cNvPr id="9" name="Shape 6"/>
+          <p:cNvSpPr/>
+          <p:nvPr/>
+        </p:nvSpPr>
+        <p:spPr>
+          <a:xfrm>
+            <a:off x="9804908" y="1835150"/>
+            <a:ext cx="54864" cy="2518791"/>
+          </a:xfrm>
+          <a:prstGeom prst="rect">
+            <a:avLst/>
+          </a:prstGeom>
+          <a:solidFill>
+            <a:srgbClr val="E98300"/>
+          </a:solidFill>
+          <a:ln/>
+        </p:spPr>
+      </p:sp>
+      <p:sp>
+        <p:nvSpPr>
+          <p:cNvPr id="10" name="Text 7"/>
+          <p:cNvSpPr txBox="1"/>
+          <p:nvPr/>
+        </p:nvSpPr>
+        <p:spPr>
+          <a:xfrm>
+            <a:off x="10079228" y="2018030"/>
+            <a:ext cx="1025716" cy="274320"/>
           </a:xfrm>
           <a:prstGeom prst="rect">
             <a:avLst/>
@@ -7055,6 +7095,87 @@
               <a:buNone/>
             </a:pPr>
             <a:r>
+              <a:rPr lang="en-US" sz="1100" b="1" spc="100" kern="0" dirty="0">
+                <a:solidFill>
+                  <a:srgbClr val="E98300"/>
+                </a:solidFill>
+                <a:latin typeface="Times New Roman" pitchFamily="34" charset="0"/>
+                <a:ea typeface="Times New Roman" pitchFamily="34" charset="-122"/>
+                <a:cs typeface="Times New Roman" pitchFamily="34" charset="-120"/>
+              </a:rPr>
+              <a:t>WHY THIS MATTERS</a:t>
+            </a:r>
+            <a:endParaRPr lang="en-US" sz="1100" dirty="0"/>
+          </a:p>
+        </p:txBody>
+      </p:sp>
+      <p:sp>
+        <p:nvSpPr>
+          <p:cNvPr id="11" name="Text 8"/>
+          <p:cNvSpPr txBox="1"/>
+          <p:nvPr/>
+        </p:nvSpPr>
+        <p:spPr>
+          <a:xfrm>
+            <a:off x="10079228" y="2338070"/>
+            <a:ext cx="1025716" cy="1832991"/>
+          </a:xfrm>
+          <a:prstGeom prst="rect">
+            <a:avLst/>
+          </a:prstGeom>
+          <a:noFill/>
+          <a:ln/>
+        </p:spPr>
+        <p:txBody>
+          <a:bodyPr wrap="square" lIns="0" tIns="0" rIns="0" bIns="0" rtlCol="0" anchor="t"/>
+          <a:lstStyle/>
+          <a:p>
+            <a:pPr indent="0" marL="0">
+              <a:lnSpc>
+                <a:spcPct val="118000"/>
+              </a:lnSpc>
+              <a:buNone/>
+            </a:pPr>
+            <a:r>
+              <a:rPr lang="en-US" sz="1350" dirty="0">
+                <a:solidFill>
+                  <a:srgbClr val="1F1D21"/>
+                </a:solidFill>
+                <a:latin typeface="Times New Roman" pitchFamily="34" charset="0"/>
+                <a:ea typeface="Times New Roman" pitchFamily="34" charset="-122"/>
+                <a:cs typeface="Times New Roman" pitchFamily="34" charset="-120"/>
+              </a:rPr>
+              <a:t>[TODO] how position and extent inform the preprocessing decisions on the next slide.</a:t>
+            </a:r>
+            <a:endParaRPr lang="en-US" sz="1350" dirty="0"/>
+          </a:p>
+        </p:txBody>
+      </p:sp>
+      <p:sp>
+        <p:nvSpPr>
+          <p:cNvPr id="12" name="Text 9"/>
+          <p:cNvSpPr txBox="1"/>
+          <p:nvPr/>
+        </p:nvSpPr>
+        <p:spPr>
+          <a:xfrm>
+            <a:off x="1142810" y="4746689"/>
+            <a:ext cx="3610229" cy="256032"/>
+          </a:xfrm>
+          <a:prstGeom prst="rect">
+            <a:avLst/>
+          </a:prstGeom>
+          <a:noFill/>
+          <a:ln/>
+        </p:spPr>
+        <p:txBody>
+          <a:bodyPr wrap="square" lIns="0" tIns="0" rIns="0" bIns="0" rtlCol="0" anchor="ctr"/>
+          <a:lstStyle/>
+          <a:p>
+            <a:pPr indent="0" marL="0">
+              <a:buNone/>
+            </a:pPr>
+            <a:r>
               <a:rPr lang="en-US" sz="1150" b="1" spc="100" kern="0" dirty="0">
                 <a:solidFill>
                   <a:srgbClr val="E98300"/>
@@ -7063,7 +7184,7 @@
                 <a:ea typeface="Times New Roman" pitchFamily="34" charset="-122"/>
                 <a:cs typeface="Times New Roman" pitchFamily="34" charset="-120"/>
               </a:rPr>
-              <a:t>POSITION</a:t>
+              <a:t>POSITION, EXTENT &amp; ADJACENCY</a:t>
             </a:r>
             <a:endParaRPr lang="en-US" sz="1150" dirty="0"/>
           </a:p>
@@ -7071,14 +7192,14 @@
       </p:sp>
       <p:sp>
         <p:nvSpPr>
-          <p:cNvPr id="9" name="Text 6"/>
-          <p:cNvSpPr txBox="1"/>
-          <p:nvPr/>
-        </p:nvSpPr>
-        <p:spPr>
-          <a:xfrm>
-            <a:off x="640080" y="4933720"/>
-            <a:ext cx="2555748" cy="822960"/>
+          <p:cNvPr id="13" name="Text 10"/>
+          <p:cNvSpPr txBox="1"/>
+          <p:nvPr/>
+        </p:nvSpPr>
+        <p:spPr>
+          <a:xfrm>
+            <a:off x="1142810" y="5039297"/>
+            <a:ext cx="3610229" cy="1014984"/>
           </a:xfrm>
           <a:prstGeom prst="rect">
             <a:avLst/>
@@ -7133,7 +7254,7 @@
                 <a:ea typeface="Times New Roman" pitchFamily="34" charset="-122"/>
                 <a:cs typeface="Times New Roman" pitchFamily="34" charset="-120"/>
               </a:rPr>
-              <a:t>[TODO]</a:t>
+              <a:t>[TODO] coverage along the body axis</a:t>
             </a:r>
             <a:endParaRPr lang="en-US" sz="1200" dirty="0"/>
           </a:p>
@@ -7157,402 +7278,15 @@
                 <a:ea typeface="Times New Roman" pitchFamily="34" charset="-122"/>
                 <a:cs typeface="Times New Roman" pitchFamily="34" charset="-120"/>
               </a:rPr>
-              <a:t>[TODO]</a:t>
+              <a:t>[TODO] which pairs matter most, now that aorta is real</a:t>
             </a:r>
             <a:endParaRPr lang="en-US" sz="1200" dirty="0"/>
-          </a:p>
-        </p:txBody>
-      </p:sp>
-      <p:sp>
-        <p:nvSpPr>
-          <p:cNvPr id="10" name="Text 7"/>
-          <p:cNvSpPr txBox="1"/>
-          <p:nvPr/>
-        </p:nvSpPr>
-        <p:spPr>
-          <a:xfrm>
-            <a:off x="3424428" y="4641112"/>
-            <a:ext cx="2555748" cy="256032"/>
-          </a:xfrm>
-          <a:prstGeom prst="rect">
-            <a:avLst/>
-          </a:prstGeom>
-          <a:noFill/>
-          <a:ln/>
-        </p:spPr>
-        <p:txBody>
-          <a:bodyPr wrap="square" lIns="0" tIns="0" rIns="0" bIns="0" rtlCol="0" anchor="ctr"/>
-          <a:lstStyle/>
-          <a:p>
-            <a:pPr indent="0" marL="0">
-              <a:buNone/>
-            </a:pPr>
-            <a:r>
-              <a:rPr lang="en-US" sz="1150" b="1" spc="100" kern="0" dirty="0">
-                <a:solidFill>
-                  <a:srgbClr val="E98300"/>
-                </a:solidFill>
-                <a:latin typeface="Times New Roman" pitchFamily="34" charset="0"/>
-                <a:ea typeface="Times New Roman" pitchFamily="34" charset="-122"/>
-                <a:cs typeface="Times New Roman" pitchFamily="34" charset="-120"/>
-              </a:rPr>
-              <a:t>EXTENT</a:t>
-            </a:r>
-            <a:endParaRPr lang="en-US" sz="1150" dirty="0"/>
-          </a:p>
-        </p:txBody>
-      </p:sp>
-      <p:sp>
-        <p:nvSpPr>
-          <p:cNvPr id="11" name="Text 8"/>
-          <p:cNvSpPr txBox="1"/>
-          <p:nvPr/>
-        </p:nvSpPr>
-        <p:spPr>
-          <a:xfrm>
-            <a:off x="3424428" y="4933720"/>
-            <a:ext cx="2555748" cy="1014984"/>
-          </a:xfrm>
-          <a:prstGeom prst="rect">
-            <a:avLst/>
-          </a:prstGeom>
-          <a:noFill/>
-          <a:ln/>
-        </p:spPr>
-        <p:txBody>
-          <a:bodyPr wrap="square" lIns="0" tIns="0" rIns="0" bIns="0" rtlCol="0" anchor="t"/>
-          <a:lstStyle/>
-          <a:p>
-            <a:pPr marL="177800" indent="-177800">
-              <a:lnSpc>
-                <a:spcPct val="115000"/>
-              </a:lnSpc>
-              <a:spcAft>
-                <a:spcPts val="500"/>
-              </a:spcAft>
-              <a:buSzPct val="100000"/>
-              <a:buChar char="▪"/>
-            </a:pPr>
-            <a:r>
-              <a:rPr lang="en-US" sz="1200" dirty="0">
-                <a:solidFill>
-                  <a:srgbClr val="1F1D21"/>
-                </a:solidFill>
-                <a:latin typeface="Times New Roman" pitchFamily="34" charset="0"/>
-                <a:ea typeface="Times New Roman" pitchFamily="34" charset="-122"/>
-                <a:cs typeface="Times New Roman" pitchFamily="34" charset="-120"/>
-              </a:rPr>
-              <a:t>[TODO] coverage along the body axis</a:t>
-            </a:r>
-            <a:endParaRPr lang="en-US" sz="1200" dirty="0"/>
-          </a:p>
-          <a:p>
-            <a:pPr marL="177800" indent="-177800">
-              <a:lnSpc>
-                <a:spcPct val="115000"/>
-              </a:lnSpc>
-              <a:spcAft>
-                <a:spcPts val="500"/>
-              </a:spcAft>
-              <a:buSzPct val="100000"/>
-              <a:buChar char="▪"/>
-            </a:pPr>
-            <a:r>
-              <a:rPr lang="en-US" sz="1200" dirty="0">
-                <a:solidFill>
-                  <a:srgbClr val="1F1D21"/>
-                </a:solidFill>
-                <a:latin typeface="Times New Roman" pitchFamily="34" charset="0"/>
-                <a:ea typeface="Times New Roman" pitchFamily="34" charset="-122"/>
-                <a:cs typeface="Times New Roman" pitchFamily="34" charset="-120"/>
-              </a:rPr>
-              <a:t>[TODO]</a:t>
-            </a:r>
-            <a:endParaRPr lang="en-US" sz="1200" dirty="0"/>
-          </a:p>
-          <a:p>
-            <a:pPr marL="177800" indent="-177800">
-              <a:lnSpc>
-                <a:spcPct val="115000"/>
-              </a:lnSpc>
-              <a:spcAft>
-                <a:spcPts val="500"/>
-              </a:spcAft>
-              <a:buSzPct val="100000"/>
-              <a:buChar char="▪"/>
-            </a:pPr>
-            <a:r>
-              <a:rPr lang="en-US" sz="1200" dirty="0">
-                <a:solidFill>
-                  <a:srgbClr val="1F1D21"/>
-                </a:solidFill>
-                <a:latin typeface="Times New Roman" pitchFamily="34" charset="0"/>
-                <a:ea typeface="Times New Roman" pitchFamily="34" charset="-122"/>
-                <a:cs typeface="Times New Roman" pitchFamily="34" charset="-120"/>
-              </a:rPr>
-              <a:t>[TODO]</a:t>
-            </a:r>
-            <a:endParaRPr lang="en-US" sz="1200" dirty="0"/>
-          </a:p>
-        </p:txBody>
-      </p:sp>
-      <p:sp>
-        <p:nvSpPr>
-          <p:cNvPr id="12" name="Text 9"/>
-          <p:cNvSpPr txBox="1"/>
-          <p:nvPr/>
-        </p:nvSpPr>
-        <p:spPr>
-          <a:xfrm>
-            <a:off x="6208776" y="4641112"/>
-            <a:ext cx="2555748" cy="256032"/>
-          </a:xfrm>
-          <a:prstGeom prst="rect">
-            <a:avLst/>
-          </a:prstGeom>
-          <a:noFill/>
-          <a:ln/>
-        </p:spPr>
-        <p:txBody>
-          <a:bodyPr wrap="square" lIns="0" tIns="0" rIns="0" bIns="0" rtlCol="0" anchor="ctr"/>
-          <a:lstStyle/>
-          <a:p>
-            <a:pPr indent="0" marL="0">
-              <a:buNone/>
-            </a:pPr>
-            <a:r>
-              <a:rPr lang="en-US" sz="1150" b="1" spc="100" kern="0" dirty="0">
-                <a:solidFill>
-                  <a:srgbClr val="E98300"/>
-                </a:solidFill>
-                <a:latin typeface="Times New Roman" pitchFamily="34" charset="0"/>
-                <a:ea typeface="Times New Roman" pitchFamily="34" charset="-122"/>
-                <a:cs typeface="Times New Roman" pitchFamily="34" charset="-120"/>
-              </a:rPr>
-              <a:t>ADJACENCY</a:t>
-            </a:r>
-            <a:endParaRPr lang="en-US" sz="1150" dirty="0"/>
-          </a:p>
-        </p:txBody>
-      </p:sp>
-      <p:sp>
-        <p:nvSpPr>
-          <p:cNvPr id="13" name="Text 10"/>
-          <p:cNvSpPr txBox="1"/>
-          <p:nvPr/>
-        </p:nvSpPr>
-        <p:spPr>
-          <a:xfrm>
-            <a:off x="6208776" y="4933720"/>
-            <a:ext cx="2555748" cy="1014984"/>
-          </a:xfrm>
-          <a:prstGeom prst="rect">
-            <a:avLst/>
-          </a:prstGeom>
-          <a:noFill/>
-          <a:ln/>
-        </p:spPr>
-        <p:txBody>
-          <a:bodyPr wrap="square" lIns="0" tIns="0" rIns="0" bIns="0" rtlCol="0" anchor="t"/>
-          <a:lstStyle/>
-          <a:p>
-            <a:pPr marL="177800" indent="-177800">
-              <a:lnSpc>
-                <a:spcPct val="115000"/>
-              </a:lnSpc>
-              <a:spcAft>
-                <a:spcPts val="500"/>
-              </a:spcAft>
-              <a:buSzPct val="100000"/>
-              <a:buChar char="▪"/>
-            </a:pPr>
-            <a:r>
-              <a:rPr lang="en-US" sz="1200" dirty="0">
-                <a:solidFill>
-                  <a:srgbClr val="1F1D21"/>
-                </a:solidFill>
-                <a:latin typeface="Times New Roman" pitchFamily="34" charset="0"/>
-                <a:ea typeface="Times New Roman" pitchFamily="34" charset="-122"/>
-                <a:cs typeface="Times New Roman" pitchFamily="34" charset="-120"/>
-              </a:rPr>
-              <a:t>[TODO] contact between label pairs</a:t>
-            </a:r>
-            <a:endParaRPr lang="en-US" sz="1200" dirty="0"/>
-          </a:p>
-          <a:p>
-            <a:pPr marL="177800" indent="-177800">
-              <a:lnSpc>
-                <a:spcPct val="115000"/>
-              </a:lnSpc>
-              <a:spcAft>
-                <a:spcPts val="500"/>
-              </a:spcAft>
-              <a:buSzPct val="100000"/>
-              <a:buChar char="▪"/>
-            </a:pPr>
-            <a:r>
-              <a:rPr lang="en-US" sz="1200" dirty="0">
-                <a:solidFill>
-                  <a:srgbClr val="1F1D21"/>
-                </a:solidFill>
-                <a:latin typeface="Times New Roman" pitchFamily="34" charset="0"/>
-                <a:ea typeface="Times New Roman" pitchFamily="34" charset="-122"/>
-                <a:cs typeface="Times New Roman" pitchFamily="34" charset="-120"/>
-              </a:rPr>
-              <a:t>[TODO] which pairs matter most, now that aorta is real</a:t>
-            </a:r>
-            <a:endParaRPr lang="en-US" sz="1200" dirty="0"/>
-          </a:p>
-          <a:p>
-            <a:pPr marL="177800" indent="-177800">
-              <a:lnSpc>
-                <a:spcPct val="115000"/>
-              </a:lnSpc>
-              <a:spcAft>
-                <a:spcPts val="500"/>
-              </a:spcAft>
-              <a:buSzPct val="100000"/>
-              <a:buChar char="▪"/>
-            </a:pPr>
-            <a:r>
-              <a:rPr lang="en-US" sz="1200" dirty="0">
-                <a:solidFill>
-                  <a:srgbClr val="1F1D21"/>
-                </a:solidFill>
-                <a:latin typeface="Times New Roman" pitchFamily="34" charset="0"/>
-                <a:ea typeface="Times New Roman" pitchFamily="34" charset="-122"/>
-                <a:cs typeface="Times New Roman" pitchFamily="34" charset="-120"/>
-              </a:rPr>
-              <a:t>[TODO]</a:t>
-            </a:r>
-            <a:endParaRPr lang="en-US" sz="1200" dirty="0"/>
-          </a:p>
-        </p:txBody>
-      </p:sp>
-      <p:sp>
-        <p:nvSpPr>
-          <p:cNvPr id="14" name="Shape 11"/>
-          <p:cNvSpPr/>
-          <p:nvPr/>
-        </p:nvSpPr>
-        <p:spPr>
-          <a:xfrm>
-            <a:off x="8993124" y="4641112"/>
-            <a:ext cx="2555748" cy="1554480"/>
-          </a:xfrm>
-          <a:prstGeom prst="rect">
-            <a:avLst/>
-          </a:prstGeom>
-          <a:solidFill>
-            <a:srgbClr val="FCEEDC"/>
-          </a:solidFill>
-          <a:ln/>
-        </p:spPr>
-      </p:sp>
-      <p:sp>
-        <p:nvSpPr>
-          <p:cNvPr id="15" name="Shape 12"/>
-          <p:cNvSpPr/>
-          <p:nvPr/>
-        </p:nvSpPr>
-        <p:spPr>
-          <a:xfrm>
-            <a:off x="8993124" y="4641112"/>
-            <a:ext cx="54864" cy="1554480"/>
-          </a:xfrm>
-          <a:prstGeom prst="rect">
-            <a:avLst/>
-          </a:prstGeom>
-          <a:solidFill>
-            <a:srgbClr val="E98300"/>
-          </a:solidFill>
-          <a:ln/>
-        </p:spPr>
-      </p:sp>
-      <p:sp>
-        <p:nvSpPr>
-          <p:cNvPr id="16" name="Text 13"/>
-          <p:cNvSpPr txBox="1"/>
-          <p:nvPr/>
-        </p:nvSpPr>
-        <p:spPr>
-          <a:xfrm>
-            <a:off x="9267444" y="4823992"/>
-            <a:ext cx="2007108" cy="274320"/>
-          </a:xfrm>
-          <a:prstGeom prst="rect">
-            <a:avLst/>
-          </a:prstGeom>
-          <a:noFill/>
-          <a:ln/>
-        </p:spPr>
-        <p:txBody>
-          <a:bodyPr wrap="square" lIns="0" tIns="0" rIns="0" bIns="0" rtlCol="0" anchor="ctr"/>
-          <a:lstStyle/>
-          <a:p>
-            <a:pPr indent="0" marL="0">
-              <a:buNone/>
-            </a:pPr>
-            <a:r>
-              <a:rPr lang="en-US" sz="1100" b="1" spc="100" kern="0" dirty="0">
-                <a:solidFill>
-                  <a:srgbClr val="E98300"/>
-                </a:solidFill>
-                <a:latin typeface="Times New Roman" pitchFamily="34" charset="0"/>
-                <a:ea typeface="Times New Roman" pitchFamily="34" charset="-122"/>
-                <a:cs typeface="Times New Roman" pitchFamily="34" charset="-120"/>
-              </a:rPr>
-              <a:t>WHY THIS MATTERS</a:t>
-            </a:r>
-            <a:endParaRPr lang="en-US" sz="1100" dirty="0"/>
-          </a:p>
-        </p:txBody>
-      </p:sp>
-      <p:sp>
-        <p:nvSpPr>
-          <p:cNvPr id="17" name="Text 14"/>
-          <p:cNvSpPr txBox="1"/>
-          <p:nvPr/>
-        </p:nvSpPr>
-        <p:spPr>
-          <a:xfrm>
-            <a:off x="9267444" y="5144032"/>
-            <a:ext cx="2007108" cy="868680"/>
-          </a:xfrm>
-          <a:prstGeom prst="rect">
-            <a:avLst/>
-          </a:prstGeom>
-          <a:noFill/>
-          <a:ln/>
-        </p:spPr>
-        <p:txBody>
-          <a:bodyPr wrap="square" lIns="0" tIns="0" rIns="0" bIns="0" rtlCol="0" anchor="t"/>
-          <a:lstStyle/>
-          <a:p>
-            <a:pPr indent="0" marL="0">
-              <a:lnSpc>
-                <a:spcPct val="118000"/>
-              </a:lnSpc>
-              <a:buNone/>
-            </a:pPr>
-            <a:r>
-              <a:rPr lang="en-US" sz="1350" dirty="0">
-                <a:solidFill>
-                  <a:srgbClr val="1F1D21"/>
-                </a:solidFill>
-                <a:latin typeface="Times New Roman" pitchFamily="34" charset="0"/>
-                <a:ea typeface="Times New Roman" pitchFamily="34" charset="-122"/>
-                <a:cs typeface="Times New Roman" pitchFamily="34" charset="-120"/>
-              </a:rPr>
-              <a:t>[TODO] how position and extent inform the preprocessing decisions on the next slide.</a:t>
-            </a:r>
-            <a:endParaRPr lang="en-US" sz="1350" dirty="0"/>
           </a:p>
         </p:txBody>
       </p:sp>
       <p:pic>
         <p:nvPicPr>
-          <p:cNvPr id="18" name="Image 1" descr="/Users/bellavg/ProjectsMSc/ai4mi_project/.claude/worktrees/segthor-presentation-midpoint-825c66/deck/assets/uva_logo.png">    </p:cNvPr>
+          <p:cNvPr id="14" name="Image 1" descr="/Users/bellavg/ProjectsMSc/ai4mi_project/.claude/worktrees/segthor-presentation-midpoint-825c66/figures/profile/label_pairs/label_pairs_strip.png">    </p:cNvPr>
           <p:cNvPicPr>
             <a:picLocks noChangeAspect="1"/>
           </p:cNvPicPr>
@@ -7560,6 +7294,29 @@
         </p:nvPicPr>
         <p:blipFill>
           <a:blip r:embed="rId2"/>
+          <a:srcRect l="0" r="0" t="0" b="0"/>
+          <a:stretch/>
+        </p:blipFill>
+        <p:spPr>
+          <a:xfrm>
+            <a:off x="5156200" y="4502150"/>
+            <a:ext cx="6223000" cy="1926167"/>
+          </a:xfrm>
+          <a:prstGeom prst="rect">
+            <a:avLst/>
+          </a:prstGeom>
+        </p:spPr>
+      </p:pic>
+      <p:pic>
+        <p:nvPicPr>
+          <p:cNvPr id="15" name="Image 2" descr="/Users/bellavg/ProjectsMSc/ai4mi_project/.claude/worktrees/segthor-presentation-midpoint-825c66/deck/assets/uva_logo.png">    </p:cNvPr>
+          <p:cNvPicPr>
+            <a:picLocks noChangeAspect="1"/>
+          </p:cNvPicPr>
+          <p:nvPr/>
+        </p:nvPicPr>
+        <p:blipFill>
+          <a:blip r:embed="rId3"/>
           <a:stretch>
             <a:fillRect/>
           </a:stretch>
@@ -7576,7 +7333,7 @@
       </p:pic>
       <p:sp>
         <p:nvSpPr>
-          <p:cNvPr id="19" name="Text 15"/>
+          <p:cNvPr id="16" name="Text 11"/>
           <p:cNvSpPr txBox="1"/>
           <p:nvPr/>
         </p:nvSpPr>

--- a/deck/midproject_outline.pptx
+++ b/deck/midproject_outline.pptx
@@ -3478,7 +3478,7 @@
       </p:sp>
       <p:pic>
         <p:nvPicPr>
-          <p:cNvPr id="7" name="Image 0" descr="/Users/bellavg/ProjectsMSc/ai4mi_project/.claude/worktrees/segthor-presentation-midpoint-825c66/deck/assets/uva_logo.png">    </p:cNvPr>
+          <p:cNvPr id="7" name="Image 0" descr="/Users/bellavg/ProjectsMSc/ai4mi_project/.claude/worktrees/segthor-presentation-midpoint-825c66/figures/profile/label_pairs/label_pairs_strip.png">    </p:cNvPr>
           <p:cNvPicPr>
             <a:picLocks noChangeAspect="1"/>
           </p:cNvPicPr>
@@ -3486,6 +3486,29 @@
         </p:nvPicPr>
         <p:blipFill>
           <a:blip r:embed="rId1"/>
+          <a:srcRect l="0" r="0" t="0" b="0"/>
+          <a:stretch/>
+        </p:blipFill>
+        <p:spPr>
+          <a:xfrm>
+            <a:off x="640080" y="3383280"/>
+            <a:ext cx="8887968" cy="2751038"/>
+          </a:xfrm>
+          <a:prstGeom prst="rect">
+            <a:avLst/>
+          </a:prstGeom>
+        </p:spPr>
+      </p:pic>
+      <p:pic>
+        <p:nvPicPr>
+          <p:cNvPr id="8" name="Image 1" descr="/Users/bellavg/ProjectsMSc/ai4mi_project/.claude/worktrees/segthor-presentation-midpoint-825c66/deck/assets/uva_logo.png">    </p:cNvPr>
+          <p:cNvPicPr>
+            <a:picLocks noChangeAspect="1"/>
+          </p:cNvPicPr>
+          <p:nvPr/>
+        </p:nvPicPr>
+        <p:blipFill>
+          <a:blip r:embed="rId2"/>
           <a:stretch>
             <a:fillRect/>
           </a:stretch>
@@ -3502,7 +3525,7 @@
       </p:pic>
       <p:sp>
         <p:nvSpPr>
-          <p:cNvPr id="8" name="Text 5"/>
+          <p:cNvPr id="9" name="Text 5"/>
           <p:cNvSpPr txBox="1"/>
           <p:nvPr/>
         </p:nvSpPr>
@@ -7022,8 +7045,8 @@
         </p:blipFill>
         <p:spPr>
           <a:xfrm>
-            <a:off x="699371" y="1631950"/>
-            <a:ext cx="8815614" cy="2870200"/>
+            <a:off x="898808" y="1585532"/>
+            <a:ext cx="10245031" cy="3335592"/>
           </a:xfrm>
           <a:prstGeom prst="rect">
             <a:avLst/>
@@ -7032,54 +7055,14 @@
       </p:pic>
       <p:sp>
         <p:nvSpPr>
-          <p:cNvPr id="8" name="Shape 5"/>
-          <p:cNvSpPr/>
-          <p:nvPr/>
-        </p:nvSpPr>
-        <p:spPr>
-          <a:xfrm>
-            <a:off x="9804908" y="1835150"/>
-            <a:ext cx="1574356" cy="2518791"/>
-          </a:xfrm>
-          <a:prstGeom prst="rect">
-            <a:avLst/>
-          </a:prstGeom>
-          <a:solidFill>
-            <a:srgbClr val="FCEEDC"/>
-          </a:solidFill>
-          <a:ln/>
-        </p:spPr>
-      </p:sp>
-      <p:sp>
-        <p:nvSpPr>
-          <p:cNvPr id="9" name="Shape 6"/>
-          <p:cNvSpPr/>
-          <p:nvPr/>
-        </p:nvSpPr>
-        <p:spPr>
-          <a:xfrm>
-            <a:off x="9804908" y="1835150"/>
-            <a:ext cx="54864" cy="2518791"/>
-          </a:xfrm>
-          <a:prstGeom prst="rect">
-            <a:avLst/>
-          </a:prstGeom>
-          <a:solidFill>
-            <a:srgbClr val="E98300"/>
-          </a:solidFill>
-          <a:ln/>
-        </p:spPr>
-      </p:sp>
-      <p:sp>
-        <p:nvSpPr>
-          <p:cNvPr id="10" name="Text 7"/>
-          <p:cNvSpPr txBox="1"/>
-          <p:nvPr/>
-        </p:nvSpPr>
-        <p:spPr>
-          <a:xfrm>
-            <a:off x="10079228" y="2018030"/>
-            <a:ext cx="1025716" cy="274320"/>
+          <p:cNvPr id="8" name="Text 5"/>
+          <p:cNvSpPr txBox="1"/>
+          <p:nvPr/>
+        </p:nvSpPr>
+        <p:spPr>
+          <a:xfrm>
+            <a:off x="1271397" y="5100955"/>
+            <a:ext cx="3610229" cy="256032"/>
           </a:xfrm>
           <a:prstGeom prst="rect">
             <a:avLst/>
@@ -7095,7 +7078,7 @@
               <a:buNone/>
             </a:pPr>
             <a:r>
-              <a:rPr lang="en-US" sz="1100" b="1" spc="100" kern="0" dirty="0">
+              <a:rPr lang="en-US" sz="1150" b="1" spc="100" kern="0" dirty="0">
                 <a:solidFill>
                   <a:srgbClr val="E98300"/>
                 </a:solidFill>
@@ -7103,87 +7086,6 @@
                 <a:ea typeface="Times New Roman" pitchFamily="34" charset="-122"/>
                 <a:cs typeface="Times New Roman" pitchFamily="34" charset="-120"/>
               </a:rPr>
-              <a:t>WHY THIS MATTERS</a:t>
-            </a:r>
-            <a:endParaRPr lang="en-US" sz="1100" dirty="0"/>
-          </a:p>
-        </p:txBody>
-      </p:sp>
-      <p:sp>
-        <p:nvSpPr>
-          <p:cNvPr id="11" name="Text 8"/>
-          <p:cNvSpPr txBox="1"/>
-          <p:nvPr/>
-        </p:nvSpPr>
-        <p:spPr>
-          <a:xfrm>
-            <a:off x="10079228" y="2338070"/>
-            <a:ext cx="1025716" cy="1832991"/>
-          </a:xfrm>
-          <a:prstGeom prst="rect">
-            <a:avLst/>
-          </a:prstGeom>
-          <a:noFill/>
-          <a:ln/>
-        </p:spPr>
-        <p:txBody>
-          <a:bodyPr wrap="square" lIns="0" tIns="0" rIns="0" bIns="0" rtlCol="0" anchor="t"/>
-          <a:lstStyle/>
-          <a:p>
-            <a:pPr indent="0" marL="0">
-              <a:lnSpc>
-                <a:spcPct val="118000"/>
-              </a:lnSpc>
-              <a:buNone/>
-            </a:pPr>
-            <a:r>
-              <a:rPr lang="en-US" sz="1350" dirty="0">
-                <a:solidFill>
-                  <a:srgbClr val="1F1D21"/>
-                </a:solidFill>
-                <a:latin typeface="Times New Roman" pitchFamily="34" charset="0"/>
-                <a:ea typeface="Times New Roman" pitchFamily="34" charset="-122"/>
-                <a:cs typeface="Times New Roman" pitchFamily="34" charset="-120"/>
-              </a:rPr>
-              <a:t>[TODO] how position and extent inform the preprocessing decisions on the next slide.</a:t>
-            </a:r>
-            <a:endParaRPr lang="en-US" sz="1350" dirty="0"/>
-          </a:p>
-        </p:txBody>
-      </p:sp>
-      <p:sp>
-        <p:nvSpPr>
-          <p:cNvPr id="12" name="Text 9"/>
-          <p:cNvSpPr txBox="1"/>
-          <p:nvPr/>
-        </p:nvSpPr>
-        <p:spPr>
-          <a:xfrm>
-            <a:off x="1142810" y="4746689"/>
-            <a:ext cx="3610229" cy="256032"/>
-          </a:xfrm>
-          <a:prstGeom prst="rect">
-            <a:avLst/>
-          </a:prstGeom>
-          <a:noFill/>
-          <a:ln/>
-        </p:spPr>
-        <p:txBody>
-          <a:bodyPr wrap="square" lIns="0" tIns="0" rIns="0" bIns="0" rtlCol="0" anchor="ctr"/>
-          <a:lstStyle/>
-          <a:p>
-            <a:pPr indent="0" marL="0">
-              <a:buNone/>
-            </a:pPr>
-            <a:r>
-              <a:rPr lang="en-US" sz="1150" b="1" spc="100" kern="0" dirty="0">
-                <a:solidFill>
-                  <a:srgbClr val="E98300"/>
-                </a:solidFill>
-                <a:latin typeface="Times New Roman" pitchFamily="34" charset="0"/>
-                <a:ea typeface="Times New Roman" pitchFamily="34" charset="-122"/>
-                <a:cs typeface="Times New Roman" pitchFamily="34" charset="-120"/>
-              </a:rPr>
               <a:t>POSITION, EXTENT &amp; ADJACENCY</a:t>
             </a:r>
             <a:endParaRPr lang="en-US" sz="1150" dirty="0"/>
@@ -7192,13 +7094,13 @@
       </p:sp>
       <p:sp>
         <p:nvSpPr>
-          <p:cNvPr id="13" name="Text 10"/>
-          <p:cNvSpPr txBox="1"/>
-          <p:nvPr/>
-        </p:nvSpPr>
-        <p:spPr>
-          <a:xfrm>
-            <a:off x="1142810" y="5039297"/>
+          <p:cNvPr id="9" name="Text 6"/>
+          <p:cNvSpPr txBox="1"/>
+          <p:nvPr/>
+        </p:nvSpPr>
+        <p:spPr>
+          <a:xfrm>
+            <a:off x="1271397" y="5393563"/>
             <a:ext cx="3610229" cy="1014984"/>
           </a:xfrm>
           <a:prstGeom prst="rect">
@@ -7284,9 +7186,130 @@
           </a:p>
         </p:txBody>
       </p:sp>
+      <p:sp>
+        <p:nvSpPr>
+          <p:cNvPr id="10" name="Shape 7"/>
+          <p:cNvSpPr/>
+          <p:nvPr/>
+        </p:nvSpPr>
+        <p:spPr>
+          <a:xfrm>
+            <a:off x="7165912" y="5100955"/>
+            <a:ext cx="4064000" cy="1188720"/>
+          </a:xfrm>
+          <a:prstGeom prst="rect">
+            <a:avLst/>
+          </a:prstGeom>
+          <a:solidFill>
+            <a:srgbClr val="FCEEDC"/>
+          </a:solidFill>
+          <a:ln/>
+        </p:spPr>
+      </p:sp>
+      <p:sp>
+        <p:nvSpPr>
+          <p:cNvPr id="11" name="Shape 8"/>
+          <p:cNvSpPr/>
+          <p:nvPr/>
+        </p:nvSpPr>
+        <p:spPr>
+          <a:xfrm>
+            <a:off x="7165912" y="5100955"/>
+            <a:ext cx="54864" cy="1188720"/>
+          </a:xfrm>
+          <a:prstGeom prst="rect">
+            <a:avLst/>
+          </a:prstGeom>
+          <a:solidFill>
+            <a:srgbClr val="E98300"/>
+          </a:solidFill>
+          <a:ln/>
+        </p:spPr>
+      </p:sp>
+      <p:sp>
+        <p:nvSpPr>
+          <p:cNvPr id="12" name="Text 9"/>
+          <p:cNvSpPr txBox="1"/>
+          <p:nvPr/>
+        </p:nvSpPr>
+        <p:spPr>
+          <a:xfrm>
+            <a:off x="7440232" y="5283835"/>
+            <a:ext cx="3515360" cy="274320"/>
+          </a:xfrm>
+          <a:prstGeom prst="rect">
+            <a:avLst/>
+          </a:prstGeom>
+          <a:noFill/>
+          <a:ln/>
+        </p:spPr>
+        <p:txBody>
+          <a:bodyPr wrap="square" lIns="0" tIns="0" rIns="0" bIns="0" rtlCol="0" anchor="ctr"/>
+          <a:lstStyle/>
+          <a:p>
+            <a:pPr indent="0" marL="0">
+              <a:buNone/>
+            </a:pPr>
+            <a:r>
+              <a:rPr lang="en-US" sz="1100" b="1" spc="100" kern="0" dirty="0">
+                <a:solidFill>
+                  <a:srgbClr val="E98300"/>
+                </a:solidFill>
+                <a:latin typeface="Times New Roman" pitchFamily="34" charset="0"/>
+                <a:ea typeface="Times New Roman" pitchFamily="34" charset="-122"/>
+                <a:cs typeface="Times New Roman" pitchFamily="34" charset="-120"/>
+              </a:rPr>
+              <a:t>WHY THIS MATTERS</a:t>
+            </a:r>
+            <a:endParaRPr lang="en-US" sz="1100" dirty="0"/>
+          </a:p>
+        </p:txBody>
+      </p:sp>
+      <p:sp>
+        <p:nvSpPr>
+          <p:cNvPr id="13" name="Text 10"/>
+          <p:cNvSpPr txBox="1"/>
+          <p:nvPr/>
+        </p:nvSpPr>
+        <p:spPr>
+          <a:xfrm>
+            <a:off x="7440232" y="5603875"/>
+            <a:ext cx="3515360" cy="502920"/>
+          </a:xfrm>
+          <a:prstGeom prst="rect">
+            <a:avLst/>
+          </a:prstGeom>
+          <a:noFill/>
+          <a:ln/>
+        </p:spPr>
+        <p:txBody>
+          <a:bodyPr wrap="square" lIns="0" tIns="0" rIns="0" bIns="0" rtlCol="0" anchor="t"/>
+          <a:lstStyle/>
+          <a:p>
+            <a:pPr indent="0" marL="0">
+              <a:lnSpc>
+                <a:spcPct val="118000"/>
+              </a:lnSpc>
+              <a:buNone/>
+            </a:pPr>
+            <a:r>
+              <a:rPr lang="en-US" sz="1350" dirty="0">
+                <a:solidFill>
+                  <a:srgbClr val="1F1D21"/>
+                </a:solidFill>
+                <a:latin typeface="Times New Roman" pitchFamily="34" charset="0"/>
+                <a:ea typeface="Times New Roman" pitchFamily="34" charset="-122"/>
+                <a:cs typeface="Times New Roman" pitchFamily="34" charset="-120"/>
+              </a:rPr>
+              <a:t>[TODO] how position and extent inform the preprocessing decisions on the next slide.</a:t>
+            </a:r>
+            <a:endParaRPr lang="en-US" sz="1350" dirty="0"/>
+          </a:p>
+        </p:txBody>
+      </p:sp>
       <p:pic>
         <p:nvPicPr>
-          <p:cNvPr id="14" name="Image 1" descr="/Users/bellavg/ProjectsMSc/ai4mi_project/.claude/worktrees/segthor-presentation-midpoint-825c66/figures/profile/label_pairs/label_pairs_strip.png">    </p:cNvPr>
+          <p:cNvPr id="14" name="Image 1" descr="/Users/bellavg/ProjectsMSc/ai4mi_project/.claude/worktrees/segthor-presentation-midpoint-825c66/deck/assets/uva_logo.png">    </p:cNvPr>
           <p:cNvPicPr>
             <a:picLocks noChangeAspect="1"/>
           </p:cNvPicPr>
@@ -7294,29 +7317,6 @@
         </p:nvPicPr>
         <p:blipFill>
           <a:blip r:embed="rId2"/>
-          <a:srcRect l="0" r="0" t="0" b="0"/>
-          <a:stretch/>
-        </p:blipFill>
-        <p:spPr>
-          <a:xfrm>
-            <a:off x="5156200" y="4502150"/>
-            <a:ext cx="6223000" cy="1926167"/>
-          </a:xfrm>
-          <a:prstGeom prst="rect">
-            <a:avLst/>
-          </a:prstGeom>
-        </p:spPr>
-      </p:pic>
-      <p:pic>
-        <p:nvPicPr>
-          <p:cNvPr id="15" name="Image 2" descr="/Users/bellavg/ProjectsMSc/ai4mi_project/.claude/worktrees/segthor-presentation-midpoint-825c66/deck/assets/uva_logo.png">    </p:cNvPr>
-          <p:cNvPicPr>
-            <a:picLocks noChangeAspect="1"/>
-          </p:cNvPicPr>
-          <p:nvPr/>
-        </p:nvPicPr>
-        <p:blipFill>
-          <a:blip r:embed="rId3"/>
           <a:stretch>
             <a:fillRect/>
           </a:stretch>
@@ -7333,7 +7333,7 @@
       </p:pic>
       <p:sp>
         <p:nvSpPr>
-          <p:cNvPr id="16" name="Text 11"/>
+          <p:cNvPr id="15" name="Text 11"/>
           <p:cNvSpPr txBox="1"/>
           <p:nvPr/>
         </p:nvSpPr>

--- a/deck/midproject_outline.pptx
+++ b/deck/midproject_outline.pptx
@@ -2370,7 +2370,7 @@
         <p:spPr>
           <a:xfrm>
             <a:off x="640080" y="3154680"/>
-            <a:ext cx="2514600" cy="2743200"/>
+            <a:ext cx="2514600" cy="868680"/>
           </a:xfrm>
           <a:prstGeom prst="rect">
             <a:avLst/>
@@ -2530,7 +2530,7 @@
         <p:spPr>
           <a:xfrm>
             <a:off x="3429000" y="3154680"/>
-            <a:ext cx="2514600" cy="2743200"/>
+            <a:ext cx="2514600" cy="868680"/>
           </a:xfrm>
           <a:prstGeom prst="rect">
             <a:avLst/>
@@ -2690,7 +2690,7 @@
         <p:spPr>
           <a:xfrm>
             <a:off x="6217920" y="3154680"/>
-            <a:ext cx="2514600" cy="2743200"/>
+            <a:ext cx="2514600" cy="868680"/>
           </a:xfrm>
           <a:prstGeom prst="rect">
             <a:avLst/>
@@ -2850,7 +2850,7 @@
         <p:spPr>
           <a:xfrm>
             <a:off x="9006840" y="3154680"/>
-            <a:ext cx="2514600" cy="2743200"/>
+            <a:ext cx="2514600" cy="868680"/>
           </a:xfrm>
           <a:prstGeom prst="rect">
             <a:avLst/>
@@ -2883,9 +2883,137 @@
           </a:p>
         </p:txBody>
       </p:sp>
+      <p:sp>
+        <p:nvSpPr>
+          <p:cNvPr id="26" name="Shape 24"/>
+          <p:cNvSpPr/>
+          <p:nvPr/>
+        </p:nvSpPr>
+        <p:spPr>
+          <a:xfrm>
+            <a:off x="640080" y="4102100"/>
+            <a:ext cx="5143500" cy="1905000"/>
+          </a:xfrm>
+          <a:prstGeom prst="rect">
+            <a:avLst/>
+          </a:prstGeom>
+          <a:solidFill>
+            <a:srgbClr val="FFFFFF"/>
+          </a:solidFill>
+          <a:ln w="19050">
+            <a:solidFill>
+              <a:srgbClr val="CDBFCB"/>
+            </a:solidFill>
+            <a:prstDash val="dash"/>
+          </a:ln>
+        </p:spPr>
+      </p:sp>
+      <p:sp>
+        <p:nvSpPr>
+          <p:cNvPr id="27" name="Text 25"/>
+          <p:cNvSpPr txBox="1"/>
+          <p:nvPr/>
+        </p:nvSpPr>
+        <p:spPr>
+          <a:xfrm>
+            <a:off x="640080" y="6061964"/>
+            <a:ext cx="5143500" cy="320040"/>
+          </a:xfrm>
+          <a:prstGeom prst="rect">
+            <a:avLst/>
+          </a:prstGeom>
+          <a:noFill/>
+          <a:ln/>
+        </p:spPr>
+        <p:txBody>
+          <a:bodyPr wrap="square" lIns="0" tIns="0" rIns="0" bIns="0" rtlCol="0" anchor="ctr"/>
+          <a:lstStyle/>
+          <a:p>
+            <a:pPr indent="0" marL="0">
+              <a:buNone/>
+            </a:pPr>
+            <a:r>
+              <a:rPr lang="en-US" sz="1200" i="1" dirty="0">
+                <a:solidFill>
+                  <a:srgbClr val="6B6B6B"/>
+                </a:solidFill>
+                <a:latin typeface="Times New Roman" pitchFamily="34" charset="0"/>
+                <a:ea typeface="Times New Roman" pitchFamily="34" charset="-122"/>
+                <a:cs typeface="Times New Roman" pitchFamily="34" charset="-120"/>
+              </a:rPr>
+              <a:t>[TODO] figure 1: results vs. corrected baseline (and nnU-Net)</a:t>
+            </a:r>
+            <a:endParaRPr lang="en-US" sz="1200" dirty="0"/>
+          </a:p>
+        </p:txBody>
+      </p:sp>
+      <p:sp>
+        <p:nvSpPr>
+          <p:cNvPr id="28" name="Shape 26"/>
+          <p:cNvSpPr/>
+          <p:nvPr/>
+        </p:nvSpPr>
+        <p:spPr>
+          <a:xfrm>
+            <a:off x="6061964" y="4102100"/>
+            <a:ext cx="5143500" cy="1905000"/>
+          </a:xfrm>
+          <a:prstGeom prst="rect">
+            <a:avLst/>
+          </a:prstGeom>
+          <a:solidFill>
+            <a:srgbClr val="FFFFFF"/>
+          </a:solidFill>
+          <a:ln w="19050">
+            <a:solidFill>
+              <a:srgbClr val="CDBFCB"/>
+            </a:solidFill>
+            <a:prstDash val="dash"/>
+          </a:ln>
+        </p:spPr>
+      </p:sp>
+      <p:sp>
+        <p:nvSpPr>
+          <p:cNvPr id="29" name="Text 27"/>
+          <p:cNvSpPr txBox="1"/>
+          <p:nvPr/>
+        </p:nvSpPr>
+        <p:spPr>
+          <a:xfrm>
+            <a:off x="6061964" y="6061964"/>
+            <a:ext cx="5143500" cy="320040"/>
+          </a:xfrm>
+          <a:prstGeom prst="rect">
+            <a:avLst/>
+          </a:prstGeom>
+          <a:noFill/>
+          <a:ln/>
+        </p:spPr>
+        <p:txBody>
+          <a:bodyPr wrap="square" lIns="0" tIns="0" rIns="0" bIns="0" rtlCol="0" anchor="ctr"/>
+          <a:lstStyle/>
+          <a:p>
+            <a:pPr indent="0" marL="0">
+              <a:buNone/>
+            </a:pPr>
+            <a:r>
+              <a:rPr lang="en-US" sz="1200" i="1" dirty="0">
+                <a:solidFill>
+                  <a:srgbClr val="6B6B6B"/>
+                </a:solidFill>
+                <a:latin typeface="Times New Roman" pitchFamily="34" charset="0"/>
+                <a:ea typeface="Times New Roman" pitchFamily="34" charset="-122"/>
+                <a:cs typeface="Times New Roman" pitchFamily="34" charset="-120"/>
+              </a:rPr>
+              <a:t>[TODO] figure 2: ground truth vs. baseline vs. modified prediction</a:t>
+            </a:r>
+            <a:endParaRPr lang="en-US" sz="1200" dirty="0"/>
+          </a:p>
+        </p:txBody>
+      </p:sp>
       <p:pic>
         <p:nvPicPr>
-          <p:cNvPr id="26" name="Image 0" descr="/Users/bellavg/ProjectsMSc/ai4mi_project/.claude/worktrees/segthor-presentation-midpoint-825c66/deck/assets/uva_logo.png">    </p:cNvPr>
+          <p:cNvPr id="30" name="Image 0" descr="/Users/bellavg/ProjectsMSc/ai4mi_project/.claude/worktrees/segthor-presentation-midpoint-825c66/deck/assets/uva_logo.png">    </p:cNvPr>
           <p:cNvPicPr>
             <a:picLocks noChangeAspect="1"/>
           </p:cNvPicPr>
@@ -2909,7 +3037,7 @@
       </p:pic>
       <p:sp>
         <p:nvSpPr>
-          <p:cNvPr id="27" name="Text 24"/>
+          <p:cNvPr id="31" name="Text 28"/>
           <p:cNvSpPr txBox="1"/>
           <p:nvPr/>
         </p:nvSpPr>
@@ -8273,60 +8401,55 @@
       </p:sp>
       <p:sp>
         <p:nvSpPr>
-          <p:cNvPr id="7" name="Text 5"/>
-          <p:cNvSpPr txBox="1"/>
-          <p:nvPr/>
-        </p:nvSpPr>
-        <p:spPr>
-          <a:xfrm>
-            <a:off x="640080" y="1783080"/>
-            <a:ext cx="6309360" cy="4206240"/>
-          </a:xfrm>
-          <a:prstGeom prst="rect">
-            <a:avLst/>
-          </a:prstGeom>
-          <a:noFill/>
-          <a:ln/>
-        </p:spPr>
-        <p:txBody>
-          <a:bodyPr wrap="square" lIns="0" tIns="0" rIns="0" bIns="0" rtlCol="0" anchor="t"/>
-          <a:lstStyle/>
-          <a:p>
-            <a:pPr marL="228600" indent="-228600">
-              <a:lnSpc>
-                <a:spcPct val="118000"/>
-              </a:lnSpc>
-              <a:spcAft>
-                <a:spcPts val="1400"/>
-              </a:spcAft>
-              <a:buSzPct val="100000"/>
-              <a:buChar char="▪"/>
-            </a:pPr>
-            <a:r>
-              <a:rPr lang="en-US" sz="1600" b="1" dirty="0">
-                <a:solidFill>
-                  <a:srgbClr val="1F1D21"/>
-                </a:solidFill>
-                <a:latin typeface="Times New Roman" pitchFamily="34" charset="0"/>
-                <a:ea typeface="Times New Roman" pitchFamily="34" charset="-122"/>
-                <a:cs typeface="Times New Roman" pitchFamily="34" charset="-120"/>
-              </a:rPr>
-              <a:t>Split: 15 train / 5 val — val = patients 01, 11, 15, 17, 19</a:t>
-            </a:r>
-            <a:endParaRPr lang="en-US" sz="1600" dirty="0"/>
-          </a:p>
-          <a:p>
-            <a:pPr lvl="1" indent="0" marL="0">
-              <a:lnSpc>
-                <a:spcPct val="118000"/>
-              </a:lnSpc>
-              <a:spcAft>
-                <a:spcPts val="600"/>
-              </a:spcAft>
-              <a:buNone/>
-            </a:pPr>
-            <a:r>
-              <a:rPr lang="en-US" sz="1400" dirty="0">
+          <p:cNvPr id="7" name="Shape 5"/>
+          <p:cNvSpPr/>
+          <p:nvPr/>
+        </p:nvSpPr>
+        <p:spPr>
+          <a:xfrm>
+            <a:off x="639064" y="1689100"/>
+            <a:ext cx="6223000" cy="3175000"/>
+          </a:xfrm>
+          <a:prstGeom prst="rect">
+            <a:avLst/>
+          </a:prstGeom>
+          <a:solidFill>
+            <a:srgbClr val="FFFFFF"/>
+          </a:solidFill>
+          <a:ln w="19050">
+            <a:solidFill>
+              <a:srgbClr val="C9B3C6"/>
+            </a:solidFill>
+            <a:prstDash val="dash"/>
+          </a:ln>
+        </p:spPr>
+      </p:sp>
+      <p:sp>
+        <p:nvSpPr>
+          <p:cNvPr id="8" name="Text 6"/>
+          <p:cNvSpPr txBox="1"/>
+          <p:nvPr/>
+        </p:nvSpPr>
+        <p:spPr>
+          <a:xfrm>
+            <a:off x="639064" y="1689100"/>
+            <a:ext cx="6223000" cy="3175000"/>
+          </a:xfrm>
+          <a:prstGeom prst="rect">
+            <a:avLst/>
+          </a:prstGeom>
+          <a:noFill/>
+          <a:ln/>
+        </p:spPr>
+        <p:txBody>
+          <a:bodyPr wrap="square" lIns="0" tIns="0" rIns="0" bIns="0" rtlCol="0" anchor="ctr"/>
+          <a:lstStyle/>
+          <a:p>
+            <a:pPr algn="ctr" indent="0" marL="0">
+              <a:buNone/>
+            </a:pPr>
+            <a:r>
+              <a:rPr lang="en-US" sz="1200" i="1" dirty="0">
                 <a:solidFill>
                   <a:srgbClr val="6B6B6B"/>
                 </a:solidFill>
@@ -8334,22 +8457,22 @@
                 <a:ea typeface="Times New Roman" pitchFamily="34" charset="-122"/>
                 <a:cs typeface="Times New Roman" pitchFamily="34" charset="-120"/>
               </a:rPr>
-              <a:t>Scores below are means over these 5 held-out scans</a:t>
-            </a:r>
-            <a:endParaRPr lang="en-US" sz="1600" dirty="0"/>
-          </a:p>
-        </p:txBody>
-      </p:sp>
-      <p:sp>
-        <p:nvSpPr>
-          <p:cNvPr id="8" name="Shape 6"/>
+              <a:t>Ground truth vs. prediction on a validation patient (figure to add)</a:t>
+            </a:r>
+            <a:endParaRPr lang="en-US" sz="1200" dirty="0"/>
+          </a:p>
+        </p:txBody>
+      </p:sp>
+      <p:sp>
+        <p:nvSpPr>
+          <p:cNvPr id="9" name="Shape 7"/>
           <p:cNvSpPr/>
           <p:nvPr/>
         </p:nvSpPr>
         <p:spPr>
           <a:xfrm>
-            <a:off x="7360920" y="1783080"/>
-            <a:ext cx="4160520" cy="2011680"/>
+            <a:off x="639064" y="4991100"/>
+            <a:ext cx="6223000" cy="1371600"/>
           </a:xfrm>
           <a:prstGeom prst="rect">
             <a:avLst/>
@@ -8362,14 +8485,14 @@
       </p:sp>
       <p:sp>
         <p:nvSpPr>
-          <p:cNvPr id="9" name="Shape 7"/>
+          <p:cNvPr id="10" name="Shape 8"/>
           <p:cNvSpPr/>
           <p:nvPr/>
         </p:nvSpPr>
         <p:spPr>
           <a:xfrm>
-            <a:off x="7360920" y="1783080"/>
-            <a:ext cx="54864" cy="2011680"/>
+            <a:off x="639064" y="4991100"/>
+            <a:ext cx="54864" cy="1371600"/>
           </a:xfrm>
           <a:prstGeom prst="rect">
             <a:avLst/>
@@ -8382,14 +8505,14 @@
       </p:sp>
       <p:sp>
         <p:nvSpPr>
-          <p:cNvPr id="10" name="Text 8"/>
-          <p:cNvSpPr txBox="1"/>
-          <p:nvPr/>
-        </p:nvSpPr>
-        <p:spPr>
-          <a:xfrm>
-            <a:off x="7635240" y="1965960"/>
-            <a:ext cx="3611880" cy="274320"/>
+          <p:cNvPr id="11" name="Text 9"/>
+          <p:cNvSpPr txBox="1"/>
+          <p:nvPr/>
+        </p:nvSpPr>
+        <p:spPr>
+          <a:xfrm>
+            <a:off x="913384" y="5173980"/>
+            <a:ext cx="5674360" cy="274320"/>
           </a:xfrm>
           <a:prstGeom prst="rect">
             <a:avLst/>
@@ -8413,7 +8536,7 @@
                 <a:ea typeface="Times New Roman" pitchFamily="34" charset="-122"/>
                 <a:cs typeface="Times New Roman" pitchFamily="34" charset="-120"/>
               </a:rPr>
-              <a:t>POSITIVE-SLICE DICE (PATIENT MEANS)</a:t>
+              <a:t>BASELINE: POSITIVE-SLICE DICE (PATIENT MEANS)</a:t>
             </a:r>
             <a:endParaRPr lang="en-US" sz="1100" dirty="0"/>
           </a:p>
@@ -8421,14 +8544,14 @@
       </p:sp>
       <p:sp>
         <p:nvSpPr>
-          <p:cNvPr id="11" name="Text 9"/>
-          <p:cNvSpPr txBox="1"/>
-          <p:nvPr/>
-        </p:nvSpPr>
-        <p:spPr>
-          <a:xfrm>
-            <a:off x="7635240" y="2286000"/>
-            <a:ext cx="3611880" cy="1325880"/>
+          <p:cNvPr id="12" name="Text 10"/>
+          <p:cNvSpPr txBox="1"/>
+          <p:nvPr/>
+        </p:nvSpPr>
+        <p:spPr>
+          <a:xfrm>
+            <a:off x="913384" y="5494020"/>
+            <a:ext cx="5674360" cy="685800"/>
           </a:xfrm>
           <a:prstGeom prst="rect">
             <a:avLst/>
@@ -8455,7 +8578,7 @@
                 <a:ea typeface="Times New Roman" pitchFamily="34" charset="-122"/>
                 <a:cs typeface="Times New Roman" pitchFamily="34" charset="-120"/>
               </a:rPr>
-              <a:t>Esophagus: 0.47</a:t>
+              <a:t>Esophagus 0.47 · Heart 0.58 · Trachea 0.50</a:t>
             </a:r>
             <a:endParaRPr lang="en-US" sz="1350" dirty="0"/>
           </a:p>
@@ -8475,19 +8598,496 @@
                 <a:ea typeface="Times New Roman" pitchFamily="34" charset="-122"/>
                 <a:cs typeface="Times New Roman" pitchFamily="34" charset="-120"/>
               </a:rPr>
-              <a:t>Heart: 0.58</a:t>
+              <a:t>Split: 15 train / 5 val (val = patients 01, 11, 15, 17, 19); scores are means over these 5 held-out scans</a:t>
             </a:r>
             <a:endParaRPr lang="en-US" sz="1350" dirty="0"/>
           </a:p>
+        </p:txBody>
+      </p:sp>
+      <p:sp>
+        <p:nvSpPr>
+          <p:cNvPr id="13" name="Text 11"/>
+          <p:cNvSpPr txBox="1"/>
+          <p:nvPr/>
+        </p:nvSpPr>
+        <p:spPr>
+          <a:xfrm>
+            <a:off x="7192264" y="1689100"/>
+            <a:ext cx="4013200" cy="502920"/>
+          </a:xfrm>
+          <a:prstGeom prst="rect">
+            <a:avLst/>
+          </a:prstGeom>
+          <a:noFill/>
+          <a:ln/>
+        </p:spPr>
+        <p:txBody>
+          <a:bodyPr wrap="square" lIns="0" tIns="0" rIns="0" bIns="0" rtlCol="0" anchor="t"/>
+          <a:lstStyle/>
           <a:p>
             <a:pPr indent="0" marL="0">
+              <a:buNone/>
+            </a:pPr>
+            <a:r>
+              <a:rPr lang="en-US" sz="1150" b="1" spc="100" kern="0" dirty="0">
+                <a:solidFill>
+                  <a:srgbClr val="751B68"/>
+                </a:solidFill>
+                <a:latin typeface="Times New Roman" pitchFamily="34" charset="0"/>
+                <a:ea typeface="Times New Roman" pitchFamily="34" charset="-122"/>
+                <a:cs typeface="Times New Roman" pitchFamily="34" charset="-120"/>
+              </a:rPr>
+              <a:t>UNCORRECTED VS. CORRECTED LABELS, WITH VS. WITHOUT PREPROCESSING</a:t>
+            </a:r>
+            <a:endParaRPr lang="en-US" sz="1150" dirty="0"/>
+          </a:p>
+        </p:txBody>
+      </p:sp>
+      <p:sp>
+        <p:nvSpPr>
+          <p:cNvPr id="14" name="Text 12"/>
+          <p:cNvSpPr txBox="1"/>
+          <p:nvPr/>
+        </p:nvSpPr>
+        <p:spPr>
+          <a:xfrm>
+            <a:off x="8462264" y="2235200"/>
+            <a:ext cx="1371600" cy="508000"/>
+          </a:xfrm>
+          <a:prstGeom prst="rect">
+            <a:avLst/>
+          </a:prstGeom>
+          <a:noFill/>
+          <a:ln/>
+        </p:spPr>
+        <p:txBody>
+          <a:bodyPr wrap="square" lIns="0" tIns="0" rIns="0" bIns="0" rtlCol="0" anchor="ctr"/>
+          <a:lstStyle/>
+          <a:p>
+            <a:pPr algn="ctr" indent="0" marL="0">
+              <a:buNone/>
+            </a:pPr>
+            <a:r>
+              <a:rPr lang="en-US" sz="1200" b="1" dirty="0">
+                <a:solidFill>
+                  <a:srgbClr val="751B68"/>
+                </a:solidFill>
+                <a:latin typeface="Times New Roman" pitchFamily="34" charset="0"/>
+                <a:ea typeface="Times New Roman" pitchFamily="34" charset="-122"/>
+                <a:cs typeface="Times New Roman" pitchFamily="34" charset="-120"/>
+              </a:rPr>
+              <a:t>Without preprocessing</a:t>
+            </a:r>
+            <a:endParaRPr lang="en-US" sz="1200" dirty="0"/>
+          </a:p>
+        </p:txBody>
+      </p:sp>
+      <p:sp>
+        <p:nvSpPr>
+          <p:cNvPr id="15" name="Text 13"/>
+          <p:cNvSpPr txBox="1"/>
+          <p:nvPr/>
+        </p:nvSpPr>
+        <p:spPr>
+          <a:xfrm>
+            <a:off x="9833864" y="2235200"/>
+            <a:ext cx="1371600" cy="508000"/>
+          </a:xfrm>
+          <a:prstGeom prst="rect">
+            <a:avLst/>
+          </a:prstGeom>
+          <a:noFill/>
+          <a:ln/>
+        </p:spPr>
+        <p:txBody>
+          <a:bodyPr wrap="square" lIns="0" tIns="0" rIns="0" bIns="0" rtlCol="0" anchor="ctr"/>
+          <a:lstStyle/>
+          <a:p>
+            <a:pPr algn="ctr" indent="0" marL="0">
+              <a:buNone/>
+            </a:pPr>
+            <a:r>
+              <a:rPr lang="en-US" sz="1200" b="1" dirty="0">
+                <a:solidFill>
+                  <a:srgbClr val="751B68"/>
+                </a:solidFill>
+                <a:latin typeface="Times New Roman" pitchFamily="34" charset="0"/>
+                <a:ea typeface="Times New Roman" pitchFamily="34" charset="-122"/>
+                <a:cs typeface="Times New Roman" pitchFamily="34" charset="-120"/>
+              </a:rPr>
+              <a:t>With preprocessing</a:t>
+            </a:r>
+            <a:endParaRPr lang="en-US" sz="1200" dirty="0"/>
+          </a:p>
+        </p:txBody>
+      </p:sp>
+      <p:sp>
+        <p:nvSpPr>
+          <p:cNvPr id="16" name="Shape 14"/>
+          <p:cNvSpPr/>
+          <p:nvPr/>
+        </p:nvSpPr>
+        <p:spPr>
+          <a:xfrm>
+            <a:off x="8462264" y="2743200"/>
+            <a:ext cx="2743200" cy="18288"/>
+          </a:xfrm>
+          <a:prstGeom prst="rect">
+            <a:avLst/>
+          </a:prstGeom>
+          <a:solidFill>
+            <a:srgbClr val="751B68"/>
+          </a:solidFill>
+          <a:ln/>
+        </p:spPr>
+      </p:sp>
+      <p:sp>
+        <p:nvSpPr>
+          <p:cNvPr id="17" name="Shape 15"/>
+          <p:cNvSpPr/>
+          <p:nvPr/>
+        </p:nvSpPr>
+        <p:spPr>
+          <a:xfrm>
+            <a:off x="8462264" y="2743200"/>
+            <a:ext cx="1371600" cy="889000"/>
+          </a:xfrm>
+          <a:prstGeom prst="rect">
+            <a:avLst/>
+          </a:prstGeom>
+          <a:solidFill>
+            <a:srgbClr val="F1E6EF"/>
+          </a:solidFill>
+          <a:ln/>
+        </p:spPr>
+      </p:sp>
+      <p:sp>
+        <p:nvSpPr>
+          <p:cNvPr id="18" name="Text 16"/>
+          <p:cNvSpPr txBox="1"/>
+          <p:nvPr/>
+        </p:nvSpPr>
+        <p:spPr>
+          <a:xfrm>
+            <a:off x="7192264" y="2743200"/>
+            <a:ext cx="1178560" cy="889000"/>
+          </a:xfrm>
+          <a:prstGeom prst="rect">
+            <a:avLst/>
+          </a:prstGeom>
+          <a:noFill/>
+          <a:ln/>
+        </p:spPr>
+        <p:txBody>
+          <a:bodyPr wrap="square" lIns="0" tIns="0" rIns="0" bIns="0" rtlCol="0" anchor="ctr"/>
+          <a:lstStyle/>
+          <a:p>
+            <a:pPr indent="0" marL="0">
+              <a:buNone/>
+            </a:pPr>
+            <a:r>
+              <a:rPr lang="en-US" sz="1200" b="1" dirty="0">
+                <a:solidFill>
+                  <a:srgbClr val="1F1D21"/>
+                </a:solidFill>
+                <a:latin typeface="Times New Roman" pitchFamily="34" charset="0"/>
+                <a:ea typeface="Times New Roman" pitchFamily="34" charset="-122"/>
+                <a:cs typeface="Times New Roman" pitchFamily="34" charset="-120"/>
+              </a:rPr>
+              <a:t>Uncorrected labels</a:t>
+            </a:r>
+            <a:endParaRPr lang="en-US" sz="1200" dirty="0"/>
+          </a:p>
+        </p:txBody>
+      </p:sp>
+      <p:sp>
+        <p:nvSpPr>
+          <p:cNvPr id="19" name="Text 17"/>
+          <p:cNvSpPr txBox="1"/>
+          <p:nvPr/>
+        </p:nvSpPr>
+        <p:spPr>
+          <a:xfrm>
+            <a:off x="8462264" y="2743200"/>
+            <a:ext cx="1371600" cy="889000"/>
+          </a:xfrm>
+          <a:prstGeom prst="rect">
+            <a:avLst/>
+          </a:prstGeom>
+          <a:noFill/>
+          <a:ln/>
+        </p:spPr>
+        <p:txBody>
+          <a:bodyPr wrap="square" lIns="0" tIns="0" rIns="0" bIns="0" rtlCol="0" anchor="ctr"/>
+          <a:lstStyle/>
+          <a:p>
+            <a:pPr algn="ctr" indent="0" marL="0">
+              <a:buNone/>
+            </a:pPr>
+            <a:r>
+              <a:rPr lang="en-US" sz="1200" dirty="0">
+                <a:solidFill>
+                  <a:srgbClr val="1F1D21"/>
+                </a:solidFill>
+                <a:latin typeface="Times New Roman" pitchFamily="34" charset="0"/>
+                <a:ea typeface="Times New Roman" pitchFamily="34" charset="-122"/>
+                <a:cs typeface="Times New Roman" pitchFamily="34" charset="-120"/>
+              </a:rPr>
+              <a:t>[TODO]</a:t>
+            </a:r>
+            <a:endParaRPr lang="en-US" sz="1200" dirty="0"/>
+          </a:p>
+        </p:txBody>
+      </p:sp>
+      <p:sp>
+        <p:nvSpPr>
+          <p:cNvPr id="20" name="Text 18"/>
+          <p:cNvSpPr txBox="1"/>
+          <p:nvPr/>
+        </p:nvSpPr>
+        <p:spPr>
+          <a:xfrm>
+            <a:off x="9833864" y="2743200"/>
+            <a:ext cx="1371600" cy="889000"/>
+          </a:xfrm>
+          <a:prstGeom prst="rect">
+            <a:avLst/>
+          </a:prstGeom>
+          <a:noFill/>
+          <a:ln/>
+        </p:spPr>
+        <p:txBody>
+          <a:bodyPr wrap="square" lIns="0" tIns="0" rIns="0" bIns="0" rtlCol="0" anchor="ctr"/>
+          <a:lstStyle/>
+          <a:p>
+            <a:pPr algn="ctr" indent="0" marL="0">
+              <a:buNone/>
+            </a:pPr>
+            <a:r>
+              <a:rPr lang="en-US" sz="1200" dirty="0">
+                <a:solidFill>
+                  <a:srgbClr val="1F1D21"/>
+                </a:solidFill>
+                <a:latin typeface="Times New Roman" pitchFamily="34" charset="0"/>
+                <a:ea typeface="Times New Roman" pitchFamily="34" charset="-122"/>
+                <a:cs typeface="Times New Roman" pitchFamily="34" charset="-120"/>
+              </a:rPr>
+              <a:t>[TODO]</a:t>
+            </a:r>
+            <a:endParaRPr lang="en-US" sz="1200" dirty="0"/>
+          </a:p>
+        </p:txBody>
+      </p:sp>
+      <p:sp>
+        <p:nvSpPr>
+          <p:cNvPr id="21" name="Shape 19"/>
+          <p:cNvSpPr/>
+          <p:nvPr/>
+        </p:nvSpPr>
+        <p:spPr>
+          <a:xfrm>
+            <a:off x="7192264" y="3632200"/>
+            <a:ext cx="4013200" cy="9144"/>
+          </a:xfrm>
+          <a:prstGeom prst="rect">
+            <a:avLst/>
+          </a:prstGeom>
+          <a:solidFill>
+            <a:srgbClr val="E3E3E3"/>
+          </a:solidFill>
+          <a:ln/>
+        </p:spPr>
+      </p:sp>
+      <p:sp>
+        <p:nvSpPr>
+          <p:cNvPr id="22" name="Shape 20"/>
+          <p:cNvSpPr/>
+          <p:nvPr/>
+        </p:nvSpPr>
+        <p:spPr>
+          <a:xfrm>
+            <a:off x="8462264" y="3632200"/>
+            <a:ext cx="1371600" cy="889000"/>
+          </a:xfrm>
+          <a:prstGeom prst="rect">
+            <a:avLst/>
+          </a:prstGeom>
+          <a:solidFill>
+            <a:srgbClr val="F1E6EF"/>
+          </a:solidFill>
+          <a:ln/>
+        </p:spPr>
+      </p:sp>
+      <p:sp>
+        <p:nvSpPr>
+          <p:cNvPr id="23" name="Text 21"/>
+          <p:cNvSpPr txBox="1"/>
+          <p:nvPr/>
+        </p:nvSpPr>
+        <p:spPr>
+          <a:xfrm>
+            <a:off x="7192264" y="3632200"/>
+            <a:ext cx="1178560" cy="889000"/>
+          </a:xfrm>
+          <a:prstGeom prst="rect">
+            <a:avLst/>
+          </a:prstGeom>
+          <a:noFill/>
+          <a:ln/>
+        </p:spPr>
+        <p:txBody>
+          <a:bodyPr wrap="square" lIns="0" tIns="0" rIns="0" bIns="0" rtlCol="0" anchor="ctr"/>
+          <a:lstStyle/>
+          <a:p>
+            <a:pPr indent="0" marL="0">
+              <a:buNone/>
+            </a:pPr>
+            <a:r>
+              <a:rPr lang="en-US" sz="1200" b="1" dirty="0">
+                <a:solidFill>
+                  <a:srgbClr val="1F1D21"/>
+                </a:solidFill>
+                <a:latin typeface="Times New Roman" pitchFamily="34" charset="0"/>
+                <a:ea typeface="Times New Roman" pitchFamily="34" charset="-122"/>
+                <a:cs typeface="Times New Roman" pitchFamily="34" charset="-120"/>
+              </a:rPr>
+              <a:t>Corrected labels</a:t>
+            </a:r>
+            <a:endParaRPr lang="en-US" sz="1200" dirty="0"/>
+          </a:p>
+        </p:txBody>
+      </p:sp>
+      <p:sp>
+        <p:nvSpPr>
+          <p:cNvPr id="24" name="Text 22"/>
+          <p:cNvSpPr txBox="1"/>
+          <p:nvPr/>
+        </p:nvSpPr>
+        <p:spPr>
+          <a:xfrm>
+            <a:off x="8462264" y="3632200"/>
+            <a:ext cx="1371600" cy="889000"/>
+          </a:xfrm>
+          <a:prstGeom prst="rect">
+            <a:avLst/>
+          </a:prstGeom>
+          <a:noFill/>
+          <a:ln/>
+        </p:spPr>
+        <p:txBody>
+          <a:bodyPr wrap="square" lIns="0" tIns="0" rIns="0" bIns="0" rtlCol="0" anchor="ctr"/>
+          <a:lstStyle/>
+          <a:p>
+            <a:pPr algn="ctr" indent="0" marL="0">
+              <a:buNone/>
+            </a:pPr>
+            <a:r>
+              <a:rPr lang="en-US" sz="1200" dirty="0">
+                <a:solidFill>
+                  <a:srgbClr val="1F1D21"/>
+                </a:solidFill>
+                <a:latin typeface="Times New Roman" pitchFamily="34" charset="0"/>
+                <a:ea typeface="Times New Roman" pitchFamily="34" charset="-122"/>
+                <a:cs typeface="Times New Roman" pitchFamily="34" charset="-120"/>
+              </a:rPr>
+              <a:t>[TODO]</a:t>
+            </a:r>
+            <a:endParaRPr lang="en-US" sz="1200" dirty="0"/>
+          </a:p>
+        </p:txBody>
+      </p:sp>
+      <p:sp>
+        <p:nvSpPr>
+          <p:cNvPr id="25" name="Text 23"/>
+          <p:cNvSpPr txBox="1"/>
+          <p:nvPr/>
+        </p:nvSpPr>
+        <p:spPr>
+          <a:xfrm>
+            <a:off x="9833864" y="3632200"/>
+            <a:ext cx="1371600" cy="889000"/>
+          </a:xfrm>
+          <a:prstGeom prst="rect">
+            <a:avLst/>
+          </a:prstGeom>
+          <a:noFill/>
+          <a:ln/>
+        </p:spPr>
+        <p:txBody>
+          <a:bodyPr wrap="square" lIns="0" tIns="0" rIns="0" bIns="0" rtlCol="0" anchor="ctr"/>
+          <a:lstStyle/>
+          <a:p>
+            <a:pPr algn="ctr" indent="0" marL="0">
+              <a:buNone/>
+            </a:pPr>
+            <a:r>
+              <a:rPr lang="en-US" sz="1200" dirty="0">
+                <a:solidFill>
+                  <a:srgbClr val="1F1D21"/>
+                </a:solidFill>
+                <a:latin typeface="Times New Roman" pitchFamily="34" charset="0"/>
+                <a:ea typeface="Times New Roman" pitchFamily="34" charset="-122"/>
+                <a:cs typeface="Times New Roman" pitchFamily="34" charset="-120"/>
+              </a:rPr>
+              <a:t>[TODO]</a:t>
+            </a:r>
+            <a:endParaRPr lang="en-US" sz="1200" dirty="0"/>
+          </a:p>
+        </p:txBody>
+      </p:sp>
+      <p:sp>
+        <p:nvSpPr>
+          <p:cNvPr id="26" name="Shape 24"/>
+          <p:cNvSpPr/>
+          <p:nvPr/>
+        </p:nvSpPr>
+        <p:spPr>
+          <a:xfrm>
+            <a:off x="7192264" y="4521200"/>
+            <a:ext cx="4013200" cy="9144"/>
+          </a:xfrm>
+          <a:prstGeom prst="rect">
+            <a:avLst/>
+          </a:prstGeom>
+          <a:solidFill>
+            <a:srgbClr val="E3E3E3"/>
+          </a:solidFill>
+          <a:ln/>
+        </p:spPr>
+      </p:sp>
+      <p:sp>
+        <p:nvSpPr>
+          <p:cNvPr id="27" name="Text 25"/>
+          <p:cNvSpPr txBox="1"/>
+          <p:nvPr/>
+        </p:nvSpPr>
+        <p:spPr>
+          <a:xfrm>
+            <a:off x="7192264" y="4673600"/>
+            <a:ext cx="4013200" cy="548640"/>
+          </a:xfrm>
+          <a:prstGeom prst="rect">
+            <a:avLst/>
+          </a:prstGeom>
+          <a:noFill/>
+          <a:ln/>
+        </p:spPr>
+        <p:txBody>
+          <a:bodyPr wrap="square" lIns="0" tIns="0" rIns="0" bIns="0" rtlCol="0" anchor="t"/>
+          <a:lstStyle/>
+          <a:p>
+            <a:pPr marL="177800" indent="-177800">
               <a:lnSpc>
-                <a:spcPct val="118000"/>
+                <a:spcPct val="115000"/>
               </a:lnSpc>
-              <a:buNone/>
-            </a:pPr>
-            <a:r>
-              <a:rPr lang="en-US" sz="1350" dirty="0">
+              <a:spcAft>
+                <a:spcPts val="500"/>
+              </a:spcAft>
+              <a:buSzPct val="100000"/>
+              <a:buChar char="▪"/>
+            </a:pPr>
+            <a:r>
+              <a:rPr lang="en-US" sz="1200" dirty="0">
                 <a:solidFill>
                   <a:srgbClr val="1F1D21"/>
                 </a:solidFill>
@@ -8495,15 +9095,15 @@
                 <a:ea typeface="Times New Roman" pitchFamily="34" charset="-122"/>
                 <a:cs typeface="Times New Roman" pitchFamily="34" charset="-120"/>
               </a:rPr>
-              <a:t>Trachea: 0.50</a:t>
-            </a:r>
-            <a:endParaRPr lang="en-US" sz="1350" dirty="0"/>
+              <a:t>[TODO] what changes with correction and with preprocessing</a:t>
+            </a:r>
+            <a:endParaRPr lang="en-US" sz="1200" dirty="0"/>
           </a:p>
         </p:txBody>
       </p:sp>
       <p:pic>
         <p:nvPicPr>
-          <p:cNvPr id="12" name="Image 0" descr="/Users/bellavg/ProjectsMSc/ai4mi_project/.claude/worktrees/segthor-presentation-midpoint-825c66/deck/assets/uva_logo.png">    </p:cNvPr>
+          <p:cNvPr id="28" name="Image 0" descr="/Users/bellavg/ProjectsMSc/ai4mi_project/.claude/worktrees/segthor-presentation-midpoint-825c66/deck/assets/uva_logo.png">    </p:cNvPr>
           <p:cNvPicPr>
             <a:picLocks noChangeAspect="1"/>
           </p:cNvPicPr>
@@ -8527,7 +9127,7 @@
       </p:pic>
       <p:sp>
         <p:nvSpPr>
-          <p:cNvPr id="13" name="Text 10"/>
+          <p:cNvPr id="29" name="Text 26"/>
           <p:cNvSpPr txBox="1"/>
           <p:nvPr/>
         </p:nvSpPr>
